--- a/lecons/USA/Population Geography/21_USA_POP_L17_Overpopulation_Underpopulation_and_Optimum_Population.pptx
+++ b/lecons/USA/Population Geography/21_USA_POP_L17_Overpopulation_Underpopulation_and_Optimum_Population.pptx
@@ -60,9 +60,17 @@
     <p:sldId id="308" r:id="rId54"/>
     <p:sldId id="309" r:id="rId55"/>
     <p:sldId id="310" r:id="rId56"/>
+    <p:sldId id="311" r:id="rId57"/>
+    <p:sldId id="312" r:id="rId58"/>
+    <p:sldId id="313" r:id="rId59"/>
+    <p:sldId id="314" r:id="rId60"/>
+    <p:sldId id="315" r:id="rId61"/>
+    <p:sldId id="316" r:id="rId62"/>
+    <p:sldId id="317" r:id="rId63"/>
+    <p:sldId id="318" r:id="rId64"/>
   </p:sldIdLst>
   <p:notesMasterIdLst>
-    <p:notesMasterId r:id="rId57"/>
+    <p:notesMasterId r:id="rId65"/>
   </p:notesMasterIdLst>
   <p:sldSz cx="12192000" cy="6858000"/>
   <p:notesSz cx="6858000" cy="12192000"/>
@@ -644,7 +652,7 @@
           <a:p>
             <a:r>
               <a:rPr lang="en-US" dirty="0"/>
-              <a:t>Listen carefully to this situation from real life. In some villages of the West Region, fields are tiny and young people leave. In the East, large forests have few people and roads, and many resources are not used. Think about it, because I am going to ask you some questions.</a:t>
+              <a:t>Take your time to copy this part; we will continue together.</a:t>
             </a:r>
             <a:endParaRPr lang="en-US" dirty="0"/>
           </a:p>
@@ -732,7 +740,7 @@
           <a:p>
             <a:r>
               <a:rPr lang="en-US" dirty="0"/>
-              <a:t>Question 1: What is the problem in the situation? Think for a moment, then raise your hand to answer.</a:t>
+              <a:t>Listen carefully to this situation from real life. Near the Benue, many families share small plots: the soil is tired, firewood is scarce and the water level in the wells is falling. Further away, a vast fertile area has only a few small villages that cannot cultivate all the land. A student comparing the two areas asks: "Which area has too many people, which has too few, what is the ideal number, and how do we know the limit of what the land can give?" Think about it, because I am going to ask you some questions.</a:t>
             </a:r>
             <a:endParaRPr lang="en-US" dirty="0"/>
           </a:p>
@@ -820,7 +828,7 @@
           <a:p>
             <a:r>
               <a:rPr lang="en-US" dirty="0"/>
-              <a:t>Good. Some areas have too many people and others too few for their resources.</a:t>
+              <a:t>Question 1: What is the problem in the situation? Think for a moment, then raise your hand to answer.</a:t>
             </a:r>
             <a:endParaRPr lang="en-US" dirty="0"/>
           </a:p>
@@ -908,7 +916,7 @@
           <a:p>
             <a:r>
               <a:rPr lang="en-US" dirty="0"/>
-              <a:t>Question 2: What is the West village situation called? Think for a moment, then raise your hand to answer.</a:t>
+              <a:t>Good. The student does not know the concepts of over-, under- and optimum population.</a:t>
             </a:r>
             <a:endParaRPr lang="en-US" dirty="0"/>
           </a:p>
@@ -996,7 +1004,7 @@
           <a:p>
             <a:r>
               <a:rPr lang="en-US" dirty="0"/>
-              <a:t>Good. Overpopulation (local).</a:t>
+              <a:t>Question 2: What is the situation near the river? Think for a moment, then raise your hand to answer.</a:t>
             </a:r>
             <a:endParaRPr lang="en-US" dirty="0"/>
           </a:p>
@@ -1084,7 +1092,7 @@
           <a:p>
             <a:r>
               <a:rPr lang="en-US" dirty="0"/>
-              <a:t>Question 3: What is the East situation called? Think for a moment, then raise your hand to answer.</a:t>
+              <a:t>Good. Overpopulation: too many people for the resources.</a:t>
             </a:r>
             <a:endParaRPr lang="en-US" dirty="0"/>
           </a:p>
@@ -1172,7 +1180,7 @@
           <a:p>
             <a:r>
               <a:rPr lang="en-US" dirty="0"/>
-              <a:t>Good. Underpopulation.</a:t>
+              <a:t>Question 3: What is the situation of the vast fertile area? Think for a moment, then raise your hand to answer.</a:t>
             </a:r>
             <a:endParaRPr lang="en-US" dirty="0"/>
           </a:p>
@@ -1260,7 +1268,7 @@
           <a:p>
             <a:r>
               <a:rPr lang="en-US" dirty="0"/>
-              <a:t>From this situation, the action we are working towards in this lesson is the following: identify population–resource imbalances and propose solutions.</a:t>
+              <a:t>Good. Underpopulation: too few people to use its resources.</a:t>
             </a:r>
             <a:endParaRPr lang="en-US" dirty="0"/>
           </a:p>
@@ -1348,7 +1356,7 @@
           <a:p>
             <a:r>
               <a:rPr lang="en-US" dirty="0"/>
-              <a:t>Why is this lesson important for you? This lesson helps us to understand the balance between people and resources.</a:t>
+              <a:t>From this situation, the action we are working towards in this lesson is the following: use resources carefully and support technology and education to raise the carrying capacity of your region.</a:t>
             </a:r>
             <a:endParaRPr lang="en-US" dirty="0"/>
           </a:p>
@@ -1436,7 +1444,7 @@
           <a:p>
             <a:r>
               <a:rPr lang="en-US" dirty="0"/>
-              <a:t>Activity 1. Look carefully at this diagram: output per person and population size. Observe every detail before I ask the question.</a:t>
+              <a:t>Why is this lesson important for you? This lesson helps us to judge the balance between people and resources and to choose policies for development.</a:t>
             </a:r>
             <a:endParaRPr lang="en-US" dirty="0"/>
           </a:p>
@@ -1612,7 +1620,7 @@
           <a:p>
             <a:r>
               <a:rPr lang="en-US" dirty="0"/>
-              <a:t>Here is the question for Activity 1: What is optimum population? Take one minute to think and write your answer in your rough notebook.</a:t>
+              <a:t>Activity 1. Look carefully at this picture: an overcrowded neighbourhood. Observe every detail before I ask the question.</a:t>
             </a:r>
             <a:endParaRPr lang="en-US" dirty="0"/>
           </a:p>
@@ -1700,7 +1708,7 @@
           <a:p>
             <a:r>
               <a:rPr lang="en-US" dirty="0"/>
-              <a:t>Let us check the answer together. The number of people that gives the highest output per person.</a:t>
+              <a:t>Here is the question for Activity 1: Give two indicators of overpopulation. Take one minute to think and write your answer in your rough notebook.</a:t>
             </a:r>
             <a:endParaRPr lang="en-US" dirty="0"/>
           </a:p>
@@ -1788,7 +1796,7 @@
           <a:p>
             <a:r>
               <a:rPr lang="en-US" dirty="0"/>
-              <a:t>Activity 2. Look carefully at this picture: a crowded market. Observe every detail before I ask the question.</a:t>
+              <a:t>Let us check the answer together. Unemployment, poverty, malnutrition, slums or overloaded services (any two).</a:t>
             </a:r>
             <a:endParaRPr lang="en-US" dirty="0"/>
           </a:p>
@@ -1876,7 +1884,7 @@
           <a:p>
             <a:r>
               <a:rPr lang="en-US" dirty="0"/>
-              <a:t>Here is the question for Activity 2: Give two indicators of overpopulation. Take one minute to think and write your answer in your rough notebook.</a:t>
+              <a:t>Activity 2. Look carefully at this diagram: types of population-resource relations. Observe every detail before I ask the question.</a:t>
             </a:r>
             <a:endParaRPr lang="en-US" dirty="0"/>
           </a:p>
@@ -1964,7 +1972,7 @@
           <a:p>
             <a:r>
               <a:rPr lang="en-US" dirty="0"/>
-              <a:t>Let us check the answer together. Unemployment and food shortages (also slums, land shortage, emigration).</a:t>
+              <a:t>Here is the question for Activity 2: Give one solution to underpopulation. Take one minute to think and write your answer in your rough notebook.</a:t>
             </a:r>
             <a:endParaRPr lang="en-US" dirty="0"/>
           </a:p>
@@ -2052,7 +2060,7 @@
           <a:p>
             <a:r>
               <a:rPr lang="en-US" dirty="0"/>
-              <a:t>Activity 3. Look carefully at this picture: dry, degraded land. Observe every detail before I ask the question.</a:t>
+              <a:t>Let us check the answer together. Encourage the immigration of workers or births, or use machines.</a:t>
             </a:r>
             <a:endParaRPr lang="en-US" dirty="0"/>
           </a:p>
@@ -2140,7 +2148,7 @@
           <a:p>
             <a:r>
               <a:rPr lang="en-US" dirty="0"/>
-              <a:t>Here is the question for Activity 3: How can overpopulation damage the environment? Take one minute to think and write your answer in your rough notebook.</a:t>
+              <a:t>Activity 3. Look carefully at this diagram: the optimum population. Observe every detail before I ask the question.</a:t>
             </a:r>
             <a:endParaRPr lang="en-US" dirty="0"/>
           </a:p>
@@ -2228,7 +2236,7 @@
           <a:p>
             <a:r>
               <a:rPr lang="en-US" dirty="0"/>
-              <a:t>Let us check the answer together. Overgrazing, deforestation and soil erosion.</a:t>
+              <a:t>Here is the question for Activity 3: At which point is output per person highest? Take one minute to think and write your answer in your rough notebook.</a:t>
             </a:r>
             <a:endParaRPr lang="en-US" dirty="0"/>
           </a:p>
@@ -2316,7 +2324,7 @@
           <a:p>
             <a:r>
               <a:rPr lang="en-US" dirty="0"/>
-              <a:t>Activity 4. Look carefully at this picture: large wheat fields in New Zealand. Observe every detail before I ask the question.</a:t>
+              <a:t>Let us check the answer together. At the optimum population.</a:t>
             </a:r>
             <a:endParaRPr lang="en-US" dirty="0"/>
           </a:p>
@@ -2404,7 +2412,7 @@
           <a:p>
             <a:r>
               <a:rPr lang="en-US" dirty="0"/>
-              <a:t>Here is the question for Activity 4: Why do some countries have too few people? Take one minute to think and write your answer in your rough notebook.</a:t>
+              <a:t>Activity 4. Look carefully at this picture: irrigation with a pivot. Observe every detail before I ask the question.</a:t>
             </a:r>
             <a:endParaRPr lang="en-US" dirty="0"/>
           </a:p>
@@ -2492,7 +2500,7 @@
           <a:p>
             <a:r>
               <a:rPr lang="en-US" dirty="0"/>
-              <a:t>Our topic is Population Growth and Resources, and the sub-topic is Population and Resource Relationships. The key notions we shall use today are: overpopulation, underpopulation, optimum population, output per person, indicators. At the end, you should be able to do this: learners are able to identify over-, under- and optimum population and suggest solutions.</a:t>
+              <a:t>Our topic is Population Growth and Resources, and the sub-topic is Population and Resource Relationships. The key notions we shall use today are: overpopulation, underpopulation, optimum population, carrying capacity, indicators, technology. At the end, you should be able to do this: learners are able to recognise the signs of overpopulation and underpopulation and propose solutions.</a:t>
             </a:r>
             <a:endParaRPr lang="en-US" dirty="0"/>
           </a:p>
@@ -2580,7 +2588,7 @@
           <a:p>
             <a:r>
               <a:rPr lang="en-US" dirty="0"/>
-              <a:t>Let us check the answer together. Rich resources but not enough workers to use them.</a:t>
+              <a:t>Here is the question for Activity 4: How does irrigation change the carrying capacity? Take one minute to think and write your answer in your rough notebook.</a:t>
             </a:r>
             <a:endParaRPr lang="en-US" dirty="0"/>
           </a:p>
@@ -2668,7 +2676,7 @@
           <a:p>
             <a:r>
               <a:rPr lang="en-US" dirty="0"/>
-              <a:t>Activity 5. Look carefully at this picture: planting trees. Observe every detail before I ask the question.</a:t>
+              <a:t>Let us check the answer together. It raises it, because more food can be produced on the same land.</a:t>
             </a:r>
             <a:endParaRPr lang="en-US" dirty="0"/>
           </a:p>
@@ -2756,7 +2764,7 @@
           <a:p>
             <a:r>
               <a:rPr lang="en-US" dirty="0"/>
-              <a:t>Here is the question for Activity 5: Give two solutions to overpopulation. Take one minute to think and write your answer in your rough notebook.</a:t>
+              <a:t>Activity 5. Look carefully at this picture: cracked, degraded soil. Observe every detail before I ask the question.</a:t>
             </a:r>
             <a:endParaRPr lang="en-US" dirty="0"/>
           </a:p>
@@ -2844,7 +2852,7 @@
           <a:p>
             <a:r>
               <a:rPr lang="en-US" dirty="0"/>
-              <a:t>Let us check the answer together. Family planning and better farming (also industry, migration, resettlement).</a:t>
+              <a:t>Here is the question for Activity 5: Give one sign that the carrying capacity is exceeded. Take one minute to think and write your answer in your rough notebook.</a:t>
             </a:r>
             <a:endParaRPr lang="en-US" dirty="0"/>
           </a:p>
@@ -2932,7 +2940,7 @@
           <a:p>
             <a:r>
               <a:rPr lang="en-US" dirty="0"/>
-              <a:t>Now we are going to copy the board summary. Write the title and the headings neatly in your notebooks. I will give you enough time for each slide, so do not rush.</a:t>
+              <a:t>Let us check the answer together. Falling water tables, soil erosion, deforestation or loss of biodiversity.</a:t>
             </a:r>
             <a:endParaRPr lang="en-US" dirty="0"/>
           </a:p>
@@ -3020,7 +3028,7 @@
           <a:p>
             <a:r>
               <a:rPr lang="en-US" dirty="0"/>
-              <a:t>Let us copy Meaning of the Concepts. The main concepts can be understood as follows. On this slide we have Overpopulation. Write each point on a new line, with the key term first, and explain it in your own words when we revise. When you finish, we go to the next slide.</a:t>
+              <a:t>Now we are going to copy the board summary. Write the title and the headings neatly in your notebooks. I will give you enough time for each slide, so do not rush.</a:t>
             </a:r>
             <a:endParaRPr lang="en-US" dirty="0"/>
           </a:p>
@@ -3108,7 +3116,7 @@
           <a:p>
             <a:r>
               <a:rPr lang="en-US" dirty="0"/>
-              <a:t>We continue with Meaning of the Concepts. On this slide we have Underpopulation. Write each point on a new line, with the key term first, and explain it in your own words when we revise. When you finish, we go to the next slide.</a:t>
+              <a:t>Let us copy the definitions. The key terms of this lesson are defined as follows. On this slide we have Overpopulation. Write each point on a new line, with the key term first, and explain it in your own words when we revise. When you finish, we go to the next slide.</a:t>
             </a:r>
             <a:endParaRPr lang="en-US" dirty="0"/>
           </a:p>
@@ -3196,7 +3204,7 @@
           <a:p>
             <a:r>
               <a:rPr lang="en-US" dirty="0"/>
-              <a:t>We continue with Meaning of the Concepts. On this slide we have Optimum population. Write each point on a new line, with the key term first, and explain it in your own words when we revise.</a:t>
+              <a:t>We continue with the definitions. On this slide we have Underpopulation and Optimum population. Write each point on a new line, with the key term first, and explain it in your own words when we revise.</a:t>
             </a:r>
             <a:endParaRPr lang="en-US" dirty="0"/>
           </a:p>
@@ -3284,7 +3292,7 @@
           <a:p>
             <a:r>
               <a:rPr lang="en-US" dirty="0"/>
-              <a:t>Now draw this illustration in your notebook: optimum population. Give it a title and label it clearly.</a:t>
+              <a:t>Let us copy Overpopulation. Overpopulation is presented as follows. Copy the point on Indicators on the left, then draw the diagram on the right: an overcrowded neighbourhood. Give it a title and label it clearly.</a:t>
             </a:r>
             <a:endParaRPr lang="en-US" dirty="0"/>
           </a:p>
@@ -3372,7 +3380,7 @@
           <a:p>
             <a:r>
               <a:rPr lang="en-US" dirty="0"/>
-              <a:t>Let us copy Overpopulation. Overpopulation can be studied as follows. On this slide we have Indicators and measurement. Write each point on a new line, with the key term first, and explain it in your own words when we revise. When you finish, we go to the next slide.</a:t>
+              <a:t>We continue with Overpopulation. On this slide we have Causes and Consequences. Write each point on a new line, with the key term first, and explain it in your own words when we revise. When you finish, we go to the next slide.</a:t>
             </a:r>
             <a:endParaRPr lang="en-US" dirty="0"/>
           </a:p>
@@ -3460,7 +3468,7 @@
           <a:p>
             <a:r>
               <a:rPr lang="en-US" dirty="0"/>
-              <a:t>Before we start the new lesson, let us correct the homework I gave you at the end of Lesson 16: Carrying Capacity. The question was: Explain how carrying capacity could be raised in your area. Take out your exercise books.</a:t>
+              <a:t>Before we start the new lesson, let us correct the homework I gave you at the end of Lesson 16: Carrying Capacity. The question was: Give one indicator of overpopulation. Take out your exercise books.</a:t>
             </a:r>
             <a:endParaRPr lang="en-US" dirty="0"/>
           </a:p>
@@ -3548,7 +3556,7 @@
           <a:p>
             <a:r>
               <a:rPr lang="en-US" dirty="0"/>
-              <a:t>We continue with Overpopulation. On this slide we have Causes. Write each point on a new line, with the key term first, and explain it in your own words when we revise. When you finish, we go to the next slide.</a:t>
+              <a:t>We continue with Overpopulation. On this slide we have Solutions. Write each point on a new line, with the key term first, and explain it in your own words when we revise.</a:t>
             </a:r>
             <a:endParaRPr lang="en-US" dirty="0"/>
           </a:p>
@@ -3636,7 +3644,7 @@
           <a:p>
             <a:r>
               <a:rPr lang="en-US" dirty="0"/>
-              <a:t>We continue with Overpopulation. On this slide we have Consequences and solutions. Write each point on a new line, with the key term first, and explain it in your own words when we revise.</a:t>
+              <a:t>Let us copy Underpopulation. Underpopulation is presented as follows. Copy the point on Indicators on the left, then draw the diagram on the right: types of population-resource relations. Give it a title and label it clearly.</a:t>
             </a:r>
             <a:endParaRPr lang="en-US" dirty="0"/>
           </a:p>
@@ -3724,7 +3732,7 @@
           <a:p>
             <a:r>
               <a:rPr lang="en-US" dirty="0"/>
-              <a:t>Let us copy Underpopulation. Underpopulation can be studied as follows. On this slide we have Indicators and causes. Write each point on a new line, with the key term first, and explain it in your own words when we revise. When you finish, we go to the next slide.</a:t>
+              <a:t>We continue with Underpopulation. On this slide we have Causes and Consequences. Write each point on a new line, with the key term first, and explain it in your own words when we revise. When you finish, we go to the next slide.</a:t>
             </a:r>
             <a:endParaRPr lang="en-US" dirty="0"/>
           </a:p>
@@ -3812,7 +3820,7 @@
           <a:p>
             <a:r>
               <a:rPr lang="en-US" dirty="0"/>
-              <a:t>We continue with Underpopulation. On this slide we have Consequences and solutions. Write each point on a new line, with the key term first, and explain it in your own words when we revise.</a:t>
+              <a:t>We continue with Underpopulation. On this slide we have Solutions. Write each point on a new line, with the key term first, and explain it in your own words when we revise.</a:t>
             </a:r>
             <a:endParaRPr lang="en-US" dirty="0"/>
           </a:p>
@@ -3900,7 +3908,7 @@
           <a:p>
             <a:r>
               <a:rPr lang="en-US" dirty="0"/>
-              <a:t>Now let us check what you have understood. Question 1: Define optimum population. Answer in your exercise book.</a:t>
+              <a:t>Let us copy Optimum Population. The optimum population is presented as follows. Copy the point on Meaning on the left, then draw the diagram on the right: the optimum population. Give it a title and label it clearly.</a:t>
             </a:r>
             <a:endParaRPr lang="en-US" dirty="0"/>
           </a:p>
@@ -3988,7 +3996,7 @@
           <a:p>
             <a:r>
               <a:rPr lang="en-US" dirty="0"/>
-              <a:t>The expected answer is: the population that gives the highest standard of living. If you got it right, well done.</a:t>
+              <a:t>We continue with Optimum Population. On this slide we have Indicators and Conditions. Write each point on a new line, with the key term first, and explain it in your own words when we revise. When you finish, we go to the next slide.</a:t>
             </a:r>
             <a:endParaRPr lang="en-US" dirty="0"/>
           </a:p>
@@ -4076,7 +4084,7 @@
           <a:p>
             <a:r>
               <a:rPr lang="en-US" dirty="0"/>
-              <a:t>Now let us check what you have understood. Question 2: Give two indicators of overpopulation. Answer in your exercise book.</a:t>
+              <a:t>We continue with Optimum Population. On this slide we have A moving target. Write each point on a new line, with the key term first, and explain it in your own words when we revise.</a:t>
             </a:r>
             <a:endParaRPr lang="en-US" dirty="0"/>
           </a:p>
@@ -4164,7 +4172,7 @@
           <a:p>
             <a:r>
               <a:rPr lang="en-US" dirty="0"/>
-              <a:t>The expected answer is: unemployment and food shortages (also slums, emigration). If you got it right, well done.</a:t>
+              <a:t>Let us copy Carrying Capacity of the Land. The carrying capacity of the land is presented as follows. On this slide we have Meaning. Write each point on a new line, with the key term first, and explain it in your own words when we revise.</a:t>
             </a:r>
             <a:endParaRPr lang="en-US" dirty="0"/>
           </a:p>
@@ -4252,7 +4260,7 @@
           <a:p>
             <a:r>
               <a:rPr lang="en-US" dirty="0"/>
-              <a:t>For those who need more practice, fill in the blanks in your exercise book. The answers are: number 1, underpopulation; number 2, optimum; number 3, underpopulation.</a:t>
+              <a:t>Copy the point on Warning signs on the left, then draw the diagram on the right: degraded soil. Give it a title and label it clearly.</a:t>
             </a:r>
             <a:endParaRPr lang="en-US" dirty="0"/>
           </a:p>
@@ -4340,7 +4348,7 @@
           <a:p>
             <a:r>
               <a:rPr lang="en-US" dirty="0"/>
-              <a:t>For your homework: Is Cameroon over-, under- or optimally populated? Write a paragraph with evidence. We shall correct it at the beginning of our next lesson.</a:t>
+              <a:t>We continue with Carrying Capacity of the Land. On this slide we have Factors. Write each point on a new line, with the key term first, and explain it in your own words when we revise. When you finish, we go to the next slide.</a:t>
             </a:r>
             <a:endParaRPr lang="en-US" dirty="0"/>
           </a:p>
@@ -4428,7 +4436,7 @@
           <a:p>
             <a:r>
               <a:rPr lang="en-US" dirty="0"/>
-              <a:t>Here is a good answer. In our area, carrying capacity could be raised by irrigation from the Benue, using manure and improved seeds, soil conservation, controlled grazing and tree planting. Compare it with your own answer and correct your work in red.</a:t>
+              <a:t>Here is a good answer. High unemployment, poverty and malnutrition, overcrowding, or pressure on schools and hospitals (any one). Compare it with your own answer and correct your work in red.</a:t>
             </a:r>
             <a:endParaRPr lang="en-US" dirty="0"/>
           </a:p>
@@ -4516,7 +4524,7 @@
           <a:p>
             <a:r>
               <a:rPr lang="en-US" dirty="0"/>
-              <a:t>Our next lesson will be on Lesson 18: Theories of Population and Resources: Malthus and Boserup. Thank you for your attention, and see you next time.</a:t>
+              <a:t>We continue with Carrying Capacity of the Land. On this slide we have If exceeded. Write each point on a new line, with the key term first, and explain it in your own words when we revise.</a:t>
             </a:r>
             <a:endParaRPr lang="en-US" dirty="0"/>
           </a:p>
@@ -4604,7 +4612,7 @@
           <a:p>
             <a:r>
               <a:rPr lang="en-US" dirty="0"/>
-              <a:t>Let us play the bilingual game. I say a word in English, and you give me the French word. Then we do the reverse.</a:t>
+              <a:t>Copy the point on Solutions on the left, then draw the diagram on the right: irrigation. Give it a title and label it clearly.</a:t>
             </a:r>
             <a:endParaRPr lang="en-US" dirty="0"/>
           </a:p>
@@ -4692,7 +4700,7 @@
           <a:p>
             <a:r>
               <a:rPr lang="en-US" dirty="0"/>
-              <a:t>I record this information in the official logbook of the class after the lesson.</a:t>
+              <a:t>Now let us check what you have understood. Question 1: Give two causes and two solutions of overpopulation. Answer in your exercise book.</a:t>
             </a:r>
             <a:endParaRPr lang="en-US" dirty="0"/>
           </a:p>
@@ -4780,7 +4788,7 @@
           <a:p>
             <a:r>
               <a:rPr lang="en-US" dirty="0"/>
-              <a:t>I complete the second page of the logbook: the matter taught, the evaluation, the homework and the attendance.</a:t>
+              <a:t>The expected answer is: causes: high births, falling deaths, immigration; solutions: family planning, education of girls, technology, industrial jobs. If you got it right, well done.</a:t>
             </a:r>
             <a:endParaRPr lang="en-US" dirty="0"/>
           </a:p>
@@ -4868,7 +4876,7 @@
           <a:p>
             <a:r>
               <a:rPr lang="en-US" dirty="0"/>
-              <a:t>This slide is for me, the teacher: it gives the timing of the lesson and what to do if the projector is not available.</a:t>
+              <a:t>Now let us check what you have understood. Question 2: How can a new irrigation system change the carrying capacity and the optimum population? Answer in your exercise book.</a:t>
             </a:r>
             <a:endParaRPr lang="en-US" dirty="0"/>
           </a:p>
@@ -4956,7 +4964,7 @@
           <a:p>
             <a:r>
               <a:rPr lang="en-US" dirty="0"/>
-              <a:t>These are the references and picture credits used to prepare this lesson.</a:t>
+              <a:t>The expected answer is: it raises both, because the same land can feed more people at a higher standard of living. If you got it right, well done.</a:t>
             </a:r>
             <a:endParaRPr lang="en-US" dirty="0"/>
           </a:p>
@@ -4980,6 +4988,358 @@
             <a:fld id="{F7021451-1387-4CA6-816F-3879F97B5CBC}" type="slidenum">
               <a:rPr lang="en-US"/>
               <a:t>55</a:t>
+            </a:fld>
+            <a:endParaRPr lang="en-US"/>
+          </a:p>
+        </p:txBody>
+      </p:sp>
+    </p:spTree>
+    <p:extLst>
+      <p:ext uri="{BB962C8B-B14F-4D97-AF65-F5344CB8AC3E}">
+        <p14:creationId xmlns:p14="http://schemas.microsoft.com/office/powerpoint/2010/main" val="1024086991"/>
+      </p:ext>
+    </p:extLst>
+  </p:cSld>
+  <p:clrMapOvr>
+    <a:masterClrMapping/>
+  </p:clrMapOvr>
+</p:notes>
+</file>
+
+<file path=ppt/notesSlides/notesSlide56.xml><?xml version="1.0" encoding="utf-8"?>
+<p:notes xmlns:a="http://schemas.openxmlformats.org/drawingml/2006/main" xmlns:r="http://schemas.openxmlformats.org/officeDocument/2006/relationships" xmlns:p="http://schemas.openxmlformats.org/presentationml/2006/main">
+  <p:cSld>
+    <p:spTree>
+      <p:nvGrpSpPr>
+        <p:cNvPr id="1" name=""/>
+        <p:cNvGrpSpPr/>
+        <p:nvPr/>
+      </p:nvGrpSpPr>
+      <p:grpSpPr>
+        <a:xfrm>
+          <a:off x="0" y="0"/>
+          <a:ext cx="0" cy="0"/>
+          <a:chOff x="0" y="0"/>
+          <a:chExt cx="0" cy="0"/>
+        </a:xfrm>
+      </p:grpSpPr>
+      <p:sp>
+        <p:nvSpPr>
+          <p:cNvPr id="2" name="Slide Image Placeholder 1"/>
+          <p:cNvSpPr>
+            <a:spLocks noGrp="1" noRot="1" noChangeAspect="1"/>
+          </p:cNvSpPr>
+          <p:nvPr>
+            <p:ph type="sldImg"/>
+          </p:nvPr>
+        </p:nvSpPr>
+        <p:spPr/>
+      </p:sp>
+      <p:sp>
+        <p:nvSpPr>
+          <p:cNvPr id="3" name="Notes Placeholder 2"/>
+          <p:cNvSpPr>
+            <a:spLocks noGrp="1"/>
+          </p:cNvSpPr>
+          <p:nvPr>
+            <p:ph type="body" idx="1"/>
+          </p:nvPr>
+        </p:nvSpPr>
+        <p:spPr/>
+        <p:txBody>
+          <a:bodyPr/>
+          <a:lstStyle/>
+          <a:p>
+            <a:r>
+              <a:rPr lang="en-US" dirty="0"/>
+              <a:t>For those who need more practice, fill in the blanks in your exercise book. The answers are: number 1, underpopulation; number 2, optimum; number 3, raises.</a:t>
+            </a:r>
+            <a:endParaRPr lang="en-US" dirty="0"/>
+          </a:p>
+        </p:txBody>
+      </p:sp>
+      <p:sp>
+        <p:nvSpPr>
+          <p:cNvPr id="4" name="Slide Number Placeholder 3"/>
+          <p:cNvSpPr>
+            <a:spLocks noGrp="1"/>
+          </p:cNvSpPr>
+          <p:nvPr>
+            <p:ph type="sldNum" sz="quarter" idx="10"/>
+          </p:nvPr>
+        </p:nvSpPr>
+        <p:spPr/>
+        <p:txBody>
+          <a:bodyPr/>
+          <a:lstStyle/>
+          <a:p>
+            <a:fld id="{F7021451-1387-4CA6-816F-3879F97B5CBC}" type="slidenum">
+              <a:rPr lang="en-US"/>
+              <a:t>56</a:t>
+            </a:fld>
+            <a:endParaRPr lang="en-US"/>
+          </a:p>
+        </p:txBody>
+      </p:sp>
+    </p:spTree>
+    <p:extLst>
+      <p:ext uri="{BB962C8B-B14F-4D97-AF65-F5344CB8AC3E}">
+        <p14:creationId xmlns:p14="http://schemas.microsoft.com/office/powerpoint/2010/main" val="1024086991"/>
+      </p:ext>
+    </p:extLst>
+  </p:cSld>
+  <p:clrMapOvr>
+    <a:masterClrMapping/>
+  </p:clrMapOvr>
+</p:notes>
+</file>
+
+<file path=ppt/notesSlides/notesSlide57.xml><?xml version="1.0" encoding="utf-8"?>
+<p:notes xmlns:a="http://schemas.openxmlformats.org/drawingml/2006/main" xmlns:r="http://schemas.openxmlformats.org/officeDocument/2006/relationships" xmlns:p="http://schemas.openxmlformats.org/presentationml/2006/main">
+  <p:cSld>
+    <p:spTree>
+      <p:nvGrpSpPr>
+        <p:cNvPr id="1" name=""/>
+        <p:cNvGrpSpPr/>
+        <p:nvPr/>
+      </p:nvGrpSpPr>
+      <p:grpSpPr>
+        <a:xfrm>
+          <a:off x="0" y="0"/>
+          <a:ext cx="0" cy="0"/>
+          <a:chOff x="0" y="0"/>
+          <a:chExt cx="0" cy="0"/>
+        </a:xfrm>
+      </p:grpSpPr>
+      <p:sp>
+        <p:nvSpPr>
+          <p:cNvPr id="2" name="Slide Image Placeholder 1"/>
+          <p:cNvSpPr>
+            <a:spLocks noGrp="1" noRot="1" noChangeAspect="1"/>
+          </p:cNvSpPr>
+          <p:nvPr>
+            <p:ph type="sldImg"/>
+          </p:nvPr>
+        </p:nvSpPr>
+        <p:spPr/>
+      </p:sp>
+      <p:sp>
+        <p:nvSpPr>
+          <p:cNvPr id="3" name="Notes Placeholder 2"/>
+          <p:cNvSpPr>
+            <a:spLocks noGrp="1"/>
+          </p:cNvSpPr>
+          <p:nvPr>
+            <p:ph type="body" idx="1"/>
+          </p:nvPr>
+        </p:nvSpPr>
+        <p:spPr/>
+        <p:txBody>
+          <a:bodyPr/>
+          <a:lstStyle/>
+          <a:p>
+            <a:r>
+              <a:rPr lang="en-US" dirty="0"/>
+              <a:t>For your homework: Give the date of Malthus's essay on population. We shall correct it at the beginning of our next lesson.</a:t>
+            </a:r>
+            <a:endParaRPr lang="en-US" dirty="0"/>
+          </a:p>
+        </p:txBody>
+      </p:sp>
+      <p:sp>
+        <p:nvSpPr>
+          <p:cNvPr id="4" name="Slide Number Placeholder 3"/>
+          <p:cNvSpPr>
+            <a:spLocks noGrp="1"/>
+          </p:cNvSpPr>
+          <p:nvPr>
+            <p:ph type="sldNum" sz="quarter" idx="10"/>
+          </p:nvPr>
+        </p:nvSpPr>
+        <p:spPr/>
+        <p:txBody>
+          <a:bodyPr/>
+          <a:lstStyle/>
+          <a:p>
+            <a:fld id="{F7021451-1387-4CA6-816F-3879F97B5CBC}" type="slidenum">
+              <a:rPr lang="en-US"/>
+              <a:t>57</a:t>
+            </a:fld>
+            <a:endParaRPr lang="en-US"/>
+          </a:p>
+        </p:txBody>
+      </p:sp>
+    </p:spTree>
+    <p:extLst>
+      <p:ext uri="{BB962C8B-B14F-4D97-AF65-F5344CB8AC3E}">
+        <p14:creationId xmlns:p14="http://schemas.microsoft.com/office/powerpoint/2010/main" val="1024086991"/>
+      </p:ext>
+    </p:extLst>
+  </p:cSld>
+  <p:clrMapOvr>
+    <a:masterClrMapping/>
+  </p:clrMapOvr>
+</p:notes>
+</file>
+
+<file path=ppt/notesSlides/notesSlide58.xml><?xml version="1.0" encoding="utf-8"?>
+<p:notes xmlns:a="http://schemas.openxmlformats.org/drawingml/2006/main" xmlns:r="http://schemas.openxmlformats.org/officeDocument/2006/relationships" xmlns:p="http://schemas.openxmlformats.org/presentationml/2006/main">
+  <p:cSld>
+    <p:spTree>
+      <p:nvGrpSpPr>
+        <p:cNvPr id="1" name=""/>
+        <p:cNvGrpSpPr/>
+        <p:nvPr/>
+      </p:nvGrpSpPr>
+      <p:grpSpPr>
+        <a:xfrm>
+          <a:off x="0" y="0"/>
+          <a:ext cx="0" cy="0"/>
+          <a:chOff x="0" y="0"/>
+          <a:chExt cx="0" cy="0"/>
+        </a:xfrm>
+      </p:grpSpPr>
+      <p:sp>
+        <p:nvSpPr>
+          <p:cNvPr id="2" name="Slide Image Placeholder 1"/>
+          <p:cNvSpPr>
+            <a:spLocks noGrp="1" noRot="1" noChangeAspect="1"/>
+          </p:cNvSpPr>
+          <p:nvPr>
+            <p:ph type="sldImg"/>
+          </p:nvPr>
+        </p:nvSpPr>
+        <p:spPr/>
+      </p:sp>
+      <p:sp>
+        <p:nvSpPr>
+          <p:cNvPr id="3" name="Notes Placeholder 2"/>
+          <p:cNvSpPr>
+            <a:spLocks noGrp="1"/>
+          </p:cNvSpPr>
+          <p:nvPr>
+            <p:ph type="body" idx="1"/>
+          </p:nvPr>
+        </p:nvSpPr>
+        <p:spPr/>
+        <p:txBody>
+          <a:bodyPr/>
+          <a:lstStyle/>
+          <a:p>
+            <a:r>
+              <a:rPr lang="en-US" dirty="0"/>
+              <a:t>Our next lesson will be on Lesson 18: Theories of Population and Resources: Malthus and Boserup. Thank you for your attention, and see you next time.</a:t>
+            </a:r>
+            <a:endParaRPr lang="en-US" dirty="0"/>
+          </a:p>
+        </p:txBody>
+      </p:sp>
+      <p:sp>
+        <p:nvSpPr>
+          <p:cNvPr id="4" name="Slide Number Placeholder 3"/>
+          <p:cNvSpPr>
+            <a:spLocks noGrp="1"/>
+          </p:cNvSpPr>
+          <p:nvPr>
+            <p:ph type="sldNum" sz="quarter" idx="10"/>
+          </p:nvPr>
+        </p:nvSpPr>
+        <p:spPr/>
+        <p:txBody>
+          <a:bodyPr/>
+          <a:lstStyle/>
+          <a:p>
+            <a:fld id="{F7021451-1387-4CA6-816F-3879F97B5CBC}" type="slidenum">
+              <a:rPr lang="en-US"/>
+              <a:t>58</a:t>
+            </a:fld>
+            <a:endParaRPr lang="en-US"/>
+          </a:p>
+        </p:txBody>
+      </p:sp>
+    </p:spTree>
+    <p:extLst>
+      <p:ext uri="{BB962C8B-B14F-4D97-AF65-F5344CB8AC3E}">
+        <p14:creationId xmlns:p14="http://schemas.microsoft.com/office/powerpoint/2010/main" val="1024086991"/>
+      </p:ext>
+    </p:extLst>
+  </p:cSld>
+  <p:clrMapOvr>
+    <a:masterClrMapping/>
+  </p:clrMapOvr>
+</p:notes>
+</file>
+
+<file path=ppt/notesSlides/notesSlide59.xml><?xml version="1.0" encoding="utf-8"?>
+<p:notes xmlns:a="http://schemas.openxmlformats.org/drawingml/2006/main" xmlns:r="http://schemas.openxmlformats.org/officeDocument/2006/relationships" xmlns:p="http://schemas.openxmlformats.org/presentationml/2006/main">
+  <p:cSld>
+    <p:spTree>
+      <p:nvGrpSpPr>
+        <p:cNvPr id="1" name=""/>
+        <p:cNvGrpSpPr/>
+        <p:nvPr/>
+      </p:nvGrpSpPr>
+      <p:grpSpPr>
+        <a:xfrm>
+          <a:off x="0" y="0"/>
+          <a:ext cx="0" cy="0"/>
+          <a:chOff x="0" y="0"/>
+          <a:chExt cx="0" cy="0"/>
+        </a:xfrm>
+      </p:grpSpPr>
+      <p:sp>
+        <p:nvSpPr>
+          <p:cNvPr id="2" name="Slide Image Placeholder 1"/>
+          <p:cNvSpPr>
+            <a:spLocks noGrp="1" noRot="1" noChangeAspect="1"/>
+          </p:cNvSpPr>
+          <p:nvPr>
+            <p:ph type="sldImg"/>
+          </p:nvPr>
+        </p:nvSpPr>
+        <p:spPr/>
+      </p:sp>
+      <p:sp>
+        <p:nvSpPr>
+          <p:cNvPr id="3" name="Notes Placeholder 2"/>
+          <p:cNvSpPr>
+            <a:spLocks noGrp="1"/>
+          </p:cNvSpPr>
+          <p:nvPr>
+            <p:ph type="body" idx="1"/>
+          </p:nvPr>
+        </p:nvSpPr>
+        <p:spPr/>
+        <p:txBody>
+          <a:bodyPr/>
+          <a:lstStyle/>
+          <a:p>
+            <a:r>
+              <a:rPr lang="en-US" dirty="0"/>
+              <a:t>Let us play the bilingual game. I say a word in English, and you give me the French word. Then we do the reverse.</a:t>
+            </a:r>
+            <a:endParaRPr lang="en-US" dirty="0"/>
+          </a:p>
+        </p:txBody>
+      </p:sp>
+      <p:sp>
+        <p:nvSpPr>
+          <p:cNvPr id="4" name="Slide Number Placeholder 3"/>
+          <p:cNvSpPr>
+            <a:spLocks noGrp="1"/>
+          </p:cNvSpPr>
+          <p:nvPr>
+            <p:ph type="sldNum" sz="quarter" idx="10"/>
+          </p:nvPr>
+        </p:nvSpPr>
+        <p:spPr/>
+        <p:txBody>
+          <a:bodyPr/>
+          <a:lstStyle/>
+          <a:p>
+            <a:fld id="{F7021451-1387-4CA6-816F-3879F97B5CBC}" type="slidenum">
+              <a:rPr lang="en-US"/>
+              <a:t>59</a:t>
             </a:fld>
             <a:endParaRPr lang="en-US"/>
           </a:p>
@@ -5086,6 +5446,358 @@
 </p:notes>
 </file>
 
+<file path=ppt/notesSlides/notesSlide60.xml><?xml version="1.0" encoding="utf-8"?>
+<p:notes xmlns:a="http://schemas.openxmlformats.org/drawingml/2006/main" xmlns:r="http://schemas.openxmlformats.org/officeDocument/2006/relationships" xmlns:p="http://schemas.openxmlformats.org/presentationml/2006/main">
+  <p:cSld>
+    <p:spTree>
+      <p:nvGrpSpPr>
+        <p:cNvPr id="1" name=""/>
+        <p:cNvGrpSpPr/>
+        <p:nvPr/>
+      </p:nvGrpSpPr>
+      <p:grpSpPr>
+        <a:xfrm>
+          <a:off x="0" y="0"/>
+          <a:ext cx="0" cy="0"/>
+          <a:chOff x="0" y="0"/>
+          <a:chExt cx="0" cy="0"/>
+        </a:xfrm>
+      </p:grpSpPr>
+      <p:sp>
+        <p:nvSpPr>
+          <p:cNvPr id="2" name="Slide Image Placeholder 1"/>
+          <p:cNvSpPr>
+            <a:spLocks noGrp="1" noRot="1" noChangeAspect="1"/>
+          </p:cNvSpPr>
+          <p:nvPr>
+            <p:ph type="sldImg"/>
+          </p:nvPr>
+        </p:nvSpPr>
+        <p:spPr/>
+      </p:sp>
+      <p:sp>
+        <p:nvSpPr>
+          <p:cNvPr id="3" name="Notes Placeholder 2"/>
+          <p:cNvSpPr>
+            <a:spLocks noGrp="1"/>
+          </p:cNvSpPr>
+          <p:nvPr>
+            <p:ph type="body" idx="1"/>
+          </p:nvPr>
+        </p:nvSpPr>
+        <p:spPr/>
+        <p:txBody>
+          <a:bodyPr/>
+          <a:lstStyle/>
+          <a:p>
+            <a:r>
+              <a:rPr lang="en-US" dirty="0"/>
+              <a:t>I record this information in the official logbook of the class after the lesson.</a:t>
+            </a:r>
+            <a:endParaRPr lang="en-US" dirty="0"/>
+          </a:p>
+        </p:txBody>
+      </p:sp>
+      <p:sp>
+        <p:nvSpPr>
+          <p:cNvPr id="4" name="Slide Number Placeholder 3"/>
+          <p:cNvSpPr>
+            <a:spLocks noGrp="1"/>
+          </p:cNvSpPr>
+          <p:nvPr>
+            <p:ph type="sldNum" sz="quarter" idx="10"/>
+          </p:nvPr>
+        </p:nvSpPr>
+        <p:spPr/>
+        <p:txBody>
+          <a:bodyPr/>
+          <a:lstStyle/>
+          <a:p>
+            <a:fld id="{F7021451-1387-4CA6-816F-3879F97B5CBC}" type="slidenum">
+              <a:rPr lang="en-US"/>
+              <a:t>60</a:t>
+            </a:fld>
+            <a:endParaRPr lang="en-US"/>
+          </a:p>
+        </p:txBody>
+      </p:sp>
+    </p:spTree>
+    <p:extLst>
+      <p:ext uri="{BB962C8B-B14F-4D97-AF65-F5344CB8AC3E}">
+        <p14:creationId xmlns:p14="http://schemas.microsoft.com/office/powerpoint/2010/main" val="1024086991"/>
+      </p:ext>
+    </p:extLst>
+  </p:cSld>
+  <p:clrMapOvr>
+    <a:masterClrMapping/>
+  </p:clrMapOvr>
+</p:notes>
+</file>
+
+<file path=ppt/notesSlides/notesSlide61.xml><?xml version="1.0" encoding="utf-8"?>
+<p:notes xmlns:a="http://schemas.openxmlformats.org/drawingml/2006/main" xmlns:r="http://schemas.openxmlformats.org/officeDocument/2006/relationships" xmlns:p="http://schemas.openxmlformats.org/presentationml/2006/main">
+  <p:cSld>
+    <p:spTree>
+      <p:nvGrpSpPr>
+        <p:cNvPr id="1" name=""/>
+        <p:cNvGrpSpPr/>
+        <p:nvPr/>
+      </p:nvGrpSpPr>
+      <p:grpSpPr>
+        <a:xfrm>
+          <a:off x="0" y="0"/>
+          <a:ext cx="0" cy="0"/>
+          <a:chOff x="0" y="0"/>
+          <a:chExt cx="0" cy="0"/>
+        </a:xfrm>
+      </p:grpSpPr>
+      <p:sp>
+        <p:nvSpPr>
+          <p:cNvPr id="2" name="Slide Image Placeholder 1"/>
+          <p:cNvSpPr>
+            <a:spLocks noGrp="1" noRot="1" noChangeAspect="1"/>
+          </p:cNvSpPr>
+          <p:nvPr>
+            <p:ph type="sldImg"/>
+          </p:nvPr>
+        </p:nvSpPr>
+        <p:spPr/>
+      </p:sp>
+      <p:sp>
+        <p:nvSpPr>
+          <p:cNvPr id="3" name="Notes Placeholder 2"/>
+          <p:cNvSpPr>
+            <a:spLocks noGrp="1"/>
+          </p:cNvSpPr>
+          <p:nvPr>
+            <p:ph type="body" idx="1"/>
+          </p:nvPr>
+        </p:nvSpPr>
+        <p:spPr/>
+        <p:txBody>
+          <a:bodyPr/>
+          <a:lstStyle/>
+          <a:p>
+            <a:r>
+              <a:rPr lang="en-US" dirty="0"/>
+              <a:t>I complete the second page of the logbook: the matter taught, the evaluation, the homework and the attendance.</a:t>
+            </a:r>
+            <a:endParaRPr lang="en-US" dirty="0"/>
+          </a:p>
+        </p:txBody>
+      </p:sp>
+      <p:sp>
+        <p:nvSpPr>
+          <p:cNvPr id="4" name="Slide Number Placeholder 3"/>
+          <p:cNvSpPr>
+            <a:spLocks noGrp="1"/>
+          </p:cNvSpPr>
+          <p:nvPr>
+            <p:ph type="sldNum" sz="quarter" idx="10"/>
+          </p:nvPr>
+        </p:nvSpPr>
+        <p:spPr/>
+        <p:txBody>
+          <a:bodyPr/>
+          <a:lstStyle/>
+          <a:p>
+            <a:fld id="{F7021451-1387-4CA6-816F-3879F97B5CBC}" type="slidenum">
+              <a:rPr lang="en-US"/>
+              <a:t>61</a:t>
+            </a:fld>
+            <a:endParaRPr lang="en-US"/>
+          </a:p>
+        </p:txBody>
+      </p:sp>
+    </p:spTree>
+    <p:extLst>
+      <p:ext uri="{BB962C8B-B14F-4D97-AF65-F5344CB8AC3E}">
+        <p14:creationId xmlns:p14="http://schemas.microsoft.com/office/powerpoint/2010/main" val="1024086991"/>
+      </p:ext>
+    </p:extLst>
+  </p:cSld>
+  <p:clrMapOvr>
+    <a:masterClrMapping/>
+  </p:clrMapOvr>
+</p:notes>
+</file>
+
+<file path=ppt/notesSlides/notesSlide62.xml><?xml version="1.0" encoding="utf-8"?>
+<p:notes xmlns:a="http://schemas.openxmlformats.org/drawingml/2006/main" xmlns:r="http://schemas.openxmlformats.org/officeDocument/2006/relationships" xmlns:p="http://schemas.openxmlformats.org/presentationml/2006/main">
+  <p:cSld>
+    <p:spTree>
+      <p:nvGrpSpPr>
+        <p:cNvPr id="1" name=""/>
+        <p:cNvGrpSpPr/>
+        <p:nvPr/>
+      </p:nvGrpSpPr>
+      <p:grpSpPr>
+        <a:xfrm>
+          <a:off x="0" y="0"/>
+          <a:ext cx="0" cy="0"/>
+          <a:chOff x="0" y="0"/>
+          <a:chExt cx="0" cy="0"/>
+        </a:xfrm>
+      </p:grpSpPr>
+      <p:sp>
+        <p:nvSpPr>
+          <p:cNvPr id="2" name="Slide Image Placeholder 1"/>
+          <p:cNvSpPr>
+            <a:spLocks noGrp="1" noRot="1" noChangeAspect="1"/>
+          </p:cNvSpPr>
+          <p:nvPr>
+            <p:ph type="sldImg"/>
+          </p:nvPr>
+        </p:nvSpPr>
+        <p:spPr/>
+      </p:sp>
+      <p:sp>
+        <p:nvSpPr>
+          <p:cNvPr id="3" name="Notes Placeholder 2"/>
+          <p:cNvSpPr>
+            <a:spLocks noGrp="1"/>
+          </p:cNvSpPr>
+          <p:nvPr>
+            <p:ph type="body" idx="1"/>
+          </p:nvPr>
+        </p:nvSpPr>
+        <p:spPr/>
+        <p:txBody>
+          <a:bodyPr/>
+          <a:lstStyle/>
+          <a:p>
+            <a:r>
+              <a:rPr lang="en-US" dirty="0"/>
+              <a:t>This slide is for me, the teacher: it gives the timing of the lesson and what to do if the projector is not available.</a:t>
+            </a:r>
+            <a:endParaRPr lang="en-US" dirty="0"/>
+          </a:p>
+        </p:txBody>
+      </p:sp>
+      <p:sp>
+        <p:nvSpPr>
+          <p:cNvPr id="4" name="Slide Number Placeholder 3"/>
+          <p:cNvSpPr>
+            <a:spLocks noGrp="1"/>
+          </p:cNvSpPr>
+          <p:nvPr>
+            <p:ph type="sldNum" sz="quarter" idx="10"/>
+          </p:nvPr>
+        </p:nvSpPr>
+        <p:spPr/>
+        <p:txBody>
+          <a:bodyPr/>
+          <a:lstStyle/>
+          <a:p>
+            <a:fld id="{F7021451-1387-4CA6-816F-3879F97B5CBC}" type="slidenum">
+              <a:rPr lang="en-US"/>
+              <a:t>62</a:t>
+            </a:fld>
+            <a:endParaRPr lang="en-US"/>
+          </a:p>
+        </p:txBody>
+      </p:sp>
+    </p:spTree>
+    <p:extLst>
+      <p:ext uri="{BB962C8B-B14F-4D97-AF65-F5344CB8AC3E}">
+        <p14:creationId xmlns:p14="http://schemas.microsoft.com/office/powerpoint/2010/main" val="1024086991"/>
+      </p:ext>
+    </p:extLst>
+  </p:cSld>
+  <p:clrMapOvr>
+    <a:masterClrMapping/>
+  </p:clrMapOvr>
+</p:notes>
+</file>
+
+<file path=ppt/notesSlides/notesSlide63.xml><?xml version="1.0" encoding="utf-8"?>
+<p:notes xmlns:a="http://schemas.openxmlformats.org/drawingml/2006/main" xmlns:r="http://schemas.openxmlformats.org/officeDocument/2006/relationships" xmlns:p="http://schemas.openxmlformats.org/presentationml/2006/main">
+  <p:cSld>
+    <p:spTree>
+      <p:nvGrpSpPr>
+        <p:cNvPr id="1" name=""/>
+        <p:cNvGrpSpPr/>
+        <p:nvPr/>
+      </p:nvGrpSpPr>
+      <p:grpSpPr>
+        <a:xfrm>
+          <a:off x="0" y="0"/>
+          <a:ext cx="0" cy="0"/>
+          <a:chOff x="0" y="0"/>
+          <a:chExt cx="0" cy="0"/>
+        </a:xfrm>
+      </p:grpSpPr>
+      <p:sp>
+        <p:nvSpPr>
+          <p:cNvPr id="2" name="Slide Image Placeholder 1"/>
+          <p:cNvSpPr>
+            <a:spLocks noGrp="1" noRot="1" noChangeAspect="1"/>
+          </p:cNvSpPr>
+          <p:nvPr>
+            <p:ph type="sldImg"/>
+          </p:nvPr>
+        </p:nvSpPr>
+        <p:spPr/>
+      </p:sp>
+      <p:sp>
+        <p:nvSpPr>
+          <p:cNvPr id="3" name="Notes Placeholder 2"/>
+          <p:cNvSpPr>
+            <a:spLocks noGrp="1"/>
+          </p:cNvSpPr>
+          <p:nvPr>
+            <p:ph type="body" idx="1"/>
+          </p:nvPr>
+        </p:nvSpPr>
+        <p:spPr/>
+        <p:txBody>
+          <a:bodyPr/>
+          <a:lstStyle/>
+          <a:p>
+            <a:r>
+              <a:rPr lang="en-US" dirty="0"/>
+              <a:t>These are the references and picture credits used to prepare this lesson.</a:t>
+            </a:r>
+            <a:endParaRPr lang="en-US" dirty="0"/>
+          </a:p>
+        </p:txBody>
+      </p:sp>
+      <p:sp>
+        <p:nvSpPr>
+          <p:cNvPr id="4" name="Slide Number Placeholder 3"/>
+          <p:cNvSpPr>
+            <a:spLocks noGrp="1"/>
+          </p:cNvSpPr>
+          <p:nvPr>
+            <p:ph type="sldNum" sz="quarter" idx="10"/>
+          </p:nvPr>
+        </p:nvSpPr>
+        <p:spPr/>
+        <p:txBody>
+          <a:bodyPr/>
+          <a:lstStyle/>
+          <a:p>
+            <a:fld id="{F7021451-1387-4CA6-816F-3879F97B5CBC}" type="slidenum">
+              <a:rPr lang="en-US"/>
+              <a:t>63</a:t>
+            </a:fld>
+            <a:endParaRPr lang="en-US"/>
+          </a:p>
+        </p:txBody>
+      </p:sp>
+    </p:spTree>
+    <p:extLst>
+      <p:ext uri="{BB962C8B-B14F-4D97-AF65-F5344CB8AC3E}">
+        <p14:creationId xmlns:p14="http://schemas.microsoft.com/office/powerpoint/2010/main" val="1024086991"/>
+      </p:ext>
+    </p:extLst>
+  </p:cSld>
+  <p:clrMapOvr>
+    <a:masterClrMapping/>
+  </p:clrMapOvr>
+</p:notes>
+</file>
+
 <file path=ppt/notesSlides/notesSlide7.xml><?xml version="1.0" encoding="utf-8"?>
 <p:notes xmlns:a="http://schemas.openxmlformats.org/drawingml/2006/main" xmlns:r="http://schemas.openxmlformats.org/officeDocument/2006/relationships" xmlns:p="http://schemas.openxmlformats.org/presentationml/2006/main">
   <p:cSld>
@@ -5220,7 +5932,7 @@
           <a:p>
             <a:r>
               <a:rPr lang="en-US" dirty="0"/>
-              <a:t>By the end of this lesson, you should be able to do three things. Number 1: define over-, under- and optimum population. Number 2: give indicators and examples of each. Number 3: explain causes, consequences and solutions.</a:t>
+              <a:t>By the end of this lesson, you should be able to do five things. Number 1: define overpopulation, underpopulation and optimum population. Number 2: give the indicators and causes of each. Number 3: explain their consequences. Number 4: explain the factors of the carrying capacity of the land. Number 5: propose solutions to population-resource problems.</a:t>
             </a:r>
             <a:endParaRPr lang="en-US" dirty="0"/>
           </a:p>
@@ -5308,7 +6020,7 @@
           <a:p>
             <a:r>
               <a:rPr lang="en-US" dirty="0"/>
-              <a:t>Let us first remember what you already know. Carrying capacity is the limit of support. Technology can raise production. Keep this in mind, because we shall build on it today.</a:t>
+              <a:t>Let us first remember what you already know. Carrying capacity is the limit of an environment. The J-curve overshoots and crashes. Technology can raise the carrying capacity. Keep this in mind, because we shall build on it today.</a:t>
             </a:r>
             <a:endParaRPr lang="en-US" dirty="0"/>
           </a:p>
@@ -6688,7 +7400,7 @@
         <p:spPr>
           <a:xfrm>
             <a:off x="0" y="658368"/>
-            <a:ext cx="5120640" cy="5833872"/>
+            <a:ext cx="2468880" cy="5833872"/>
           </a:xfrm>
           <a:prstGeom prst="rect">
             <a:avLst/>
@@ -6703,8 +7415,8 @@
         </p:nvSpPr>
         <p:spPr>
           <a:xfrm>
-            <a:off x="5349240" y="1005840"/>
-            <a:ext cx="6522415" cy="731520"/>
+            <a:off x="2697480" y="1005840"/>
+            <a:ext cx="9174175" cy="731520"/>
           </a:xfrm>
           <a:prstGeom prst="rect">
             <a:avLst/>
@@ -6744,8 +7456,8 @@
         </p:nvSpPr>
         <p:spPr>
           <a:xfrm>
-            <a:off x="5349240" y="1783080"/>
-            <a:ext cx="6522415" cy="4663440"/>
+            <a:off x="2697480" y="1783080"/>
+            <a:ext cx="9174175" cy="4663440"/>
           </a:xfrm>
           <a:prstGeom prst="rect">
             <a:avLst/>
@@ -6772,7 +7484,27 @@
                 <a:ea typeface="Times New Roman" pitchFamily="34" charset="-122"/>
                 <a:cs typeface="Times New Roman" pitchFamily="34" charset="-120"/>
               </a:rPr>
-              <a:t>In some villages of the West Region, fields are tiny and young people leave. In the East, large forests have few people and roads, and many resources are not used.</a:t>
+              <a:t>Near the Benue, many families share small plots: the soil is tired, firewood is scarce and the water level in the wells is falling.</a:t>
+            </a:r>
+            <a:endParaRPr lang="en-US" sz="4000" dirty="0"/>
+          </a:p>
+          <a:p>
+            <a:pPr algn="l" indent="0" marL="0">
+              <a:spcAft>
+                <a:spcPts val="800"/>
+              </a:spcAft>
+              <a:buNone/>
+            </a:pPr>
+            <a:r>
+              <a:rPr lang="en-US" sz="4000" dirty="0">
+                <a:solidFill>
+                  <a:srgbClr val="111111"/>
+                </a:solidFill>
+                <a:latin typeface="Times New Roman" pitchFamily="34" charset="0"/>
+                <a:ea typeface="Times New Roman" pitchFamily="34" charset="-122"/>
+                <a:cs typeface="Times New Roman" pitchFamily="34" charset="-120"/>
+              </a:rPr>
+              <a:t>Further away, a vast fertile area has only a few small villages that cannot cultivate all the land.</a:t>
             </a:r>
             <a:endParaRPr lang="en-US" sz="4000" dirty="0"/>
           </a:p>
@@ -6949,7 +7681,7 @@
                 <a:ea typeface="Times New Roman" pitchFamily="34" charset="-122"/>
                 <a:cs typeface="Times New Roman" pitchFamily="34" charset="-120"/>
               </a:rPr>
-              <a:t>Situation: Question 1</a:t>
+              <a:t>Situation in Real Life (continued)</a:t>
             </a:r>
             <a:endParaRPr lang="en-US" sz="3600" dirty="0"/>
           </a:p>
@@ -6991,7 +7723,7 @@
                 <a:ea typeface="Times New Roman" pitchFamily="34" charset="-122"/>
                 <a:cs typeface="Times New Roman" pitchFamily="34" charset="-120"/>
               </a:rPr>
-              <a:t>What is the problem in the situation?</a:t>
+              <a:t>A student comparing the two areas asks: "Which area has too many people, which has too few, what is the ideal number, and how do we know the limit of what the land can give?"</a:t>
             </a:r>
             <a:endParaRPr lang="en-US" sz="4000" dirty="0"/>
           </a:p>
@@ -7168,7 +7900,7 @@
                 <a:ea typeface="Times New Roman" pitchFamily="34" charset="-122"/>
                 <a:cs typeface="Times New Roman" pitchFamily="34" charset="-120"/>
               </a:rPr>
-              <a:t>Answer</a:t>
+              <a:t>Situation: Question 1</a:t>
             </a:r>
             <a:endParaRPr lang="en-US" sz="3600" dirty="0"/>
           </a:p>
@@ -7210,7 +7942,7 @@
                 <a:ea typeface="Times New Roman" pitchFamily="34" charset="-122"/>
                 <a:cs typeface="Times New Roman" pitchFamily="34" charset="-120"/>
               </a:rPr>
-              <a:t>Some areas have too many people and others too few for their resources.</a:t>
+              <a:t>What is the problem in the situation?</a:t>
             </a:r>
             <a:endParaRPr lang="en-US" sz="4000" dirty="0"/>
           </a:p>
@@ -7387,7 +8119,7 @@
                 <a:ea typeface="Times New Roman" pitchFamily="34" charset="-122"/>
                 <a:cs typeface="Times New Roman" pitchFamily="34" charset="-120"/>
               </a:rPr>
-              <a:t>Situation: Question 2</a:t>
+              <a:t>Answer</a:t>
             </a:r>
             <a:endParaRPr lang="en-US" sz="3600" dirty="0"/>
           </a:p>
@@ -7429,7 +8161,7 @@
                 <a:ea typeface="Times New Roman" pitchFamily="34" charset="-122"/>
                 <a:cs typeface="Times New Roman" pitchFamily="34" charset="-120"/>
               </a:rPr>
-              <a:t>What is the West village situation called?</a:t>
+              <a:t>The student does not know the concepts of over-, under- and optimum population.</a:t>
             </a:r>
             <a:endParaRPr lang="en-US" sz="4000" dirty="0"/>
           </a:p>
@@ -7606,7 +8338,7 @@
                 <a:ea typeface="Times New Roman" pitchFamily="34" charset="-122"/>
                 <a:cs typeface="Times New Roman" pitchFamily="34" charset="-120"/>
               </a:rPr>
-              <a:t>Answer</a:t>
+              <a:t>Situation: Question 2</a:t>
             </a:r>
             <a:endParaRPr lang="en-US" sz="3600" dirty="0"/>
           </a:p>
@@ -7648,7 +8380,7 @@
                 <a:ea typeface="Times New Roman" pitchFamily="34" charset="-122"/>
                 <a:cs typeface="Times New Roman" pitchFamily="34" charset="-120"/>
               </a:rPr>
-              <a:t>Overpopulation (local).</a:t>
+              <a:t>What is the situation near the river?</a:t>
             </a:r>
             <a:endParaRPr lang="en-US" sz="4000" dirty="0"/>
           </a:p>
@@ -7825,7 +8557,7 @@
                 <a:ea typeface="Times New Roman" pitchFamily="34" charset="-122"/>
                 <a:cs typeface="Times New Roman" pitchFamily="34" charset="-120"/>
               </a:rPr>
-              <a:t>Situation: Question 3</a:t>
+              <a:t>Answer</a:t>
             </a:r>
             <a:endParaRPr lang="en-US" sz="3600" dirty="0"/>
           </a:p>
@@ -7867,7 +8599,7 @@
                 <a:ea typeface="Times New Roman" pitchFamily="34" charset="-122"/>
                 <a:cs typeface="Times New Roman" pitchFamily="34" charset="-120"/>
               </a:rPr>
-              <a:t>What is the East situation called?</a:t>
+              <a:t>Overpopulation: too many people for the resources.</a:t>
             </a:r>
             <a:endParaRPr lang="en-US" sz="4000" dirty="0"/>
           </a:p>
@@ -8044,7 +8776,7 @@
                 <a:ea typeface="Times New Roman" pitchFamily="34" charset="-122"/>
                 <a:cs typeface="Times New Roman" pitchFamily="34" charset="-120"/>
               </a:rPr>
-              <a:t>Possible Answer</a:t>
+              <a:t>Situation: Question 3</a:t>
             </a:r>
             <a:endParaRPr lang="en-US" sz="3600" dirty="0"/>
           </a:p>
@@ -8086,7 +8818,7 @@
                 <a:ea typeface="Times New Roman" pitchFamily="34" charset="-122"/>
                 <a:cs typeface="Times New Roman" pitchFamily="34" charset="-120"/>
               </a:rPr>
-              <a:t>Underpopulation.</a:t>
+              <a:t>What is the situation of the vast fertile area?</a:t>
             </a:r>
             <a:endParaRPr lang="en-US" sz="4000" dirty="0"/>
           </a:p>
@@ -8198,7 +8930,7 @@
                 <a:ea typeface="Calibri" pitchFamily="34" charset="-122"/>
                 <a:cs typeface="Calibri" pitchFamily="34" charset="-120"/>
               </a:rPr>
-              <a:t>ACTION TO TAKE</a:t>
+              <a:t>REAL-LIFE SITUATION</a:t>
             </a:r>
             <a:endParaRPr lang="en-US" sz="1400" dirty="0"/>
           </a:p>
@@ -8263,7 +8995,7 @@
                 <a:ea typeface="Times New Roman" pitchFamily="34" charset="-122"/>
                 <a:cs typeface="Times New Roman" pitchFamily="34" charset="-120"/>
               </a:rPr>
-              <a:t>Action to Take</a:t>
+              <a:t>Possible Answer</a:t>
             </a:r>
             <a:endParaRPr lang="en-US" sz="3600" dirty="0"/>
           </a:p>
@@ -8305,7 +9037,7 @@
                 <a:ea typeface="Times New Roman" pitchFamily="34" charset="-122"/>
                 <a:cs typeface="Times New Roman" pitchFamily="34" charset="-120"/>
               </a:rPr>
-              <a:t>Identify population–resource imbalances and propose solutions.</a:t>
+              <a:t>Underpopulation: too few people to use its resources.</a:t>
             </a:r>
             <a:endParaRPr lang="en-US" sz="4000" dirty="0"/>
           </a:p>
@@ -8417,7 +9149,7 @@
                 <a:ea typeface="Calibri" pitchFamily="34" charset="-122"/>
                 <a:cs typeface="Calibri" pitchFamily="34" charset="-120"/>
               </a:rPr>
-              <a:t>JUSTIFICATION</a:t>
+              <a:t>ACTION TO TAKE</a:t>
             </a:r>
             <a:endParaRPr lang="en-US" sz="1400" dirty="0"/>
           </a:p>
@@ -8482,7 +9214,7 @@
                 <a:ea typeface="Times New Roman" pitchFamily="34" charset="-122"/>
                 <a:cs typeface="Times New Roman" pitchFamily="34" charset="-120"/>
               </a:rPr>
-              <a:t>Justification of the Lesson</a:t>
+              <a:t>Action to Take</a:t>
             </a:r>
             <a:endParaRPr lang="en-US" sz="3600" dirty="0"/>
           </a:p>
@@ -8524,7 +9256,7 @@
                 <a:ea typeface="Times New Roman" pitchFamily="34" charset="-122"/>
                 <a:cs typeface="Times New Roman" pitchFamily="34" charset="-120"/>
               </a:rPr>
-              <a:t>This lesson helps us to understand the balance between people and resources.</a:t>
+              <a:t>Use resources carefully and support technology and education to raise the carrying capacity of your region.</a:t>
             </a:r>
             <a:endParaRPr lang="en-US" sz="4000" dirty="0"/>
           </a:p>
@@ -8636,54 +9368,15 @@
                 <a:ea typeface="Calibri" pitchFamily="34" charset="-122"/>
                 <a:cs typeface="Calibri" pitchFamily="34" charset="-120"/>
               </a:rPr>
-              <a:t>1. THE CONCEPTS</a:t>
+              <a:t>JUSTIFICATION</a:t>
             </a:r>
             <a:endParaRPr lang="en-US" sz="1400" dirty="0"/>
-          </a:p>
-        </p:txBody>
-      </p:sp>
-      <p:sp>
-        <p:nvSpPr>
-          <p:cNvPr id="3" name="Text 1"/>
-          <p:cNvSpPr/>
-          <p:nvPr/>
-        </p:nvSpPr>
-        <p:spPr>
-          <a:xfrm>
-            <a:off x="457200" y="1005840"/>
-            <a:ext cx="11277295" cy="731520"/>
-          </a:xfrm>
-          <a:prstGeom prst="rect">
-            <a:avLst/>
-          </a:prstGeom>
-          <a:noFill/>
-          <a:ln/>
-        </p:spPr>
-        <p:txBody>
-          <a:bodyPr wrap="square" lIns="0" tIns="0" rIns="0" bIns="0" rtlCol="0" anchor="ctr"/>
-          <a:lstStyle/>
-          <a:p>
-            <a:pPr algn="ctr" indent="0" marL="0">
-              <a:buNone/>
-            </a:pPr>
-            <a:r>
-              <a:rPr lang="en-US" sz="3600" b="1" dirty="0">
-                <a:solidFill>
-                  <a:srgbClr val="990011"/>
-                </a:solidFill>
-                <a:latin typeface="Times New Roman" pitchFamily="34" charset="0"/>
-                <a:ea typeface="Times New Roman" pitchFamily="34" charset="-122"/>
-                <a:cs typeface="Times New Roman" pitchFamily="34" charset="-120"/>
-              </a:rPr>
-              <a:t>Activity 1</a:t>
-            </a:r>
-            <a:endParaRPr lang="en-US" sz="3600" dirty="0"/>
           </a:p>
         </p:txBody>
       </p:sp>
       <p:pic>
         <p:nvPicPr>
-          <p:cNvPr id="4" name="Image 0" descr="/home/claude/f4/img/v2/optimum_big.png">    </p:cNvPr>
+          <p:cNvPr id="3" name="Image 0" descr="/home/claude/f4/img/minesec_sheet.png">    </p:cNvPr>
           <p:cNvPicPr>
             <a:picLocks noChangeAspect="1"/>
           </p:cNvPicPr>
@@ -8697,8 +9390,8 @@
         </p:blipFill>
         <p:spPr>
           <a:xfrm>
-            <a:off x="1215564" y="1783080"/>
-            <a:ext cx="9760567" cy="4270248"/>
+            <a:off x="0" y="658368"/>
+            <a:ext cx="5120640" cy="5833872"/>
           </a:xfrm>
           <a:prstGeom prst="rect">
             <a:avLst/>
@@ -8707,14 +9400,14 @@
       </p:pic>
       <p:sp>
         <p:nvSpPr>
-          <p:cNvPr id="5" name="Text 2"/>
+          <p:cNvPr id="4" name="Text 1"/>
           <p:cNvSpPr/>
           <p:nvPr/>
         </p:nvSpPr>
         <p:spPr>
           <a:xfrm>
-            <a:off x="457200" y="6089904"/>
-            <a:ext cx="11277295" cy="347472"/>
+            <a:off x="5349240" y="1005840"/>
+            <a:ext cx="6522415" cy="731520"/>
           </a:xfrm>
           <a:prstGeom prst="rect">
             <a:avLst/>
@@ -8723,24 +9416,68 @@
           <a:ln/>
         </p:spPr>
         <p:txBody>
-          <a:bodyPr wrap="square" lIns="0" tIns="0" rIns="0" bIns="0" rtlCol="0" anchor="ctr"/>
+          <a:bodyPr wrap="square" lIns="0" tIns="0" rIns="0" bIns="0" rtlCol="0" anchor="ctr">
+            <a:normAutofit/>
+          </a:bodyPr>
           <a:lstStyle/>
           <a:p>
             <a:pPr algn="ctr" indent="0" marL="0">
               <a:buNone/>
             </a:pPr>
             <a:r>
-              <a:rPr lang="en-US" sz="1800" i="1" dirty="0">
-                <a:solidFill>
-                  <a:srgbClr val="555555"/>
+              <a:rPr lang="en-US" sz="3600" b="1" dirty="0">
+                <a:solidFill>
+                  <a:srgbClr val="990011"/>
                 </a:solidFill>
                 <a:latin typeface="Times New Roman" pitchFamily="34" charset="0"/>
                 <a:ea typeface="Times New Roman" pitchFamily="34" charset="-122"/>
                 <a:cs typeface="Times New Roman" pitchFamily="34" charset="-120"/>
               </a:rPr>
-              <a:t>Output per person and population size.</a:t>
-            </a:r>
-            <a:endParaRPr lang="en-US" sz="1800" dirty="0"/>
+              <a:t>Justification of the Lesson</a:t>
+            </a:r>
+            <a:endParaRPr lang="en-US" sz="3600" dirty="0"/>
+          </a:p>
+        </p:txBody>
+      </p:sp>
+      <p:sp>
+        <p:nvSpPr>
+          <p:cNvPr id="5" name="Text 2"/>
+          <p:cNvSpPr/>
+          <p:nvPr/>
+        </p:nvSpPr>
+        <p:spPr>
+          <a:xfrm>
+            <a:off x="5349240" y="1783080"/>
+            <a:ext cx="6522415" cy="4663440"/>
+          </a:xfrm>
+          <a:prstGeom prst="rect">
+            <a:avLst/>
+          </a:prstGeom>
+          <a:noFill/>
+          <a:ln/>
+        </p:spPr>
+        <p:txBody>
+          <a:bodyPr wrap="square" lIns="0" tIns="0" rIns="0" bIns="0" rtlCol="0" anchor="t"/>
+          <a:lstStyle/>
+          <a:p>
+            <a:pPr algn="l" indent="0" marL="0">
+              <a:spcAft>
+                <a:spcPts val="800"/>
+              </a:spcAft>
+              <a:buNone/>
+            </a:pPr>
+            <a:r>
+              <a:rPr lang="en-US" sz="4000" dirty="0">
+                <a:solidFill>
+                  <a:srgbClr val="111111"/>
+                </a:solidFill>
+                <a:latin typeface="Times New Roman" pitchFamily="34" charset="0"/>
+                <a:ea typeface="Times New Roman" pitchFamily="34" charset="-122"/>
+                <a:cs typeface="Times New Roman" pitchFamily="34" charset="-120"/>
+              </a:rPr>
+              <a:t>This lesson helps us to judge the balance between people and resources and to choose policies for development.</a:t>
+            </a:r>
+            <a:endParaRPr lang="en-US" sz="4000" dirty="0"/>
           </a:p>
         </p:txBody>
       </p:sp>
@@ -9445,15 +10182,54 @@
                 <a:ea typeface="Calibri" pitchFamily="34" charset="-122"/>
                 <a:cs typeface="Calibri" pitchFamily="34" charset="-120"/>
               </a:rPr>
-              <a:t>1. THE CONCEPTS</a:t>
+              <a:t>1. OVERPOPULATION</a:t>
             </a:r>
             <a:endParaRPr lang="en-US" sz="1400" dirty="0"/>
+          </a:p>
+        </p:txBody>
+      </p:sp>
+      <p:sp>
+        <p:nvSpPr>
+          <p:cNvPr id="3" name="Text 1"/>
+          <p:cNvSpPr/>
+          <p:nvPr/>
+        </p:nvSpPr>
+        <p:spPr>
+          <a:xfrm>
+            <a:off x="457200" y="1005840"/>
+            <a:ext cx="11277295" cy="731520"/>
+          </a:xfrm>
+          <a:prstGeom prst="rect">
+            <a:avLst/>
+          </a:prstGeom>
+          <a:noFill/>
+          <a:ln/>
+        </p:spPr>
+        <p:txBody>
+          <a:bodyPr wrap="square" lIns="0" tIns="0" rIns="0" bIns="0" rtlCol="0" anchor="ctr"/>
+          <a:lstStyle/>
+          <a:p>
+            <a:pPr algn="ctr" indent="0" marL="0">
+              <a:buNone/>
+            </a:pPr>
+            <a:r>
+              <a:rPr lang="en-US" sz="3600" b="1" dirty="0">
+                <a:solidFill>
+                  <a:srgbClr val="990011"/>
+                </a:solidFill>
+                <a:latin typeface="Times New Roman" pitchFamily="34" charset="0"/>
+                <a:ea typeface="Times New Roman" pitchFamily="34" charset="-122"/>
+                <a:cs typeface="Times New Roman" pitchFamily="34" charset="-120"/>
+              </a:rPr>
+              <a:t>Activity 1</a:t>
+            </a:r>
+            <a:endParaRPr lang="en-US" sz="3600" dirty="0"/>
           </a:p>
         </p:txBody>
       </p:sp>
       <p:pic>
         <p:nvPicPr>
-          <p:cNvPr id="3" name="Image 0" descr="/home/claude/f4/img/minesec_sheet.png">    </p:cNvPr>
+          <p:cNvPr id="4" name="Image 0" descr="/home/claude/f4/img/v2/usa_slum.jpg">    </p:cNvPr>
           <p:cNvPicPr>
             <a:picLocks noChangeAspect="1"/>
           </p:cNvPicPr>
@@ -9467,8 +10243,8 @@
         </p:blipFill>
         <p:spPr>
           <a:xfrm>
-            <a:off x="0" y="658368"/>
-            <a:ext cx="5120640" cy="5833872"/>
+            <a:off x="2250369" y="1783080"/>
+            <a:ext cx="7690957" cy="4270248"/>
           </a:xfrm>
           <a:prstGeom prst="rect">
             <a:avLst/>
@@ -9477,14 +10253,14 @@
       </p:pic>
       <p:sp>
         <p:nvSpPr>
-          <p:cNvPr id="4" name="Text 1"/>
+          <p:cNvPr id="5" name="Text 2"/>
           <p:cNvSpPr/>
           <p:nvPr/>
         </p:nvSpPr>
         <p:spPr>
           <a:xfrm>
-            <a:off x="5349240" y="1005840"/>
-            <a:ext cx="6522415" cy="731520"/>
+            <a:off x="457200" y="6089904"/>
+            <a:ext cx="11277295" cy="347472"/>
           </a:xfrm>
           <a:prstGeom prst="rect">
             <a:avLst/>
@@ -9493,68 +10269,24 @@
           <a:ln/>
         </p:spPr>
         <p:txBody>
-          <a:bodyPr wrap="square" lIns="0" tIns="0" rIns="0" bIns="0" rtlCol="0" anchor="ctr">
-            <a:normAutofit/>
-          </a:bodyPr>
+          <a:bodyPr wrap="square" lIns="0" tIns="0" rIns="0" bIns="0" rtlCol="0" anchor="ctr"/>
           <a:lstStyle/>
           <a:p>
             <a:pPr algn="ctr" indent="0" marL="0">
               <a:buNone/>
             </a:pPr>
             <a:r>
-              <a:rPr lang="en-US" sz="3600" b="1" dirty="0">
-                <a:solidFill>
-                  <a:srgbClr val="990011"/>
+              <a:rPr lang="en-US" sz="1800" i="1" dirty="0">
+                <a:solidFill>
+                  <a:srgbClr val="555555"/>
                 </a:solidFill>
                 <a:latin typeface="Times New Roman" pitchFamily="34" charset="0"/>
                 <a:ea typeface="Times New Roman" pitchFamily="34" charset="-122"/>
                 <a:cs typeface="Times New Roman" pitchFamily="34" charset="-120"/>
               </a:rPr>
-              <a:t>Activity 1: Question</a:t>
-            </a:r>
-            <a:endParaRPr lang="en-US" sz="3600" dirty="0"/>
-          </a:p>
-        </p:txBody>
-      </p:sp>
-      <p:sp>
-        <p:nvSpPr>
-          <p:cNvPr id="5" name="Text 2"/>
-          <p:cNvSpPr/>
-          <p:nvPr/>
-        </p:nvSpPr>
-        <p:spPr>
-          <a:xfrm>
-            <a:off x="5349240" y="1783080"/>
-            <a:ext cx="6522415" cy="4663440"/>
-          </a:xfrm>
-          <a:prstGeom prst="rect">
-            <a:avLst/>
-          </a:prstGeom>
-          <a:noFill/>
-          <a:ln/>
-        </p:spPr>
-        <p:txBody>
-          <a:bodyPr wrap="square" lIns="0" tIns="0" rIns="0" bIns="0" rtlCol="0" anchor="t"/>
-          <a:lstStyle/>
-          <a:p>
-            <a:pPr algn="l" indent="0" marL="0">
-              <a:spcAft>
-                <a:spcPts val="800"/>
-              </a:spcAft>
-              <a:buNone/>
-            </a:pPr>
-            <a:r>
-              <a:rPr lang="en-US" sz="4000" dirty="0">
-                <a:solidFill>
-                  <a:srgbClr val="111111"/>
-                </a:solidFill>
-                <a:latin typeface="Times New Roman" pitchFamily="34" charset="0"/>
-                <a:ea typeface="Times New Roman" pitchFamily="34" charset="-122"/>
-                <a:cs typeface="Times New Roman" pitchFamily="34" charset="-120"/>
-              </a:rPr>
-              <a:t>What is optimum population?</a:t>
-            </a:r>
-            <a:endParaRPr lang="en-US" sz="4000" dirty="0"/>
+              <a:t>An overcrowded neighbourhood.</a:t>
+            </a:r>
+            <a:endParaRPr lang="en-US" sz="1800" dirty="0"/>
           </a:p>
         </p:txBody>
       </p:sp>
@@ -9664,7 +10396,7 @@
                 <a:ea typeface="Calibri" pitchFamily="34" charset="-122"/>
                 <a:cs typeface="Calibri" pitchFamily="34" charset="-120"/>
               </a:rPr>
-              <a:t>1. THE CONCEPTS</a:t>
+              <a:t>1. OVERPOPULATION</a:t>
             </a:r>
             <a:endParaRPr lang="en-US" sz="1400" dirty="0"/>
           </a:p>
@@ -9729,7 +10461,7 @@
                 <a:ea typeface="Times New Roman" pitchFamily="34" charset="-122"/>
                 <a:cs typeface="Times New Roman" pitchFamily="34" charset="-120"/>
               </a:rPr>
-              <a:t>Activity 1: Answer</a:t>
+              <a:t>Activity 1: Question</a:t>
             </a:r>
             <a:endParaRPr lang="en-US" sz="3600" dirty="0"/>
           </a:p>
@@ -9771,7 +10503,7 @@
                 <a:ea typeface="Times New Roman" pitchFamily="34" charset="-122"/>
                 <a:cs typeface="Times New Roman" pitchFamily="34" charset="-120"/>
               </a:rPr>
-              <a:t>The number of people that gives the highest output per person.</a:t>
+              <a:t>Give two indicators of overpopulation.</a:t>
             </a:r>
             <a:endParaRPr lang="en-US" sz="4000" dirty="0"/>
           </a:p>
@@ -9883,54 +10615,15 @@
                 <a:ea typeface="Calibri" pitchFamily="34" charset="-122"/>
                 <a:cs typeface="Calibri" pitchFamily="34" charset="-120"/>
               </a:rPr>
-              <a:t>2. OVERPOPULATION: INDICATORS</a:t>
+              <a:t>1. OVERPOPULATION</a:t>
             </a:r>
             <a:endParaRPr lang="en-US" sz="1400" dirty="0"/>
-          </a:p>
-        </p:txBody>
-      </p:sp>
-      <p:sp>
-        <p:nvSpPr>
-          <p:cNvPr id="3" name="Text 1"/>
-          <p:cNvSpPr/>
-          <p:nvPr/>
-        </p:nvSpPr>
-        <p:spPr>
-          <a:xfrm>
-            <a:off x="457200" y="1005840"/>
-            <a:ext cx="11277295" cy="731520"/>
-          </a:xfrm>
-          <a:prstGeom prst="rect">
-            <a:avLst/>
-          </a:prstGeom>
-          <a:noFill/>
-          <a:ln/>
-        </p:spPr>
-        <p:txBody>
-          <a:bodyPr wrap="square" lIns="0" tIns="0" rIns="0" bIns="0" rtlCol="0" anchor="ctr"/>
-          <a:lstStyle/>
-          <a:p>
-            <a:pPr algn="ctr" indent="0" marL="0">
-              <a:buNone/>
-            </a:pPr>
-            <a:r>
-              <a:rPr lang="en-US" sz="3600" b="1" dirty="0">
-                <a:solidFill>
-                  <a:srgbClr val="990011"/>
-                </a:solidFill>
-                <a:latin typeface="Times New Roman" pitchFamily="34" charset="0"/>
-                <a:ea typeface="Times New Roman" pitchFamily="34" charset="-122"/>
-                <a:cs typeface="Times New Roman" pitchFamily="34" charset="-120"/>
-              </a:rPr>
-              <a:t>Activity 2</a:t>
-            </a:r>
-            <a:endParaRPr lang="en-US" sz="3600" dirty="0"/>
           </a:p>
         </p:txBody>
       </p:sp>
       <p:pic>
         <p:nvPicPr>
-          <p:cNvPr id="4" name="Image 0" descr="/home/claude/f4/img/v2/usa_crowd.jpg">    </p:cNvPr>
+          <p:cNvPr id="3" name="Image 0" descr="/home/claude/f4/img/minesec_sheet.png">    </p:cNvPr>
           <p:cNvPicPr>
             <a:picLocks noChangeAspect="1"/>
           </p:cNvPicPr>
@@ -9944,8 +10637,8 @@
         </p:blipFill>
         <p:spPr>
           <a:xfrm>
-            <a:off x="2246610" y="1783080"/>
-            <a:ext cx="7698475" cy="4270248"/>
+            <a:off x="0" y="658368"/>
+            <a:ext cx="5120640" cy="5833872"/>
           </a:xfrm>
           <a:prstGeom prst="rect">
             <a:avLst/>
@@ -9954,14 +10647,14 @@
       </p:pic>
       <p:sp>
         <p:nvSpPr>
-          <p:cNvPr id="5" name="Text 2"/>
+          <p:cNvPr id="4" name="Text 1"/>
           <p:cNvSpPr/>
           <p:nvPr/>
         </p:nvSpPr>
         <p:spPr>
           <a:xfrm>
-            <a:off x="457200" y="6089904"/>
-            <a:ext cx="11277295" cy="347472"/>
+            <a:off x="5349240" y="1005840"/>
+            <a:ext cx="6522415" cy="731520"/>
           </a:xfrm>
           <a:prstGeom prst="rect">
             <a:avLst/>
@@ -9970,24 +10663,68 @@
           <a:ln/>
         </p:spPr>
         <p:txBody>
-          <a:bodyPr wrap="square" lIns="0" tIns="0" rIns="0" bIns="0" rtlCol="0" anchor="ctr"/>
+          <a:bodyPr wrap="square" lIns="0" tIns="0" rIns="0" bIns="0" rtlCol="0" anchor="ctr">
+            <a:normAutofit/>
+          </a:bodyPr>
           <a:lstStyle/>
           <a:p>
             <a:pPr algn="ctr" indent="0" marL="0">
               <a:buNone/>
             </a:pPr>
             <a:r>
-              <a:rPr lang="en-US" sz="1800" i="1" dirty="0">
-                <a:solidFill>
-                  <a:srgbClr val="555555"/>
+              <a:rPr lang="en-US" sz="3600" b="1" dirty="0">
+                <a:solidFill>
+                  <a:srgbClr val="990011"/>
                 </a:solidFill>
                 <a:latin typeface="Times New Roman" pitchFamily="34" charset="0"/>
                 <a:ea typeface="Times New Roman" pitchFamily="34" charset="-122"/>
                 <a:cs typeface="Times New Roman" pitchFamily="34" charset="-120"/>
               </a:rPr>
-              <a:t>A crowded market.</a:t>
-            </a:r>
-            <a:endParaRPr lang="en-US" sz="1800" dirty="0"/>
+              <a:t>Activity 1: Answer</a:t>
+            </a:r>
+            <a:endParaRPr lang="en-US" sz="3600" dirty="0"/>
+          </a:p>
+        </p:txBody>
+      </p:sp>
+      <p:sp>
+        <p:nvSpPr>
+          <p:cNvPr id="5" name="Text 2"/>
+          <p:cNvSpPr/>
+          <p:nvPr/>
+        </p:nvSpPr>
+        <p:spPr>
+          <a:xfrm>
+            <a:off x="5349240" y="1783080"/>
+            <a:ext cx="6522415" cy="4663440"/>
+          </a:xfrm>
+          <a:prstGeom prst="rect">
+            <a:avLst/>
+          </a:prstGeom>
+          <a:noFill/>
+          <a:ln/>
+        </p:spPr>
+        <p:txBody>
+          <a:bodyPr wrap="square" lIns="0" tIns="0" rIns="0" bIns="0" rtlCol="0" anchor="t"/>
+          <a:lstStyle/>
+          <a:p>
+            <a:pPr algn="l" indent="0" marL="0">
+              <a:spcAft>
+                <a:spcPts val="800"/>
+              </a:spcAft>
+              <a:buNone/>
+            </a:pPr>
+            <a:r>
+              <a:rPr lang="en-US" sz="4000" dirty="0">
+                <a:solidFill>
+                  <a:srgbClr val="111111"/>
+                </a:solidFill>
+                <a:latin typeface="Times New Roman" pitchFamily="34" charset="0"/>
+                <a:ea typeface="Times New Roman" pitchFamily="34" charset="-122"/>
+                <a:cs typeface="Times New Roman" pitchFamily="34" charset="-120"/>
+              </a:rPr>
+              <a:t>Unemployment, poverty, malnutrition, slums or overloaded services (any two).</a:t>
+            </a:r>
+            <a:endParaRPr lang="en-US" sz="4000" dirty="0"/>
           </a:p>
         </p:txBody>
       </p:sp>
@@ -10097,15 +10834,54 @@
                 <a:ea typeface="Calibri" pitchFamily="34" charset="-122"/>
                 <a:cs typeface="Calibri" pitchFamily="34" charset="-120"/>
               </a:rPr>
-              <a:t>2. OVERPOPULATION: INDICATORS</a:t>
+              <a:t>2. UNDERPOPULATION</a:t>
             </a:r>
             <a:endParaRPr lang="en-US" sz="1400" dirty="0"/>
+          </a:p>
+        </p:txBody>
+      </p:sp>
+      <p:sp>
+        <p:nvSpPr>
+          <p:cNvPr id="3" name="Text 1"/>
+          <p:cNvSpPr/>
+          <p:nvPr/>
+        </p:nvSpPr>
+        <p:spPr>
+          <a:xfrm>
+            <a:off x="457200" y="1005840"/>
+            <a:ext cx="11277295" cy="731520"/>
+          </a:xfrm>
+          <a:prstGeom prst="rect">
+            <a:avLst/>
+          </a:prstGeom>
+          <a:noFill/>
+          <a:ln/>
+        </p:spPr>
+        <p:txBody>
+          <a:bodyPr wrap="square" lIns="0" tIns="0" rIns="0" bIns="0" rtlCol="0" anchor="ctr"/>
+          <a:lstStyle/>
+          <a:p>
+            <a:pPr algn="ctr" indent="0" marL="0">
+              <a:buNone/>
+            </a:pPr>
+            <a:r>
+              <a:rPr lang="en-US" sz="3600" b="1" dirty="0">
+                <a:solidFill>
+                  <a:srgbClr val="990011"/>
+                </a:solidFill>
+                <a:latin typeface="Times New Roman" pitchFamily="34" charset="0"/>
+                <a:ea typeface="Times New Roman" pitchFamily="34" charset="-122"/>
+                <a:cs typeface="Times New Roman" pitchFamily="34" charset="-120"/>
+              </a:rPr>
+              <a:t>Activity 2</a:t>
+            </a:r>
+            <a:endParaRPr lang="en-US" sz="3600" dirty="0"/>
           </a:p>
         </p:txBody>
       </p:sp>
       <p:pic>
         <p:nvPicPr>
-          <p:cNvPr id="3" name="Image 0" descr="/home/claude/f4/img/minesec_sheet.png">    </p:cNvPr>
+          <p:cNvPr id="4" name="Image 0" descr="/home/claude/f4/img/v2/regimes_big.png">    </p:cNvPr>
           <p:cNvPicPr>
             <a:picLocks noChangeAspect="1"/>
           </p:cNvPicPr>
@@ -10119,8 +10895,8 @@
         </p:blipFill>
         <p:spPr>
           <a:xfrm>
-            <a:off x="0" y="658368"/>
-            <a:ext cx="5120640" cy="5833872"/>
+            <a:off x="629930" y="1783080"/>
+            <a:ext cx="10931835" cy="4270248"/>
           </a:xfrm>
           <a:prstGeom prst="rect">
             <a:avLst/>
@@ -10129,14 +10905,14 @@
       </p:pic>
       <p:sp>
         <p:nvSpPr>
-          <p:cNvPr id="4" name="Text 1"/>
+          <p:cNvPr id="5" name="Text 2"/>
           <p:cNvSpPr/>
           <p:nvPr/>
         </p:nvSpPr>
         <p:spPr>
           <a:xfrm>
-            <a:off x="5349240" y="1005840"/>
-            <a:ext cx="6522415" cy="731520"/>
+            <a:off x="457200" y="6089904"/>
+            <a:ext cx="11277295" cy="347472"/>
           </a:xfrm>
           <a:prstGeom prst="rect">
             <a:avLst/>
@@ -10145,68 +10921,24 @@
           <a:ln/>
         </p:spPr>
         <p:txBody>
-          <a:bodyPr wrap="square" lIns="0" tIns="0" rIns="0" bIns="0" rtlCol="0" anchor="ctr">
-            <a:normAutofit/>
-          </a:bodyPr>
+          <a:bodyPr wrap="square" lIns="0" tIns="0" rIns="0" bIns="0" rtlCol="0" anchor="ctr"/>
           <a:lstStyle/>
           <a:p>
             <a:pPr algn="ctr" indent="0" marL="0">
               <a:buNone/>
             </a:pPr>
             <a:r>
-              <a:rPr lang="en-US" sz="3600" b="1" dirty="0">
-                <a:solidFill>
-                  <a:srgbClr val="990011"/>
+              <a:rPr lang="en-US" sz="1800" i="1" dirty="0">
+                <a:solidFill>
+                  <a:srgbClr val="555555"/>
                 </a:solidFill>
                 <a:latin typeface="Times New Roman" pitchFamily="34" charset="0"/>
                 <a:ea typeface="Times New Roman" pitchFamily="34" charset="-122"/>
                 <a:cs typeface="Times New Roman" pitchFamily="34" charset="-120"/>
               </a:rPr>
-              <a:t>Activity 2: Question</a:t>
-            </a:r>
-            <a:endParaRPr lang="en-US" sz="3600" dirty="0"/>
-          </a:p>
-        </p:txBody>
-      </p:sp>
-      <p:sp>
-        <p:nvSpPr>
-          <p:cNvPr id="5" name="Text 2"/>
-          <p:cNvSpPr/>
-          <p:nvPr/>
-        </p:nvSpPr>
-        <p:spPr>
-          <a:xfrm>
-            <a:off x="5349240" y="1783080"/>
-            <a:ext cx="6522415" cy="4663440"/>
-          </a:xfrm>
-          <a:prstGeom prst="rect">
-            <a:avLst/>
-          </a:prstGeom>
-          <a:noFill/>
-          <a:ln/>
-        </p:spPr>
-        <p:txBody>
-          <a:bodyPr wrap="square" lIns="0" tIns="0" rIns="0" bIns="0" rtlCol="0" anchor="t"/>
-          <a:lstStyle/>
-          <a:p>
-            <a:pPr algn="l" indent="0" marL="0">
-              <a:spcAft>
-                <a:spcPts val="800"/>
-              </a:spcAft>
-              <a:buNone/>
-            </a:pPr>
-            <a:r>
-              <a:rPr lang="en-US" sz="4000" dirty="0">
-                <a:solidFill>
-                  <a:srgbClr val="111111"/>
-                </a:solidFill>
-                <a:latin typeface="Times New Roman" pitchFamily="34" charset="0"/>
-                <a:ea typeface="Times New Roman" pitchFamily="34" charset="-122"/>
-                <a:cs typeface="Times New Roman" pitchFamily="34" charset="-120"/>
-              </a:rPr>
-              <a:t>Give two indicators of overpopulation.</a:t>
-            </a:r>
-            <a:endParaRPr lang="en-US" sz="4000" dirty="0"/>
+              <a:t>Types of population-resource relations.</a:t>
+            </a:r>
+            <a:endParaRPr lang="en-US" sz="1800" dirty="0"/>
           </a:p>
         </p:txBody>
       </p:sp>
@@ -10316,7 +11048,7 @@
                 <a:ea typeface="Calibri" pitchFamily="34" charset="-122"/>
                 <a:cs typeface="Calibri" pitchFamily="34" charset="-120"/>
               </a:rPr>
-              <a:t>2. OVERPOPULATION: INDICATORS</a:t>
+              <a:t>2. UNDERPOPULATION</a:t>
             </a:r>
             <a:endParaRPr lang="en-US" sz="1400" dirty="0"/>
           </a:p>
@@ -10381,7 +11113,7 @@
                 <a:ea typeface="Times New Roman" pitchFamily="34" charset="-122"/>
                 <a:cs typeface="Times New Roman" pitchFamily="34" charset="-120"/>
               </a:rPr>
-              <a:t>Activity 2: Answer</a:t>
+              <a:t>Activity 2: Question</a:t>
             </a:r>
             <a:endParaRPr lang="en-US" sz="3600" dirty="0"/>
           </a:p>
@@ -10423,7 +11155,7 @@
                 <a:ea typeface="Times New Roman" pitchFamily="34" charset="-122"/>
                 <a:cs typeface="Times New Roman" pitchFamily="34" charset="-120"/>
               </a:rPr>
-              <a:t>Unemployment and food shortages (also slums, land shortage, emigration).</a:t>
+              <a:t>Give one solution to underpopulation.</a:t>
             </a:r>
             <a:endParaRPr lang="en-US" sz="4000" dirty="0"/>
           </a:p>
@@ -10535,54 +11267,15 @@
                 <a:ea typeface="Calibri" pitchFamily="34" charset="-122"/>
                 <a:cs typeface="Calibri" pitchFamily="34" charset="-120"/>
               </a:rPr>
-              <a:t>2. OVERPOPULATION: CONSEQUENCES</a:t>
+              <a:t>2. UNDERPOPULATION</a:t>
             </a:r>
             <a:endParaRPr lang="en-US" sz="1400" dirty="0"/>
-          </a:p>
-        </p:txBody>
-      </p:sp>
-      <p:sp>
-        <p:nvSpPr>
-          <p:cNvPr id="3" name="Text 1"/>
-          <p:cNvSpPr/>
-          <p:nvPr/>
-        </p:nvSpPr>
-        <p:spPr>
-          <a:xfrm>
-            <a:off x="457200" y="1005840"/>
-            <a:ext cx="11277295" cy="731520"/>
-          </a:xfrm>
-          <a:prstGeom prst="rect">
-            <a:avLst/>
-          </a:prstGeom>
-          <a:noFill/>
-          <a:ln/>
-        </p:spPr>
-        <p:txBody>
-          <a:bodyPr wrap="square" lIns="0" tIns="0" rIns="0" bIns="0" rtlCol="0" anchor="ctr"/>
-          <a:lstStyle/>
-          <a:p>
-            <a:pPr algn="ctr" indent="0" marL="0">
-              <a:buNone/>
-            </a:pPr>
-            <a:r>
-              <a:rPr lang="en-US" sz="3600" b="1" dirty="0">
-                <a:solidFill>
-                  <a:srgbClr val="990011"/>
-                </a:solidFill>
-                <a:latin typeface="Times New Roman" pitchFamily="34" charset="0"/>
-                <a:ea typeface="Times New Roman" pitchFamily="34" charset="-122"/>
-                <a:cs typeface="Times New Roman" pitchFamily="34" charset="-120"/>
-              </a:rPr>
-              <a:t>Activity 3</a:t>
-            </a:r>
-            <a:endParaRPr lang="en-US" sz="3600" dirty="0"/>
           </a:p>
         </p:txBody>
       </p:sp>
       <p:pic>
         <p:nvPicPr>
-          <p:cNvPr id="4" name="Image 0" descr="/home/claude/f4/img/v2/f2t_drought.jpg">    </p:cNvPr>
+          <p:cNvPr id="3" name="Image 0" descr="/home/claude/f4/img/minesec_sheet.png">    </p:cNvPr>
           <p:cNvPicPr>
             <a:picLocks noChangeAspect="1"/>
           </p:cNvPicPr>
@@ -10596,8 +11289,8 @@
         </p:blipFill>
         <p:spPr>
           <a:xfrm>
-            <a:off x="2246610" y="1783080"/>
-            <a:ext cx="7698475" cy="4270248"/>
+            <a:off x="0" y="658368"/>
+            <a:ext cx="5120640" cy="5833872"/>
           </a:xfrm>
           <a:prstGeom prst="rect">
             <a:avLst/>
@@ -10606,14 +11299,14 @@
       </p:pic>
       <p:sp>
         <p:nvSpPr>
-          <p:cNvPr id="5" name="Text 2"/>
+          <p:cNvPr id="4" name="Text 1"/>
           <p:cNvSpPr/>
           <p:nvPr/>
         </p:nvSpPr>
         <p:spPr>
           <a:xfrm>
-            <a:off x="457200" y="6089904"/>
-            <a:ext cx="11277295" cy="347472"/>
+            <a:off x="5349240" y="1005840"/>
+            <a:ext cx="6522415" cy="731520"/>
           </a:xfrm>
           <a:prstGeom prst="rect">
             <a:avLst/>
@@ -10622,24 +11315,68 @@
           <a:ln/>
         </p:spPr>
         <p:txBody>
-          <a:bodyPr wrap="square" lIns="0" tIns="0" rIns="0" bIns="0" rtlCol="0" anchor="ctr"/>
+          <a:bodyPr wrap="square" lIns="0" tIns="0" rIns="0" bIns="0" rtlCol="0" anchor="ctr">
+            <a:normAutofit/>
+          </a:bodyPr>
           <a:lstStyle/>
           <a:p>
             <a:pPr algn="ctr" indent="0" marL="0">
               <a:buNone/>
             </a:pPr>
             <a:r>
-              <a:rPr lang="en-US" sz="1800" i="1" dirty="0">
-                <a:solidFill>
-                  <a:srgbClr val="555555"/>
+              <a:rPr lang="en-US" sz="3600" b="1" dirty="0">
+                <a:solidFill>
+                  <a:srgbClr val="990011"/>
                 </a:solidFill>
                 <a:latin typeface="Times New Roman" pitchFamily="34" charset="0"/>
                 <a:ea typeface="Times New Roman" pitchFamily="34" charset="-122"/>
                 <a:cs typeface="Times New Roman" pitchFamily="34" charset="-120"/>
               </a:rPr>
-              <a:t>Dry, degraded land.</a:t>
-            </a:r>
-            <a:endParaRPr lang="en-US" sz="1800" dirty="0"/>
+              <a:t>Activity 2: Answer</a:t>
+            </a:r>
+            <a:endParaRPr lang="en-US" sz="3600" dirty="0"/>
+          </a:p>
+        </p:txBody>
+      </p:sp>
+      <p:sp>
+        <p:nvSpPr>
+          <p:cNvPr id="5" name="Text 2"/>
+          <p:cNvSpPr/>
+          <p:nvPr/>
+        </p:nvSpPr>
+        <p:spPr>
+          <a:xfrm>
+            <a:off x="5349240" y="1783080"/>
+            <a:ext cx="6522415" cy="4663440"/>
+          </a:xfrm>
+          <a:prstGeom prst="rect">
+            <a:avLst/>
+          </a:prstGeom>
+          <a:noFill/>
+          <a:ln/>
+        </p:spPr>
+        <p:txBody>
+          <a:bodyPr wrap="square" lIns="0" tIns="0" rIns="0" bIns="0" rtlCol="0" anchor="t"/>
+          <a:lstStyle/>
+          <a:p>
+            <a:pPr algn="l" indent="0" marL="0">
+              <a:spcAft>
+                <a:spcPts val="800"/>
+              </a:spcAft>
+              <a:buNone/>
+            </a:pPr>
+            <a:r>
+              <a:rPr lang="en-US" sz="4000" dirty="0">
+                <a:solidFill>
+                  <a:srgbClr val="111111"/>
+                </a:solidFill>
+                <a:latin typeface="Times New Roman" pitchFamily="34" charset="0"/>
+                <a:ea typeface="Times New Roman" pitchFamily="34" charset="-122"/>
+                <a:cs typeface="Times New Roman" pitchFamily="34" charset="-120"/>
+              </a:rPr>
+              <a:t>Encourage the immigration of workers or births, or use machines.</a:t>
+            </a:r>
+            <a:endParaRPr lang="en-US" sz="4000" dirty="0"/>
           </a:p>
         </p:txBody>
       </p:sp>
@@ -10749,15 +11486,54 @@
                 <a:ea typeface="Calibri" pitchFamily="34" charset="-122"/>
                 <a:cs typeface="Calibri" pitchFamily="34" charset="-120"/>
               </a:rPr>
-              <a:t>2. OVERPOPULATION: CONSEQUENCES</a:t>
+              <a:t>3. OPTIMUM</a:t>
             </a:r>
             <a:endParaRPr lang="en-US" sz="1400" dirty="0"/>
+          </a:p>
+        </p:txBody>
+      </p:sp>
+      <p:sp>
+        <p:nvSpPr>
+          <p:cNvPr id="3" name="Text 1"/>
+          <p:cNvSpPr/>
+          <p:nvPr/>
+        </p:nvSpPr>
+        <p:spPr>
+          <a:xfrm>
+            <a:off x="457200" y="1005840"/>
+            <a:ext cx="11277295" cy="731520"/>
+          </a:xfrm>
+          <a:prstGeom prst="rect">
+            <a:avLst/>
+          </a:prstGeom>
+          <a:noFill/>
+          <a:ln/>
+        </p:spPr>
+        <p:txBody>
+          <a:bodyPr wrap="square" lIns="0" tIns="0" rIns="0" bIns="0" rtlCol="0" anchor="ctr"/>
+          <a:lstStyle/>
+          <a:p>
+            <a:pPr algn="ctr" indent="0" marL="0">
+              <a:buNone/>
+            </a:pPr>
+            <a:r>
+              <a:rPr lang="en-US" sz="3600" b="1" dirty="0">
+                <a:solidFill>
+                  <a:srgbClr val="990011"/>
+                </a:solidFill>
+                <a:latin typeface="Times New Roman" pitchFamily="34" charset="0"/>
+                <a:ea typeface="Times New Roman" pitchFamily="34" charset="-122"/>
+                <a:cs typeface="Times New Roman" pitchFamily="34" charset="-120"/>
+              </a:rPr>
+              <a:t>Activity 3</a:t>
+            </a:r>
+            <a:endParaRPr lang="en-US" sz="3600" dirty="0"/>
           </a:p>
         </p:txBody>
       </p:sp>
       <p:pic>
         <p:nvPicPr>
-          <p:cNvPr id="3" name="Image 0" descr="/home/claude/f4/img/minesec_sheet.png">    </p:cNvPr>
+          <p:cNvPr id="4" name="Image 0" descr="/home/claude/f4/img/v2/optimum_big.png">    </p:cNvPr>
           <p:cNvPicPr>
             <a:picLocks noChangeAspect="1"/>
           </p:cNvPicPr>
@@ -10771,8 +11547,8 @@
         </p:blipFill>
         <p:spPr>
           <a:xfrm>
-            <a:off x="0" y="658368"/>
-            <a:ext cx="5120640" cy="5833872"/>
+            <a:off x="1215564" y="1783080"/>
+            <a:ext cx="9760567" cy="4270248"/>
           </a:xfrm>
           <a:prstGeom prst="rect">
             <a:avLst/>
@@ -10781,14 +11557,14 @@
       </p:pic>
       <p:sp>
         <p:nvSpPr>
-          <p:cNvPr id="4" name="Text 1"/>
+          <p:cNvPr id="5" name="Text 2"/>
           <p:cNvSpPr/>
           <p:nvPr/>
         </p:nvSpPr>
         <p:spPr>
           <a:xfrm>
-            <a:off x="5349240" y="1005840"/>
-            <a:ext cx="6522415" cy="731520"/>
+            <a:off x="457200" y="6089904"/>
+            <a:ext cx="11277295" cy="347472"/>
           </a:xfrm>
           <a:prstGeom prst="rect">
             <a:avLst/>
@@ -10797,68 +11573,24 @@
           <a:ln/>
         </p:spPr>
         <p:txBody>
-          <a:bodyPr wrap="square" lIns="0" tIns="0" rIns="0" bIns="0" rtlCol="0" anchor="ctr">
-            <a:normAutofit/>
-          </a:bodyPr>
+          <a:bodyPr wrap="square" lIns="0" tIns="0" rIns="0" bIns="0" rtlCol="0" anchor="ctr"/>
           <a:lstStyle/>
           <a:p>
             <a:pPr algn="ctr" indent="0" marL="0">
               <a:buNone/>
             </a:pPr>
             <a:r>
-              <a:rPr lang="en-US" sz="3600" b="1" dirty="0">
-                <a:solidFill>
-                  <a:srgbClr val="990011"/>
+              <a:rPr lang="en-US" sz="1800" i="1" dirty="0">
+                <a:solidFill>
+                  <a:srgbClr val="555555"/>
                 </a:solidFill>
                 <a:latin typeface="Times New Roman" pitchFamily="34" charset="0"/>
                 <a:ea typeface="Times New Roman" pitchFamily="34" charset="-122"/>
                 <a:cs typeface="Times New Roman" pitchFamily="34" charset="-120"/>
               </a:rPr>
-              <a:t>Activity 3: Question</a:t>
-            </a:r>
-            <a:endParaRPr lang="en-US" sz="3600" dirty="0"/>
-          </a:p>
-        </p:txBody>
-      </p:sp>
-      <p:sp>
-        <p:nvSpPr>
-          <p:cNvPr id="5" name="Text 2"/>
-          <p:cNvSpPr/>
-          <p:nvPr/>
-        </p:nvSpPr>
-        <p:spPr>
-          <a:xfrm>
-            <a:off x="5349240" y="1783080"/>
-            <a:ext cx="6522415" cy="4663440"/>
-          </a:xfrm>
-          <a:prstGeom prst="rect">
-            <a:avLst/>
-          </a:prstGeom>
-          <a:noFill/>
-          <a:ln/>
-        </p:spPr>
-        <p:txBody>
-          <a:bodyPr wrap="square" lIns="0" tIns="0" rIns="0" bIns="0" rtlCol="0" anchor="t"/>
-          <a:lstStyle/>
-          <a:p>
-            <a:pPr algn="l" indent="0" marL="0">
-              <a:spcAft>
-                <a:spcPts val="800"/>
-              </a:spcAft>
-              <a:buNone/>
-            </a:pPr>
-            <a:r>
-              <a:rPr lang="en-US" sz="4000" dirty="0">
-                <a:solidFill>
-                  <a:srgbClr val="111111"/>
-                </a:solidFill>
-                <a:latin typeface="Times New Roman" pitchFamily="34" charset="0"/>
-                <a:ea typeface="Times New Roman" pitchFamily="34" charset="-122"/>
-                <a:cs typeface="Times New Roman" pitchFamily="34" charset="-120"/>
-              </a:rPr>
-              <a:t>How can overpopulation damage the environment?</a:t>
-            </a:r>
-            <a:endParaRPr lang="en-US" sz="4000" dirty="0"/>
+              <a:t>The optimum population.</a:t>
+            </a:r>
+            <a:endParaRPr lang="en-US" sz="1800" dirty="0"/>
           </a:p>
         </p:txBody>
       </p:sp>
@@ -10968,7 +11700,7 @@
                 <a:ea typeface="Calibri" pitchFamily="34" charset="-122"/>
                 <a:cs typeface="Calibri" pitchFamily="34" charset="-120"/>
               </a:rPr>
-              <a:t>2. OVERPOPULATION: CONSEQUENCES</a:t>
+              <a:t>3. OPTIMUM</a:t>
             </a:r>
             <a:endParaRPr lang="en-US" sz="1400" dirty="0"/>
           </a:p>
@@ -11033,7 +11765,7 @@
                 <a:ea typeface="Times New Roman" pitchFamily="34" charset="-122"/>
                 <a:cs typeface="Times New Roman" pitchFamily="34" charset="-120"/>
               </a:rPr>
-              <a:t>Activity 3: Answer</a:t>
+              <a:t>Activity 3: Question</a:t>
             </a:r>
             <a:endParaRPr lang="en-US" sz="3600" dirty="0"/>
           </a:p>
@@ -11075,7 +11807,7 @@
                 <a:ea typeface="Times New Roman" pitchFamily="34" charset="-122"/>
                 <a:cs typeface="Times New Roman" pitchFamily="34" charset="-120"/>
               </a:rPr>
-              <a:t>Overgrazing, deforestation and soil erosion.</a:t>
+              <a:t>At which point is output per person highest?</a:t>
             </a:r>
             <a:endParaRPr lang="en-US" sz="4000" dirty="0"/>
           </a:p>
@@ -11187,54 +11919,15 @@
                 <a:ea typeface="Calibri" pitchFamily="34" charset="-122"/>
                 <a:cs typeface="Calibri" pitchFamily="34" charset="-120"/>
               </a:rPr>
-              <a:t>3. UNDERPOPULATION</a:t>
+              <a:t>3. OPTIMUM</a:t>
             </a:r>
             <a:endParaRPr lang="en-US" sz="1400" dirty="0"/>
-          </a:p>
-        </p:txBody>
-      </p:sp>
-      <p:sp>
-        <p:nvSpPr>
-          <p:cNvPr id="3" name="Text 1"/>
-          <p:cNvSpPr/>
-          <p:nvPr/>
-        </p:nvSpPr>
-        <p:spPr>
-          <a:xfrm>
-            <a:off x="457200" y="1005840"/>
-            <a:ext cx="11277295" cy="731520"/>
-          </a:xfrm>
-          <a:prstGeom prst="rect">
-            <a:avLst/>
-          </a:prstGeom>
-          <a:noFill/>
-          <a:ln/>
-        </p:spPr>
-        <p:txBody>
-          <a:bodyPr wrap="square" lIns="0" tIns="0" rIns="0" bIns="0" rtlCol="0" anchor="ctr"/>
-          <a:lstStyle/>
-          <a:p>
-            <a:pPr algn="ctr" indent="0" marL="0">
-              <a:buNone/>
-            </a:pPr>
-            <a:r>
-              <a:rPr lang="en-US" sz="3600" b="1" dirty="0">
-                <a:solidFill>
-                  <a:srgbClr val="990011"/>
-                </a:solidFill>
-                <a:latin typeface="Times New Roman" pitchFamily="34" charset="0"/>
-                <a:ea typeface="Times New Roman" pitchFamily="34" charset="-122"/>
-                <a:cs typeface="Times New Roman" pitchFamily="34" charset="-120"/>
-              </a:rPr>
-              <a:t>Activity 4</a:t>
-            </a:r>
-            <a:endParaRPr lang="en-US" sz="3600" dirty="0"/>
           </a:p>
         </p:txBody>
       </p:sp>
       <p:pic>
         <p:nvPicPr>
-          <p:cNvPr id="4" name="Image 0" descr="/home/claude/f4/img/v2/usa_bigfarm.jpg">    </p:cNvPr>
+          <p:cNvPr id="3" name="Image 0" descr="/home/claude/f4/img/minesec_sheet.png">    </p:cNvPr>
           <p:cNvPicPr>
             <a:picLocks noChangeAspect="1"/>
           </p:cNvPicPr>
@@ -11248,8 +11941,8 @@
         </p:blipFill>
         <p:spPr>
           <a:xfrm>
-            <a:off x="2181454" y="1783080"/>
-            <a:ext cx="7828788" cy="4270248"/>
+            <a:off x="0" y="658368"/>
+            <a:ext cx="5120640" cy="5833872"/>
           </a:xfrm>
           <a:prstGeom prst="rect">
             <a:avLst/>
@@ -11258,14 +11951,14 @@
       </p:pic>
       <p:sp>
         <p:nvSpPr>
-          <p:cNvPr id="5" name="Text 2"/>
+          <p:cNvPr id="4" name="Text 1"/>
           <p:cNvSpPr/>
           <p:nvPr/>
         </p:nvSpPr>
         <p:spPr>
           <a:xfrm>
-            <a:off x="457200" y="6089904"/>
-            <a:ext cx="11277295" cy="347472"/>
+            <a:off x="5349240" y="1005840"/>
+            <a:ext cx="6522415" cy="731520"/>
           </a:xfrm>
           <a:prstGeom prst="rect">
             <a:avLst/>
@@ -11274,24 +11967,68 @@
           <a:ln/>
         </p:spPr>
         <p:txBody>
-          <a:bodyPr wrap="square" lIns="0" tIns="0" rIns="0" bIns="0" rtlCol="0" anchor="ctr"/>
+          <a:bodyPr wrap="square" lIns="0" tIns="0" rIns="0" bIns="0" rtlCol="0" anchor="ctr">
+            <a:normAutofit/>
+          </a:bodyPr>
           <a:lstStyle/>
           <a:p>
             <a:pPr algn="ctr" indent="0" marL="0">
               <a:buNone/>
             </a:pPr>
             <a:r>
-              <a:rPr lang="en-US" sz="1800" i="1" dirty="0">
-                <a:solidFill>
-                  <a:srgbClr val="555555"/>
+              <a:rPr lang="en-US" sz="3600" b="1" dirty="0">
+                <a:solidFill>
+                  <a:srgbClr val="990011"/>
                 </a:solidFill>
                 <a:latin typeface="Times New Roman" pitchFamily="34" charset="0"/>
                 <a:ea typeface="Times New Roman" pitchFamily="34" charset="-122"/>
                 <a:cs typeface="Times New Roman" pitchFamily="34" charset="-120"/>
               </a:rPr>
-              <a:t>Large wheat fields in New Zealand.</a:t>
-            </a:r>
-            <a:endParaRPr lang="en-US" sz="1800" dirty="0"/>
+              <a:t>Activity 3: Answer</a:t>
+            </a:r>
+            <a:endParaRPr lang="en-US" sz="3600" dirty="0"/>
+          </a:p>
+        </p:txBody>
+      </p:sp>
+      <p:sp>
+        <p:nvSpPr>
+          <p:cNvPr id="5" name="Text 2"/>
+          <p:cNvSpPr/>
+          <p:nvPr/>
+        </p:nvSpPr>
+        <p:spPr>
+          <a:xfrm>
+            <a:off x="5349240" y="1783080"/>
+            <a:ext cx="6522415" cy="4663440"/>
+          </a:xfrm>
+          <a:prstGeom prst="rect">
+            <a:avLst/>
+          </a:prstGeom>
+          <a:noFill/>
+          <a:ln/>
+        </p:spPr>
+        <p:txBody>
+          <a:bodyPr wrap="square" lIns="0" tIns="0" rIns="0" bIns="0" rtlCol="0" anchor="t"/>
+          <a:lstStyle/>
+          <a:p>
+            <a:pPr algn="l" indent="0" marL="0">
+              <a:spcAft>
+                <a:spcPts val="800"/>
+              </a:spcAft>
+              <a:buNone/>
+            </a:pPr>
+            <a:r>
+              <a:rPr lang="en-US" sz="4000" dirty="0">
+                <a:solidFill>
+                  <a:srgbClr val="111111"/>
+                </a:solidFill>
+                <a:latin typeface="Times New Roman" pitchFamily="34" charset="0"/>
+                <a:ea typeface="Times New Roman" pitchFamily="34" charset="-122"/>
+                <a:cs typeface="Times New Roman" pitchFamily="34" charset="-120"/>
+              </a:rPr>
+              <a:t>At the optimum population.</a:t>
+            </a:r>
+            <a:endParaRPr lang="en-US" sz="4000" dirty="0"/>
           </a:p>
         </p:txBody>
       </p:sp>
@@ -11401,15 +12138,54 @@
                 <a:ea typeface="Calibri" pitchFamily="34" charset="-122"/>
                 <a:cs typeface="Calibri" pitchFamily="34" charset="-120"/>
               </a:rPr>
-              <a:t>3. UNDERPOPULATION</a:t>
+              <a:t>4. CARRYING CAPACITY</a:t>
             </a:r>
             <a:endParaRPr lang="en-US" sz="1400" dirty="0"/>
+          </a:p>
+        </p:txBody>
+      </p:sp>
+      <p:sp>
+        <p:nvSpPr>
+          <p:cNvPr id="3" name="Text 1"/>
+          <p:cNvSpPr/>
+          <p:nvPr/>
+        </p:nvSpPr>
+        <p:spPr>
+          <a:xfrm>
+            <a:off x="457200" y="1005840"/>
+            <a:ext cx="11277295" cy="731520"/>
+          </a:xfrm>
+          <a:prstGeom prst="rect">
+            <a:avLst/>
+          </a:prstGeom>
+          <a:noFill/>
+          <a:ln/>
+        </p:spPr>
+        <p:txBody>
+          <a:bodyPr wrap="square" lIns="0" tIns="0" rIns="0" bIns="0" rtlCol="0" anchor="ctr"/>
+          <a:lstStyle/>
+          <a:p>
+            <a:pPr algn="ctr" indent="0" marL="0">
+              <a:buNone/>
+            </a:pPr>
+            <a:r>
+              <a:rPr lang="en-US" sz="3600" b="1" dirty="0">
+                <a:solidFill>
+                  <a:srgbClr val="990011"/>
+                </a:solidFill>
+                <a:latin typeface="Times New Roman" pitchFamily="34" charset="0"/>
+                <a:ea typeface="Times New Roman" pitchFamily="34" charset="-122"/>
+                <a:cs typeface="Times New Roman" pitchFamily="34" charset="-120"/>
+              </a:rPr>
+              <a:t>Activity 4</a:t>
+            </a:r>
+            <a:endParaRPr lang="en-US" sz="3600" dirty="0"/>
           </a:p>
         </p:txBody>
       </p:sp>
       <p:pic>
         <p:nvPicPr>
-          <p:cNvPr id="3" name="Image 0" descr="/home/claude/f4/img/minesec_sheet.png">    </p:cNvPr>
+          <p:cNvPr id="4" name="Image 0" descr="/home/claude/f4/img/v2/f2t_pivot.jpg">    </p:cNvPr>
           <p:cNvPicPr>
             <a:picLocks noChangeAspect="1"/>
           </p:cNvPicPr>
@@ -11423,8 +12199,8 @@
         </p:blipFill>
         <p:spPr>
           <a:xfrm>
-            <a:off x="0" y="658368"/>
-            <a:ext cx="5120640" cy="5833872"/>
+            <a:off x="2246610" y="1783080"/>
+            <a:ext cx="7698475" cy="4270248"/>
           </a:xfrm>
           <a:prstGeom prst="rect">
             <a:avLst/>
@@ -11433,14 +12209,14 @@
       </p:pic>
       <p:sp>
         <p:nvSpPr>
-          <p:cNvPr id="4" name="Text 1"/>
+          <p:cNvPr id="5" name="Text 2"/>
           <p:cNvSpPr/>
           <p:nvPr/>
         </p:nvSpPr>
         <p:spPr>
           <a:xfrm>
-            <a:off x="5349240" y="1005840"/>
-            <a:ext cx="6522415" cy="731520"/>
+            <a:off x="457200" y="6089904"/>
+            <a:ext cx="11277295" cy="347472"/>
           </a:xfrm>
           <a:prstGeom prst="rect">
             <a:avLst/>
@@ -11449,68 +12225,24 @@
           <a:ln/>
         </p:spPr>
         <p:txBody>
-          <a:bodyPr wrap="square" lIns="0" tIns="0" rIns="0" bIns="0" rtlCol="0" anchor="ctr">
-            <a:normAutofit/>
-          </a:bodyPr>
+          <a:bodyPr wrap="square" lIns="0" tIns="0" rIns="0" bIns="0" rtlCol="0" anchor="ctr"/>
           <a:lstStyle/>
           <a:p>
             <a:pPr algn="ctr" indent="0" marL="0">
               <a:buNone/>
             </a:pPr>
             <a:r>
-              <a:rPr lang="en-US" sz="3600" b="1" dirty="0">
-                <a:solidFill>
-                  <a:srgbClr val="990011"/>
+              <a:rPr lang="en-US" sz="1800" i="1" dirty="0">
+                <a:solidFill>
+                  <a:srgbClr val="555555"/>
                 </a:solidFill>
                 <a:latin typeface="Times New Roman" pitchFamily="34" charset="0"/>
                 <a:ea typeface="Times New Roman" pitchFamily="34" charset="-122"/>
                 <a:cs typeface="Times New Roman" pitchFamily="34" charset="-120"/>
               </a:rPr>
-              <a:t>Activity 4: Question</a:t>
-            </a:r>
-            <a:endParaRPr lang="en-US" sz="3600" dirty="0"/>
-          </a:p>
-        </p:txBody>
-      </p:sp>
-      <p:sp>
-        <p:nvSpPr>
-          <p:cNvPr id="5" name="Text 2"/>
-          <p:cNvSpPr/>
-          <p:nvPr/>
-        </p:nvSpPr>
-        <p:spPr>
-          <a:xfrm>
-            <a:off x="5349240" y="1783080"/>
-            <a:ext cx="6522415" cy="4663440"/>
-          </a:xfrm>
-          <a:prstGeom prst="rect">
-            <a:avLst/>
-          </a:prstGeom>
-          <a:noFill/>
-          <a:ln/>
-        </p:spPr>
-        <p:txBody>
-          <a:bodyPr wrap="square" lIns="0" tIns="0" rIns="0" bIns="0" rtlCol="0" anchor="t"/>
-          <a:lstStyle/>
-          <a:p>
-            <a:pPr algn="l" indent="0" marL="0">
-              <a:spcAft>
-                <a:spcPts val="800"/>
-              </a:spcAft>
-              <a:buNone/>
-            </a:pPr>
-            <a:r>
-              <a:rPr lang="en-US" sz="4000" dirty="0">
-                <a:solidFill>
-                  <a:srgbClr val="111111"/>
-                </a:solidFill>
-                <a:latin typeface="Times New Roman" pitchFamily="34" charset="0"/>
-                <a:ea typeface="Times New Roman" pitchFamily="34" charset="-122"/>
-                <a:cs typeface="Times New Roman" pitchFamily="34" charset="-120"/>
-              </a:rPr>
-              <a:t>Why do some countries have too few people?</a:t>
-            </a:r>
-            <a:endParaRPr lang="en-US" sz="4000" dirty="0"/>
+              <a:t>Irrigation with a pivot.</a:t>
+            </a:r>
+            <a:endParaRPr lang="en-US" sz="1800" dirty="0"/>
           </a:p>
         </p:txBody>
       </p:sp>
@@ -12191,7 +12923,7 @@
                           <a:ea typeface="Calibri" pitchFamily="34" charset="-122"/>
                           <a:cs typeface="Calibri" pitchFamily="34" charset="-120"/>
                         </a:rPr>
-                        <a:t>Overpopulation, underpopulation, optimum population, output per person, indicators.</a:t>
+                        <a:t>Overpopulation, underpopulation, optimum population, carrying capacity, indicators, technology.</a:t>
                       </a:r>
                       <a:endParaRPr lang="en-US" sz="1700" dirty="0">
                         <a:latin typeface="Calibri" charset="0"/>
@@ -12329,7 +13061,7 @@
                           <a:ea typeface="Calibri" pitchFamily="34" charset="-122"/>
                           <a:cs typeface="Calibri" pitchFamily="34" charset="-120"/>
                         </a:rPr>
-                        <a:t>Meaning and situations; indicators and measurement; causes, consequences and solutions.</a:t>
+                        <a:t>Meaning, indicators, causes, consequences and solutions of overpopulation, underpopulation and optimum population; carrying capacity of the land and its factors.</a:t>
                       </a:r>
                       <a:endParaRPr lang="en-US" sz="1700" dirty="0">
                         <a:latin typeface="Calibri" charset="0"/>
@@ -12467,7 +13199,7 @@
                           <a:ea typeface="Calibri" pitchFamily="34" charset="-122"/>
                           <a:cs typeface="Calibri" pitchFamily="34" charset="-120"/>
                         </a:rPr>
-                        <a:t>Learners are able to identify over-, under- and optimum population and suggest solutions.</a:t>
+                        <a:t>Learners are able to recognise the signs of overpopulation and underpopulation and propose solutions.</a:t>
                       </a:r>
                       <a:endParaRPr lang="en-US" sz="1700" dirty="0">
                         <a:latin typeface="Calibri" charset="0"/>
@@ -12629,7 +13361,7 @@
                 <a:ea typeface="Calibri" pitchFamily="34" charset="-122"/>
                 <a:cs typeface="Calibri" pitchFamily="34" charset="-120"/>
               </a:rPr>
-              <a:t>3. UNDERPOPULATION</a:t>
+              <a:t>4. CARRYING CAPACITY</a:t>
             </a:r>
             <a:endParaRPr lang="en-US" sz="1400" dirty="0"/>
           </a:p>
@@ -12694,7 +13426,7 @@
                 <a:ea typeface="Times New Roman" pitchFamily="34" charset="-122"/>
                 <a:cs typeface="Times New Roman" pitchFamily="34" charset="-120"/>
               </a:rPr>
-              <a:t>Activity 4: Answer</a:t>
+              <a:t>Activity 4: Question</a:t>
             </a:r>
             <a:endParaRPr lang="en-US" sz="3600" dirty="0"/>
           </a:p>
@@ -12736,7 +13468,7 @@
                 <a:ea typeface="Times New Roman" pitchFamily="34" charset="-122"/>
                 <a:cs typeface="Times New Roman" pitchFamily="34" charset="-120"/>
               </a:rPr>
-              <a:t>Rich resources but not enough workers to use them.</a:t>
+              <a:t>How does irrigation change the carrying capacity?</a:t>
             </a:r>
             <a:endParaRPr lang="en-US" sz="4000" dirty="0"/>
           </a:p>
@@ -12848,54 +13580,15 @@
                 <a:ea typeface="Calibri" pitchFamily="34" charset="-122"/>
                 <a:cs typeface="Calibri" pitchFamily="34" charset="-120"/>
               </a:rPr>
-              <a:t>4. SOLUTIONS</a:t>
+              <a:t>4. CARRYING CAPACITY</a:t>
             </a:r>
             <a:endParaRPr lang="en-US" sz="1400" dirty="0"/>
-          </a:p>
-        </p:txBody>
-      </p:sp>
-      <p:sp>
-        <p:nvSpPr>
-          <p:cNvPr id="3" name="Text 1"/>
-          <p:cNvSpPr/>
-          <p:nvPr/>
-        </p:nvSpPr>
-        <p:spPr>
-          <a:xfrm>
-            <a:off x="457200" y="1005840"/>
-            <a:ext cx="11277295" cy="731520"/>
-          </a:xfrm>
-          <a:prstGeom prst="rect">
-            <a:avLst/>
-          </a:prstGeom>
-          <a:noFill/>
-          <a:ln/>
-        </p:spPr>
-        <p:txBody>
-          <a:bodyPr wrap="square" lIns="0" tIns="0" rIns="0" bIns="0" rtlCol="0" anchor="ctr"/>
-          <a:lstStyle/>
-          <a:p>
-            <a:pPr algn="ctr" indent="0" marL="0">
-              <a:buNone/>
-            </a:pPr>
-            <a:r>
-              <a:rPr lang="en-US" sz="3600" b="1" dirty="0">
-                <a:solidFill>
-                  <a:srgbClr val="990011"/>
-                </a:solidFill>
-                <a:latin typeface="Times New Roman" pitchFamily="34" charset="0"/>
-                <a:ea typeface="Times New Roman" pitchFamily="34" charset="-122"/>
-                <a:cs typeface="Times New Roman" pitchFamily="34" charset="-120"/>
-              </a:rPr>
-              <a:t>Activity 5</a:t>
-            </a:r>
-            <a:endParaRPr lang="en-US" sz="3600" dirty="0"/>
           </a:p>
         </p:txBody>
       </p:sp>
       <p:pic>
         <p:nvPicPr>
-          <p:cNvPr id="4" name="Image 0" descr="/home/claude/f4/img/v2/f2t_tree_planting.jpg">    </p:cNvPr>
+          <p:cNvPr id="3" name="Image 0" descr="/home/claude/f4/img/minesec_sheet.png">    </p:cNvPr>
           <p:cNvPicPr>
             <a:picLocks noChangeAspect="1"/>
           </p:cNvPicPr>
@@ -12909,8 +13602,8 @@
         </p:blipFill>
         <p:spPr>
           <a:xfrm>
-            <a:off x="2246610" y="1783080"/>
-            <a:ext cx="7698475" cy="4270248"/>
+            <a:off x="0" y="658368"/>
+            <a:ext cx="5120640" cy="5833872"/>
           </a:xfrm>
           <a:prstGeom prst="rect">
             <a:avLst/>
@@ -12919,14 +13612,14 @@
       </p:pic>
       <p:sp>
         <p:nvSpPr>
-          <p:cNvPr id="5" name="Text 2"/>
+          <p:cNvPr id="4" name="Text 1"/>
           <p:cNvSpPr/>
           <p:nvPr/>
         </p:nvSpPr>
         <p:spPr>
           <a:xfrm>
-            <a:off x="457200" y="6089904"/>
-            <a:ext cx="11277295" cy="347472"/>
+            <a:off x="5349240" y="1005840"/>
+            <a:ext cx="6522415" cy="731520"/>
           </a:xfrm>
           <a:prstGeom prst="rect">
             <a:avLst/>
@@ -12935,24 +13628,68 @@
           <a:ln/>
         </p:spPr>
         <p:txBody>
-          <a:bodyPr wrap="square" lIns="0" tIns="0" rIns="0" bIns="0" rtlCol="0" anchor="ctr"/>
+          <a:bodyPr wrap="square" lIns="0" tIns="0" rIns="0" bIns="0" rtlCol="0" anchor="ctr">
+            <a:normAutofit/>
+          </a:bodyPr>
           <a:lstStyle/>
           <a:p>
             <a:pPr algn="ctr" indent="0" marL="0">
               <a:buNone/>
             </a:pPr>
             <a:r>
-              <a:rPr lang="en-US" sz="1800" i="1" dirty="0">
-                <a:solidFill>
-                  <a:srgbClr val="555555"/>
+              <a:rPr lang="en-US" sz="3600" b="1" dirty="0">
+                <a:solidFill>
+                  <a:srgbClr val="990011"/>
                 </a:solidFill>
                 <a:latin typeface="Times New Roman" pitchFamily="34" charset="0"/>
                 <a:ea typeface="Times New Roman" pitchFamily="34" charset="-122"/>
                 <a:cs typeface="Times New Roman" pitchFamily="34" charset="-120"/>
               </a:rPr>
-              <a:t>Planting trees.</a:t>
-            </a:r>
-            <a:endParaRPr lang="en-US" sz="1800" dirty="0"/>
+              <a:t>Activity 4: Answer</a:t>
+            </a:r>
+            <a:endParaRPr lang="en-US" sz="3600" dirty="0"/>
+          </a:p>
+        </p:txBody>
+      </p:sp>
+      <p:sp>
+        <p:nvSpPr>
+          <p:cNvPr id="5" name="Text 2"/>
+          <p:cNvSpPr/>
+          <p:nvPr/>
+        </p:nvSpPr>
+        <p:spPr>
+          <a:xfrm>
+            <a:off x="5349240" y="1783080"/>
+            <a:ext cx="6522415" cy="4663440"/>
+          </a:xfrm>
+          <a:prstGeom prst="rect">
+            <a:avLst/>
+          </a:prstGeom>
+          <a:noFill/>
+          <a:ln/>
+        </p:spPr>
+        <p:txBody>
+          <a:bodyPr wrap="square" lIns="0" tIns="0" rIns="0" bIns="0" rtlCol="0" anchor="t"/>
+          <a:lstStyle/>
+          <a:p>
+            <a:pPr algn="l" indent="0" marL="0">
+              <a:spcAft>
+                <a:spcPts val="800"/>
+              </a:spcAft>
+              <a:buNone/>
+            </a:pPr>
+            <a:r>
+              <a:rPr lang="en-US" sz="4000" dirty="0">
+                <a:solidFill>
+                  <a:srgbClr val="111111"/>
+                </a:solidFill>
+                <a:latin typeface="Times New Roman" pitchFamily="34" charset="0"/>
+                <a:ea typeface="Times New Roman" pitchFamily="34" charset="-122"/>
+                <a:cs typeface="Times New Roman" pitchFamily="34" charset="-120"/>
+              </a:rPr>
+              <a:t>It raises it, because more food can be produced on the same land.</a:t>
+            </a:r>
+            <a:endParaRPr lang="en-US" sz="4000" dirty="0"/>
           </a:p>
         </p:txBody>
       </p:sp>
@@ -13062,15 +13799,54 @@
                 <a:ea typeface="Calibri" pitchFamily="34" charset="-122"/>
                 <a:cs typeface="Calibri" pitchFamily="34" charset="-120"/>
               </a:rPr>
-              <a:t>4. SOLUTIONS</a:t>
+              <a:t>4. CARRYING CAPACITY</a:t>
             </a:r>
             <a:endParaRPr lang="en-US" sz="1400" dirty="0"/>
+          </a:p>
+        </p:txBody>
+      </p:sp>
+      <p:sp>
+        <p:nvSpPr>
+          <p:cNvPr id="3" name="Text 1"/>
+          <p:cNvSpPr/>
+          <p:nvPr/>
+        </p:nvSpPr>
+        <p:spPr>
+          <a:xfrm>
+            <a:off x="457200" y="1005840"/>
+            <a:ext cx="11277295" cy="731520"/>
+          </a:xfrm>
+          <a:prstGeom prst="rect">
+            <a:avLst/>
+          </a:prstGeom>
+          <a:noFill/>
+          <a:ln/>
+        </p:spPr>
+        <p:txBody>
+          <a:bodyPr wrap="square" lIns="0" tIns="0" rIns="0" bIns="0" rtlCol="0" anchor="ctr"/>
+          <a:lstStyle/>
+          <a:p>
+            <a:pPr algn="ctr" indent="0" marL="0">
+              <a:buNone/>
+            </a:pPr>
+            <a:r>
+              <a:rPr lang="en-US" sz="3600" b="1" dirty="0">
+                <a:solidFill>
+                  <a:srgbClr val="990011"/>
+                </a:solidFill>
+                <a:latin typeface="Times New Roman" pitchFamily="34" charset="0"/>
+                <a:ea typeface="Times New Roman" pitchFamily="34" charset="-122"/>
+                <a:cs typeface="Times New Roman" pitchFamily="34" charset="-120"/>
+              </a:rPr>
+              <a:t>Activity 5</a:t>
+            </a:r>
+            <a:endParaRPr lang="en-US" sz="3600" dirty="0"/>
           </a:p>
         </p:txBody>
       </p:sp>
       <p:pic>
         <p:nvPicPr>
-          <p:cNvPr id="3" name="Image 0" descr="/home/claude/f4/img/minesec_sheet.png">    </p:cNvPr>
+          <p:cNvPr id="4" name="Image 0" descr="/home/claude/f4/img/v2/f2t_cracked_soil.jpg">    </p:cNvPr>
           <p:cNvPicPr>
             <a:picLocks noChangeAspect="1"/>
           </p:cNvPicPr>
@@ -13084,8 +13860,8 @@
         </p:blipFill>
         <p:spPr>
           <a:xfrm>
-            <a:off x="0" y="658368"/>
-            <a:ext cx="5120640" cy="5833872"/>
+            <a:off x="2246610" y="1783080"/>
+            <a:ext cx="7698475" cy="4270248"/>
           </a:xfrm>
           <a:prstGeom prst="rect">
             <a:avLst/>
@@ -13094,14 +13870,14 @@
       </p:pic>
       <p:sp>
         <p:nvSpPr>
-          <p:cNvPr id="4" name="Text 1"/>
+          <p:cNvPr id="5" name="Text 2"/>
           <p:cNvSpPr/>
           <p:nvPr/>
         </p:nvSpPr>
         <p:spPr>
           <a:xfrm>
-            <a:off x="5349240" y="1005840"/>
-            <a:ext cx="6522415" cy="731520"/>
+            <a:off x="457200" y="6089904"/>
+            <a:ext cx="11277295" cy="347472"/>
           </a:xfrm>
           <a:prstGeom prst="rect">
             <a:avLst/>
@@ -13110,68 +13886,24 @@
           <a:ln/>
         </p:spPr>
         <p:txBody>
-          <a:bodyPr wrap="square" lIns="0" tIns="0" rIns="0" bIns="0" rtlCol="0" anchor="ctr">
-            <a:normAutofit/>
-          </a:bodyPr>
+          <a:bodyPr wrap="square" lIns="0" tIns="0" rIns="0" bIns="0" rtlCol="0" anchor="ctr"/>
           <a:lstStyle/>
           <a:p>
             <a:pPr algn="ctr" indent="0" marL="0">
               <a:buNone/>
             </a:pPr>
             <a:r>
-              <a:rPr lang="en-US" sz="3600" b="1" dirty="0">
-                <a:solidFill>
-                  <a:srgbClr val="990011"/>
+              <a:rPr lang="en-US" sz="1800" i="1" dirty="0">
+                <a:solidFill>
+                  <a:srgbClr val="555555"/>
                 </a:solidFill>
                 <a:latin typeface="Times New Roman" pitchFamily="34" charset="0"/>
                 <a:ea typeface="Times New Roman" pitchFamily="34" charset="-122"/>
                 <a:cs typeface="Times New Roman" pitchFamily="34" charset="-120"/>
               </a:rPr>
-              <a:t>Activity 5: Question</a:t>
-            </a:r>
-            <a:endParaRPr lang="en-US" sz="3600" dirty="0"/>
-          </a:p>
-        </p:txBody>
-      </p:sp>
-      <p:sp>
-        <p:nvSpPr>
-          <p:cNvPr id="5" name="Text 2"/>
-          <p:cNvSpPr/>
-          <p:nvPr/>
-        </p:nvSpPr>
-        <p:spPr>
-          <a:xfrm>
-            <a:off x="5349240" y="1783080"/>
-            <a:ext cx="6522415" cy="4663440"/>
-          </a:xfrm>
-          <a:prstGeom prst="rect">
-            <a:avLst/>
-          </a:prstGeom>
-          <a:noFill/>
-          <a:ln/>
-        </p:spPr>
-        <p:txBody>
-          <a:bodyPr wrap="square" lIns="0" tIns="0" rIns="0" bIns="0" rtlCol="0" anchor="t"/>
-          <a:lstStyle/>
-          <a:p>
-            <a:pPr algn="l" indent="0" marL="0">
-              <a:spcAft>
-                <a:spcPts val="800"/>
-              </a:spcAft>
-              <a:buNone/>
-            </a:pPr>
-            <a:r>
-              <a:rPr lang="en-US" sz="4000" dirty="0">
-                <a:solidFill>
-                  <a:srgbClr val="111111"/>
-                </a:solidFill>
-                <a:latin typeface="Times New Roman" pitchFamily="34" charset="0"/>
-                <a:ea typeface="Times New Roman" pitchFamily="34" charset="-122"/>
-                <a:cs typeface="Times New Roman" pitchFamily="34" charset="-120"/>
-              </a:rPr>
-              <a:t>Give two solutions to overpopulation.</a:t>
-            </a:r>
-            <a:endParaRPr lang="en-US" sz="4000" dirty="0"/>
+              <a:t>Cracked, degraded soil.</a:t>
+            </a:r>
+            <a:endParaRPr lang="en-US" sz="1800" dirty="0"/>
           </a:p>
         </p:txBody>
       </p:sp>
@@ -13281,7 +14013,7 @@
                 <a:ea typeface="Calibri" pitchFamily="34" charset="-122"/>
                 <a:cs typeface="Calibri" pitchFamily="34" charset="-120"/>
               </a:rPr>
-              <a:t>4. SOLUTIONS</a:t>
+              <a:t>4. CARRYING CAPACITY</a:t>
             </a:r>
             <a:endParaRPr lang="en-US" sz="1400" dirty="0"/>
           </a:p>
@@ -13346,7 +14078,7 @@
                 <a:ea typeface="Times New Roman" pitchFamily="34" charset="-122"/>
                 <a:cs typeface="Times New Roman" pitchFamily="34" charset="-120"/>
               </a:rPr>
-              <a:t>Activity 5: Answer</a:t>
+              <a:t>Activity 5: Question</a:t>
             </a:r>
             <a:endParaRPr lang="en-US" sz="3600" dirty="0"/>
           </a:p>
@@ -13388,7 +14120,7 @@
                 <a:ea typeface="Times New Roman" pitchFamily="34" charset="-122"/>
                 <a:cs typeface="Times New Roman" pitchFamily="34" charset="-120"/>
               </a:rPr>
-              <a:t>Family planning and better farming (also industry, migration, resettlement).</a:t>
+              <a:t>Give one sign that the carrying capacity is exceeded.</a:t>
             </a:r>
             <a:endParaRPr lang="en-US" sz="4000" dirty="0"/>
           </a:p>
@@ -13500,7 +14232,7 @@
                 <a:ea typeface="Calibri" pitchFamily="34" charset="-122"/>
                 <a:cs typeface="Calibri" pitchFamily="34" charset="-120"/>
               </a:rPr>
-              <a:t>BOARD SUMMARY</a:t>
+              <a:t>4. CARRYING CAPACITY</a:t>
             </a:r>
             <a:endParaRPr lang="en-US" sz="1400" dirty="0"/>
           </a:p>
@@ -13565,7 +14297,7 @@
                 <a:ea typeface="Times New Roman" pitchFamily="34" charset="-122"/>
                 <a:cs typeface="Times New Roman" pitchFamily="34" charset="-120"/>
               </a:rPr>
-              <a:t>Board Summary</a:t>
+              <a:t>Activity 5: Answer</a:t>
             </a:r>
             <a:endParaRPr lang="en-US" sz="3600" dirty="0"/>
           </a:p>
@@ -13599,7 +14331,7 @@
               <a:buNone/>
             </a:pPr>
             <a:r>
-              <a:rPr lang="en-US" sz="4000" b="1" dirty="0">
+              <a:rPr lang="en-US" sz="4000" dirty="0">
                 <a:solidFill>
                   <a:srgbClr val="111111"/>
                 </a:solidFill>
@@ -13607,47 +14339,7 @@
                 <a:ea typeface="Times New Roman" pitchFamily="34" charset="-122"/>
                 <a:cs typeface="Times New Roman" pitchFamily="34" charset="-120"/>
               </a:rPr>
-              <a:t>Topic: Population Growth and Resources</a:t>
-            </a:r>
-            <a:endParaRPr lang="en-US" sz="4000" dirty="0"/>
-          </a:p>
-          <a:p>
-            <a:pPr algn="l" indent="0" marL="0">
-              <a:spcAft>
-                <a:spcPts val="800"/>
-              </a:spcAft>
-              <a:buNone/>
-            </a:pPr>
-            <a:r>
-              <a:rPr lang="en-US" sz="4000" b="1" dirty="0">
-                <a:solidFill>
-                  <a:srgbClr val="111111"/>
-                </a:solidFill>
-                <a:latin typeface="Times New Roman" pitchFamily="34" charset="0"/>
-                <a:ea typeface="Times New Roman" pitchFamily="34" charset="-122"/>
-                <a:cs typeface="Times New Roman" pitchFamily="34" charset="-120"/>
-              </a:rPr>
-              <a:t>Sub-topic: Population and Resource Relationships</a:t>
-            </a:r>
-            <a:endParaRPr lang="en-US" sz="4000" dirty="0"/>
-          </a:p>
-          <a:p>
-            <a:pPr algn="l" indent="0" marL="0">
-              <a:spcAft>
-                <a:spcPts val="800"/>
-              </a:spcAft>
-              <a:buNone/>
-            </a:pPr>
-            <a:r>
-              <a:rPr lang="en-US" sz="4000" b="1" dirty="0">
-                <a:solidFill>
-                  <a:srgbClr val="990011"/>
-                </a:solidFill>
-                <a:latin typeface="Times New Roman" pitchFamily="34" charset="0"/>
-                <a:ea typeface="Times New Roman" pitchFamily="34" charset="-122"/>
-                <a:cs typeface="Times New Roman" pitchFamily="34" charset="-120"/>
-              </a:rPr>
-              <a:t>Lesson 17: Overpopulation, Underpopulation and Optimum Population</a:t>
+              <a:t>Falling water tables, soil erosion, deforestation or loss of biodiversity.</a:t>
             </a:r>
             <a:endParaRPr lang="en-US" sz="4000" dirty="0"/>
           </a:p>
@@ -13782,7 +14474,7 @@
         <p:spPr>
           <a:xfrm>
             <a:off x="0" y="658368"/>
-            <a:ext cx="3840480" cy="5833872"/>
+            <a:ext cx="5120640" cy="5833872"/>
           </a:xfrm>
           <a:prstGeom prst="rect">
             <a:avLst/>
@@ -13797,8 +14489,8 @@
         </p:nvSpPr>
         <p:spPr>
           <a:xfrm>
-            <a:off x="4069080" y="1005840"/>
-            <a:ext cx="7802575" cy="731520"/>
+            <a:off x="5349240" y="1005840"/>
+            <a:ext cx="6522415" cy="731520"/>
           </a:xfrm>
           <a:prstGeom prst="rect">
             <a:avLst/>
@@ -13824,7 +14516,7 @@
                 <a:ea typeface="Times New Roman" pitchFamily="34" charset="-122"/>
                 <a:cs typeface="Times New Roman" pitchFamily="34" charset="-120"/>
               </a:rPr>
-              <a:t>1. Meaning of the Concepts</a:t>
+              <a:t>Board Summary</a:t>
             </a:r>
             <a:endParaRPr lang="en-US" sz="3600" dirty="0"/>
           </a:p>
@@ -13838,8 +14530,8 @@
         </p:nvSpPr>
         <p:spPr>
           <a:xfrm>
-            <a:off x="4069080" y="1783080"/>
-            <a:ext cx="7802575" cy="4663440"/>
+            <a:off x="5349240" y="1783080"/>
+            <a:ext cx="6522415" cy="4663440"/>
           </a:xfrm>
           <a:prstGeom prst="rect">
             <a:avLst/>
@@ -13858,7 +14550,7 @@
               <a:buNone/>
             </a:pPr>
             <a:r>
-              <a:rPr lang="en-US" sz="4000" i="1" dirty="0">
+              <a:rPr lang="en-US" sz="3200" b="1" dirty="0">
                 <a:solidFill>
                   <a:srgbClr val="111111"/>
                 </a:solidFill>
@@ -13866,9 +14558,9 @@
                 <a:ea typeface="Times New Roman" pitchFamily="34" charset="-122"/>
                 <a:cs typeface="Times New Roman" pitchFamily="34" charset="-120"/>
               </a:rPr>
-              <a:t>The main concepts can be understood as follows:</a:t>
-            </a:r>
-            <a:endParaRPr lang="en-US" sz="4000" dirty="0"/>
+              <a:t>Topic: Population Growth and Resources</a:t>
+            </a:r>
+            <a:endParaRPr lang="en-US" sz="3200" dirty="0"/>
           </a:p>
           <a:p>
             <a:pPr algn="l" indent="0" marL="0">
@@ -13878,7 +14570,7 @@
               <a:buNone/>
             </a:pPr>
             <a:r>
-              <a:rPr lang="en-US" sz="4000" b="1" dirty="0">
+              <a:rPr lang="en-US" sz="3200" b="1" dirty="0">
                 <a:solidFill>
                   <a:srgbClr val="111111"/>
                 </a:solidFill>
@@ -13886,8 +14578,11 @@
                 <a:ea typeface="Times New Roman" pitchFamily="34" charset="-122"/>
                 <a:cs typeface="Times New Roman" pitchFamily="34" charset="-120"/>
               </a:rPr>
-              <a:t>Overpopulation: </a:t>
-            </a:r>
+              <a:t>Sub-topic: Population and Resource Relationships</a:t>
+            </a:r>
+            <a:endParaRPr lang="en-US" sz="3200" dirty="0"/>
+          </a:p>
+          <a:p>
             <a:pPr algn="l" indent="0" marL="0">
               <a:spcAft>
                 <a:spcPts val="800"/>
@@ -13895,17 +14590,17 @@
               <a:buNone/>
             </a:pPr>
             <a:r>
-              <a:rPr lang="en-US" sz="4000" dirty="0">
-                <a:solidFill>
-                  <a:srgbClr val="111111"/>
+              <a:rPr lang="en-US" sz="3200" b="1" dirty="0">
+                <a:solidFill>
+                  <a:srgbClr val="990011"/>
                 </a:solidFill>
                 <a:latin typeface="Times New Roman" pitchFamily="34" charset="0"/>
                 <a:ea typeface="Times New Roman" pitchFamily="34" charset="-122"/>
                 <a:cs typeface="Times New Roman" pitchFamily="34" charset="-120"/>
               </a:rPr>
-              <a:t>It is a situation where there are too many people for the resources and technology available, so living standards fall.</a:t>
-            </a:r>
-            <a:endParaRPr lang="en-US" sz="4000" dirty="0"/>
+              <a:t>Lesson 17: Overpopulation, Underpopulation and Optimum Population</a:t>
+            </a:r>
+            <a:endParaRPr lang="en-US" sz="3200" dirty="0"/>
           </a:p>
         </p:txBody>
       </p:sp>
@@ -14038,7 +14733,7 @@
         <p:spPr>
           <a:xfrm>
             <a:off x="0" y="658368"/>
-            <a:ext cx="5120640" cy="5833872"/>
+            <a:ext cx="3840480" cy="5833872"/>
           </a:xfrm>
           <a:prstGeom prst="rect">
             <a:avLst/>
@@ -14053,8 +14748,8 @@
         </p:nvSpPr>
         <p:spPr>
           <a:xfrm>
-            <a:off x="5349240" y="1005840"/>
-            <a:ext cx="6522415" cy="731520"/>
+            <a:off x="4069080" y="1005840"/>
+            <a:ext cx="7802575" cy="731520"/>
           </a:xfrm>
           <a:prstGeom prst="rect">
             <a:avLst/>
@@ -14080,7 +14775,7 @@
                 <a:ea typeface="Times New Roman" pitchFamily="34" charset="-122"/>
                 <a:cs typeface="Times New Roman" pitchFamily="34" charset="-120"/>
               </a:rPr>
-              <a:t>1. Meaning of the Concepts (continued)</a:t>
+              <a:t>DEFINITIONS</a:t>
             </a:r>
             <a:endParaRPr lang="en-US" sz="3600" dirty="0"/>
           </a:p>
@@ -14094,8 +14789,8 @@
         </p:nvSpPr>
         <p:spPr>
           <a:xfrm>
-            <a:off x="5349240" y="1783080"/>
-            <a:ext cx="6522415" cy="4663440"/>
+            <a:off x="4069080" y="1783080"/>
+            <a:ext cx="7802575" cy="4663440"/>
           </a:xfrm>
           <a:prstGeom prst="rect">
             <a:avLst/>
@@ -14114,7 +14809,7 @@
               <a:buNone/>
             </a:pPr>
             <a:r>
-              <a:rPr lang="en-US" sz="4000" b="1" dirty="0">
+              <a:rPr lang="en-US" sz="4000" i="1" dirty="0">
                 <a:solidFill>
                   <a:srgbClr val="111111"/>
                 </a:solidFill>
@@ -14122,8 +14817,11 @@
                 <a:ea typeface="Times New Roman" pitchFamily="34" charset="-122"/>
                 <a:cs typeface="Times New Roman" pitchFamily="34" charset="-120"/>
               </a:rPr>
-              <a:t>Underpopulation: </a:t>
-            </a:r>
+              <a:t>The key terms of this lesson are defined as follows:</a:t>
+            </a:r>
+            <a:endParaRPr lang="en-US" sz="4000" dirty="0"/>
+          </a:p>
+          <a:p>
             <a:pPr algn="l" indent="0" marL="0">
               <a:spcAft>
                 <a:spcPts val="800"/>
@@ -14131,7 +14829,7 @@
               <a:buNone/>
             </a:pPr>
             <a:r>
-              <a:rPr lang="en-US" sz="4000" dirty="0">
+              <a:rPr lang="en-US" sz="4000" b="1" dirty="0">
                 <a:solidFill>
                   <a:srgbClr val="111111"/>
                 </a:solidFill>
@@ -14139,7 +14837,24 @@
                 <a:ea typeface="Times New Roman" pitchFamily="34" charset="-122"/>
                 <a:cs typeface="Times New Roman" pitchFamily="34" charset="-120"/>
               </a:rPr>
-              <a:t>It is a situation where there are too few people to use the resources fully and efficiently.</a:t>
+              <a:t>Overpopulation: </a:t>
+            </a:r>
+            <a:pPr algn="l" indent="0" marL="0">
+              <a:spcAft>
+                <a:spcPts val="800"/>
+              </a:spcAft>
+              <a:buNone/>
+            </a:pPr>
+            <a:r>
+              <a:rPr lang="en-US" sz="4000" dirty="0">
+                <a:solidFill>
+                  <a:srgbClr val="111111"/>
+                </a:solidFill>
+                <a:latin typeface="Times New Roman" pitchFamily="34" charset="0"/>
+                <a:ea typeface="Times New Roman" pitchFamily="34" charset="-122"/>
+                <a:cs typeface="Times New Roman" pitchFamily="34" charset="-120"/>
+              </a:rPr>
+              <a:t>It is a situation where there are too many people for the resources and technology of an area, so living standards fall.</a:t>
             </a:r>
             <a:endParaRPr lang="en-US" sz="4000" dirty="0"/>
           </a:p>
@@ -14274,7 +14989,7 @@
         <p:spPr>
           <a:xfrm>
             <a:off x="0" y="658368"/>
-            <a:ext cx="5120640" cy="5833872"/>
+            <a:ext cx="2468880" cy="5833872"/>
           </a:xfrm>
           <a:prstGeom prst="rect">
             <a:avLst/>
@@ -14289,8 +15004,8 @@
         </p:nvSpPr>
         <p:spPr>
           <a:xfrm>
-            <a:off x="5349240" y="1005840"/>
-            <a:ext cx="6522415" cy="731520"/>
+            <a:off x="2697480" y="1005840"/>
+            <a:ext cx="9174175" cy="731520"/>
           </a:xfrm>
           <a:prstGeom prst="rect">
             <a:avLst/>
@@ -14316,7 +15031,7 @@
                 <a:ea typeface="Times New Roman" pitchFamily="34" charset="-122"/>
                 <a:cs typeface="Times New Roman" pitchFamily="34" charset="-120"/>
               </a:rPr>
-              <a:t>1. Meaning of the Concepts (continued)</a:t>
+              <a:t>DEFINITIONS (continued)</a:t>
             </a:r>
             <a:endParaRPr lang="en-US" sz="3600" dirty="0"/>
           </a:p>
@@ -14330,8 +15045,8 @@
         </p:nvSpPr>
         <p:spPr>
           <a:xfrm>
-            <a:off x="5349240" y="1783080"/>
-            <a:ext cx="6522415" cy="4663440"/>
+            <a:off x="2697480" y="1783080"/>
+            <a:ext cx="9174175" cy="4663440"/>
           </a:xfrm>
           <a:prstGeom prst="rect">
             <a:avLst/>
@@ -14358,7 +15073,7 @@
                 <a:ea typeface="Times New Roman" pitchFamily="34" charset="-122"/>
                 <a:cs typeface="Times New Roman" pitchFamily="34" charset="-120"/>
               </a:rPr>
-              <a:t>Optimum population: </a:t>
+              <a:t>Underpopulation: </a:t>
             </a:r>
             <a:pPr algn="l" indent="0" marL="0">
               <a:spcAft>
@@ -14375,7 +15090,44 @@
                 <a:ea typeface="Times New Roman" pitchFamily="34" charset="-122"/>
                 <a:cs typeface="Times New Roman" pitchFamily="34" charset="-120"/>
               </a:rPr>
-              <a:t>It is the number of people that gives the highest standard of living with the available resources and technology. It changes when technology changes.</a:t>
+              <a:t>It is a situation where there are too few people to develop the resources of an area fully.</a:t>
+            </a:r>
+            <a:endParaRPr lang="en-US" sz="4000" dirty="0"/>
+          </a:p>
+          <a:p>
+            <a:pPr algn="l" indent="0" marL="0">
+              <a:spcAft>
+                <a:spcPts val="800"/>
+              </a:spcAft>
+              <a:buNone/>
+            </a:pPr>
+            <a:r>
+              <a:rPr lang="en-US" sz="4000" b="1" dirty="0">
+                <a:solidFill>
+                  <a:srgbClr val="111111"/>
+                </a:solidFill>
+                <a:latin typeface="Times New Roman" pitchFamily="34" charset="0"/>
+                <a:ea typeface="Times New Roman" pitchFamily="34" charset="-122"/>
+                <a:cs typeface="Times New Roman" pitchFamily="34" charset="-120"/>
+              </a:rPr>
+              <a:t>Optimum population: </a:t>
+            </a:r>
+            <a:pPr algn="l" indent="0" marL="0">
+              <a:spcAft>
+                <a:spcPts val="800"/>
+              </a:spcAft>
+              <a:buNone/>
+            </a:pPr>
+            <a:r>
+              <a:rPr lang="en-US" sz="4000" dirty="0">
+                <a:solidFill>
+                  <a:srgbClr val="111111"/>
+                </a:solidFill>
+                <a:latin typeface="Times New Roman" pitchFamily="34" charset="0"/>
+                <a:ea typeface="Times New Roman" pitchFamily="34" charset="-122"/>
+                <a:cs typeface="Times New Roman" pitchFamily="34" charset="-120"/>
+              </a:rPr>
+              <a:t>It is the ideal number of people that gives the highest standard of living with the available resources and technology.</a:t>
             </a:r>
             <a:endParaRPr lang="en-US" sz="4000" dirty="0"/>
           </a:p>
@@ -14501,8 +15253,8 @@
         </p:nvSpPr>
         <p:spPr>
           <a:xfrm>
-            <a:off x="457200" y="1005840"/>
-            <a:ext cx="11277295" cy="731520"/>
+            <a:off x="365760" y="1005840"/>
+            <a:ext cx="11460175" cy="731520"/>
           </a:xfrm>
           <a:prstGeom prst="rect">
             <a:avLst/>
@@ -14511,7 +15263,9 @@
           <a:ln/>
         </p:spPr>
         <p:txBody>
-          <a:bodyPr wrap="square" lIns="0" tIns="0" rIns="0" bIns="0" rtlCol="0" anchor="ctr"/>
+          <a:bodyPr wrap="square" lIns="0" tIns="0" rIns="0" bIns="0" rtlCol="0" anchor="ctr">
+            <a:normAutofit/>
+          </a:bodyPr>
           <a:lstStyle/>
           <a:p>
             <a:pPr algn="ctr" indent="0" marL="0">
@@ -14526,7 +15280,86 @@
                 <a:ea typeface="Times New Roman" pitchFamily="34" charset="-122"/>
                 <a:cs typeface="Times New Roman" pitchFamily="34" charset="-120"/>
               </a:rPr>
-              <a:t>1. Meaning of the Concepts</a:t>
+              <a:t>1. Overpopulation</a:t>
+            </a:r>
+            <a:endParaRPr lang="en-US" sz="3600" dirty="0"/>
+          </a:p>
+        </p:txBody>
+      </p:sp>
+      <p:sp>
+        <p:nvSpPr>
+          <p:cNvPr id="4" name="Text 2"/>
+          <p:cNvSpPr/>
+          <p:nvPr/>
+        </p:nvSpPr>
+        <p:spPr>
+          <a:xfrm>
+            <a:off x="365760" y="1783080"/>
+            <a:ext cx="4846320" cy="4617720"/>
+          </a:xfrm>
+          <a:prstGeom prst="rect">
+            <a:avLst/>
+          </a:prstGeom>
+          <a:noFill/>
+          <a:ln/>
+        </p:spPr>
+        <p:txBody>
+          <a:bodyPr wrap="square" lIns="0" tIns="0" rIns="0" bIns="0" rtlCol="0" anchor="t"/>
+          <a:lstStyle/>
+          <a:p>
+            <a:pPr algn="l" indent="0" marL="0">
+              <a:spcAft>
+                <a:spcPts val="800"/>
+              </a:spcAft>
+              <a:buNone/>
+            </a:pPr>
+            <a:r>
+              <a:rPr lang="en-US" sz="3600" i="1" dirty="0">
+                <a:solidFill>
+                  <a:srgbClr val="111111"/>
+                </a:solidFill>
+                <a:latin typeface="Times New Roman" pitchFamily="34" charset="0"/>
+                <a:ea typeface="Times New Roman" pitchFamily="34" charset="-122"/>
+                <a:cs typeface="Times New Roman" pitchFamily="34" charset="-120"/>
+              </a:rPr>
+              <a:t>Overpopulation is presented as follows:</a:t>
+            </a:r>
+            <a:endParaRPr lang="en-US" sz="3600" dirty="0"/>
+          </a:p>
+          <a:p>
+            <a:pPr algn="l" indent="0" marL="0">
+              <a:spcAft>
+                <a:spcPts val="800"/>
+              </a:spcAft>
+              <a:buNone/>
+            </a:pPr>
+            <a:r>
+              <a:rPr lang="en-US" sz="3600" b="1" dirty="0">
+                <a:solidFill>
+                  <a:srgbClr val="111111"/>
+                </a:solidFill>
+                <a:latin typeface="Times New Roman" pitchFamily="34" charset="0"/>
+                <a:ea typeface="Times New Roman" pitchFamily="34" charset="-122"/>
+                <a:cs typeface="Times New Roman" pitchFamily="34" charset="-120"/>
+              </a:rPr>
+              <a:t>Indicators: </a:t>
+            </a:r>
+            <a:pPr algn="l" indent="0" marL="0">
+              <a:spcAft>
+                <a:spcPts val="800"/>
+              </a:spcAft>
+              <a:buNone/>
+            </a:pPr>
+            <a:r>
+              <a:rPr lang="en-US" sz="3600" dirty="0">
+                <a:solidFill>
+                  <a:srgbClr val="111111"/>
+                </a:solidFill>
+                <a:latin typeface="Times New Roman" pitchFamily="34" charset="0"/>
+                <a:ea typeface="Times New Roman" pitchFamily="34" charset="-122"/>
+                <a:cs typeface="Times New Roman" pitchFamily="34" charset="-120"/>
+              </a:rPr>
+              <a:t>High unemployment, low income per person, poverty, malnutrition, slums and overloaded schools and hospitals.</a:t>
             </a:r>
             <a:endParaRPr lang="en-US" sz="3600" dirty="0"/>
           </a:p>
@@ -14534,7 +15367,7 @@
       </p:sp>
       <p:pic>
         <p:nvPicPr>
-          <p:cNvPr id="4" name="Image 0" descr="/home/claude/f4/img/v2/optimum_big.png">    </p:cNvPr>
+          <p:cNvPr id="5" name="Image 0" descr="/home/claude/f4/img/v2/usa_slum.jpg">    </p:cNvPr>
           <p:cNvPicPr>
             <a:picLocks noChangeAspect="1"/>
           </p:cNvPicPr>
@@ -14548,8 +15381,8 @@
         </p:blipFill>
         <p:spPr>
           <a:xfrm>
-            <a:off x="1215564" y="1783080"/>
-            <a:ext cx="9760567" cy="4270248"/>
+            <a:off x="5349240" y="2069407"/>
+            <a:ext cx="6659575" cy="3697594"/>
           </a:xfrm>
           <a:prstGeom prst="rect">
             <a:avLst/>
@@ -14558,14 +15391,14 @@
       </p:pic>
       <p:sp>
         <p:nvSpPr>
-          <p:cNvPr id="5" name="Text 2"/>
+          <p:cNvPr id="6" name="Text 3"/>
           <p:cNvSpPr/>
           <p:nvPr/>
         </p:nvSpPr>
         <p:spPr>
           <a:xfrm>
-            <a:off x="457200" y="6089904"/>
-            <a:ext cx="11277295" cy="347472"/>
+            <a:off x="5349240" y="6089904"/>
+            <a:ext cx="6659575" cy="347472"/>
           </a:xfrm>
           <a:prstGeom prst="rect">
             <a:avLst/>
@@ -14581,7 +15414,7 @@
               <a:buNone/>
             </a:pPr>
             <a:r>
-              <a:rPr lang="en-US" sz="1800" i="1" dirty="0">
+              <a:rPr lang="en-US" sz="1600" i="1" dirty="0">
                 <a:solidFill>
                   <a:srgbClr val="555555"/>
                 </a:solidFill>
@@ -14589,9 +15422,9 @@
                 <a:ea typeface="Times New Roman" pitchFamily="34" charset="-122"/>
                 <a:cs typeface="Times New Roman" pitchFamily="34" charset="-120"/>
               </a:rPr>
-              <a:t>Illustration: optimum population</a:t>
-            </a:r>
-            <a:endParaRPr lang="en-US" sz="1800" dirty="0"/>
+              <a:t>Illustration: an overcrowded neighbourhood</a:t>
+            </a:r>
+            <a:endParaRPr lang="en-US" sz="1600" dirty="0"/>
           </a:p>
         </p:txBody>
       </p:sp>
@@ -14724,7 +15557,7 @@
         <p:spPr>
           <a:xfrm>
             <a:off x="0" y="658368"/>
-            <a:ext cx="1463040" cy="5833872"/>
+            <a:ext cx="5120640" cy="5833872"/>
           </a:xfrm>
           <a:prstGeom prst="rect">
             <a:avLst/>
@@ -14739,8 +15572,8 @@
         </p:nvSpPr>
         <p:spPr>
           <a:xfrm>
-            <a:off x="1691640" y="1005840"/>
-            <a:ext cx="10180015" cy="731520"/>
+            <a:off x="5349240" y="1005840"/>
+            <a:ext cx="6522415" cy="731520"/>
           </a:xfrm>
           <a:prstGeom prst="rect">
             <a:avLst/>
@@ -14766,7 +15599,7 @@
                 <a:ea typeface="Times New Roman" pitchFamily="34" charset="-122"/>
                 <a:cs typeface="Times New Roman" pitchFamily="34" charset="-120"/>
               </a:rPr>
-              <a:t>2. Overpopulation</a:t>
+              <a:t>1. Overpopulation</a:t>
             </a:r>
             <a:endParaRPr lang="en-US" sz="3600" dirty="0"/>
           </a:p>
@@ -14780,8 +15613,8 @@
         </p:nvSpPr>
         <p:spPr>
           <a:xfrm>
-            <a:off x="1691640" y="1783080"/>
-            <a:ext cx="10180015" cy="4663440"/>
+            <a:off x="5349240" y="1783080"/>
+            <a:ext cx="6522415" cy="4663440"/>
           </a:xfrm>
           <a:prstGeom prst="rect">
             <a:avLst/>
@@ -14800,7 +15633,7 @@
               <a:buNone/>
             </a:pPr>
             <a:r>
-              <a:rPr lang="en-US" sz="4000" i="1" dirty="0">
+              <a:rPr lang="en-US" sz="4000" b="1" dirty="0">
                 <a:solidFill>
                   <a:srgbClr val="111111"/>
                 </a:solidFill>
@@ -14808,11 +15641,8 @@
                 <a:ea typeface="Times New Roman" pitchFamily="34" charset="-122"/>
                 <a:cs typeface="Times New Roman" pitchFamily="34" charset="-120"/>
               </a:rPr>
-              <a:t>Overpopulation can be studied as follows:</a:t>
-            </a:r>
-            <a:endParaRPr lang="en-US" sz="4000" dirty="0"/>
-          </a:p>
-          <a:p>
+              <a:t>Causes: </a:t>
+            </a:r>
             <a:pPr algn="l" indent="0" marL="0">
               <a:spcAft>
                 <a:spcPts val="800"/>
@@ -14820,7 +15650,7 @@
               <a:buNone/>
             </a:pPr>
             <a:r>
-              <a:rPr lang="en-US" sz="4000" b="1" dirty="0">
+              <a:rPr lang="en-US" sz="4000" dirty="0">
                 <a:solidFill>
                   <a:srgbClr val="111111"/>
                 </a:solidFill>
@@ -14828,8 +15658,11 @@
                 <a:ea typeface="Times New Roman" pitchFamily="34" charset="-122"/>
                 <a:cs typeface="Times New Roman" pitchFamily="34" charset="-120"/>
               </a:rPr>
-              <a:t>Indicators and measurement: </a:t>
-            </a:r>
+              <a:t>High birth rates, falling death rates and strong immigration.</a:t>
+            </a:r>
+            <a:endParaRPr lang="en-US" sz="4000" dirty="0"/>
+          </a:p>
+          <a:p>
             <a:pPr algn="l" indent="0" marL="0">
               <a:spcAft>
                 <a:spcPts val="800"/>
@@ -14837,7 +15670,7 @@
               <a:buNone/>
             </a:pPr>
             <a:r>
-              <a:rPr lang="en-US" sz="4000" dirty="0">
+              <a:rPr lang="en-US" sz="4000" b="1" dirty="0">
                 <a:solidFill>
                   <a:srgbClr val="111111"/>
                 </a:solidFill>
@@ -14845,7 +15678,24 @@
                 <a:ea typeface="Times New Roman" pitchFamily="34" charset="-122"/>
                 <a:cs typeface="Times New Roman" pitchFamily="34" charset="-120"/>
               </a:rPr>
-              <a:t>High unemployment, malnutrition, slums, landlessness and very high physiological density indicate overpopulation. It is measured by comparing population with resources and GNI per person.</a:t>
+              <a:t>Consequences: </a:t>
+            </a:r>
+            <a:pPr algn="l" indent="0" marL="0">
+              <a:spcAft>
+                <a:spcPts val="800"/>
+              </a:spcAft>
+              <a:buNone/>
+            </a:pPr>
+            <a:r>
+              <a:rPr lang="en-US" sz="4000" dirty="0">
+                <a:solidFill>
+                  <a:srgbClr val="111111"/>
+                </a:solidFill>
+                <a:latin typeface="Times New Roman" pitchFamily="34" charset="0"/>
+                <a:ea typeface="Times New Roman" pitchFamily="34" charset="-122"/>
+                <a:cs typeface="Times New Roman" pitchFamily="34" charset="-120"/>
+              </a:rPr>
+              <a:t>Deforestation, pollution, exhaustion of resources, social unrest, poverty and famine.</a:t>
             </a:r>
             <a:endParaRPr lang="en-US" sz="4000" dirty="0"/>
           </a:p>
@@ -15084,7 +15934,7 @@
                 <a:ea typeface="Times New Roman" pitchFamily="34" charset="-122"/>
                 <a:cs typeface="Times New Roman" pitchFamily="34" charset="-120"/>
               </a:rPr>
-              <a:t>Explain how carrying capacity could be raised in your area.</a:t>
+              <a:t>Give one indicator of overpopulation.</a:t>
             </a:r>
             <a:endParaRPr lang="en-US" sz="4000" dirty="0"/>
           </a:p>
@@ -15219,7 +16069,7 @@
         <p:spPr>
           <a:xfrm>
             <a:off x="0" y="658368"/>
-            <a:ext cx="5120640" cy="5833872"/>
+            <a:ext cx="2468880" cy="5833872"/>
           </a:xfrm>
           <a:prstGeom prst="rect">
             <a:avLst/>
@@ -15234,8 +16084,8 @@
         </p:nvSpPr>
         <p:spPr>
           <a:xfrm>
-            <a:off x="5349240" y="1005840"/>
-            <a:ext cx="6522415" cy="731520"/>
+            <a:off x="2697480" y="1005840"/>
+            <a:ext cx="9174175" cy="731520"/>
           </a:xfrm>
           <a:prstGeom prst="rect">
             <a:avLst/>
@@ -15261,7 +16111,7 @@
                 <a:ea typeface="Times New Roman" pitchFamily="34" charset="-122"/>
                 <a:cs typeface="Times New Roman" pitchFamily="34" charset="-120"/>
               </a:rPr>
-              <a:t>2. Overpopulation (continued)</a:t>
+              <a:t>1. Overpopulation (continued)</a:t>
             </a:r>
             <a:endParaRPr lang="en-US" sz="3600" dirty="0"/>
           </a:p>
@@ -15275,8 +16125,8 @@
         </p:nvSpPr>
         <p:spPr>
           <a:xfrm>
-            <a:off x="5349240" y="1783080"/>
-            <a:ext cx="6522415" cy="4663440"/>
+            <a:off x="2697480" y="1783080"/>
+            <a:ext cx="9174175" cy="4663440"/>
           </a:xfrm>
           <a:prstGeom prst="rect">
             <a:avLst/>
@@ -15303,13 +16153,17 @@
                 <a:ea typeface="Times New Roman" pitchFamily="34" charset="-122"/>
                 <a:cs typeface="Times New Roman" pitchFamily="34" charset="-120"/>
               </a:rPr>
-              <a:t>Causes: </a:t>
-            </a:r>
-            <a:pPr algn="l" indent="0" marL="0">
+              <a:t>Solutions:</a:t>
+            </a:r>
+            <a:endParaRPr lang="en-US" sz="4000" dirty="0"/>
+          </a:p>
+          <a:p>
+            <a:pPr algn="l" marL="342900" indent="-342900">
               <a:spcAft>
                 <a:spcPts val="800"/>
               </a:spcAft>
-              <a:buNone/>
+              <a:buSzPct val="100000"/>
+              <a:buChar char="•"/>
             </a:pPr>
             <a:r>
               <a:rPr lang="en-US" sz="4000" dirty="0">
@@ -15320,7 +16174,49 @@
                 <a:ea typeface="Times New Roman" pitchFamily="34" charset="-122"/>
                 <a:cs typeface="Times New Roman" pitchFamily="34" charset="-120"/>
               </a:rPr>
-              <a:t>Rapid population growth and limited resources or technology cause it. Examples are Bangladesh, the Sahel and parts of the Mandara Mountains.</a:t>
+              <a:t>Family planning and the education of girls.</a:t>
+            </a:r>
+            <a:endParaRPr lang="en-US" sz="4000" dirty="0"/>
+          </a:p>
+          <a:p>
+            <a:pPr algn="l" marL="342900" indent="-342900">
+              <a:spcAft>
+                <a:spcPts val="800"/>
+              </a:spcAft>
+              <a:buSzPct val="100000"/>
+              <a:buChar char="•"/>
+            </a:pPr>
+            <a:r>
+              <a:rPr lang="en-US" sz="4000" dirty="0">
+                <a:solidFill>
+                  <a:srgbClr val="111111"/>
+                </a:solidFill>
+                <a:latin typeface="Times New Roman" pitchFamily="34" charset="0"/>
+                <a:ea typeface="Times New Roman" pitchFamily="34" charset="-122"/>
+                <a:cs typeface="Times New Roman" pitchFamily="34" charset="-120"/>
+              </a:rPr>
+              <a:t>Technology to use resources better.</a:t>
+            </a:r>
+            <a:endParaRPr lang="en-US" sz="4000" dirty="0"/>
+          </a:p>
+          <a:p>
+            <a:pPr algn="l" marL="342900" indent="-342900">
+              <a:spcAft>
+                <a:spcPts val="800"/>
+              </a:spcAft>
+              <a:buSzPct val="100000"/>
+              <a:buChar char="•"/>
+            </a:pPr>
+            <a:r>
+              <a:rPr lang="en-US" sz="4000" dirty="0">
+                <a:solidFill>
+                  <a:srgbClr val="111111"/>
+                </a:solidFill>
+                <a:latin typeface="Times New Roman" pitchFamily="34" charset="0"/>
+                <a:ea typeface="Times New Roman" pitchFamily="34" charset="-122"/>
+                <a:cs typeface="Times New Roman" pitchFamily="34" charset="-120"/>
+              </a:rPr>
+              <a:t>Industrial jobs to reduce pressure on land.</a:t>
             </a:r>
             <a:endParaRPr lang="en-US" sz="4000" dirty="0"/>
           </a:p>
@@ -15438,9 +16334,129 @@
           </a:p>
         </p:txBody>
       </p:sp>
+      <p:sp>
+        <p:nvSpPr>
+          <p:cNvPr id="3" name="Text 1"/>
+          <p:cNvSpPr/>
+          <p:nvPr/>
+        </p:nvSpPr>
+        <p:spPr>
+          <a:xfrm>
+            <a:off x="365760" y="1005840"/>
+            <a:ext cx="11460175" cy="731520"/>
+          </a:xfrm>
+          <a:prstGeom prst="rect">
+            <a:avLst/>
+          </a:prstGeom>
+          <a:noFill/>
+          <a:ln/>
+        </p:spPr>
+        <p:txBody>
+          <a:bodyPr wrap="square" lIns="0" tIns="0" rIns="0" bIns="0" rtlCol="0" anchor="ctr">
+            <a:normAutofit/>
+          </a:bodyPr>
+          <a:lstStyle/>
+          <a:p>
+            <a:pPr algn="ctr" indent="0" marL="0">
+              <a:buNone/>
+            </a:pPr>
+            <a:r>
+              <a:rPr lang="en-US" sz="3600" b="1" dirty="0">
+                <a:solidFill>
+                  <a:srgbClr val="990011"/>
+                </a:solidFill>
+                <a:latin typeface="Times New Roman" pitchFamily="34" charset="0"/>
+                <a:ea typeface="Times New Roman" pitchFamily="34" charset="-122"/>
+                <a:cs typeface="Times New Roman" pitchFamily="34" charset="-120"/>
+              </a:rPr>
+              <a:t>2. Underpopulation</a:t>
+            </a:r>
+            <a:endParaRPr lang="en-US" sz="3600" dirty="0"/>
+          </a:p>
+        </p:txBody>
+      </p:sp>
+      <p:sp>
+        <p:nvSpPr>
+          <p:cNvPr id="4" name="Text 2"/>
+          <p:cNvSpPr/>
+          <p:nvPr/>
+        </p:nvSpPr>
+        <p:spPr>
+          <a:xfrm>
+            <a:off x="365760" y="1783080"/>
+            <a:ext cx="4846320" cy="4617720"/>
+          </a:xfrm>
+          <a:prstGeom prst="rect">
+            <a:avLst/>
+          </a:prstGeom>
+          <a:noFill/>
+          <a:ln/>
+        </p:spPr>
+        <p:txBody>
+          <a:bodyPr wrap="square" lIns="0" tIns="0" rIns="0" bIns="0" rtlCol="0" anchor="t"/>
+          <a:lstStyle/>
+          <a:p>
+            <a:pPr algn="l" indent="0" marL="0">
+              <a:spcAft>
+                <a:spcPts val="800"/>
+              </a:spcAft>
+              <a:buNone/>
+            </a:pPr>
+            <a:r>
+              <a:rPr lang="en-US" sz="3600" i="1" dirty="0">
+                <a:solidFill>
+                  <a:srgbClr val="111111"/>
+                </a:solidFill>
+                <a:latin typeface="Times New Roman" pitchFamily="34" charset="0"/>
+                <a:ea typeface="Times New Roman" pitchFamily="34" charset="-122"/>
+                <a:cs typeface="Times New Roman" pitchFamily="34" charset="-120"/>
+              </a:rPr>
+              <a:t>Underpopulation is presented as follows:</a:t>
+            </a:r>
+            <a:endParaRPr lang="en-US" sz="3600" dirty="0"/>
+          </a:p>
+          <a:p>
+            <a:pPr algn="l" indent="0" marL="0">
+              <a:spcAft>
+                <a:spcPts val="800"/>
+              </a:spcAft>
+              <a:buNone/>
+            </a:pPr>
+            <a:r>
+              <a:rPr lang="en-US" sz="3600" b="1" dirty="0">
+                <a:solidFill>
+                  <a:srgbClr val="111111"/>
+                </a:solidFill>
+                <a:latin typeface="Times New Roman" pitchFamily="34" charset="0"/>
+                <a:ea typeface="Times New Roman" pitchFamily="34" charset="-122"/>
+                <a:cs typeface="Times New Roman" pitchFamily="34" charset="-120"/>
+              </a:rPr>
+              <a:t>Indicators: </a:t>
+            </a:r>
+            <a:pPr algn="l" indent="0" marL="0">
+              <a:spcAft>
+                <a:spcPts val="800"/>
+              </a:spcAft>
+              <a:buNone/>
+            </a:pPr>
+            <a:r>
+              <a:rPr lang="en-US" sz="3600" dirty="0">
+                <a:solidFill>
+                  <a:srgbClr val="111111"/>
+                </a:solidFill>
+                <a:latin typeface="Times New Roman" pitchFamily="34" charset="0"/>
+                <a:ea typeface="Times New Roman" pitchFamily="34" charset="-122"/>
+                <a:cs typeface="Times New Roman" pitchFamily="34" charset="-120"/>
+              </a:rPr>
+              <a:t>Many resources per person, labour shortages, empty schools and slow economic growth.</a:t>
+            </a:r>
+            <a:endParaRPr lang="en-US" sz="3600" dirty="0"/>
+          </a:p>
+        </p:txBody>
+      </p:sp>
       <p:pic>
         <p:nvPicPr>
-          <p:cNvPr id="3" name="Image 0" descr="/home/claude/f4/img/minesec_sheet.png">    </p:cNvPr>
+          <p:cNvPr id="5" name="Image 0" descr="/home/claude/f4/img/v2/regimes_big.png">    </p:cNvPr>
           <p:cNvPicPr>
             <a:picLocks noChangeAspect="1"/>
           </p:cNvPicPr>
@@ -15454,8 +16470,8 @@
         </p:blipFill>
         <p:spPr>
           <a:xfrm>
-            <a:off x="0" y="658368"/>
-            <a:ext cx="3840480" cy="5833872"/>
+            <a:off x="5349240" y="2617506"/>
+            <a:ext cx="6659575" cy="2601397"/>
           </a:xfrm>
           <a:prstGeom prst="rect">
             <a:avLst/>
@@ -15464,14 +16480,14 @@
       </p:pic>
       <p:sp>
         <p:nvSpPr>
-          <p:cNvPr id="4" name="Text 1"/>
+          <p:cNvPr id="6" name="Text 3"/>
           <p:cNvSpPr/>
           <p:nvPr/>
         </p:nvSpPr>
         <p:spPr>
           <a:xfrm>
-            <a:off x="4069080" y="1005840"/>
-            <a:ext cx="7802575" cy="731520"/>
+            <a:off x="5349240" y="6089904"/>
+            <a:ext cx="6659575" cy="347472"/>
           </a:xfrm>
           <a:prstGeom prst="rect">
             <a:avLst/>
@@ -15480,85 +16496,24 @@
           <a:ln/>
         </p:spPr>
         <p:txBody>
-          <a:bodyPr wrap="square" lIns="0" tIns="0" rIns="0" bIns="0" rtlCol="0" anchor="ctr">
-            <a:normAutofit/>
-          </a:bodyPr>
+          <a:bodyPr wrap="square" lIns="0" tIns="0" rIns="0" bIns="0" rtlCol="0" anchor="ctr"/>
           <a:lstStyle/>
           <a:p>
             <a:pPr algn="ctr" indent="0" marL="0">
               <a:buNone/>
             </a:pPr>
             <a:r>
-              <a:rPr lang="en-US" sz="3600" b="1" dirty="0">
-                <a:solidFill>
-                  <a:srgbClr val="990011"/>
+              <a:rPr lang="en-US" sz="1600" i="1" dirty="0">
+                <a:solidFill>
+                  <a:srgbClr val="555555"/>
                 </a:solidFill>
                 <a:latin typeface="Times New Roman" pitchFamily="34" charset="0"/>
                 <a:ea typeface="Times New Roman" pitchFamily="34" charset="-122"/>
                 <a:cs typeface="Times New Roman" pitchFamily="34" charset="-120"/>
               </a:rPr>
-              <a:t>2. Overpopulation (continued)</a:t>
-            </a:r>
-            <a:endParaRPr lang="en-US" sz="3600" dirty="0"/>
-          </a:p>
-        </p:txBody>
-      </p:sp>
-      <p:sp>
-        <p:nvSpPr>
-          <p:cNvPr id="5" name="Text 2"/>
-          <p:cNvSpPr/>
-          <p:nvPr/>
-        </p:nvSpPr>
-        <p:spPr>
-          <a:xfrm>
-            <a:off x="4069080" y="1783080"/>
-            <a:ext cx="7802575" cy="4663440"/>
-          </a:xfrm>
-          <a:prstGeom prst="rect">
-            <a:avLst/>
-          </a:prstGeom>
-          <a:noFill/>
-          <a:ln/>
-        </p:spPr>
-        <p:txBody>
-          <a:bodyPr wrap="square" lIns="0" tIns="0" rIns="0" bIns="0" rtlCol="0" anchor="t"/>
-          <a:lstStyle/>
-          <a:p>
-            <a:pPr algn="l" indent="0" marL="0">
-              <a:spcAft>
-                <a:spcPts val="800"/>
-              </a:spcAft>
-              <a:buNone/>
-            </a:pPr>
-            <a:r>
-              <a:rPr lang="en-US" sz="4000" b="1" dirty="0">
-                <a:solidFill>
-                  <a:srgbClr val="111111"/>
-                </a:solidFill>
-                <a:latin typeface="Times New Roman" pitchFamily="34" charset="0"/>
-                <a:ea typeface="Times New Roman" pitchFamily="34" charset="-122"/>
-                <a:cs typeface="Times New Roman" pitchFamily="34" charset="-120"/>
-              </a:rPr>
-              <a:t>Consequences and solutions: </a:t>
-            </a:r>
-            <a:pPr algn="l" indent="0" marL="0">
-              <a:spcAft>
-                <a:spcPts val="800"/>
-              </a:spcAft>
-              <a:buNone/>
-            </a:pPr>
-            <a:r>
-              <a:rPr lang="en-US" sz="4000" dirty="0">
-                <a:solidFill>
-                  <a:srgbClr val="111111"/>
-                </a:solidFill>
-                <a:latin typeface="Times New Roman" pitchFamily="34" charset="0"/>
-                <a:ea typeface="Times New Roman" pitchFamily="34" charset="-122"/>
-                <a:cs typeface="Times New Roman" pitchFamily="34" charset="-120"/>
-              </a:rPr>
-              <a:t>It leads to poverty, migration and environmental damage such as soil erosion. Solutions are family planning, intensification of agriculture, industrialisation and migration.</a:t>
-            </a:r>
-            <a:endParaRPr lang="en-US" sz="4000" dirty="0"/>
+              <a:t>Illustration: types of population-resource relations</a:t>
+            </a:r>
+            <a:endParaRPr lang="en-US" sz="1600" dirty="0"/>
           </a:p>
         </p:txBody>
       </p:sp>
@@ -15691,7 +16646,7 @@
         <p:spPr>
           <a:xfrm>
             <a:off x="0" y="658368"/>
-            <a:ext cx="1463040" cy="5833872"/>
+            <a:ext cx="3840480" cy="5833872"/>
           </a:xfrm>
           <a:prstGeom prst="rect">
             <a:avLst/>
@@ -15706,8 +16661,8 @@
         </p:nvSpPr>
         <p:spPr>
           <a:xfrm>
-            <a:off x="1691640" y="1005840"/>
-            <a:ext cx="10180015" cy="731520"/>
+            <a:off x="4069080" y="1005840"/>
+            <a:ext cx="7802575" cy="731520"/>
           </a:xfrm>
           <a:prstGeom prst="rect">
             <a:avLst/>
@@ -15733,7 +16688,7 @@
                 <a:ea typeface="Times New Roman" pitchFamily="34" charset="-122"/>
                 <a:cs typeface="Times New Roman" pitchFamily="34" charset="-120"/>
               </a:rPr>
-              <a:t>3. Underpopulation</a:t>
+              <a:t>2. Underpopulation</a:t>
             </a:r>
             <a:endParaRPr lang="en-US" sz="3600" dirty="0"/>
           </a:p>
@@ -15747,8 +16702,8 @@
         </p:nvSpPr>
         <p:spPr>
           <a:xfrm>
-            <a:off x="1691640" y="1783080"/>
-            <a:ext cx="10180015" cy="4663440"/>
+            <a:off x="4069080" y="1783080"/>
+            <a:ext cx="7802575" cy="4663440"/>
           </a:xfrm>
           <a:prstGeom prst="rect">
             <a:avLst/>
@@ -15767,7 +16722,7 @@
               <a:buNone/>
             </a:pPr>
             <a:r>
-              <a:rPr lang="en-US" sz="4000" i="1" dirty="0">
+              <a:rPr lang="en-US" sz="4000" b="1" dirty="0">
                 <a:solidFill>
                   <a:srgbClr val="111111"/>
                 </a:solidFill>
@@ -15775,11 +16730,8 @@
                 <a:ea typeface="Times New Roman" pitchFamily="34" charset="-122"/>
                 <a:cs typeface="Times New Roman" pitchFamily="34" charset="-120"/>
               </a:rPr>
-              <a:t>Underpopulation can be studied as follows:</a:t>
-            </a:r>
-            <a:endParaRPr lang="en-US" sz="4000" dirty="0"/>
-          </a:p>
-          <a:p>
+              <a:t>Causes: </a:t>
+            </a:r>
             <a:pPr algn="l" indent="0" marL="0">
               <a:spcAft>
                 <a:spcPts val="800"/>
@@ -15787,7 +16739,7 @@
               <a:buNone/>
             </a:pPr>
             <a:r>
-              <a:rPr lang="en-US" sz="4000" b="1" dirty="0">
+              <a:rPr lang="en-US" sz="4000" dirty="0">
                 <a:solidFill>
                   <a:srgbClr val="111111"/>
                 </a:solidFill>
@@ -15795,8 +16747,11 @@
                 <a:ea typeface="Times New Roman" pitchFamily="34" charset="-122"/>
                 <a:cs typeface="Times New Roman" pitchFamily="34" charset="-120"/>
               </a:rPr>
-              <a:t>Indicators and causes: </a:t>
-            </a:r>
+              <a:t>Low birth rates, high death rates and strong emigration.</a:t>
+            </a:r>
+            <a:endParaRPr lang="en-US" sz="4000" dirty="0"/>
+          </a:p>
+          <a:p>
             <a:pPr algn="l" indent="0" marL="0">
               <a:spcAft>
                 <a:spcPts val="800"/>
@@ -15804,7 +16759,7 @@
               <a:buNone/>
             </a:pPr>
             <a:r>
-              <a:rPr lang="en-US" sz="4000" dirty="0">
+              <a:rPr lang="en-US" sz="4000" b="1" dirty="0">
                 <a:solidFill>
                   <a:srgbClr val="111111"/>
                 </a:solidFill>
@@ -15812,7 +16767,24 @@
                 <a:ea typeface="Times New Roman" pitchFamily="34" charset="-122"/>
                 <a:cs typeface="Times New Roman" pitchFamily="34" charset="-120"/>
               </a:rPr>
-              <a:t>Resources are unused, labour is scarce and markets are small. Causes are low birth rates, emigration or very large territories, as in Australia, Canada and the East Region of Cameroon.</a:t>
+              <a:t>Consequences: </a:t>
+            </a:r>
+            <a:pPr algn="l" indent="0" marL="0">
+              <a:spcAft>
+                <a:spcPts val="800"/>
+              </a:spcAft>
+              <a:buNone/>
+            </a:pPr>
+            <a:r>
+              <a:rPr lang="en-US" sz="4000" dirty="0">
+                <a:solidFill>
+                  <a:srgbClr val="111111"/>
+                </a:solidFill>
+                <a:latin typeface="Times New Roman" pitchFamily="34" charset="0"/>
+                <a:ea typeface="Times New Roman" pitchFamily="34" charset="-122"/>
+                <a:cs typeface="Times New Roman" pitchFamily="34" charset="-120"/>
+              </a:rPr>
+              <a:t>Resources are left unused, the domestic market is small and the country may be difficult to defend.</a:t>
             </a:r>
             <a:endParaRPr lang="en-US" sz="4000" dirty="0"/>
           </a:p>
@@ -15989,7 +16961,7 @@
                 <a:ea typeface="Times New Roman" pitchFamily="34" charset="-122"/>
                 <a:cs typeface="Times New Roman" pitchFamily="34" charset="-120"/>
               </a:rPr>
-              <a:t>3. Underpopulation (continued)</a:t>
+              <a:t>2. Underpopulation (continued)</a:t>
             </a:r>
             <a:endParaRPr lang="en-US" sz="3600" dirty="0"/>
           </a:p>
@@ -16031,13 +17003,17 @@
                 <a:ea typeface="Times New Roman" pitchFamily="34" charset="-122"/>
                 <a:cs typeface="Times New Roman" pitchFamily="34" charset="-120"/>
               </a:rPr>
-              <a:t>Consequences and solutions: </a:t>
-            </a:r>
-            <a:pPr algn="l" indent="0" marL="0">
+              <a:t>Solutions:</a:t>
+            </a:r>
+            <a:endParaRPr lang="en-US" sz="4000" dirty="0"/>
+          </a:p>
+          <a:p>
+            <a:pPr algn="l" marL="342900" indent="-342900">
               <a:spcAft>
                 <a:spcPts val="800"/>
               </a:spcAft>
-              <a:buNone/>
+              <a:buSzPct val="100000"/>
+              <a:buChar char="•"/>
             </a:pPr>
             <a:r>
               <a:rPr lang="en-US" sz="4000" dirty="0">
@@ -16048,7 +17024,49 @@
                 <a:ea typeface="Times New Roman" pitchFamily="34" charset="-122"/>
                 <a:cs typeface="Times New Roman" pitchFamily="34" charset="-120"/>
               </a:rPr>
-              <a:t>Development is slow, and services are expensive for scattered people. Solutions are encouraging immigration, pro-natal policies and better transport.</a:t>
+              <a:t>Immigration of skilled workers.</a:t>
+            </a:r>
+            <a:endParaRPr lang="en-US" sz="4000" dirty="0"/>
+          </a:p>
+          <a:p>
+            <a:pPr algn="l" marL="342900" indent="-342900">
+              <a:spcAft>
+                <a:spcPts val="800"/>
+              </a:spcAft>
+              <a:buSzPct val="100000"/>
+              <a:buChar char="•"/>
+            </a:pPr>
+            <a:r>
+              <a:rPr lang="en-US" sz="4000" dirty="0">
+                <a:solidFill>
+                  <a:srgbClr val="111111"/>
+                </a:solidFill>
+                <a:latin typeface="Times New Roman" pitchFamily="34" charset="0"/>
+                <a:ea typeface="Times New Roman" pitchFamily="34" charset="-122"/>
+                <a:cs typeface="Times New Roman" pitchFamily="34" charset="-120"/>
+              </a:rPr>
+              <a:t>Pro-natalist policies.</a:t>
+            </a:r>
+            <a:endParaRPr lang="en-US" sz="4000" dirty="0"/>
+          </a:p>
+          <a:p>
+            <a:pPr algn="l" marL="342900" indent="-342900">
+              <a:spcAft>
+                <a:spcPts val="800"/>
+              </a:spcAft>
+              <a:buSzPct val="100000"/>
+              <a:buChar char="•"/>
+            </a:pPr>
+            <a:r>
+              <a:rPr lang="en-US" sz="4000" dirty="0">
+                <a:solidFill>
+                  <a:srgbClr val="111111"/>
+                </a:solidFill>
+                <a:latin typeface="Times New Roman" pitchFamily="34" charset="0"/>
+                <a:ea typeface="Times New Roman" pitchFamily="34" charset="-122"/>
+                <a:cs typeface="Times New Roman" pitchFamily="34" charset="-120"/>
+              </a:rPr>
+              <a:t>Machines and automation.</a:t>
             </a:r>
             <a:endParaRPr lang="en-US" sz="4000" dirty="0"/>
           </a:p>
@@ -16160,15 +17178,135 @@
                 <a:ea typeface="Calibri" pitchFamily="34" charset="-122"/>
                 <a:cs typeface="Calibri" pitchFamily="34" charset="-120"/>
               </a:rPr>
-              <a:t>FORMATIVE EVALUATION</a:t>
+              <a:t>BOARD SUMMARY</a:t>
             </a:r>
             <a:endParaRPr lang="en-US" sz="1400" dirty="0"/>
+          </a:p>
+        </p:txBody>
+      </p:sp>
+      <p:sp>
+        <p:nvSpPr>
+          <p:cNvPr id="3" name="Text 1"/>
+          <p:cNvSpPr/>
+          <p:nvPr/>
+        </p:nvSpPr>
+        <p:spPr>
+          <a:xfrm>
+            <a:off x="365760" y="1005840"/>
+            <a:ext cx="11460175" cy="731520"/>
+          </a:xfrm>
+          <a:prstGeom prst="rect">
+            <a:avLst/>
+          </a:prstGeom>
+          <a:noFill/>
+          <a:ln/>
+        </p:spPr>
+        <p:txBody>
+          <a:bodyPr wrap="square" lIns="0" tIns="0" rIns="0" bIns="0" rtlCol="0" anchor="ctr">
+            <a:normAutofit/>
+          </a:bodyPr>
+          <a:lstStyle/>
+          <a:p>
+            <a:pPr algn="ctr" indent="0" marL="0">
+              <a:buNone/>
+            </a:pPr>
+            <a:r>
+              <a:rPr lang="en-US" sz="3600" b="1" dirty="0">
+                <a:solidFill>
+                  <a:srgbClr val="990011"/>
+                </a:solidFill>
+                <a:latin typeface="Times New Roman" pitchFamily="34" charset="0"/>
+                <a:ea typeface="Times New Roman" pitchFamily="34" charset="-122"/>
+                <a:cs typeface="Times New Roman" pitchFamily="34" charset="-120"/>
+              </a:rPr>
+              <a:t>3. Optimum Population</a:t>
+            </a:r>
+            <a:endParaRPr lang="en-US" sz="3600" dirty="0"/>
+          </a:p>
+        </p:txBody>
+      </p:sp>
+      <p:sp>
+        <p:nvSpPr>
+          <p:cNvPr id="4" name="Text 2"/>
+          <p:cNvSpPr/>
+          <p:nvPr/>
+        </p:nvSpPr>
+        <p:spPr>
+          <a:xfrm>
+            <a:off x="365760" y="1783080"/>
+            <a:ext cx="4846320" cy="4617720"/>
+          </a:xfrm>
+          <a:prstGeom prst="rect">
+            <a:avLst/>
+          </a:prstGeom>
+          <a:noFill/>
+          <a:ln/>
+        </p:spPr>
+        <p:txBody>
+          <a:bodyPr wrap="square" lIns="0" tIns="0" rIns="0" bIns="0" rtlCol="0" anchor="t"/>
+          <a:lstStyle/>
+          <a:p>
+            <a:pPr algn="l" indent="0" marL="0">
+              <a:spcAft>
+                <a:spcPts val="800"/>
+              </a:spcAft>
+              <a:buNone/>
+            </a:pPr>
+            <a:r>
+              <a:rPr lang="en-US" sz="3600" i="1" dirty="0">
+                <a:solidFill>
+                  <a:srgbClr val="111111"/>
+                </a:solidFill>
+                <a:latin typeface="Times New Roman" pitchFamily="34" charset="0"/>
+                <a:ea typeface="Times New Roman" pitchFamily="34" charset="-122"/>
+                <a:cs typeface="Times New Roman" pitchFamily="34" charset="-120"/>
+              </a:rPr>
+              <a:t>The optimum population is presented as follows:</a:t>
+            </a:r>
+            <a:endParaRPr lang="en-US" sz="3600" dirty="0"/>
+          </a:p>
+          <a:p>
+            <a:pPr algn="l" indent="0" marL="0">
+              <a:spcAft>
+                <a:spcPts val="800"/>
+              </a:spcAft>
+              <a:buNone/>
+            </a:pPr>
+            <a:r>
+              <a:rPr lang="en-US" sz="3600" b="1" dirty="0">
+                <a:solidFill>
+                  <a:srgbClr val="111111"/>
+                </a:solidFill>
+                <a:latin typeface="Times New Roman" pitchFamily="34" charset="0"/>
+                <a:ea typeface="Times New Roman" pitchFamily="34" charset="-122"/>
+                <a:cs typeface="Times New Roman" pitchFamily="34" charset="-120"/>
+              </a:rPr>
+              <a:t>Meaning: </a:t>
+            </a:r>
+            <a:pPr algn="l" indent="0" marL="0">
+              <a:spcAft>
+                <a:spcPts val="800"/>
+              </a:spcAft>
+              <a:buNone/>
+            </a:pPr>
+            <a:r>
+              <a:rPr lang="en-US" sz="3600" dirty="0">
+                <a:solidFill>
+                  <a:srgbClr val="111111"/>
+                </a:solidFill>
+                <a:latin typeface="Times New Roman" pitchFamily="34" charset="0"/>
+                <a:ea typeface="Times New Roman" pitchFamily="34" charset="-122"/>
+                <a:cs typeface="Times New Roman" pitchFamily="34" charset="-120"/>
+              </a:rPr>
+              <a:t>It is a dynamic balance where output per person is highest.</a:t>
+            </a:r>
+            <a:endParaRPr lang="en-US" sz="3600" dirty="0"/>
           </a:p>
         </p:txBody>
       </p:sp>
       <p:pic>
         <p:nvPicPr>
-          <p:cNvPr id="3" name="Image 0" descr="/home/claude/f4/img/minesec_sheet.png">    </p:cNvPr>
+          <p:cNvPr id="5" name="Image 0" descr="/home/claude/f4/img/v2/optimum_big.png">    </p:cNvPr>
           <p:cNvPicPr>
             <a:picLocks noChangeAspect="1"/>
           </p:cNvPicPr>
@@ -16182,8 +17320,8 @@
         </p:blipFill>
         <p:spPr>
           <a:xfrm>
-            <a:off x="0" y="658368"/>
-            <a:ext cx="5120640" cy="5833872"/>
+            <a:off x="5349240" y="2461422"/>
+            <a:ext cx="6659575" cy="2913564"/>
           </a:xfrm>
           <a:prstGeom prst="rect">
             <a:avLst/>
@@ -16192,14 +17330,14 @@
       </p:pic>
       <p:sp>
         <p:nvSpPr>
-          <p:cNvPr id="4" name="Text 1"/>
+          <p:cNvPr id="6" name="Text 3"/>
           <p:cNvSpPr/>
           <p:nvPr/>
         </p:nvSpPr>
         <p:spPr>
           <a:xfrm>
-            <a:off x="5349240" y="1005840"/>
-            <a:ext cx="6522415" cy="731520"/>
+            <a:off x="5349240" y="6089904"/>
+            <a:ext cx="6659575" cy="347472"/>
           </a:xfrm>
           <a:prstGeom prst="rect">
             <a:avLst/>
@@ -16208,68 +17346,24 @@
           <a:ln/>
         </p:spPr>
         <p:txBody>
-          <a:bodyPr wrap="square" lIns="0" tIns="0" rIns="0" bIns="0" rtlCol="0" anchor="ctr">
-            <a:normAutofit/>
-          </a:bodyPr>
+          <a:bodyPr wrap="square" lIns="0" tIns="0" rIns="0" bIns="0" rtlCol="0" anchor="ctr"/>
           <a:lstStyle/>
           <a:p>
             <a:pPr algn="ctr" indent="0" marL="0">
               <a:buNone/>
             </a:pPr>
             <a:r>
-              <a:rPr lang="en-US" sz="3600" b="1" dirty="0">
-                <a:solidFill>
-                  <a:srgbClr val="990011"/>
+              <a:rPr lang="en-US" sz="1600" i="1" dirty="0">
+                <a:solidFill>
+                  <a:srgbClr val="555555"/>
                 </a:solidFill>
                 <a:latin typeface="Times New Roman" pitchFamily="34" charset="0"/>
                 <a:ea typeface="Times New Roman" pitchFamily="34" charset="-122"/>
                 <a:cs typeface="Times New Roman" pitchFamily="34" charset="-120"/>
               </a:rPr>
-              <a:t>Evaluation 1</a:t>
-            </a:r>
-            <a:endParaRPr lang="en-US" sz="3600" dirty="0"/>
-          </a:p>
-        </p:txBody>
-      </p:sp>
-      <p:sp>
-        <p:nvSpPr>
-          <p:cNvPr id="5" name="Text 2"/>
-          <p:cNvSpPr/>
-          <p:nvPr/>
-        </p:nvSpPr>
-        <p:spPr>
-          <a:xfrm>
-            <a:off x="5349240" y="1783080"/>
-            <a:ext cx="6522415" cy="4663440"/>
-          </a:xfrm>
-          <a:prstGeom prst="rect">
-            <a:avLst/>
-          </a:prstGeom>
-          <a:noFill/>
-          <a:ln/>
-        </p:spPr>
-        <p:txBody>
-          <a:bodyPr wrap="square" lIns="0" tIns="0" rIns="0" bIns="0" rtlCol="0" anchor="t"/>
-          <a:lstStyle/>
-          <a:p>
-            <a:pPr algn="l" indent="0" marL="0">
-              <a:spcAft>
-                <a:spcPts val="800"/>
-              </a:spcAft>
-              <a:buNone/>
-            </a:pPr>
-            <a:r>
-              <a:rPr lang="en-US" sz="4000" dirty="0">
-                <a:solidFill>
-                  <a:srgbClr val="111111"/>
-                </a:solidFill>
-                <a:latin typeface="Times New Roman" pitchFamily="34" charset="0"/>
-                <a:ea typeface="Times New Roman" pitchFamily="34" charset="-122"/>
-                <a:cs typeface="Times New Roman" pitchFamily="34" charset="-120"/>
-              </a:rPr>
-              <a:t>Define optimum population.</a:t>
-            </a:r>
-            <a:endParaRPr lang="en-US" sz="4000" dirty="0"/>
+              <a:t>Illustration: the optimum population</a:t>
+            </a:r>
+            <a:endParaRPr lang="en-US" sz="1600" dirty="0"/>
           </a:p>
         </p:txBody>
       </p:sp>
@@ -16379,7 +17473,7 @@
                 <a:ea typeface="Calibri" pitchFamily="34" charset="-122"/>
                 <a:cs typeface="Calibri" pitchFamily="34" charset="-120"/>
               </a:rPr>
-              <a:t>FORMATIVE EVALUATION</a:t>
+              <a:t>BOARD SUMMARY</a:t>
             </a:r>
             <a:endParaRPr lang="en-US" sz="1400" dirty="0"/>
           </a:p>
@@ -16402,7 +17496,7 @@
         <p:spPr>
           <a:xfrm>
             <a:off x="0" y="658368"/>
-            <a:ext cx="5120640" cy="5833872"/>
+            <a:ext cx="2468880" cy="5833872"/>
           </a:xfrm>
           <a:prstGeom prst="rect">
             <a:avLst/>
@@ -16417,8 +17511,8 @@
         </p:nvSpPr>
         <p:spPr>
           <a:xfrm>
-            <a:off x="5349240" y="1005840"/>
-            <a:ext cx="6522415" cy="731520"/>
+            <a:off x="2697480" y="1005840"/>
+            <a:ext cx="9174175" cy="731520"/>
           </a:xfrm>
           <a:prstGeom prst="rect">
             <a:avLst/>
@@ -16444,7 +17538,7 @@
                 <a:ea typeface="Times New Roman" pitchFamily="34" charset="-122"/>
                 <a:cs typeface="Times New Roman" pitchFamily="34" charset="-120"/>
               </a:rPr>
-              <a:t>Expected Answer</a:t>
+              <a:t>3. Optimum Population</a:t>
             </a:r>
             <a:endParaRPr lang="en-US" sz="3600" dirty="0"/>
           </a:p>
@@ -16458,8 +17552,8 @@
         </p:nvSpPr>
         <p:spPr>
           <a:xfrm>
-            <a:off x="5349240" y="1783080"/>
-            <a:ext cx="6522415" cy="4663440"/>
+            <a:off x="2697480" y="1783080"/>
+            <a:ext cx="9174175" cy="4663440"/>
           </a:xfrm>
           <a:prstGeom prst="rect">
             <a:avLst/>
@@ -16478,7 +17572,7 @@
               <a:buNone/>
             </a:pPr>
             <a:r>
-              <a:rPr lang="en-US" sz="4000" dirty="0">
+              <a:rPr lang="en-US" sz="4000" b="1" dirty="0">
                 <a:solidFill>
                   <a:srgbClr val="111111"/>
                 </a:solidFill>
@@ -16486,7 +17580,61 @@
                 <a:ea typeface="Times New Roman" pitchFamily="34" charset="-122"/>
                 <a:cs typeface="Times New Roman" pitchFamily="34" charset="-120"/>
               </a:rPr>
-              <a:t>The population that gives the highest standard of living.</a:t>
+              <a:t>Indicators: </a:t>
+            </a:r>
+            <a:pPr algn="l" indent="0" marL="0">
+              <a:spcAft>
+                <a:spcPts val="800"/>
+              </a:spcAft>
+              <a:buNone/>
+            </a:pPr>
+            <a:r>
+              <a:rPr lang="en-US" sz="4000" dirty="0">
+                <a:solidFill>
+                  <a:srgbClr val="111111"/>
+                </a:solidFill>
+                <a:latin typeface="Times New Roman" pitchFamily="34" charset="0"/>
+                <a:ea typeface="Times New Roman" pitchFamily="34" charset="-122"/>
+                <a:cs typeface="Times New Roman" pitchFamily="34" charset="-120"/>
+              </a:rPr>
+              <a:t>High income per person, full employment, sustainable use of resources and good social services.</a:t>
+            </a:r>
+            <a:endParaRPr lang="en-US" sz="4000" dirty="0"/>
+          </a:p>
+          <a:p>
+            <a:pPr algn="l" indent="0" marL="0">
+              <a:spcAft>
+                <a:spcPts val="800"/>
+              </a:spcAft>
+              <a:buNone/>
+            </a:pPr>
+            <a:r>
+              <a:rPr lang="en-US" sz="4000" b="1" dirty="0">
+                <a:solidFill>
+                  <a:srgbClr val="111111"/>
+                </a:solidFill>
+                <a:latin typeface="Times New Roman" pitchFamily="34" charset="0"/>
+                <a:ea typeface="Times New Roman" pitchFamily="34" charset="-122"/>
+                <a:cs typeface="Times New Roman" pitchFamily="34" charset="-120"/>
+              </a:rPr>
+              <a:t>Conditions: </a:t>
+            </a:r>
+            <a:pPr algn="l" indent="0" marL="0">
+              <a:spcAft>
+                <a:spcPts val="800"/>
+              </a:spcAft>
+              <a:buNone/>
+            </a:pPr>
+            <a:r>
+              <a:rPr lang="en-US" sz="4000" dirty="0">
+                <a:solidFill>
+                  <a:srgbClr val="111111"/>
+                </a:solidFill>
+                <a:latin typeface="Times New Roman" pitchFamily="34" charset="0"/>
+                <a:ea typeface="Times New Roman" pitchFamily="34" charset="-122"/>
+                <a:cs typeface="Times New Roman" pitchFamily="34" charset="-120"/>
+              </a:rPr>
+              <a:t>Balanced births and deaths, controlled immigration, advanced technology and good resource management.</a:t>
             </a:r>
             <a:endParaRPr lang="en-US" sz="4000" dirty="0"/>
           </a:p>
@@ -16598,7 +17746,7 @@
                 <a:ea typeface="Calibri" pitchFamily="34" charset="-122"/>
                 <a:cs typeface="Calibri" pitchFamily="34" charset="-120"/>
               </a:rPr>
-              <a:t>FORMATIVE EVALUATION</a:t>
+              <a:t>BOARD SUMMARY</a:t>
             </a:r>
             <a:endParaRPr lang="en-US" sz="1400" dirty="0"/>
           </a:p>
@@ -16663,7 +17811,7 @@
                 <a:ea typeface="Times New Roman" pitchFamily="34" charset="-122"/>
                 <a:cs typeface="Times New Roman" pitchFamily="34" charset="-120"/>
               </a:rPr>
-              <a:t>Evaluation 2</a:t>
+              <a:t>3. Optimum Population (continued)</a:t>
             </a:r>
             <a:endParaRPr lang="en-US" sz="3600" dirty="0"/>
           </a:p>
@@ -16697,7 +17845,7 @@
               <a:buNone/>
             </a:pPr>
             <a:r>
-              <a:rPr lang="en-US" sz="4000" dirty="0">
+              <a:rPr lang="en-US" sz="4000" b="1" dirty="0">
                 <a:solidFill>
                   <a:srgbClr val="111111"/>
                 </a:solidFill>
@@ -16705,7 +17853,24 @@
                 <a:ea typeface="Times New Roman" pitchFamily="34" charset="-122"/>
                 <a:cs typeface="Times New Roman" pitchFamily="34" charset="-120"/>
               </a:rPr>
-              <a:t>Give two indicators of overpopulation.</a:t>
+              <a:t>A moving target: </a:t>
+            </a:r>
+            <a:pPr algn="l" indent="0" marL="0">
+              <a:spcAft>
+                <a:spcPts val="800"/>
+              </a:spcAft>
+              <a:buNone/>
+            </a:pPr>
+            <a:r>
+              <a:rPr lang="en-US" sz="4000" dirty="0">
+                <a:solidFill>
+                  <a:srgbClr val="111111"/>
+                </a:solidFill>
+                <a:latin typeface="Times New Roman" pitchFamily="34" charset="0"/>
+                <a:ea typeface="Times New Roman" pitchFamily="34" charset="-122"/>
+                <a:cs typeface="Times New Roman" pitchFamily="34" charset="-120"/>
+              </a:rPr>
+              <a:t>The optimum changes with technology, so it needs continuous planning.</a:t>
             </a:r>
             <a:endParaRPr lang="en-US" sz="4000" dirty="0"/>
           </a:p>
@@ -16817,7 +17982,7 @@
                 <a:ea typeface="Calibri" pitchFamily="34" charset="-122"/>
                 <a:cs typeface="Calibri" pitchFamily="34" charset="-120"/>
               </a:rPr>
-              <a:t>FORMATIVE EVALUATION</a:t>
+              <a:t>BOARD SUMMARY</a:t>
             </a:r>
             <a:endParaRPr lang="en-US" sz="1400" dirty="0"/>
           </a:p>
@@ -16882,7 +18047,7 @@
                 <a:ea typeface="Times New Roman" pitchFamily="34" charset="-122"/>
                 <a:cs typeface="Times New Roman" pitchFamily="34" charset="-120"/>
               </a:rPr>
-              <a:t>Expected Answer</a:t>
+              <a:t>4. Carrying Capacity of the Land</a:t>
             </a:r>
             <a:endParaRPr lang="en-US" sz="3600" dirty="0"/>
           </a:p>
@@ -16916,7 +18081,7 @@
               <a:buNone/>
             </a:pPr>
             <a:r>
-              <a:rPr lang="en-US" sz="4000" dirty="0">
+              <a:rPr lang="en-US" sz="4000" i="1" dirty="0">
                 <a:solidFill>
                   <a:srgbClr val="111111"/>
                 </a:solidFill>
@@ -16924,7 +18089,44 @@
                 <a:ea typeface="Times New Roman" pitchFamily="34" charset="-122"/>
                 <a:cs typeface="Times New Roman" pitchFamily="34" charset="-120"/>
               </a:rPr>
-              <a:t>Unemployment and food shortages (also slums, emigration).</a:t>
+              <a:t>The carrying capacity of the land is presented as follows:</a:t>
+            </a:r>
+            <a:endParaRPr lang="en-US" sz="4000" dirty="0"/>
+          </a:p>
+          <a:p>
+            <a:pPr algn="l" indent="0" marL="0">
+              <a:spcAft>
+                <a:spcPts val="800"/>
+              </a:spcAft>
+              <a:buNone/>
+            </a:pPr>
+            <a:r>
+              <a:rPr lang="en-US" sz="4000" b="1" dirty="0">
+                <a:solidFill>
+                  <a:srgbClr val="111111"/>
+                </a:solidFill>
+                <a:latin typeface="Times New Roman" pitchFamily="34" charset="0"/>
+                <a:ea typeface="Times New Roman" pitchFamily="34" charset="-122"/>
+                <a:cs typeface="Times New Roman" pitchFamily="34" charset="-120"/>
+              </a:rPr>
+              <a:t>Meaning: </a:t>
+            </a:r>
+            <a:pPr algn="l" indent="0" marL="0">
+              <a:spcAft>
+                <a:spcPts val="800"/>
+              </a:spcAft>
+              <a:buNone/>
+            </a:pPr>
+            <a:r>
+              <a:rPr lang="en-US" sz="4000" dirty="0">
+                <a:solidFill>
+                  <a:srgbClr val="111111"/>
+                </a:solidFill>
+                <a:latin typeface="Times New Roman" pitchFamily="34" charset="0"/>
+                <a:ea typeface="Times New Roman" pitchFamily="34" charset="-122"/>
+                <a:cs typeface="Times New Roman" pitchFamily="34" charset="-120"/>
+              </a:rPr>
+              <a:t>It is the maximum population an environment can support for a long time without permanent damage.</a:t>
             </a:r>
             <a:endParaRPr lang="en-US" sz="4000" dirty="0"/>
           </a:p>
@@ -17036,15 +18238,115 @@
                 <a:ea typeface="Calibri" pitchFamily="34" charset="-122"/>
                 <a:cs typeface="Calibri" pitchFamily="34" charset="-120"/>
               </a:rPr>
-              <a:t>REMEDIATION</a:t>
+              <a:t>BOARD SUMMARY</a:t>
             </a:r>
             <a:endParaRPr lang="en-US" sz="1400" dirty="0"/>
+          </a:p>
+        </p:txBody>
+      </p:sp>
+      <p:sp>
+        <p:nvSpPr>
+          <p:cNvPr id="3" name="Text 1"/>
+          <p:cNvSpPr/>
+          <p:nvPr/>
+        </p:nvSpPr>
+        <p:spPr>
+          <a:xfrm>
+            <a:off x="365760" y="1005840"/>
+            <a:ext cx="11460175" cy="731520"/>
+          </a:xfrm>
+          <a:prstGeom prst="rect">
+            <a:avLst/>
+          </a:prstGeom>
+          <a:noFill/>
+          <a:ln/>
+        </p:spPr>
+        <p:txBody>
+          <a:bodyPr wrap="square" lIns="0" tIns="0" rIns="0" bIns="0" rtlCol="0" anchor="ctr">
+            <a:normAutofit/>
+          </a:bodyPr>
+          <a:lstStyle/>
+          <a:p>
+            <a:pPr algn="ctr" indent="0" marL="0">
+              <a:buNone/>
+            </a:pPr>
+            <a:r>
+              <a:rPr lang="en-US" sz="3600" b="1" dirty="0">
+                <a:solidFill>
+                  <a:srgbClr val="990011"/>
+                </a:solidFill>
+                <a:latin typeface="Times New Roman" pitchFamily="34" charset="0"/>
+                <a:ea typeface="Times New Roman" pitchFamily="34" charset="-122"/>
+                <a:cs typeface="Times New Roman" pitchFamily="34" charset="-120"/>
+              </a:rPr>
+              <a:t>4. Carrying Capacity of the Land</a:t>
+            </a:r>
+            <a:endParaRPr lang="en-US" sz="3600" dirty="0"/>
+          </a:p>
+        </p:txBody>
+      </p:sp>
+      <p:sp>
+        <p:nvSpPr>
+          <p:cNvPr id="4" name="Text 2"/>
+          <p:cNvSpPr/>
+          <p:nvPr/>
+        </p:nvSpPr>
+        <p:spPr>
+          <a:xfrm>
+            <a:off x="365760" y="1783080"/>
+            <a:ext cx="4846320" cy="4617720"/>
+          </a:xfrm>
+          <a:prstGeom prst="rect">
+            <a:avLst/>
+          </a:prstGeom>
+          <a:noFill/>
+          <a:ln/>
+        </p:spPr>
+        <p:txBody>
+          <a:bodyPr wrap="square" lIns="0" tIns="0" rIns="0" bIns="0" rtlCol="0" anchor="t"/>
+          <a:lstStyle/>
+          <a:p>
+            <a:pPr algn="l" indent="0" marL="0">
+              <a:spcAft>
+                <a:spcPts val="800"/>
+              </a:spcAft>
+              <a:buNone/>
+            </a:pPr>
+            <a:r>
+              <a:rPr lang="en-US" sz="3600" b="1" dirty="0">
+                <a:solidFill>
+                  <a:srgbClr val="111111"/>
+                </a:solidFill>
+                <a:latin typeface="Times New Roman" pitchFamily="34" charset="0"/>
+                <a:ea typeface="Times New Roman" pitchFamily="34" charset="-122"/>
+                <a:cs typeface="Times New Roman" pitchFamily="34" charset="-120"/>
+              </a:rPr>
+              <a:t>Warning signs: </a:t>
+            </a:r>
+            <a:pPr algn="l" indent="0" marL="0">
+              <a:spcAft>
+                <a:spcPts val="800"/>
+              </a:spcAft>
+              <a:buNone/>
+            </a:pPr>
+            <a:r>
+              <a:rPr lang="en-US" sz="3600" dirty="0">
+                <a:solidFill>
+                  <a:srgbClr val="111111"/>
+                </a:solidFill>
+                <a:latin typeface="Times New Roman" pitchFamily="34" charset="0"/>
+                <a:ea typeface="Times New Roman" pitchFamily="34" charset="-122"/>
+                <a:cs typeface="Times New Roman" pitchFamily="34" charset="-120"/>
+              </a:rPr>
+              <a:t>Falling water tables, soil erosion, deforestation and loss of biodiversity show that it is being exceeded.</a:t>
+            </a:r>
+            <a:endParaRPr lang="en-US" sz="3600" dirty="0"/>
           </a:p>
         </p:txBody>
       </p:sp>
       <p:pic>
         <p:nvPicPr>
-          <p:cNvPr id="3" name="Image 0" descr="/home/claude/f4/img/minesec_sheet.png">    </p:cNvPr>
+          <p:cNvPr id="5" name="Image 0" descr="/home/claude/f4/img/v2/f2t_cracked_soil.jpg">    </p:cNvPr>
           <p:cNvPicPr>
             <a:picLocks noChangeAspect="1"/>
           </p:cNvPicPr>
@@ -17058,8 +18360,8 @@
         </p:blipFill>
         <p:spPr>
           <a:xfrm>
-            <a:off x="0" y="658368"/>
-            <a:ext cx="3840480" cy="5833872"/>
+            <a:off x="5349240" y="2071212"/>
+            <a:ext cx="6659575" cy="3693983"/>
           </a:xfrm>
           <a:prstGeom prst="rect">
             <a:avLst/>
@@ -17068,14 +18370,14 @@
       </p:pic>
       <p:sp>
         <p:nvSpPr>
-          <p:cNvPr id="4" name="Text 1"/>
+          <p:cNvPr id="6" name="Text 3"/>
           <p:cNvSpPr/>
           <p:nvPr/>
         </p:nvSpPr>
         <p:spPr>
           <a:xfrm>
-            <a:off x="4069080" y="1005840"/>
-            <a:ext cx="7802575" cy="731520"/>
+            <a:off x="5349240" y="6089904"/>
+            <a:ext cx="6659575" cy="347472"/>
           </a:xfrm>
           <a:prstGeom prst="rect">
             <a:avLst/>
@@ -17084,134 +18386,24 @@
           <a:ln/>
         </p:spPr>
         <p:txBody>
-          <a:bodyPr wrap="square" lIns="0" tIns="0" rIns="0" bIns="0" rtlCol="0" anchor="ctr">
-            <a:normAutofit/>
-          </a:bodyPr>
+          <a:bodyPr wrap="square" lIns="0" tIns="0" rIns="0" bIns="0" rtlCol="0" anchor="ctr"/>
           <a:lstStyle/>
           <a:p>
             <a:pPr algn="ctr" indent="0" marL="0">
               <a:buNone/>
             </a:pPr>
             <a:r>
-              <a:rPr lang="en-US" sz="3600" b="1" dirty="0">
-                <a:solidFill>
-                  <a:srgbClr val="990011"/>
+              <a:rPr lang="en-US" sz="1600" i="1" dirty="0">
+                <a:solidFill>
+                  <a:srgbClr val="555555"/>
                 </a:solidFill>
                 <a:latin typeface="Times New Roman" pitchFamily="34" charset="0"/>
                 <a:ea typeface="Times New Roman" pitchFamily="34" charset="-122"/>
                 <a:cs typeface="Times New Roman" pitchFamily="34" charset="-120"/>
               </a:rPr>
-              <a:t>Remediation</a:t>
-            </a:r>
-            <a:endParaRPr lang="en-US" sz="3600" dirty="0"/>
-          </a:p>
-        </p:txBody>
-      </p:sp>
-      <p:sp>
-        <p:nvSpPr>
-          <p:cNvPr id="5" name="Text 2"/>
-          <p:cNvSpPr/>
-          <p:nvPr/>
-        </p:nvSpPr>
-        <p:spPr>
-          <a:xfrm>
-            <a:off x="4069080" y="1783080"/>
-            <a:ext cx="7802575" cy="4663440"/>
-          </a:xfrm>
-          <a:prstGeom prst="rect">
-            <a:avLst/>
-          </a:prstGeom>
-          <a:noFill/>
-          <a:ln/>
-        </p:spPr>
-        <p:txBody>
-          <a:bodyPr wrap="square" lIns="0" tIns="0" rIns="0" bIns="0" rtlCol="0" anchor="t"/>
-          <a:lstStyle/>
-          <a:p>
-            <a:pPr algn="l" indent="0" marL="0">
-              <a:spcAft>
-                <a:spcPts val="800"/>
-              </a:spcAft>
-              <a:buNone/>
-            </a:pPr>
-            <a:r>
-              <a:rPr lang="en-US" sz="4000" b="1" dirty="0">
-                <a:solidFill>
-                  <a:srgbClr val="111111"/>
-                </a:solidFill>
-                <a:latin typeface="Times New Roman" pitchFamily="34" charset="0"/>
-                <a:ea typeface="Times New Roman" pitchFamily="34" charset="-122"/>
-                <a:cs typeface="Times New Roman" pitchFamily="34" charset="-120"/>
-              </a:rPr>
-              <a:t>Fill in the blanks:</a:t>
-            </a:r>
-            <a:endParaRPr lang="en-US" sz="4000" dirty="0"/>
-          </a:p>
-          <a:p>
-            <a:pPr algn="l" marL="342900" indent="-342900">
-              <a:spcAft>
-                <a:spcPts val="800"/>
-              </a:spcAft>
-              <a:buSzPct val="100000"/>
-              <a:buFont typeface="+mj-lt"/>
-              <a:buAutoNum type="arabicPeriod" startAt="1"/>
-            </a:pPr>
-            <a:r>
-              <a:rPr lang="en-US" sz="4000" dirty="0">
-                <a:solidFill>
-                  <a:srgbClr val="111111"/>
-                </a:solidFill>
-                <a:latin typeface="Times New Roman" pitchFamily="34" charset="0"/>
-                <a:ea typeface="Times New Roman" pitchFamily="34" charset="-122"/>
-                <a:cs typeface="Times New Roman" pitchFamily="34" charset="-120"/>
-              </a:rPr>
-              <a:t>Too few people for the resources is ______.</a:t>
-            </a:r>
-            <a:endParaRPr lang="en-US" sz="4000" dirty="0"/>
-          </a:p>
-          <a:p>
-            <a:pPr algn="l" marL="342900" indent="-342900">
-              <a:spcAft>
-                <a:spcPts val="800"/>
-              </a:spcAft>
-              <a:buSzPct val="100000"/>
-              <a:buFont typeface="+mj-lt"/>
-              <a:buAutoNum type="arabicPeriod" startAt="1"/>
-            </a:pPr>
-            <a:r>
-              <a:rPr lang="en-US" sz="4000" dirty="0">
-                <a:solidFill>
-                  <a:srgbClr val="111111"/>
-                </a:solidFill>
-                <a:latin typeface="Times New Roman" pitchFamily="34" charset="0"/>
-                <a:ea typeface="Times New Roman" pitchFamily="34" charset="-122"/>
-                <a:cs typeface="Times New Roman" pitchFamily="34" charset="-120"/>
-              </a:rPr>
-              <a:t>The best balance of people and resources is ______ population.</a:t>
-            </a:r>
-            <a:endParaRPr lang="en-US" sz="4000" dirty="0"/>
-          </a:p>
-          <a:p>
-            <a:pPr algn="l" marL="342900" indent="-342900">
-              <a:spcAft>
-                <a:spcPts val="800"/>
-              </a:spcAft>
-              <a:buSzPct val="100000"/>
-              <a:buFont typeface="+mj-lt"/>
-              <a:buAutoNum type="arabicPeriod" startAt="1"/>
-            </a:pPr>
-            <a:r>
-              <a:rPr lang="en-US" sz="4000" dirty="0">
-                <a:solidFill>
-                  <a:srgbClr val="111111"/>
-                </a:solidFill>
-                <a:latin typeface="Times New Roman" pitchFamily="34" charset="0"/>
-                <a:ea typeface="Times New Roman" pitchFamily="34" charset="-122"/>
-                <a:cs typeface="Times New Roman" pitchFamily="34" charset="-120"/>
-              </a:rPr>
-              <a:t>Canada is an example of ______.</a:t>
-            </a:r>
-            <a:endParaRPr lang="en-US" sz="4000" dirty="0"/>
+              <a:t>Illustration: degraded soil</a:t>
+            </a:r>
+            <a:endParaRPr lang="en-US" sz="1600" dirty="0"/>
           </a:p>
         </p:txBody>
       </p:sp>
@@ -17321,7 +18513,7 @@
                 <a:ea typeface="Calibri" pitchFamily="34" charset="-122"/>
                 <a:cs typeface="Calibri" pitchFamily="34" charset="-120"/>
               </a:rPr>
-              <a:t>HOMEWORK</a:t>
+              <a:t>BOARD SUMMARY</a:t>
             </a:r>
             <a:endParaRPr lang="en-US" sz="1400" dirty="0"/>
           </a:p>
@@ -17344,7 +18536,7 @@
         <p:spPr>
           <a:xfrm>
             <a:off x="0" y="658368"/>
-            <a:ext cx="5120640" cy="5833872"/>
+            <a:ext cx="1463040" cy="5833872"/>
           </a:xfrm>
           <a:prstGeom prst="rect">
             <a:avLst/>
@@ -17359,8 +18551,8 @@
         </p:nvSpPr>
         <p:spPr>
           <a:xfrm>
-            <a:off x="5349240" y="1005840"/>
-            <a:ext cx="6522415" cy="731520"/>
+            <a:off x="1691640" y="1005840"/>
+            <a:ext cx="10180015" cy="731520"/>
           </a:xfrm>
           <a:prstGeom prst="rect">
             <a:avLst/>
@@ -17386,7 +18578,7 @@
                 <a:ea typeface="Times New Roman" pitchFamily="34" charset="-122"/>
                 <a:cs typeface="Times New Roman" pitchFamily="34" charset="-120"/>
               </a:rPr>
-              <a:t>Homework</a:t>
+              <a:t>4. Carrying Capacity of the Land</a:t>
             </a:r>
             <a:endParaRPr lang="en-US" sz="3600" dirty="0"/>
           </a:p>
@@ -17400,8 +18592,8 @@
         </p:nvSpPr>
         <p:spPr>
           <a:xfrm>
-            <a:off x="5349240" y="1783080"/>
-            <a:ext cx="6522415" cy="4663440"/>
+            <a:off x="1691640" y="1783080"/>
+            <a:ext cx="10180015" cy="4663440"/>
           </a:xfrm>
           <a:prstGeom prst="rect">
             <a:avLst/>
@@ -17420,7 +18612,7 @@
               <a:buNone/>
             </a:pPr>
             <a:r>
-              <a:rPr lang="en-US" sz="4000" dirty="0">
+              <a:rPr lang="en-US" sz="4000" b="1" dirty="0">
                 <a:solidFill>
                   <a:srgbClr val="111111"/>
                 </a:solidFill>
@@ -17428,7 +18620,70 @@
                 <a:ea typeface="Times New Roman" pitchFamily="34" charset="-122"/>
                 <a:cs typeface="Times New Roman" pitchFamily="34" charset="-120"/>
               </a:rPr>
-              <a:t>Is Cameroon over-, under- or optimally populated? Write a paragraph with evidence.</a:t>
+              <a:t>Factors:</a:t>
+            </a:r>
+            <a:endParaRPr lang="en-US" sz="4000" dirty="0"/>
+          </a:p>
+          <a:p>
+            <a:pPr algn="l" marL="342900" indent="-342900">
+              <a:spcAft>
+                <a:spcPts val="800"/>
+              </a:spcAft>
+              <a:buSzPct val="100000"/>
+              <a:buChar char="•"/>
+            </a:pPr>
+            <a:r>
+              <a:rPr lang="en-US" sz="4000" dirty="0">
+                <a:solidFill>
+                  <a:srgbClr val="111111"/>
+                </a:solidFill>
+                <a:latin typeface="Times New Roman" pitchFamily="34" charset="0"/>
+                <a:ea typeface="Times New Roman" pitchFamily="34" charset="-122"/>
+                <a:cs typeface="Times New Roman" pitchFamily="34" charset="-120"/>
+              </a:rPr>
+              <a:t>The amount of land, water and minerals.</a:t>
+            </a:r>
+            <a:endParaRPr lang="en-US" sz="4000" dirty="0"/>
+          </a:p>
+          <a:p>
+            <a:pPr algn="l" marL="342900" indent="-342900">
+              <a:spcAft>
+                <a:spcPts val="800"/>
+              </a:spcAft>
+              <a:buSzPct val="100000"/>
+              <a:buChar char="•"/>
+            </a:pPr>
+            <a:r>
+              <a:rPr lang="en-US" sz="4000" dirty="0">
+                <a:solidFill>
+                  <a:srgbClr val="111111"/>
+                </a:solidFill>
+                <a:latin typeface="Times New Roman" pitchFamily="34" charset="0"/>
+                <a:ea typeface="Times New Roman" pitchFamily="34" charset="-122"/>
+                <a:cs typeface="Times New Roman" pitchFamily="34" charset="-120"/>
+              </a:rPr>
+              <a:t>Technology: irrigation and tractors raise it compared with the hoe.</a:t>
+            </a:r>
+            <a:endParaRPr lang="en-US" sz="4000" dirty="0"/>
+          </a:p>
+          <a:p>
+            <a:pPr algn="l" marL="342900" indent="-342900">
+              <a:spcAft>
+                <a:spcPts val="800"/>
+              </a:spcAft>
+              <a:buSzPct val="100000"/>
+              <a:buChar char="•"/>
+            </a:pPr>
+            <a:r>
+              <a:rPr lang="en-US" sz="4000" dirty="0">
+                <a:solidFill>
+                  <a:srgbClr val="111111"/>
+                </a:solidFill>
+                <a:latin typeface="Times New Roman" pitchFamily="34" charset="0"/>
+                <a:ea typeface="Times New Roman" pitchFamily="34" charset="-122"/>
+                <a:cs typeface="Times New Roman" pitchFamily="34" charset="-120"/>
+              </a:rPr>
+              <a:t>Lifestyles: high consumption per person, as in the USA, lowers it.</a:t>
             </a:r>
             <a:endParaRPr lang="en-US" sz="4000" dirty="0"/>
           </a:p>
@@ -17647,7 +18902,7 @@
                 <a:ea typeface="Times New Roman" pitchFamily="34" charset="-122"/>
                 <a:cs typeface="Times New Roman" pitchFamily="34" charset="-120"/>
               </a:rPr>
-              <a:t>In our area, carrying capacity could be raised by irrigation from the Benue, using manure and improved seeds, soil conservation, controlled grazing and tree planting.</a:t>
+              <a:t>High unemployment, poverty and malnutrition, overcrowding, or pressure on schools and hospitals (any one).</a:t>
             </a:r>
             <a:endParaRPr lang="en-US" sz="4000" dirty="0"/>
           </a:p>
@@ -17759,7 +19014,7 @@
                 <a:ea typeface="Calibri" pitchFamily="34" charset="-122"/>
                 <a:cs typeface="Calibri" pitchFamily="34" charset="-120"/>
               </a:rPr>
-              <a:t>NEXT LESSON</a:t>
+              <a:t>BOARD SUMMARY</a:t>
             </a:r>
             <a:endParaRPr lang="en-US" sz="1400" dirty="0"/>
           </a:p>
@@ -17824,7 +19079,7 @@
                 <a:ea typeface="Times New Roman" pitchFamily="34" charset="-122"/>
                 <a:cs typeface="Times New Roman" pitchFamily="34" charset="-120"/>
               </a:rPr>
-              <a:t>Next Lesson</a:t>
+              <a:t>4. Carrying Capacity of the Land (continued)</a:t>
             </a:r>
             <a:endParaRPr lang="en-US" sz="3600" dirty="0"/>
           </a:p>
@@ -17848,10 +19103,10 @@
           <a:ln/>
         </p:spPr>
         <p:txBody>
-          <a:bodyPr wrap="square" lIns="0" tIns="0" rIns="0" bIns="0" rtlCol="0" anchor="ctr"/>
-          <a:lstStyle/>
-          <a:p>
-            <a:pPr algn="ctr" indent="0" marL="0">
+          <a:bodyPr wrap="square" lIns="0" tIns="0" rIns="0" bIns="0" rtlCol="0" anchor="t"/>
+          <a:lstStyle/>
+          <a:p>
+            <a:pPr algn="l" indent="0" marL="0">
               <a:spcAft>
                 <a:spcPts val="800"/>
               </a:spcAft>
@@ -17866,27 +19121,24 @@
                 <a:ea typeface="Times New Roman" pitchFamily="34" charset="-122"/>
                 <a:cs typeface="Times New Roman" pitchFamily="34" charset="-120"/>
               </a:rPr>
-              <a:t>Our next lesson will be on:</a:t>
-            </a:r>
-            <a:endParaRPr lang="en-US" sz="4000" dirty="0"/>
-          </a:p>
-          <a:p>
-            <a:pPr algn="ctr" indent="0" marL="0">
+              <a:t>If exceeded: </a:t>
+            </a:r>
+            <a:pPr algn="l" indent="0" marL="0">
               <a:spcAft>
                 <a:spcPts val="800"/>
               </a:spcAft>
               <a:buNone/>
             </a:pPr>
             <a:r>
-              <a:rPr lang="en-US" sz="4000" b="1" dirty="0">
-                <a:solidFill>
-                  <a:srgbClr val="990011"/>
+              <a:rPr lang="en-US" sz="4000" dirty="0">
+                <a:solidFill>
+                  <a:srgbClr val="111111"/>
                 </a:solidFill>
                 <a:latin typeface="Times New Roman" pitchFamily="34" charset="0"/>
                 <a:ea typeface="Times New Roman" pitchFamily="34" charset="-122"/>
                 <a:cs typeface="Times New Roman" pitchFamily="34" charset="-120"/>
               </a:rPr>
-              <a:t>Lesson 18: Theories of Population and Resources: Malthus and Boserup</a:t>
+              <a:t>Famine, disease, conflict, desertification and forced migration may follow.</a:t>
             </a:r>
             <a:endParaRPr lang="en-US" sz="4000" dirty="0"/>
           </a:p>
@@ -17998,7 +19250,7 @@
                 <a:ea typeface="Calibri" pitchFamily="34" charset="-122"/>
                 <a:cs typeface="Calibri" pitchFamily="34" charset="-120"/>
               </a:rPr>
-              <a:t>BILINGUAL GAME</a:t>
+              <a:t>BOARD SUMMARY</a:t>
             </a:r>
             <a:endParaRPr lang="en-US" sz="1400" dirty="0"/>
           </a:p>
@@ -18012,8 +19264,8 @@
         </p:nvSpPr>
         <p:spPr>
           <a:xfrm>
-            <a:off x="457200" y="1005840"/>
-            <a:ext cx="11277295" cy="731520"/>
+            <a:off x="365760" y="1005840"/>
+            <a:ext cx="11460175" cy="731520"/>
           </a:xfrm>
           <a:prstGeom prst="rect">
             <a:avLst/>
@@ -18022,7 +19274,9 @@
           <a:ln/>
         </p:spPr>
         <p:txBody>
-          <a:bodyPr wrap="square" lIns="0" tIns="0" rIns="0" bIns="0" rtlCol="0" anchor="ctr"/>
+          <a:bodyPr wrap="square" lIns="0" tIns="0" rIns="0" bIns="0" rtlCol="0" anchor="ctr">
+            <a:normAutofit/>
+          </a:bodyPr>
           <a:lstStyle/>
           <a:p>
             <a:pPr algn="ctr" indent="0" marL="0">
@@ -18037,6 +19291,1898 @@
                 <a:ea typeface="Times New Roman" pitchFamily="34" charset="-122"/>
                 <a:cs typeface="Times New Roman" pitchFamily="34" charset="-120"/>
               </a:rPr>
+              <a:t>4. Carrying Capacity of the Land</a:t>
+            </a:r>
+            <a:endParaRPr lang="en-US" sz="3600" dirty="0"/>
+          </a:p>
+        </p:txBody>
+      </p:sp>
+      <p:sp>
+        <p:nvSpPr>
+          <p:cNvPr id="4" name="Text 2"/>
+          <p:cNvSpPr/>
+          <p:nvPr/>
+        </p:nvSpPr>
+        <p:spPr>
+          <a:xfrm>
+            <a:off x="365760" y="1783080"/>
+            <a:ext cx="4846320" cy="4617720"/>
+          </a:xfrm>
+          <a:prstGeom prst="rect">
+            <a:avLst/>
+          </a:prstGeom>
+          <a:noFill/>
+          <a:ln/>
+        </p:spPr>
+        <p:txBody>
+          <a:bodyPr wrap="square" lIns="0" tIns="0" rIns="0" bIns="0" rtlCol="0" anchor="t"/>
+          <a:lstStyle/>
+          <a:p>
+            <a:pPr algn="l" indent="0" marL="0">
+              <a:spcAft>
+                <a:spcPts val="800"/>
+              </a:spcAft>
+              <a:buNone/>
+            </a:pPr>
+            <a:r>
+              <a:rPr lang="en-US" sz="3600" b="1" dirty="0">
+                <a:solidFill>
+                  <a:srgbClr val="111111"/>
+                </a:solidFill>
+                <a:latin typeface="Times New Roman" pitchFamily="34" charset="0"/>
+                <a:ea typeface="Times New Roman" pitchFamily="34" charset="-122"/>
+                <a:cs typeface="Times New Roman" pitchFamily="34" charset="-120"/>
+              </a:rPr>
+              <a:t>Solutions: </a:t>
+            </a:r>
+            <a:pPr algn="l" indent="0" marL="0">
+              <a:spcAft>
+                <a:spcPts val="800"/>
+              </a:spcAft>
+              <a:buNone/>
+            </a:pPr>
+            <a:r>
+              <a:rPr lang="en-US" sz="3600" dirty="0">
+                <a:solidFill>
+                  <a:srgbClr val="111111"/>
+                </a:solidFill>
+                <a:latin typeface="Times New Roman" pitchFamily="34" charset="0"/>
+                <a:ea typeface="Times New Roman" pitchFamily="34" charset="-122"/>
+                <a:cs typeface="Times New Roman" pitchFamily="34" charset="-120"/>
+              </a:rPr>
+              <a:t>Irrigation, renewable energy, recycling, sustainable farming and control of population growth.</a:t>
+            </a:r>
+            <a:endParaRPr lang="en-US" sz="3600" dirty="0"/>
+          </a:p>
+        </p:txBody>
+      </p:sp>
+      <p:pic>
+        <p:nvPicPr>
+          <p:cNvPr id="5" name="Image 0" descr="/home/claude/f4/img/v2/f2t_pivot.jpg">    </p:cNvPr>
+          <p:cNvPicPr>
+            <a:picLocks noChangeAspect="1"/>
+          </p:cNvPicPr>
+          <p:nvPr/>
+        </p:nvPicPr>
+        <p:blipFill>
+          <a:blip r:embed="rId1"/>
+          <a:stretch>
+            <a:fillRect/>
+          </a:stretch>
+        </p:blipFill>
+        <p:spPr>
+          <a:xfrm>
+            <a:off x="5349240" y="2071212"/>
+            <a:ext cx="6659575" cy="3693983"/>
+          </a:xfrm>
+          <a:prstGeom prst="rect">
+            <a:avLst/>
+          </a:prstGeom>
+        </p:spPr>
+      </p:pic>
+      <p:sp>
+        <p:nvSpPr>
+          <p:cNvPr id="6" name="Text 3"/>
+          <p:cNvSpPr/>
+          <p:nvPr/>
+        </p:nvSpPr>
+        <p:spPr>
+          <a:xfrm>
+            <a:off x="5349240" y="6089904"/>
+            <a:ext cx="6659575" cy="347472"/>
+          </a:xfrm>
+          <a:prstGeom prst="rect">
+            <a:avLst/>
+          </a:prstGeom>
+          <a:noFill/>
+          <a:ln/>
+        </p:spPr>
+        <p:txBody>
+          <a:bodyPr wrap="square" lIns="0" tIns="0" rIns="0" bIns="0" rtlCol="0" anchor="ctr"/>
+          <a:lstStyle/>
+          <a:p>
+            <a:pPr algn="ctr" indent="0" marL="0">
+              <a:buNone/>
+            </a:pPr>
+            <a:r>
+              <a:rPr lang="en-US" sz="1600" i="1" dirty="0">
+                <a:solidFill>
+                  <a:srgbClr val="555555"/>
+                </a:solidFill>
+                <a:latin typeface="Times New Roman" pitchFamily="34" charset="0"/>
+                <a:ea typeface="Times New Roman" pitchFamily="34" charset="-122"/>
+                <a:cs typeface="Times New Roman" pitchFamily="34" charset="-120"/>
+              </a:rPr>
+              <a:t>Illustration: irrigation</a:t>
+            </a:r>
+            <a:endParaRPr lang="en-US" sz="1600" dirty="0"/>
+          </a:p>
+        </p:txBody>
+      </p:sp>
+      <p:sp>
+        <p:nvSpPr>
+          <p:cNvPr id="25" name="Slide Number Placeholder 0"/>
+          <p:cNvSpPr>
+            <a:spLocks noGrp="1"/>
+          </p:cNvSpPr>
+          <p:nvPr>
+            <p:ph type="sldNum" sz="quarter" idx="4294967295"/>
+          </p:nvPr>
+        </p:nvSpPr>
+        <p:spPr>
+          <a:xfrm>
+            <a:off x="27432" y="91440"/>
+            <a:ext cx="585216" cy="475488"/>
+          </a:xfrm>
+          <a:prstGeom prst="rect">
+            <a:avLst/>
+          </a:prstGeom>
+          <a:extLst>
+            <a:ext uri="{C572A759-6A51-4108-AA02-DFA0A04FC94B}">
+              <ma14:wrappingTextBoxFlag xmlns:ma14="http://schemas.microsoft.com/office/mac/drawingml/2011/main" val="0"/>
+            </a:ext>
+          </a:extLst>
+        </p:spPr>
+        <p:txBody>
+          <a:bodyPr/>
+          <a:lstStyle>
+            <a:lvl1pPr>
+              <a:defRPr sz="2000">
+                <a:solidFill>
+                  <a:srgbClr val="FFFFFF"/>
+                </a:solidFill>
+                <a:latin typeface="Calibri"/>
+                <a:ea typeface="Calibri"/>
+                <a:cs typeface="Calibri"/>
+              </a:defRPr>
+            </a:lvl1pPr>
+          </a:lstStyle>
+          <a:p>
+            <a:pPr algn="ctr"/>
+            <a:fld id="{F7021451-1387-4CA6-816F-3879F97B5CBC}" type="slidenum">
+              <a:rPr b="1" lang="en-US"/>
+              <a:t>51</a:t>
+            </a:fld>
+            <a:endParaRPr lang="en-US"/>
+          </a:p>
+        </p:txBody>
+      </p:sp>
+    </p:spTree>
+  </p:cSld>
+  <p:clrMapOvr>
+    <a:masterClrMapping/>
+  </p:clrMapOvr>
+</p:sld>
+</file>
+
+<file path=ppt/slides/slide52.xml><?xml version="1.0" encoding="utf-8"?>
+<p:sld xmlns:a="http://schemas.openxmlformats.org/drawingml/2006/main" xmlns:r="http://schemas.openxmlformats.org/officeDocument/2006/relationships" xmlns:p="http://schemas.openxmlformats.org/presentationml/2006/main">
+  <p:cSld name="Slide 52">
+    <p:spTree>
+      <p:nvGrpSpPr>
+        <p:cNvPr id="1" name=""/>
+        <p:cNvGrpSpPr/>
+        <p:nvPr/>
+      </p:nvGrpSpPr>
+      <p:grpSpPr>
+        <a:xfrm>
+          <a:off x="0" y="0"/>
+          <a:ext cx="0" cy="0"/>
+          <a:chOff x="0" y="0"/>
+          <a:chExt cx="0" cy="0"/>
+        </a:xfrm>
+      </p:grpSpPr>
+      <p:sp>
+        <p:nvSpPr>
+          <p:cNvPr id="2" name="Text 0"/>
+          <p:cNvSpPr/>
+          <p:nvPr/>
+        </p:nvSpPr>
+        <p:spPr>
+          <a:xfrm>
+            <a:off x="457200" y="713232"/>
+            <a:ext cx="11368735" cy="274320"/>
+          </a:xfrm>
+          <a:prstGeom prst="rect">
+            <a:avLst/>
+          </a:prstGeom>
+          <a:noFill/>
+          <a:ln/>
+        </p:spPr>
+        <p:txBody>
+          <a:bodyPr wrap="square" lIns="0" tIns="0" rIns="0" bIns="0" rtlCol="0" anchor="ctr"/>
+          <a:lstStyle/>
+          <a:p>
+            <a:pPr algn="r" indent="0" marL="0">
+              <a:buNone/>
+            </a:pPr>
+            <a:r>
+              <a:rPr lang="en-US" sz="1400" b="1" dirty="0">
+                <a:solidFill>
+                  <a:srgbClr val="1C3F6E"/>
+                </a:solidFill>
+                <a:latin typeface="Calibri" pitchFamily="34" charset="0"/>
+                <a:ea typeface="Calibri" pitchFamily="34" charset="-122"/>
+                <a:cs typeface="Calibri" pitchFamily="34" charset="-120"/>
+              </a:rPr>
+              <a:t>FORMATIVE EVALUATION</a:t>
+            </a:r>
+            <a:endParaRPr lang="en-US" sz="1400" dirty="0"/>
+          </a:p>
+        </p:txBody>
+      </p:sp>
+      <p:pic>
+        <p:nvPicPr>
+          <p:cNvPr id="3" name="Image 0" descr="/home/claude/f4/img/minesec_sheet.png">    </p:cNvPr>
+          <p:cNvPicPr>
+            <a:picLocks noChangeAspect="1"/>
+          </p:cNvPicPr>
+          <p:nvPr/>
+        </p:nvPicPr>
+        <p:blipFill>
+          <a:blip r:embed="rId1"/>
+          <a:stretch>
+            <a:fillRect/>
+          </a:stretch>
+        </p:blipFill>
+        <p:spPr>
+          <a:xfrm>
+            <a:off x="0" y="658368"/>
+            <a:ext cx="5120640" cy="5833872"/>
+          </a:xfrm>
+          <a:prstGeom prst="rect">
+            <a:avLst/>
+          </a:prstGeom>
+        </p:spPr>
+      </p:pic>
+      <p:sp>
+        <p:nvSpPr>
+          <p:cNvPr id="4" name="Text 1"/>
+          <p:cNvSpPr/>
+          <p:nvPr/>
+        </p:nvSpPr>
+        <p:spPr>
+          <a:xfrm>
+            <a:off x="5349240" y="1005840"/>
+            <a:ext cx="6522415" cy="731520"/>
+          </a:xfrm>
+          <a:prstGeom prst="rect">
+            <a:avLst/>
+          </a:prstGeom>
+          <a:noFill/>
+          <a:ln/>
+        </p:spPr>
+        <p:txBody>
+          <a:bodyPr wrap="square" lIns="0" tIns="0" rIns="0" bIns="0" rtlCol="0" anchor="ctr">
+            <a:normAutofit/>
+          </a:bodyPr>
+          <a:lstStyle/>
+          <a:p>
+            <a:pPr algn="ctr" indent="0" marL="0">
+              <a:buNone/>
+            </a:pPr>
+            <a:r>
+              <a:rPr lang="en-US" sz="3600" b="1" dirty="0">
+                <a:solidFill>
+                  <a:srgbClr val="990011"/>
+                </a:solidFill>
+                <a:latin typeface="Times New Roman" pitchFamily="34" charset="0"/>
+                <a:ea typeface="Times New Roman" pitchFamily="34" charset="-122"/>
+                <a:cs typeface="Times New Roman" pitchFamily="34" charset="-120"/>
+              </a:rPr>
+              <a:t>Evaluation 1</a:t>
+            </a:r>
+            <a:endParaRPr lang="en-US" sz="3600" dirty="0"/>
+          </a:p>
+        </p:txBody>
+      </p:sp>
+      <p:sp>
+        <p:nvSpPr>
+          <p:cNvPr id="5" name="Text 2"/>
+          <p:cNvSpPr/>
+          <p:nvPr/>
+        </p:nvSpPr>
+        <p:spPr>
+          <a:xfrm>
+            <a:off x="5349240" y="1783080"/>
+            <a:ext cx="6522415" cy="4663440"/>
+          </a:xfrm>
+          <a:prstGeom prst="rect">
+            <a:avLst/>
+          </a:prstGeom>
+          <a:noFill/>
+          <a:ln/>
+        </p:spPr>
+        <p:txBody>
+          <a:bodyPr wrap="square" lIns="0" tIns="0" rIns="0" bIns="0" rtlCol="0" anchor="t"/>
+          <a:lstStyle/>
+          <a:p>
+            <a:pPr algn="l" indent="0" marL="0">
+              <a:spcAft>
+                <a:spcPts val="800"/>
+              </a:spcAft>
+              <a:buNone/>
+            </a:pPr>
+            <a:r>
+              <a:rPr lang="en-US" sz="4000" dirty="0">
+                <a:solidFill>
+                  <a:srgbClr val="111111"/>
+                </a:solidFill>
+                <a:latin typeface="Times New Roman" pitchFamily="34" charset="0"/>
+                <a:ea typeface="Times New Roman" pitchFamily="34" charset="-122"/>
+                <a:cs typeface="Times New Roman" pitchFamily="34" charset="-120"/>
+              </a:rPr>
+              <a:t>Give two causes and two solutions of overpopulation.</a:t>
+            </a:r>
+            <a:endParaRPr lang="en-US" sz="4000" dirty="0"/>
+          </a:p>
+        </p:txBody>
+      </p:sp>
+      <p:sp>
+        <p:nvSpPr>
+          <p:cNvPr id="25" name="Slide Number Placeholder 0"/>
+          <p:cNvSpPr>
+            <a:spLocks noGrp="1"/>
+          </p:cNvSpPr>
+          <p:nvPr>
+            <p:ph type="sldNum" sz="quarter" idx="4294967295"/>
+          </p:nvPr>
+        </p:nvSpPr>
+        <p:spPr>
+          <a:xfrm>
+            <a:off x="27432" y="91440"/>
+            <a:ext cx="585216" cy="475488"/>
+          </a:xfrm>
+          <a:prstGeom prst="rect">
+            <a:avLst/>
+          </a:prstGeom>
+          <a:extLst>
+            <a:ext uri="{C572A759-6A51-4108-AA02-DFA0A04FC94B}">
+              <ma14:wrappingTextBoxFlag xmlns:ma14="http://schemas.microsoft.com/office/mac/drawingml/2011/main" val="0"/>
+            </a:ext>
+          </a:extLst>
+        </p:spPr>
+        <p:txBody>
+          <a:bodyPr/>
+          <a:lstStyle>
+            <a:lvl1pPr>
+              <a:defRPr sz="2000">
+                <a:solidFill>
+                  <a:srgbClr val="FFFFFF"/>
+                </a:solidFill>
+                <a:latin typeface="Calibri"/>
+                <a:ea typeface="Calibri"/>
+                <a:cs typeface="Calibri"/>
+              </a:defRPr>
+            </a:lvl1pPr>
+          </a:lstStyle>
+          <a:p>
+            <a:pPr algn="ctr"/>
+            <a:fld id="{F7021451-1387-4CA6-816F-3879F97B5CBC}" type="slidenum">
+              <a:rPr b="1" lang="en-US"/>
+              <a:t>52</a:t>
+            </a:fld>
+            <a:endParaRPr lang="en-US"/>
+          </a:p>
+        </p:txBody>
+      </p:sp>
+    </p:spTree>
+  </p:cSld>
+  <p:clrMapOvr>
+    <a:masterClrMapping/>
+  </p:clrMapOvr>
+</p:sld>
+</file>
+
+<file path=ppt/slides/slide53.xml><?xml version="1.0" encoding="utf-8"?>
+<p:sld xmlns:a="http://schemas.openxmlformats.org/drawingml/2006/main" xmlns:r="http://schemas.openxmlformats.org/officeDocument/2006/relationships" xmlns:p="http://schemas.openxmlformats.org/presentationml/2006/main">
+  <p:cSld name="Slide 53">
+    <p:spTree>
+      <p:nvGrpSpPr>
+        <p:cNvPr id="1" name=""/>
+        <p:cNvGrpSpPr/>
+        <p:nvPr/>
+      </p:nvGrpSpPr>
+      <p:grpSpPr>
+        <a:xfrm>
+          <a:off x="0" y="0"/>
+          <a:ext cx="0" cy="0"/>
+          <a:chOff x="0" y="0"/>
+          <a:chExt cx="0" cy="0"/>
+        </a:xfrm>
+      </p:grpSpPr>
+      <p:sp>
+        <p:nvSpPr>
+          <p:cNvPr id="2" name="Text 0"/>
+          <p:cNvSpPr/>
+          <p:nvPr/>
+        </p:nvSpPr>
+        <p:spPr>
+          <a:xfrm>
+            <a:off x="457200" y="713232"/>
+            <a:ext cx="11368735" cy="274320"/>
+          </a:xfrm>
+          <a:prstGeom prst="rect">
+            <a:avLst/>
+          </a:prstGeom>
+          <a:noFill/>
+          <a:ln/>
+        </p:spPr>
+        <p:txBody>
+          <a:bodyPr wrap="square" lIns="0" tIns="0" rIns="0" bIns="0" rtlCol="0" anchor="ctr"/>
+          <a:lstStyle/>
+          <a:p>
+            <a:pPr algn="r" indent="0" marL="0">
+              <a:buNone/>
+            </a:pPr>
+            <a:r>
+              <a:rPr lang="en-US" sz="1400" b="1" dirty="0">
+                <a:solidFill>
+                  <a:srgbClr val="1C3F6E"/>
+                </a:solidFill>
+                <a:latin typeface="Calibri" pitchFamily="34" charset="0"/>
+                <a:ea typeface="Calibri" pitchFamily="34" charset="-122"/>
+                <a:cs typeface="Calibri" pitchFamily="34" charset="-120"/>
+              </a:rPr>
+              <a:t>FORMATIVE EVALUATION</a:t>
+            </a:r>
+            <a:endParaRPr lang="en-US" sz="1400" dirty="0"/>
+          </a:p>
+        </p:txBody>
+      </p:sp>
+      <p:pic>
+        <p:nvPicPr>
+          <p:cNvPr id="3" name="Image 0" descr="/home/claude/f4/img/minesec_sheet.png">    </p:cNvPr>
+          <p:cNvPicPr>
+            <a:picLocks noChangeAspect="1"/>
+          </p:cNvPicPr>
+          <p:nvPr/>
+        </p:nvPicPr>
+        <p:blipFill>
+          <a:blip r:embed="rId1"/>
+          <a:stretch>
+            <a:fillRect/>
+          </a:stretch>
+        </p:blipFill>
+        <p:spPr>
+          <a:xfrm>
+            <a:off x="0" y="658368"/>
+            <a:ext cx="5120640" cy="5833872"/>
+          </a:xfrm>
+          <a:prstGeom prst="rect">
+            <a:avLst/>
+          </a:prstGeom>
+        </p:spPr>
+      </p:pic>
+      <p:sp>
+        <p:nvSpPr>
+          <p:cNvPr id="4" name="Text 1"/>
+          <p:cNvSpPr/>
+          <p:nvPr/>
+        </p:nvSpPr>
+        <p:spPr>
+          <a:xfrm>
+            <a:off x="5349240" y="1005840"/>
+            <a:ext cx="6522415" cy="731520"/>
+          </a:xfrm>
+          <a:prstGeom prst="rect">
+            <a:avLst/>
+          </a:prstGeom>
+          <a:noFill/>
+          <a:ln/>
+        </p:spPr>
+        <p:txBody>
+          <a:bodyPr wrap="square" lIns="0" tIns="0" rIns="0" bIns="0" rtlCol="0" anchor="ctr">
+            <a:normAutofit/>
+          </a:bodyPr>
+          <a:lstStyle/>
+          <a:p>
+            <a:pPr algn="ctr" indent="0" marL="0">
+              <a:buNone/>
+            </a:pPr>
+            <a:r>
+              <a:rPr lang="en-US" sz="3600" b="1" dirty="0">
+                <a:solidFill>
+                  <a:srgbClr val="990011"/>
+                </a:solidFill>
+                <a:latin typeface="Times New Roman" pitchFamily="34" charset="0"/>
+                <a:ea typeface="Times New Roman" pitchFamily="34" charset="-122"/>
+                <a:cs typeface="Times New Roman" pitchFamily="34" charset="-120"/>
+              </a:rPr>
+              <a:t>Expected Answer</a:t>
+            </a:r>
+            <a:endParaRPr lang="en-US" sz="3600" dirty="0"/>
+          </a:p>
+        </p:txBody>
+      </p:sp>
+      <p:sp>
+        <p:nvSpPr>
+          <p:cNvPr id="5" name="Text 2"/>
+          <p:cNvSpPr/>
+          <p:nvPr/>
+        </p:nvSpPr>
+        <p:spPr>
+          <a:xfrm>
+            <a:off x="5349240" y="1783080"/>
+            <a:ext cx="6522415" cy="4663440"/>
+          </a:xfrm>
+          <a:prstGeom prst="rect">
+            <a:avLst/>
+          </a:prstGeom>
+          <a:noFill/>
+          <a:ln/>
+        </p:spPr>
+        <p:txBody>
+          <a:bodyPr wrap="square" lIns="0" tIns="0" rIns="0" bIns="0" rtlCol="0" anchor="t"/>
+          <a:lstStyle/>
+          <a:p>
+            <a:pPr algn="l" indent="0" marL="0">
+              <a:spcAft>
+                <a:spcPts val="800"/>
+              </a:spcAft>
+              <a:buNone/>
+            </a:pPr>
+            <a:r>
+              <a:rPr lang="en-US" sz="4000" dirty="0">
+                <a:solidFill>
+                  <a:srgbClr val="111111"/>
+                </a:solidFill>
+                <a:latin typeface="Times New Roman" pitchFamily="34" charset="0"/>
+                <a:ea typeface="Times New Roman" pitchFamily="34" charset="-122"/>
+                <a:cs typeface="Times New Roman" pitchFamily="34" charset="-120"/>
+              </a:rPr>
+              <a:t>Causes: high births, falling deaths, immigration; solutions: family planning, education of girls, technology, industrial jobs.</a:t>
+            </a:r>
+            <a:endParaRPr lang="en-US" sz="4000" dirty="0"/>
+          </a:p>
+        </p:txBody>
+      </p:sp>
+      <p:sp>
+        <p:nvSpPr>
+          <p:cNvPr id="25" name="Slide Number Placeholder 0"/>
+          <p:cNvSpPr>
+            <a:spLocks noGrp="1"/>
+          </p:cNvSpPr>
+          <p:nvPr>
+            <p:ph type="sldNum" sz="quarter" idx="4294967295"/>
+          </p:nvPr>
+        </p:nvSpPr>
+        <p:spPr>
+          <a:xfrm>
+            <a:off x="27432" y="91440"/>
+            <a:ext cx="585216" cy="475488"/>
+          </a:xfrm>
+          <a:prstGeom prst="rect">
+            <a:avLst/>
+          </a:prstGeom>
+          <a:extLst>
+            <a:ext uri="{C572A759-6A51-4108-AA02-DFA0A04FC94B}">
+              <ma14:wrappingTextBoxFlag xmlns:ma14="http://schemas.microsoft.com/office/mac/drawingml/2011/main" val="0"/>
+            </a:ext>
+          </a:extLst>
+        </p:spPr>
+        <p:txBody>
+          <a:bodyPr/>
+          <a:lstStyle>
+            <a:lvl1pPr>
+              <a:defRPr sz="2000">
+                <a:solidFill>
+                  <a:srgbClr val="FFFFFF"/>
+                </a:solidFill>
+                <a:latin typeface="Calibri"/>
+                <a:ea typeface="Calibri"/>
+                <a:cs typeface="Calibri"/>
+              </a:defRPr>
+            </a:lvl1pPr>
+          </a:lstStyle>
+          <a:p>
+            <a:pPr algn="ctr"/>
+            <a:fld id="{F7021451-1387-4CA6-816F-3879F97B5CBC}" type="slidenum">
+              <a:rPr b="1" lang="en-US"/>
+              <a:t>53</a:t>
+            </a:fld>
+            <a:endParaRPr lang="en-US"/>
+          </a:p>
+        </p:txBody>
+      </p:sp>
+    </p:spTree>
+  </p:cSld>
+  <p:clrMapOvr>
+    <a:masterClrMapping/>
+  </p:clrMapOvr>
+</p:sld>
+</file>
+
+<file path=ppt/slides/slide54.xml><?xml version="1.0" encoding="utf-8"?>
+<p:sld xmlns:a="http://schemas.openxmlformats.org/drawingml/2006/main" xmlns:r="http://schemas.openxmlformats.org/officeDocument/2006/relationships" xmlns:p="http://schemas.openxmlformats.org/presentationml/2006/main">
+  <p:cSld name="Slide 54">
+    <p:spTree>
+      <p:nvGrpSpPr>
+        <p:cNvPr id="1" name=""/>
+        <p:cNvGrpSpPr/>
+        <p:nvPr/>
+      </p:nvGrpSpPr>
+      <p:grpSpPr>
+        <a:xfrm>
+          <a:off x="0" y="0"/>
+          <a:ext cx="0" cy="0"/>
+          <a:chOff x="0" y="0"/>
+          <a:chExt cx="0" cy="0"/>
+        </a:xfrm>
+      </p:grpSpPr>
+      <p:sp>
+        <p:nvSpPr>
+          <p:cNvPr id="2" name="Text 0"/>
+          <p:cNvSpPr/>
+          <p:nvPr/>
+        </p:nvSpPr>
+        <p:spPr>
+          <a:xfrm>
+            <a:off x="457200" y="713232"/>
+            <a:ext cx="11368735" cy="274320"/>
+          </a:xfrm>
+          <a:prstGeom prst="rect">
+            <a:avLst/>
+          </a:prstGeom>
+          <a:noFill/>
+          <a:ln/>
+        </p:spPr>
+        <p:txBody>
+          <a:bodyPr wrap="square" lIns="0" tIns="0" rIns="0" bIns="0" rtlCol="0" anchor="ctr"/>
+          <a:lstStyle/>
+          <a:p>
+            <a:pPr algn="r" indent="0" marL="0">
+              <a:buNone/>
+            </a:pPr>
+            <a:r>
+              <a:rPr lang="en-US" sz="1400" b="1" dirty="0">
+                <a:solidFill>
+                  <a:srgbClr val="1C3F6E"/>
+                </a:solidFill>
+                <a:latin typeface="Calibri" pitchFamily="34" charset="0"/>
+                <a:ea typeface="Calibri" pitchFamily="34" charset="-122"/>
+                <a:cs typeface="Calibri" pitchFamily="34" charset="-120"/>
+              </a:rPr>
+              <a:t>FORMATIVE EVALUATION</a:t>
+            </a:r>
+            <a:endParaRPr lang="en-US" sz="1400" dirty="0"/>
+          </a:p>
+        </p:txBody>
+      </p:sp>
+      <p:pic>
+        <p:nvPicPr>
+          <p:cNvPr id="3" name="Image 0" descr="/home/claude/f4/img/minesec_sheet.png">    </p:cNvPr>
+          <p:cNvPicPr>
+            <a:picLocks noChangeAspect="1"/>
+          </p:cNvPicPr>
+          <p:nvPr/>
+        </p:nvPicPr>
+        <p:blipFill>
+          <a:blip r:embed="rId1"/>
+          <a:stretch>
+            <a:fillRect/>
+          </a:stretch>
+        </p:blipFill>
+        <p:spPr>
+          <a:xfrm>
+            <a:off x="0" y="658368"/>
+            <a:ext cx="5120640" cy="5833872"/>
+          </a:xfrm>
+          <a:prstGeom prst="rect">
+            <a:avLst/>
+          </a:prstGeom>
+        </p:spPr>
+      </p:pic>
+      <p:sp>
+        <p:nvSpPr>
+          <p:cNvPr id="4" name="Text 1"/>
+          <p:cNvSpPr/>
+          <p:nvPr/>
+        </p:nvSpPr>
+        <p:spPr>
+          <a:xfrm>
+            <a:off x="5349240" y="1005840"/>
+            <a:ext cx="6522415" cy="731520"/>
+          </a:xfrm>
+          <a:prstGeom prst="rect">
+            <a:avLst/>
+          </a:prstGeom>
+          <a:noFill/>
+          <a:ln/>
+        </p:spPr>
+        <p:txBody>
+          <a:bodyPr wrap="square" lIns="0" tIns="0" rIns="0" bIns="0" rtlCol="0" anchor="ctr">
+            <a:normAutofit/>
+          </a:bodyPr>
+          <a:lstStyle/>
+          <a:p>
+            <a:pPr algn="ctr" indent="0" marL="0">
+              <a:buNone/>
+            </a:pPr>
+            <a:r>
+              <a:rPr lang="en-US" sz="3600" b="1" dirty="0">
+                <a:solidFill>
+                  <a:srgbClr val="990011"/>
+                </a:solidFill>
+                <a:latin typeface="Times New Roman" pitchFamily="34" charset="0"/>
+                <a:ea typeface="Times New Roman" pitchFamily="34" charset="-122"/>
+                <a:cs typeface="Times New Roman" pitchFamily="34" charset="-120"/>
+              </a:rPr>
+              <a:t>Evaluation 2</a:t>
+            </a:r>
+            <a:endParaRPr lang="en-US" sz="3600" dirty="0"/>
+          </a:p>
+        </p:txBody>
+      </p:sp>
+      <p:sp>
+        <p:nvSpPr>
+          <p:cNvPr id="5" name="Text 2"/>
+          <p:cNvSpPr/>
+          <p:nvPr/>
+        </p:nvSpPr>
+        <p:spPr>
+          <a:xfrm>
+            <a:off x="5349240" y="1783080"/>
+            <a:ext cx="6522415" cy="4663440"/>
+          </a:xfrm>
+          <a:prstGeom prst="rect">
+            <a:avLst/>
+          </a:prstGeom>
+          <a:noFill/>
+          <a:ln/>
+        </p:spPr>
+        <p:txBody>
+          <a:bodyPr wrap="square" lIns="0" tIns="0" rIns="0" bIns="0" rtlCol="0" anchor="t"/>
+          <a:lstStyle/>
+          <a:p>
+            <a:pPr algn="l" indent="0" marL="0">
+              <a:spcAft>
+                <a:spcPts val="800"/>
+              </a:spcAft>
+              <a:buNone/>
+            </a:pPr>
+            <a:r>
+              <a:rPr lang="en-US" sz="4000" dirty="0">
+                <a:solidFill>
+                  <a:srgbClr val="111111"/>
+                </a:solidFill>
+                <a:latin typeface="Times New Roman" pitchFamily="34" charset="0"/>
+                <a:ea typeface="Times New Roman" pitchFamily="34" charset="-122"/>
+                <a:cs typeface="Times New Roman" pitchFamily="34" charset="-120"/>
+              </a:rPr>
+              <a:t>How can a new irrigation system change the carrying capacity and the optimum population?</a:t>
+            </a:r>
+            <a:endParaRPr lang="en-US" sz="4000" dirty="0"/>
+          </a:p>
+        </p:txBody>
+      </p:sp>
+      <p:sp>
+        <p:nvSpPr>
+          <p:cNvPr id="25" name="Slide Number Placeholder 0"/>
+          <p:cNvSpPr>
+            <a:spLocks noGrp="1"/>
+          </p:cNvSpPr>
+          <p:nvPr>
+            <p:ph type="sldNum" sz="quarter" idx="4294967295"/>
+          </p:nvPr>
+        </p:nvSpPr>
+        <p:spPr>
+          <a:xfrm>
+            <a:off x="27432" y="91440"/>
+            <a:ext cx="585216" cy="475488"/>
+          </a:xfrm>
+          <a:prstGeom prst="rect">
+            <a:avLst/>
+          </a:prstGeom>
+          <a:extLst>
+            <a:ext uri="{C572A759-6A51-4108-AA02-DFA0A04FC94B}">
+              <ma14:wrappingTextBoxFlag xmlns:ma14="http://schemas.microsoft.com/office/mac/drawingml/2011/main" val="0"/>
+            </a:ext>
+          </a:extLst>
+        </p:spPr>
+        <p:txBody>
+          <a:bodyPr/>
+          <a:lstStyle>
+            <a:lvl1pPr>
+              <a:defRPr sz="2000">
+                <a:solidFill>
+                  <a:srgbClr val="FFFFFF"/>
+                </a:solidFill>
+                <a:latin typeface="Calibri"/>
+                <a:ea typeface="Calibri"/>
+                <a:cs typeface="Calibri"/>
+              </a:defRPr>
+            </a:lvl1pPr>
+          </a:lstStyle>
+          <a:p>
+            <a:pPr algn="ctr"/>
+            <a:fld id="{F7021451-1387-4CA6-816F-3879F97B5CBC}" type="slidenum">
+              <a:rPr b="1" lang="en-US"/>
+              <a:t>54</a:t>
+            </a:fld>
+            <a:endParaRPr lang="en-US"/>
+          </a:p>
+        </p:txBody>
+      </p:sp>
+    </p:spTree>
+  </p:cSld>
+  <p:clrMapOvr>
+    <a:masterClrMapping/>
+  </p:clrMapOvr>
+</p:sld>
+</file>
+
+<file path=ppt/slides/slide55.xml><?xml version="1.0" encoding="utf-8"?>
+<p:sld xmlns:a="http://schemas.openxmlformats.org/drawingml/2006/main" xmlns:r="http://schemas.openxmlformats.org/officeDocument/2006/relationships" xmlns:p="http://schemas.openxmlformats.org/presentationml/2006/main">
+  <p:cSld name="Slide 55">
+    <p:spTree>
+      <p:nvGrpSpPr>
+        <p:cNvPr id="1" name=""/>
+        <p:cNvGrpSpPr/>
+        <p:nvPr/>
+      </p:nvGrpSpPr>
+      <p:grpSpPr>
+        <a:xfrm>
+          <a:off x="0" y="0"/>
+          <a:ext cx="0" cy="0"/>
+          <a:chOff x="0" y="0"/>
+          <a:chExt cx="0" cy="0"/>
+        </a:xfrm>
+      </p:grpSpPr>
+      <p:sp>
+        <p:nvSpPr>
+          <p:cNvPr id="2" name="Text 0"/>
+          <p:cNvSpPr/>
+          <p:nvPr/>
+        </p:nvSpPr>
+        <p:spPr>
+          <a:xfrm>
+            <a:off x="457200" y="713232"/>
+            <a:ext cx="11368735" cy="274320"/>
+          </a:xfrm>
+          <a:prstGeom prst="rect">
+            <a:avLst/>
+          </a:prstGeom>
+          <a:noFill/>
+          <a:ln/>
+        </p:spPr>
+        <p:txBody>
+          <a:bodyPr wrap="square" lIns="0" tIns="0" rIns="0" bIns="0" rtlCol="0" anchor="ctr"/>
+          <a:lstStyle/>
+          <a:p>
+            <a:pPr algn="r" indent="0" marL="0">
+              <a:buNone/>
+            </a:pPr>
+            <a:r>
+              <a:rPr lang="en-US" sz="1400" b="1" dirty="0">
+                <a:solidFill>
+                  <a:srgbClr val="1C3F6E"/>
+                </a:solidFill>
+                <a:latin typeface="Calibri" pitchFamily="34" charset="0"/>
+                <a:ea typeface="Calibri" pitchFamily="34" charset="-122"/>
+                <a:cs typeface="Calibri" pitchFamily="34" charset="-120"/>
+              </a:rPr>
+              <a:t>FORMATIVE EVALUATION</a:t>
+            </a:r>
+            <a:endParaRPr lang="en-US" sz="1400" dirty="0"/>
+          </a:p>
+        </p:txBody>
+      </p:sp>
+      <p:pic>
+        <p:nvPicPr>
+          <p:cNvPr id="3" name="Image 0" descr="/home/claude/f4/img/minesec_sheet.png">    </p:cNvPr>
+          <p:cNvPicPr>
+            <a:picLocks noChangeAspect="1"/>
+          </p:cNvPicPr>
+          <p:nvPr/>
+        </p:nvPicPr>
+        <p:blipFill>
+          <a:blip r:embed="rId1"/>
+          <a:stretch>
+            <a:fillRect/>
+          </a:stretch>
+        </p:blipFill>
+        <p:spPr>
+          <a:xfrm>
+            <a:off x="0" y="658368"/>
+            <a:ext cx="5120640" cy="5833872"/>
+          </a:xfrm>
+          <a:prstGeom prst="rect">
+            <a:avLst/>
+          </a:prstGeom>
+        </p:spPr>
+      </p:pic>
+      <p:sp>
+        <p:nvSpPr>
+          <p:cNvPr id="4" name="Text 1"/>
+          <p:cNvSpPr/>
+          <p:nvPr/>
+        </p:nvSpPr>
+        <p:spPr>
+          <a:xfrm>
+            <a:off x="5349240" y="1005840"/>
+            <a:ext cx="6522415" cy="731520"/>
+          </a:xfrm>
+          <a:prstGeom prst="rect">
+            <a:avLst/>
+          </a:prstGeom>
+          <a:noFill/>
+          <a:ln/>
+        </p:spPr>
+        <p:txBody>
+          <a:bodyPr wrap="square" lIns="0" tIns="0" rIns="0" bIns="0" rtlCol="0" anchor="ctr">
+            <a:normAutofit/>
+          </a:bodyPr>
+          <a:lstStyle/>
+          <a:p>
+            <a:pPr algn="ctr" indent="0" marL="0">
+              <a:buNone/>
+            </a:pPr>
+            <a:r>
+              <a:rPr lang="en-US" sz="3600" b="1" dirty="0">
+                <a:solidFill>
+                  <a:srgbClr val="990011"/>
+                </a:solidFill>
+                <a:latin typeface="Times New Roman" pitchFamily="34" charset="0"/>
+                <a:ea typeface="Times New Roman" pitchFamily="34" charset="-122"/>
+                <a:cs typeface="Times New Roman" pitchFamily="34" charset="-120"/>
+              </a:rPr>
+              <a:t>Expected Answer</a:t>
+            </a:r>
+            <a:endParaRPr lang="en-US" sz="3600" dirty="0"/>
+          </a:p>
+        </p:txBody>
+      </p:sp>
+      <p:sp>
+        <p:nvSpPr>
+          <p:cNvPr id="5" name="Text 2"/>
+          <p:cNvSpPr/>
+          <p:nvPr/>
+        </p:nvSpPr>
+        <p:spPr>
+          <a:xfrm>
+            <a:off x="5349240" y="1783080"/>
+            <a:ext cx="6522415" cy="4663440"/>
+          </a:xfrm>
+          <a:prstGeom prst="rect">
+            <a:avLst/>
+          </a:prstGeom>
+          <a:noFill/>
+          <a:ln/>
+        </p:spPr>
+        <p:txBody>
+          <a:bodyPr wrap="square" lIns="0" tIns="0" rIns="0" bIns="0" rtlCol="0" anchor="t"/>
+          <a:lstStyle/>
+          <a:p>
+            <a:pPr algn="l" indent="0" marL="0">
+              <a:spcAft>
+                <a:spcPts val="800"/>
+              </a:spcAft>
+              <a:buNone/>
+            </a:pPr>
+            <a:r>
+              <a:rPr lang="en-US" sz="4000" dirty="0">
+                <a:solidFill>
+                  <a:srgbClr val="111111"/>
+                </a:solidFill>
+                <a:latin typeface="Times New Roman" pitchFamily="34" charset="0"/>
+                <a:ea typeface="Times New Roman" pitchFamily="34" charset="-122"/>
+                <a:cs typeface="Times New Roman" pitchFamily="34" charset="-120"/>
+              </a:rPr>
+              <a:t>It raises both, because the same land can feed more people at a higher standard of living.</a:t>
+            </a:r>
+            <a:endParaRPr lang="en-US" sz="4000" dirty="0"/>
+          </a:p>
+        </p:txBody>
+      </p:sp>
+      <p:sp>
+        <p:nvSpPr>
+          <p:cNvPr id="25" name="Slide Number Placeholder 0"/>
+          <p:cNvSpPr>
+            <a:spLocks noGrp="1"/>
+          </p:cNvSpPr>
+          <p:nvPr>
+            <p:ph type="sldNum" sz="quarter" idx="4294967295"/>
+          </p:nvPr>
+        </p:nvSpPr>
+        <p:spPr>
+          <a:xfrm>
+            <a:off x="27432" y="91440"/>
+            <a:ext cx="585216" cy="475488"/>
+          </a:xfrm>
+          <a:prstGeom prst="rect">
+            <a:avLst/>
+          </a:prstGeom>
+          <a:extLst>
+            <a:ext uri="{C572A759-6A51-4108-AA02-DFA0A04FC94B}">
+              <ma14:wrappingTextBoxFlag xmlns:ma14="http://schemas.microsoft.com/office/mac/drawingml/2011/main" val="0"/>
+            </a:ext>
+          </a:extLst>
+        </p:spPr>
+        <p:txBody>
+          <a:bodyPr/>
+          <a:lstStyle>
+            <a:lvl1pPr>
+              <a:defRPr sz="2000">
+                <a:solidFill>
+                  <a:srgbClr val="FFFFFF"/>
+                </a:solidFill>
+                <a:latin typeface="Calibri"/>
+                <a:ea typeface="Calibri"/>
+                <a:cs typeface="Calibri"/>
+              </a:defRPr>
+            </a:lvl1pPr>
+          </a:lstStyle>
+          <a:p>
+            <a:pPr algn="ctr"/>
+            <a:fld id="{F7021451-1387-4CA6-816F-3879F97B5CBC}" type="slidenum">
+              <a:rPr b="1" lang="en-US"/>
+              <a:t>55</a:t>
+            </a:fld>
+            <a:endParaRPr lang="en-US"/>
+          </a:p>
+        </p:txBody>
+      </p:sp>
+    </p:spTree>
+  </p:cSld>
+  <p:clrMapOvr>
+    <a:masterClrMapping/>
+  </p:clrMapOvr>
+</p:sld>
+</file>
+
+<file path=ppt/slides/slide56.xml><?xml version="1.0" encoding="utf-8"?>
+<p:sld xmlns:a="http://schemas.openxmlformats.org/drawingml/2006/main" xmlns:r="http://schemas.openxmlformats.org/officeDocument/2006/relationships" xmlns:p="http://schemas.openxmlformats.org/presentationml/2006/main">
+  <p:cSld name="Slide 56">
+    <p:spTree>
+      <p:nvGrpSpPr>
+        <p:cNvPr id="1" name=""/>
+        <p:cNvGrpSpPr/>
+        <p:nvPr/>
+      </p:nvGrpSpPr>
+      <p:grpSpPr>
+        <a:xfrm>
+          <a:off x="0" y="0"/>
+          <a:ext cx="0" cy="0"/>
+          <a:chOff x="0" y="0"/>
+          <a:chExt cx="0" cy="0"/>
+        </a:xfrm>
+      </p:grpSpPr>
+      <p:sp>
+        <p:nvSpPr>
+          <p:cNvPr id="2" name="Text 0"/>
+          <p:cNvSpPr/>
+          <p:nvPr/>
+        </p:nvSpPr>
+        <p:spPr>
+          <a:xfrm>
+            <a:off x="457200" y="713232"/>
+            <a:ext cx="11368735" cy="274320"/>
+          </a:xfrm>
+          <a:prstGeom prst="rect">
+            <a:avLst/>
+          </a:prstGeom>
+          <a:noFill/>
+          <a:ln/>
+        </p:spPr>
+        <p:txBody>
+          <a:bodyPr wrap="square" lIns="0" tIns="0" rIns="0" bIns="0" rtlCol="0" anchor="ctr"/>
+          <a:lstStyle/>
+          <a:p>
+            <a:pPr algn="r" indent="0" marL="0">
+              <a:buNone/>
+            </a:pPr>
+            <a:r>
+              <a:rPr lang="en-US" sz="1400" b="1" dirty="0">
+                <a:solidFill>
+                  <a:srgbClr val="1C3F6E"/>
+                </a:solidFill>
+                <a:latin typeface="Calibri" pitchFamily="34" charset="0"/>
+                <a:ea typeface="Calibri" pitchFamily="34" charset="-122"/>
+                <a:cs typeface="Calibri" pitchFamily="34" charset="-120"/>
+              </a:rPr>
+              <a:t>REMEDIATION</a:t>
+            </a:r>
+            <a:endParaRPr lang="en-US" sz="1400" dirty="0"/>
+          </a:p>
+        </p:txBody>
+      </p:sp>
+      <p:pic>
+        <p:nvPicPr>
+          <p:cNvPr id="3" name="Image 0" descr="/home/claude/f4/img/minesec_sheet.png">    </p:cNvPr>
+          <p:cNvPicPr>
+            <a:picLocks noChangeAspect="1"/>
+          </p:cNvPicPr>
+          <p:nvPr/>
+        </p:nvPicPr>
+        <p:blipFill>
+          <a:blip r:embed="rId1"/>
+          <a:stretch>
+            <a:fillRect/>
+          </a:stretch>
+        </p:blipFill>
+        <p:spPr>
+          <a:xfrm>
+            <a:off x="0" y="658368"/>
+            <a:ext cx="1463040" cy="5833872"/>
+          </a:xfrm>
+          <a:prstGeom prst="rect">
+            <a:avLst/>
+          </a:prstGeom>
+        </p:spPr>
+      </p:pic>
+      <p:sp>
+        <p:nvSpPr>
+          <p:cNvPr id="4" name="Text 1"/>
+          <p:cNvSpPr/>
+          <p:nvPr/>
+        </p:nvSpPr>
+        <p:spPr>
+          <a:xfrm>
+            <a:off x="1691640" y="1005840"/>
+            <a:ext cx="10180015" cy="731520"/>
+          </a:xfrm>
+          <a:prstGeom prst="rect">
+            <a:avLst/>
+          </a:prstGeom>
+          <a:noFill/>
+          <a:ln/>
+        </p:spPr>
+        <p:txBody>
+          <a:bodyPr wrap="square" lIns="0" tIns="0" rIns="0" bIns="0" rtlCol="0" anchor="ctr">
+            <a:normAutofit/>
+          </a:bodyPr>
+          <a:lstStyle/>
+          <a:p>
+            <a:pPr algn="ctr" indent="0" marL="0">
+              <a:buNone/>
+            </a:pPr>
+            <a:r>
+              <a:rPr lang="en-US" sz="3600" b="1" dirty="0">
+                <a:solidFill>
+                  <a:srgbClr val="990011"/>
+                </a:solidFill>
+                <a:latin typeface="Times New Roman" pitchFamily="34" charset="0"/>
+                <a:ea typeface="Times New Roman" pitchFamily="34" charset="-122"/>
+                <a:cs typeface="Times New Roman" pitchFamily="34" charset="-120"/>
+              </a:rPr>
+              <a:t>Remediation</a:t>
+            </a:r>
+            <a:endParaRPr lang="en-US" sz="3600" dirty="0"/>
+          </a:p>
+        </p:txBody>
+      </p:sp>
+      <p:sp>
+        <p:nvSpPr>
+          <p:cNvPr id="5" name="Text 2"/>
+          <p:cNvSpPr/>
+          <p:nvPr/>
+        </p:nvSpPr>
+        <p:spPr>
+          <a:xfrm>
+            <a:off x="1691640" y="1783080"/>
+            <a:ext cx="10180015" cy="4663440"/>
+          </a:xfrm>
+          <a:prstGeom prst="rect">
+            <a:avLst/>
+          </a:prstGeom>
+          <a:noFill/>
+          <a:ln/>
+        </p:spPr>
+        <p:txBody>
+          <a:bodyPr wrap="square" lIns="0" tIns="0" rIns="0" bIns="0" rtlCol="0" anchor="t"/>
+          <a:lstStyle/>
+          <a:p>
+            <a:pPr algn="l" indent="0" marL="0">
+              <a:spcAft>
+                <a:spcPts val="800"/>
+              </a:spcAft>
+              <a:buNone/>
+            </a:pPr>
+            <a:r>
+              <a:rPr lang="en-US" sz="4000" b="1" dirty="0">
+                <a:solidFill>
+                  <a:srgbClr val="111111"/>
+                </a:solidFill>
+                <a:latin typeface="Times New Roman" pitchFamily="34" charset="0"/>
+                <a:ea typeface="Times New Roman" pitchFamily="34" charset="-122"/>
+                <a:cs typeface="Times New Roman" pitchFamily="34" charset="-120"/>
+              </a:rPr>
+              <a:t>Fill in the blanks:</a:t>
+            </a:r>
+            <a:endParaRPr lang="en-US" sz="4000" dirty="0"/>
+          </a:p>
+          <a:p>
+            <a:pPr algn="l" marL="342900" indent="-342900">
+              <a:spcAft>
+                <a:spcPts val="800"/>
+              </a:spcAft>
+              <a:buSzPct val="100000"/>
+              <a:buFont typeface="+mj-lt"/>
+              <a:buAutoNum type="arabicPeriod" startAt="1"/>
+            </a:pPr>
+            <a:r>
+              <a:rPr lang="en-US" sz="4000" dirty="0">
+                <a:solidFill>
+                  <a:srgbClr val="111111"/>
+                </a:solidFill>
+                <a:latin typeface="Times New Roman" pitchFamily="34" charset="0"/>
+                <a:ea typeface="Times New Roman" pitchFamily="34" charset="-122"/>
+                <a:cs typeface="Times New Roman" pitchFamily="34" charset="-120"/>
+              </a:rPr>
+              <a:t>Too few people to use resources is ______.</a:t>
+            </a:r>
+            <a:endParaRPr lang="en-US" sz="4000" dirty="0"/>
+          </a:p>
+          <a:p>
+            <a:pPr algn="l" marL="342900" indent="-342900">
+              <a:spcAft>
+                <a:spcPts val="800"/>
+              </a:spcAft>
+              <a:buSzPct val="100000"/>
+              <a:buFont typeface="+mj-lt"/>
+              <a:buAutoNum type="arabicPeriod" startAt="1"/>
+            </a:pPr>
+            <a:r>
+              <a:rPr lang="en-US" sz="4000" dirty="0">
+                <a:solidFill>
+                  <a:srgbClr val="111111"/>
+                </a:solidFill>
+                <a:latin typeface="Times New Roman" pitchFamily="34" charset="0"/>
+                <a:ea typeface="Times New Roman" pitchFamily="34" charset="-122"/>
+                <a:cs typeface="Times New Roman" pitchFamily="34" charset="-120"/>
+              </a:rPr>
+              <a:t>The ideal number of people is the ______ population.</a:t>
+            </a:r>
+            <a:endParaRPr lang="en-US" sz="4000" dirty="0"/>
+          </a:p>
+          <a:p>
+            <a:pPr algn="l" marL="342900" indent="-342900">
+              <a:spcAft>
+                <a:spcPts val="800"/>
+              </a:spcAft>
+              <a:buSzPct val="100000"/>
+              <a:buFont typeface="+mj-lt"/>
+              <a:buAutoNum type="arabicPeriod" startAt="1"/>
+            </a:pPr>
+            <a:r>
+              <a:rPr lang="en-US" sz="4000" dirty="0">
+                <a:solidFill>
+                  <a:srgbClr val="111111"/>
+                </a:solidFill>
+                <a:latin typeface="Times New Roman" pitchFamily="34" charset="0"/>
+                <a:ea typeface="Times New Roman" pitchFamily="34" charset="-122"/>
+                <a:cs typeface="Times New Roman" pitchFamily="34" charset="-120"/>
+              </a:rPr>
+              <a:t>Irrigation ______ the carrying capacity.</a:t>
+            </a:r>
+            <a:endParaRPr lang="en-US" sz="4000" dirty="0"/>
+          </a:p>
+        </p:txBody>
+      </p:sp>
+      <p:sp>
+        <p:nvSpPr>
+          <p:cNvPr id="25" name="Slide Number Placeholder 0"/>
+          <p:cNvSpPr>
+            <a:spLocks noGrp="1"/>
+          </p:cNvSpPr>
+          <p:nvPr>
+            <p:ph type="sldNum" sz="quarter" idx="4294967295"/>
+          </p:nvPr>
+        </p:nvSpPr>
+        <p:spPr>
+          <a:xfrm>
+            <a:off x="27432" y="91440"/>
+            <a:ext cx="585216" cy="475488"/>
+          </a:xfrm>
+          <a:prstGeom prst="rect">
+            <a:avLst/>
+          </a:prstGeom>
+          <a:extLst>
+            <a:ext uri="{C572A759-6A51-4108-AA02-DFA0A04FC94B}">
+              <ma14:wrappingTextBoxFlag xmlns:ma14="http://schemas.microsoft.com/office/mac/drawingml/2011/main" val="0"/>
+            </a:ext>
+          </a:extLst>
+        </p:spPr>
+        <p:txBody>
+          <a:bodyPr/>
+          <a:lstStyle>
+            <a:lvl1pPr>
+              <a:defRPr sz="2000">
+                <a:solidFill>
+                  <a:srgbClr val="FFFFFF"/>
+                </a:solidFill>
+                <a:latin typeface="Calibri"/>
+                <a:ea typeface="Calibri"/>
+                <a:cs typeface="Calibri"/>
+              </a:defRPr>
+            </a:lvl1pPr>
+          </a:lstStyle>
+          <a:p>
+            <a:pPr algn="ctr"/>
+            <a:fld id="{F7021451-1387-4CA6-816F-3879F97B5CBC}" type="slidenum">
+              <a:rPr b="1" lang="en-US"/>
+              <a:t>56</a:t>
+            </a:fld>
+            <a:endParaRPr lang="en-US"/>
+          </a:p>
+        </p:txBody>
+      </p:sp>
+    </p:spTree>
+  </p:cSld>
+  <p:clrMapOvr>
+    <a:masterClrMapping/>
+  </p:clrMapOvr>
+</p:sld>
+</file>
+
+<file path=ppt/slides/slide57.xml><?xml version="1.0" encoding="utf-8"?>
+<p:sld xmlns:a="http://schemas.openxmlformats.org/drawingml/2006/main" xmlns:r="http://schemas.openxmlformats.org/officeDocument/2006/relationships" xmlns:p="http://schemas.openxmlformats.org/presentationml/2006/main">
+  <p:cSld name="Slide 57">
+    <p:spTree>
+      <p:nvGrpSpPr>
+        <p:cNvPr id="1" name=""/>
+        <p:cNvGrpSpPr/>
+        <p:nvPr/>
+      </p:nvGrpSpPr>
+      <p:grpSpPr>
+        <a:xfrm>
+          <a:off x="0" y="0"/>
+          <a:ext cx="0" cy="0"/>
+          <a:chOff x="0" y="0"/>
+          <a:chExt cx="0" cy="0"/>
+        </a:xfrm>
+      </p:grpSpPr>
+      <p:sp>
+        <p:nvSpPr>
+          <p:cNvPr id="2" name="Text 0"/>
+          <p:cNvSpPr/>
+          <p:nvPr/>
+        </p:nvSpPr>
+        <p:spPr>
+          <a:xfrm>
+            <a:off x="457200" y="713232"/>
+            <a:ext cx="11368735" cy="274320"/>
+          </a:xfrm>
+          <a:prstGeom prst="rect">
+            <a:avLst/>
+          </a:prstGeom>
+          <a:noFill/>
+          <a:ln/>
+        </p:spPr>
+        <p:txBody>
+          <a:bodyPr wrap="square" lIns="0" tIns="0" rIns="0" bIns="0" rtlCol="0" anchor="ctr"/>
+          <a:lstStyle/>
+          <a:p>
+            <a:pPr algn="r" indent="0" marL="0">
+              <a:buNone/>
+            </a:pPr>
+            <a:r>
+              <a:rPr lang="en-US" sz="1400" b="1" dirty="0">
+                <a:solidFill>
+                  <a:srgbClr val="1C3F6E"/>
+                </a:solidFill>
+                <a:latin typeface="Calibri" pitchFamily="34" charset="0"/>
+                <a:ea typeface="Calibri" pitchFamily="34" charset="-122"/>
+                <a:cs typeface="Calibri" pitchFamily="34" charset="-120"/>
+              </a:rPr>
+              <a:t>HOMEWORK</a:t>
+            </a:r>
+            <a:endParaRPr lang="en-US" sz="1400" dirty="0"/>
+          </a:p>
+        </p:txBody>
+      </p:sp>
+      <p:pic>
+        <p:nvPicPr>
+          <p:cNvPr id="3" name="Image 0" descr="/home/claude/f4/img/minesec_sheet.png">    </p:cNvPr>
+          <p:cNvPicPr>
+            <a:picLocks noChangeAspect="1"/>
+          </p:cNvPicPr>
+          <p:nvPr/>
+        </p:nvPicPr>
+        <p:blipFill>
+          <a:blip r:embed="rId1"/>
+          <a:stretch>
+            <a:fillRect/>
+          </a:stretch>
+        </p:blipFill>
+        <p:spPr>
+          <a:xfrm>
+            <a:off x="0" y="658368"/>
+            <a:ext cx="5120640" cy="5833872"/>
+          </a:xfrm>
+          <a:prstGeom prst="rect">
+            <a:avLst/>
+          </a:prstGeom>
+        </p:spPr>
+      </p:pic>
+      <p:sp>
+        <p:nvSpPr>
+          <p:cNvPr id="4" name="Text 1"/>
+          <p:cNvSpPr/>
+          <p:nvPr/>
+        </p:nvSpPr>
+        <p:spPr>
+          <a:xfrm>
+            <a:off x="5349240" y="1005840"/>
+            <a:ext cx="6522415" cy="731520"/>
+          </a:xfrm>
+          <a:prstGeom prst="rect">
+            <a:avLst/>
+          </a:prstGeom>
+          <a:noFill/>
+          <a:ln/>
+        </p:spPr>
+        <p:txBody>
+          <a:bodyPr wrap="square" lIns="0" tIns="0" rIns="0" bIns="0" rtlCol="0" anchor="ctr">
+            <a:normAutofit/>
+          </a:bodyPr>
+          <a:lstStyle/>
+          <a:p>
+            <a:pPr algn="ctr" indent="0" marL="0">
+              <a:buNone/>
+            </a:pPr>
+            <a:r>
+              <a:rPr lang="en-US" sz="3600" b="1" dirty="0">
+                <a:solidFill>
+                  <a:srgbClr val="990011"/>
+                </a:solidFill>
+                <a:latin typeface="Times New Roman" pitchFamily="34" charset="0"/>
+                <a:ea typeface="Times New Roman" pitchFamily="34" charset="-122"/>
+                <a:cs typeface="Times New Roman" pitchFamily="34" charset="-120"/>
+              </a:rPr>
+              <a:t>Homework</a:t>
+            </a:r>
+            <a:endParaRPr lang="en-US" sz="3600" dirty="0"/>
+          </a:p>
+        </p:txBody>
+      </p:sp>
+      <p:sp>
+        <p:nvSpPr>
+          <p:cNvPr id="5" name="Text 2"/>
+          <p:cNvSpPr/>
+          <p:nvPr/>
+        </p:nvSpPr>
+        <p:spPr>
+          <a:xfrm>
+            <a:off x="5349240" y="1783080"/>
+            <a:ext cx="6522415" cy="4663440"/>
+          </a:xfrm>
+          <a:prstGeom prst="rect">
+            <a:avLst/>
+          </a:prstGeom>
+          <a:noFill/>
+          <a:ln/>
+        </p:spPr>
+        <p:txBody>
+          <a:bodyPr wrap="square" lIns="0" tIns="0" rIns="0" bIns="0" rtlCol="0" anchor="t"/>
+          <a:lstStyle/>
+          <a:p>
+            <a:pPr algn="l" indent="0" marL="0">
+              <a:spcAft>
+                <a:spcPts val="800"/>
+              </a:spcAft>
+              <a:buNone/>
+            </a:pPr>
+            <a:r>
+              <a:rPr lang="en-US" sz="4000" dirty="0">
+                <a:solidFill>
+                  <a:srgbClr val="111111"/>
+                </a:solidFill>
+                <a:latin typeface="Times New Roman" pitchFamily="34" charset="0"/>
+                <a:ea typeface="Times New Roman" pitchFamily="34" charset="-122"/>
+                <a:cs typeface="Times New Roman" pitchFamily="34" charset="-120"/>
+              </a:rPr>
+              <a:t>Give the date of Malthus's essay on population.</a:t>
+            </a:r>
+            <a:endParaRPr lang="en-US" sz="4000" dirty="0"/>
+          </a:p>
+        </p:txBody>
+      </p:sp>
+      <p:sp>
+        <p:nvSpPr>
+          <p:cNvPr id="25" name="Slide Number Placeholder 0"/>
+          <p:cNvSpPr>
+            <a:spLocks noGrp="1"/>
+          </p:cNvSpPr>
+          <p:nvPr>
+            <p:ph type="sldNum" sz="quarter" idx="4294967295"/>
+          </p:nvPr>
+        </p:nvSpPr>
+        <p:spPr>
+          <a:xfrm>
+            <a:off x="27432" y="91440"/>
+            <a:ext cx="585216" cy="475488"/>
+          </a:xfrm>
+          <a:prstGeom prst="rect">
+            <a:avLst/>
+          </a:prstGeom>
+          <a:extLst>
+            <a:ext uri="{C572A759-6A51-4108-AA02-DFA0A04FC94B}">
+              <ma14:wrappingTextBoxFlag xmlns:ma14="http://schemas.microsoft.com/office/mac/drawingml/2011/main" val="0"/>
+            </a:ext>
+          </a:extLst>
+        </p:spPr>
+        <p:txBody>
+          <a:bodyPr/>
+          <a:lstStyle>
+            <a:lvl1pPr>
+              <a:defRPr sz="2000">
+                <a:solidFill>
+                  <a:srgbClr val="FFFFFF"/>
+                </a:solidFill>
+                <a:latin typeface="Calibri"/>
+                <a:ea typeface="Calibri"/>
+                <a:cs typeface="Calibri"/>
+              </a:defRPr>
+            </a:lvl1pPr>
+          </a:lstStyle>
+          <a:p>
+            <a:pPr algn="ctr"/>
+            <a:fld id="{F7021451-1387-4CA6-816F-3879F97B5CBC}" type="slidenum">
+              <a:rPr b="1" lang="en-US"/>
+              <a:t>57</a:t>
+            </a:fld>
+            <a:endParaRPr lang="en-US"/>
+          </a:p>
+        </p:txBody>
+      </p:sp>
+    </p:spTree>
+  </p:cSld>
+  <p:clrMapOvr>
+    <a:masterClrMapping/>
+  </p:clrMapOvr>
+</p:sld>
+</file>
+
+<file path=ppt/slides/slide58.xml><?xml version="1.0" encoding="utf-8"?>
+<p:sld xmlns:a="http://schemas.openxmlformats.org/drawingml/2006/main" xmlns:r="http://schemas.openxmlformats.org/officeDocument/2006/relationships" xmlns:p="http://schemas.openxmlformats.org/presentationml/2006/main">
+  <p:cSld name="Slide 58">
+    <p:spTree>
+      <p:nvGrpSpPr>
+        <p:cNvPr id="1" name=""/>
+        <p:cNvGrpSpPr/>
+        <p:nvPr/>
+      </p:nvGrpSpPr>
+      <p:grpSpPr>
+        <a:xfrm>
+          <a:off x="0" y="0"/>
+          <a:ext cx="0" cy="0"/>
+          <a:chOff x="0" y="0"/>
+          <a:chExt cx="0" cy="0"/>
+        </a:xfrm>
+      </p:grpSpPr>
+      <p:sp>
+        <p:nvSpPr>
+          <p:cNvPr id="2" name="Text 0"/>
+          <p:cNvSpPr/>
+          <p:nvPr/>
+        </p:nvSpPr>
+        <p:spPr>
+          <a:xfrm>
+            <a:off x="457200" y="713232"/>
+            <a:ext cx="11368735" cy="274320"/>
+          </a:xfrm>
+          <a:prstGeom prst="rect">
+            <a:avLst/>
+          </a:prstGeom>
+          <a:noFill/>
+          <a:ln/>
+        </p:spPr>
+        <p:txBody>
+          <a:bodyPr wrap="square" lIns="0" tIns="0" rIns="0" bIns="0" rtlCol="0" anchor="ctr"/>
+          <a:lstStyle/>
+          <a:p>
+            <a:pPr algn="r" indent="0" marL="0">
+              <a:buNone/>
+            </a:pPr>
+            <a:r>
+              <a:rPr lang="en-US" sz="1400" b="1" dirty="0">
+                <a:solidFill>
+                  <a:srgbClr val="1C3F6E"/>
+                </a:solidFill>
+                <a:latin typeface="Calibri" pitchFamily="34" charset="0"/>
+                <a:ea typeface="Calibri" pitchFamily="34" charset="-122"/>
+                <a:cs typeface="Calibri" pitchFamily="34" charset="-120"/>
+              </a:rPr>
+              <a:t>NEXT LESSON</a:t>
+            </a:r>
+            <a:endParaRPr lang="en-US" sz="1400" dirty="0"/>
+          </a:p>
+        </p:txBody>
+      </p:sp>
+      <p:pic>
+        <p:nvPicPr>
+          <p:cNvPr id="3" name="Image 0" descr="/home/claude/f4/img/minesec_sheet.png">    </p:cNvPr>
+          <p:cNvPicPr>
+            <a:picLocks noChangeAspect="1"/>
+          </p:cNvPicPr>
+          <p:nvPr/>
+        </p:nvPicPr>
+        <p:blipFill>
+          <a:blip r:embed="rId1"/>
+          <a:stretch>
+            <a:fillRect/>
+          </a:stretch>
+        </p:blipFill>
+        <p:spPr>
+          <a:xfrm>
+            <a:off x="0" y="658368"/>
+            <a:ext cx="5120640" cy="5833872"/>
+          </a:xfrm>
+          <a:prstGeom prst="rect">
+            <a:avLst/>
+          </a:prstGeom>
+        </p:spPr>
+      </p:pic>
+      <p:sp>
+        <p:nvSpPr>
+          <p:cNvPr id="4" name="Text 1"/>
+          <p:cNvSpPr/>
+          <p:nvPr/>
+        </p:nvSpPr>
+        <p:spPr>
+          <a:xfrm>
+            <a:off x="5349240" y="1005840"/>
+            <a:ext cx="6522415" cy="731520"/>
+          </a:xfrm>
+          <a:prstGeom prst="rect">
+            <a:avLst/>
+          </a:prstGeom>
+          <a:noFill/>
+          <a:ln/>
+        </p:spPr>
+        <p:txBody>
+          <a:bodyPr wrap="square" lIns="0" tIns="0" rIns="0" bIns="0" rtlCol="0" anchor="ctr">
+            <a:normAutofit/>
+          </a:bodyPr>
+          <a:lstStyle/>
+          <a:p>
+            <a:pPr algn="ctr" indent="0" marL="0">
+              <a:buNone/>
+            </a:pPr>
+            <a:r>
+              <a:rPr lang="en-US" sz="3600" b="1" dirty="0">
+                <a:solidFill>
+                  <a:srgbClr val="990011"/>
+                </a:solidFill>
+                <a:latin typeface="Times New Roman" pitchFamily="34" charset="0"/>
+                <a:ea typeface="Times New Roman" pitchFamily="34" charset="-122"/>
+                <a:cs typeface="Times New Roman" pitchFamily="34" charset="-120"/>
+              </a:rPr>
+              <a:t>Next Lesson</a:t>
+            </a:r>
+            <a:endParaRPr lang="en-US" sz="3600" dirty="0"/>
+          </a:p>
+        </p:txBody>
+      </p:sp>
+      <p:sp>
+        <p:nvSpPr>
+          <p:cNvPr id="5" name="Text 2"/>
+          <p:cNvSpPr/>
+          <p:nvPr/>
+        </p:nvSpPr>
+        <p:spPr>
+          <a:xfrm>
+            <a:off x="5349240" y="1783080"/>
+            <a:ext cx="6522415" cy="4663440"/>
+          </a:xfrm>
+          <a:prstGeom prst="rect">
+            <a:avLst/>
+          </a:prstGeom>
+          <a:noFill/>
+          <a:ln/>
+        </p:spPr>
+        <p:txBody>
+          <a:bodyPr wrap="square" lIns="0" tIns="0" rIns="0" bIns="0" rtlCol="0" anchor="ctr"/>
+          <a:lstStyle/>
+          <a:p>
+            <a:pPr algn="ctr" indent="0" marL="0">
+              <a:spcAft>
+                <a:spcPts val="800"/>
+              </a:spcAft>
+              <a:buNone/>
+            </a:pPr>
+            <a:r>
+              <a:rPr lang="en-US" sz="4000" b="1" dirty="0">
+                <a:solidFill>
+                  <a:srgbClr val="111111"/>
+                </a:solidFill>
+                <a:latin typeface="Times New Roman" pitchFamily="34" charset="0"/>
+                <a:ea typeface="Times New Roman" pitchFamily="34" charset="-122"/>
+                <a:cs typeface="Times New Roman" pitchFamily="34" charset="-120"/>
+              </a:rPr>
+              <a:t>Our next lesson will be on:</a:t>
+            </a:r>
+            <a:endParaRPr lang="en-US" sz="4000" dirty="0"/>
+          </a:p>
+          <a:p>
+            <a:pPr algn="ctr" indent="0" marL="0">
+              <a:spcAft>
+                <a:spcPts val="800"/>
+              </a:spcAft>
+              <a:buNone/>
+            </a:pPr>
+            <a:r>
+              <a:rPr lang="en-US" sz="4000" b="1" dirty="0">
+                <a:solidFill>
+                  <a:srgbClr val="990011"/>
+                </a:solidFill>
+                <a:latin typeface="Times New Roman" pitchFamily="34" charset="0"/>
+                <a:ea typeface="Times New Roman" pitchFamily="34" charset="-122"/>
+                <a:cs typeface="Times New Roman" pitchFamily="34" charset="-120"/>
+              </a:rPr>
+              <a:t>Lesson 18: Theories of Population and Resources: Malthus and Boserup</a:t>
+            </a:r>
+            <a:endParaRPr lang="en-US" sz="4000" dirty="0"/>
+          </a:p>
+        </p:txBody>
+      </p:sp>
+      <p:sp>
+        <p:nvSpPr>
+          <p:cNvPr id="25" name="Slide Number Placeholder 0"/>
+          <p:cNvSpPr>
+            <a:spLocks noGrp="1"/>
+          </p:cNvSpPr>
+          <p:nvPr>
+            <p:ph type="sldNum" sz="quarter" idx="4294967295"/>
+          </p:nvPr>
+        </p:nvSpPr>
+        <p:spPr>
+          <a:xfrm>
+            <a:off x="27432" y="91440"/>
+            <a:ext cx="585216" cy="475488"/>
+          </a:xfrm>
+          <a:prstGeom prst="rect">
+            <a:avLst/>
+          </a:prstGeom>
+          <a:extLst>
+            <a:ext uri="{C572A759-6A51-4108-AA02-DFA0A04FC94B}">
+              <ma14:wrappingTextBoxFlag xmlns:ma14="http://schemas.microsoft.com/office/mac/drawingml/2011/main" val="0"/>
+            </a:ext>
+          </a:extLst>
+        </p:spPr>
+        <p:txBody>
+          <a:bodyPr/>
+          <a:lstStyle>
+            <a:lvl1pPr>
+              <a:defRPr sz="2000">
+                <a:solidFill>
+                  <a:srgbClr val="FFFFFF"/>
+                </a:solidFill>
+                <a:latin typeface="Calibri"/>
+                <a:ea typeface="Calibri"/>
+                <a:cs typeface="Calibri"/>
+              </a:defRPr>
+            </a:lvl1pPr>
+          </a:lstStyle>
+          <a:p>
+            <a:pPr algn="ctr"/>
+            <a:fld id="{F7021451-1387-4CA6-816F-3879F97B5CBC}" type="slidenum">
+              <a:rPr b="1" lang="en-US"/>
+              <a:t>58</a:t>
+            </a:fld>
+            <a:endParaRPr lang="en-US"/>
+          </a:p>
+        </p:txBody>
+      </p:sp>
+    </p:spTree>
+  </p:cSld>
+  <p:clrMapOvr>
+    <a:masterClrMapping/>
+  </p:clrMapOvr>
+</p:sld>
+</file>
+
+<file path=ppt/slides/slide59.xml><?xml version="1.0" encoding="utf-8"?>
+<p:sld xmlns:a="http://schemas.openxmlformats.org/drawingml/2006/main" xmlns:r="http://schemas.openxmlformats.org/officeDocument/2006/relationships" xmlns:p="http://schemas.openxmlformats.org/presentationml/2006/main">
+  <p:cSld name="Slide 59">
+    <p:spTree>
+      <p:nvGrpSpPr>
+        <p:cNvPr id="1" name=""/>
+        <p:cNvGrpSpPr/>
+        <p:nvPr/>
+      </p:nvGrpSpPr>
+      <p:grpSpPr>
+        <a:xfrm>
+          <a:off x="0" y="0"/>
+          <a:ext cx="0" cy="0"/>
+          <a:chOff x="0" y="0"/>
+          <a:chExt cx="0" cy="0"/>
+        </a:xfrm>
+      </p:grpSpPr>
+      <p:sp>
+        <p:nvSpPr>
+          <p:cNvPr id="2" name="Text 0"/>
+          <p:cNvSpPr/>
+          <p:nvPr/>
+        </p:nvSpPr>
+        <p:spPr>
+          <a:xfrm>
+            <a:off x="457200" y="713232"/>
+            <a:ext cx="11368735" cy="274320"/>
+          </a:xfrm>
+          <a:prstGeom prst="rect">
+            <a:avLst/>
+          </a:prstGeom>
+          <a:noFill/>
+          <a:ln/>
+        </p:spPr>
+        <p:txBody>
+          <a:bodyPr wrap="square" lIns="0" tIns="0" rIns="0" bIns="0" rtlCol="0" anchor="ctr"/>
+          <a:lstStyle/>
+          <a:p>
+            <a:pPr algn="r" indent="0" marL="0">
+              <a:buNone/>
+            </a:pPr>
+            <a:r>
+              <a:rPr lang="en-US" sz="1400" b="1" dirty="0">
+                <a:solidFill>
+                  <a:srgbClr val="1C3F6E"/>
+                </a:solidFill>
+                <a:latin typeface="Calibri" pitchFamily="34" charset="0"/>
+                <a:ea typeface="Calibri" pitchFamily="34" charset="-122"/>
+                <a:cs typeface="Calibri" pitchFamily="34" charset="-120"/>
+              </a:rPr>
+              <a:t>BILINGUAL GAME</a:t>
+            </a:r>
+            <a:endParaRPr lang="en-US" sz="1400" dirty="0"/>
+          </a:p>
+        </p:txBody>
+      </p:sp>
+      <p:sp>
+        <p:nvSpPr>
+          <p:cNvPr id="3" name="Text 1"/>
+          <p:cNvSpPr/>
+          <p:nvPr/>
+        </p:nvSpPr>
+        <p:spPr>
+          <a:xfrm>
+            <a:off x="457200" y="1005840"/>
+            <a:ext cx="11277295" cy="731520"/>
+          </a:xfrm>
+          <a:prstGeom prst="rect">
+            <a:avLst/>
+          </a:prstGeom>
+          <a:noFill/>
+          <a:ln/>
+        </p:spPr>
+        <p:txBody>
+          <a:bodyPr wrap="square" lIns="0" tIns="0" rIns="0" bIns="0" rtlCol="0" anchor="ctr"/>
+          <a:lstStyle/>
+          <a:p>
+            <a:pPr algn="ctr" indent="0" marL="0">
+              <a:buNone/>
+            </a:pPr>
+            <a:r>
+              <a:rPr lang="en-US" sz="3600" b="1" dirty="0">
+                <a:solidFill>
+                  <a:srgbClr val="990011"/>
+                </a:solidFill>
+                <a:latin typeface="Times New Roman" pitchFamily="34" charset="0"/>
+                <a:ea typeface="Times New Roman" pitchFamily="34" charset="-122"/>
+                <a:cs typeface="Times New Roman" pitchFamily="34" charset="-120"/>
+              </a:rPr>
               <a:t>Bilingual Game (Jeu Bilingue)</a:t>
             </a:r>
             <a:endParaRPr lang="en-US" sz="3600" dirty="0"/>
@@ -18045,7 +21191,7 @@
       </p:sp>
       <p:graphicFrame>
         <p:nvGraphicFramePr>
-          <p:cNvPr id="52" name="Table 0"/>
+          <p:cNvPr id="60" name="Table 0"/>
           <p:cNvGraphicFramePr>
             <a:graphicFrameLocks noGrp="1"/>
           </p:cNvGraphicFramePr>
@@ -18431,7 +21577,7 @@
                           <a:ea typeface="Calibri" pitchFamily="34" charset="-122"/>
                           <a:cs typeface="Calibri" pitchFamily="34" charset="-120"/>
                         </a:rPr>
-                        <a:t>Le sous-peuplement</a:t>
+                        <a:t>La sous-population</a:t>
                       </a:r>
                       <a:endParaRPr lang="en-US" sz="2200" dirty="0">
                         <a:latin typeface="Calibri" charset="0"/>
@@ -18501,7 +21647,7 @@
                           <a:ea typeface="Calibri" pitchFamily="34" charset="-122"/>
                           <a:cs typeface="Calibri" pitchFamily="34" charset="-120"/>
                         </a:rPr>
-                        <a:t>Optimum</a:t>
+                        <a:t>Optimum population</a:t>
                       </a:r>
                       <a:endParaRPr lang="en-US" sz="2200" dirty="0">
                         <a:latin typeface="Calibri" charset="0"/>
@@ -18569,7 +21715,283 @@
                           <a:ea typeface="Calibri" pitchFamily="34" charset="-122"/>
                           <a:cs typeface="Calibri" pitchFamily="34" charset="-120"/>
                         </a:rPr>
-                        <a:t>L'optimum</a:t>
+                        <a:t>L'optimum de peuplement</a:t>
+                      </a:r>
+                      <a:endParaRPr lang="en-US" sz="2200" dirty="0">
+                        <a:latin typeface="Calibri" charset="0"/>
+                        <a:ea typeface="Calibri" charset="0"/>
+                        <a:cs typeface="Calibri" charset="0"/>
+                      </a:endParaRPr>
+                    </a:p>
+                  </a:txBody>
+                  <a:tcPr marL="73152" marR="73152" marT="73152" marB="73152" anchor="ctr">
+                    <a:lnL w="12700" cap="flat" cmpd="sng" algn="ctr">
+                      <a:solidFill>
+                        <a:srgbClr val="BBBBBB"/>
+                      </a:solidFill>
+                      <a:prstDash val="solid"/>
+                      <a:round/>
+                      <a:headEnd type="none" w="med" len="med"/>
+                      <a:tailEnd type="none" w="med" len="med"/>
+                    </a:lnL>
+                    <a:lnR w="12700" cap="flat" cmpd="sng" algn="ctr">
+                      <a:solidFill>
+                        <a:srgbClr val="BBBBBB"/>
+                      </a:solidFill>
+                      <a:prstDash val="solid"/>
+                      <a:round/>
+                      <a:headEnd type="none" w="med" len="med"/>
+                      <a:tailEnd type="none" w="med" len="med"/>
+                    </a:lnR>
+                    <a:lnT w="12700" cap="flat" cmpd="sng" algn="ctr">
+                      <a:solidFill>
+                        <a:srgbClr val="BBBBBB"/>
+                      </a:solidFill>
+                      <a:prstDash val="solid"/>
+                      <a:round/>
+                      <a:headEnd type="none" w="med" len="med"/>
+                      <a:tailEnd type="none" w="med" len="med"/>
+                    </a:lnT>
+                    <a:lnB w="12700" cap="flat" cmpd="sng" algn="ctr">
+                      <a:solidFill>
+                        <a:srgbClr val="BBBBBB"/>
+                      </a:solidFill>
+                      <a:prstDash val="solid"/>
+                      <a:round/>
+                      <a:headEnd type="none" w="med" len="med"/>
+                      <a:tailEnd type="none" w="med" len="med"/>
+                    </a:lnB>
+                    <a:solidFill>
+                      <a:srgbClr val="FFFFFF"/>
+                    </a:solidFill>
+                  </a:tcPr>
+                </a:tc>
+              </a:tr>
+              <a:tr h="0">
+                <a:tc>
+                  <a:txBody>
+                    <a:bodyPr/>
+                    <a:lstStyle/>
+                    <a:p>
+                      <a:pPr algn="ctr" indent="0" marL="0">
+                        <a:buNone/>
+                      </a:pPr>
+                      <a:r>
+                        <a:rPr lang="en-US" sz="2200" dirty="0">
+                          <a:solidFill>
+                            <a:srgbClr val="111111"/>
+                          </a:solidFill>
+                          <a:latin typeface="Calibri" pitchFamily="34" charset="0"/>
+                          <a:ea typeface="Calibri" pitchFamily="34" charset="-122"/>
+                          <a:cs typeface="Calibri" pitchFamily="34" charset="-120"/>
+                        </a:rPr>
+                        <a:t>Resources</a:t>
+                      </a:r>
+                      <a:endParaRPr lang="en-US" sz="2200" dirty="0">
+                        <a:latin typeface="Calibri" charset="0"/>
+                        <a:ea typeface="Calibri" charset="0"/>
+                        <a:cs typeface="Calibri" charset="0"/>
+                      </a:endParaRPr>
+                    </a:p>
+                  </a:txBody>
+                  <a:tcPr marL="73152" marR="73152" marT="73152" marB="73152" anchor="ctr">
+                    <a:lnL w="12700" cap="flat" cmpd="sng" algn="ctr">
+                      <a:solidFill>
+                        <a:srgbClr val="BBBBBB"/>
+                      </a:solidFill>
+                      <a:prstDash val="solid"/>
+                      <a:round/>
+                      <a:headEnd type="none" w="med" len="med"/>
+                      <a:tailEnd type="none" w="med" len="med"/>
+                    </a:lnL>
+                    <a:lnR w="12700" cap="flat" cmpd="sng" algn="ctr">
+                      <a:solidFill>
+                        <a:srgbClr val="BBBBBB"/>
+                      </a:solidFill>
+                      <a:prstDash val="solid"/>
+                      <a:round/>
+                      <a:headEnd type="none" w="med" len="med"/>
+                      <a:tailEnd type="none" w="med" len="med"/>
+                    </a:lnR>
+                    <a:lnT w="12700" cap="flat" cmpd="sng" algn="ctr">
+                      <a:solidFill>
+                        <a:srgbClr val="BBBBBB"/>
+                      </a:solidFill>
+                      <a:prstDash val="solid"/>
+                      <a:round/>
+                      <a:headEnd type="none" w="med" len="med"/>
+                      <a:tailEnd type="none" w="med" len="med"/>
+                    </a:lnT>
+                    <a:lnB w="12700" cap="flat" cmpd="sng" algn="ctr">
+                      <a:solidFill>
+                        <a:srgbClr val="BBBBBB"/>
+                      </a:solidFill>
+                      <a:prstDash val="solid"/>
+                      <a:round/>
+                      <a:headEnd type="none" w="med" len="med"/>
+                      <a:tailEnd type="none" w="med" len="med"/>
+                    </a:lnB>
+                    <a:solidFill>
+                      <a:srgbClr val="F2F4F8"/>
+                    </a:solidFill>
+                  </a:tcPr>
+                </a:tc>
+                <a:tc>
+                  <a:txBody>
+                    <a:bodyPr/>
+                    <a:lstStyle/>
+                    <a:p>
+                      <a:pPr algn="ctr" indent="0" marL="0">
+                        <a:buNone/>
+                      </a:pPr>
+                      <a:r>
+                        <a:rPr lang="en-US" sz="2200" dirty="0">
+                          <a:solidFill>
+                            <a:srgbClr val="111111"/>
+                          </a:solidFill>
+                          <a:latin typeface="Calibri" pitchFamily="34" charset="0"/>
+                          <a:ea typeface="Calibri" pitchFamily="34" charset="-122"/>
+                          <a:cs typeface="Calibri" pitchFamily="34" charset="-120"/>
+                        </a:rPr>
+                        <a:t>Les ressources</a:t>
+                      </a:r>
+                      <a:endParaRPr lang="en-US" sz="2200" dirty="0">
+                        <a:latin typeface="Calibri" charset="0"/>
+                        <a:ea typeface="Calibri" charset="0"/>
+                        <a:cs typeface="Calibri" charset="0"/>
+                      </a:endParaRPr>
+                    </a:p>
+                  </a:txBody>
+                  <a:tcPr marL="73152" marR="73152" marT="73152" marB="73152" anchor="ctr">
+                    <a:lnL w="12700" cap="flat" cmpd="sng" algn="ctr">
+                      <a:solidFill>
+                        <a:srgbClr val="BBBBBB"/>
+                      </a:solidFill>
+                      <a:prstDash val="solid"/>
+                      <a:round/>
+                      <a:headEnd type="none" w="med" len="med"/>
+                      <a:tailEnd type="none" w="med" len="med"/>
+                    </a:lnL>
+                    <a:lnR w="12700" cap="flat" cmpd="sng" algn="ctr">
+                      <a:solidFill>
+                        <a:srgbClr val="BBBBBB"/>
+                      </a:solidFill>
+                      <a:prstDash val="solid"/>
+                      <a:round/>
+                      <a:headEnd type="none" w="med" len="med"/>
+                      <a:tailEnd type="none" w="med" len="med"/>
+                    </a:lnR>
+                    <a:lnT w="12700" cap="flat" cmpd="sng" algn="ctr">
+                      <a:solidFill>
+                        <a:srgbClr val="BBBBBB"/>
+                      </a:solidFill>
+                      <a:prstDash val="solid"/>
+                      <a:round/>
+                      <a:headEnd type="none" w="med" len="med"/>
+                      <a:tailEnd type="none" w="med" len="med"/>
+                    </a:lnT>
+                    <a:lnB w="12700" cap="flat" cmpd="sng" algn="ctr">
+                      <a:solidFill>
+                        <a:srgbClr val="BBBBBB"/>
+                      </a:solidFill>
+                      <a:prstDash val="solid"/>
+                      <a:round/>
+                      <a:headEnd type="none" w="med" len="med"/>
+                      <a:tailEnd type="none" w="med" len="med"/>
+                    </a:lnB>
+                    <a:solidFill>
+                      <a:srgbClr val="F2F4F8"/>
+                    </a:solidFill>
+                  </a:tcPr>
+                </a:tc>
+              </a:tr>
+              <a:tr h="0">
+                <a:tc>
+                  <a:txBody>
+                    <a:bodyPr/>
+                    <a:lstStyle/>
+                    <a:p>
+                      <a:pPr algn="ctr" indent="0" marL="0">
+                        <a:buNone/>
+                      </a:pPr>
+                      <a:r>
+                        <a:rPr lang="en-US" sz="2200" dirty="0">
+                          <a:solidFill>
+                            <a:srgbClr val="111111"/>
+                          </a:solidFill>
+                          <a:latin typeface="Calibri" pitchFamily="34" charset="0"/>
+                          <a:ea typeface="Calibri" pitchFamily="34" charset="-122"/>
+                          <a:cs typeface="Calibri" pitchFamily="34" charset="-120"/>
+                        </a:rPr>
+                        <a:t>Carrying capacity</a:t>
+                      </a:r>
+                      <a:endParaRPr lang="en-US" sz="2200" dirty="0">
+                        <a:latin typeface="Calibri" charset="0"/>
+                        <a:ea typeface="Calibri" charset="0"/>
+                        <a:cs typeface="Calibri" charset="0"/>
+                      </a:endParaRPr>
+                    </a:p>
+                  </a:txBody>
+                  <a:tcPr marL="73152" marR="73152" marT="73152" marB="73152" anchor="ctr">
+                    <a:lnL w="12700" cap="flat" cmpd="sng" algn="ctr">
+                      <a:solidFill>
+                        <a:srgbClr val="BBBBBB"/>
+                      </a:solidFill>
+                      <a:prstDash val="solid"/>
+                      <a:round/>
+                      <a:headEnd type="none" w="med" len="med"/>
+                      <a:tailEnd type="none" w="med" len="med"/>
+                    </a:lnL>
+                    <a:lnR w="12700" cap="flat" cmpd="sng" algn="ctr">
+                      <a:solidFill>
+                        <a:srgbClr val="BBBBBB"/>
+                      </a:solidFill>
+                      <a:prstDash val="solid"/>
+                      <a:round/>
+                      <a:headEnd type="none" w="med" len="med"/>
+                      <a:tailEnd type="none" w="med" len="med"/>
+                    </a:lnR>
+                    <a:lnT w="12700" cap="flat" cmpd="sng" algn="ctr">
+                      <a:solidFill>
+                        <a:srgbClr val="BBBBBB"/>
+                      </a:solidFill>
+                      <a:prstDash val="solid"/>
+                      <a:round/>
+                      <a:headEnd type="none" w="med" len="med"/>
+                      <a:tailEnd type="none" w="med" len="med"/>
+                    </a:lnT>
+                    <a:lnB w="12700" cap="flat" cmpd="sng" algn="ctr">
+                      <a:solidFill>
+                        <a:srgbClr val="BBBBBB"/>
+                      </a:solidFill>
+                      <a:prstDash val="solid"/>
+                      <a:round/>
+                      <a:headEnd type="none" w="med" len="med"/>
+                      <a:tailEnd type="none" w="med" len="med"/>
+                    </a:lnB>
+                    <a:solidFill>
+                      <a:srgbClr val="FFFFFF"/>
+                    </a:solidFill>
+                  </a:tcPr>
+                </a:tc>
+                <a:tc>
+                  <a:txBody>
+                    <a:bodyPr/>
+                    <a:lstStyle/>
+                    <a:p>
+                      <a:pPr algn="ctr" indent="0" marL="0">
+                        <a:buNone/>
+                      </a:pPr>
+                      <a:r>
+                        <a:rPr lang="en-US" sz="2200" dirty="0">
+                          <a:solidFill>
+                            <a:srgbClr val="111111"/>
+                          </a:solidFill>
+                          <a:latin typeface="Calibri" pitchFamily="34" charset="0"/>
+                          <a:ea typeface="Calibri" pitchFamily="34" charset="-122"/>
+                          <a:cs typeface="Calibri" pitchFamily="34" charset="-120"/>
+                        </a:rPr>
+                        <a:t>La capacité de charge</a:t>
                       </a:r>
                       <a:endParaRPr lang="en-US" sz="2200" dirty="0">
                         <a:latin typeface="Calibri" charset="0"/>
@@ -18759,282 +22181,6 @@
                   </a:tcPr>
                 </a:tc>
               </a:tr>
-              <a:tr h="0">
-                <a:tc>
-                  <a:txBody>
-                    <a:bodyPr/>
-                    <a:lstStyle/>
-                    <a:p>
-                      <a:pPr algn="ctr" indent="0" marL="0">
-                        <a:buNone/>
-                      </a:pPr>
-                      <a:r>
-                        <a:rPr lang="en-US" sz="2200" dirty="0">
-                          <a:solidFill>
-                            <a:srgbClr val="111111"/>
-                          </a:solidFill>
-                          <a:latin typeface="Calibri" pitchFamily="34" charset="0"/>
-                          <a:ea typeface="Calibri" pitchFamily="34" charset="-122"/>
-                          <a:cs typeface="Calibri" pitchFamily="34" charset="-120"/>
-                        </a:rPr>
-                        <a:t>Indicator</a:t>
-                      </a:r>
-                      <a:endParaRPr lang="en-US" sz="2200" dirty="0">
-                        <a:latin typeface="Calibri" charset="0"/>
-                        <a:ea typeface="Calibri" charset="0"/>
-                        <a:cs typeface="Calibri" charset="0"/>
-                      </a:endParaRPr>
-                    </a:p>
-                  </a:txBody>
-                  <a:tcPr marL="73152" marR="73152" marT="73152" marB="73152" anchor="ctr">
-                    <a:lnL w="12700" cap="flat" cmpd="sng" algn="ctr">
-                      <a:solidFill>
-                        <a:srgbClr val="BBBBBB"/>
-                      </a:solidFill>
-                      <a:prstDash val="solid"/>
-                      <a:round/>
-                      <a:headEnd type="none" w="med" len="med"/>
-                      <a:tailEnd type="none" w="med" len="med"/>
-                    </a:lnL>
-                    <a:lnR w="12700" cap="flat" cmpd="sng" algn="ctr">
-                      <a:solidFill>
-                        <a:srgbClr val="BBBBBB"/>
-                      </a:solidFill>
-                      <a:prstDash val="solid"/>
-                      <a:round/>
-                      <a:headEnd type="none" w="med" len="med"/>
-                      <a:tailEnd type="none" w="med" len="med"/>
-                    </a:lnR>
-                    <a:lnT w="12700" cap="flat" cmpd="sng" algn="ctr">
-                      <a:solidFill>
-                        <a:srgbClr val="BBBBBB"/>
-                      </a:solidFill>
-                      <a:prstDash val="solid"/>
-                      <a:round/>
-                      <a:headEnd type="none" w="med" len="med"/>
-                      <a:tailEnd type="none" w="med" len="med"/>
-                    </a:lnT>
-                    <a:lnB w="12700" cap="flat" cmpd="sng" algn="ctr">
-                      <a:solidFill>
-                        <a:srgbClr val="BBBBBB"/>
-                      </a:solidFill>
-                      <a:prstDash val="solid"/>
-                      <a:round/>
-                      <a:headEnd type="none" w="med" len="med"/>
-                      <a:tailEnd type="none" w="med" len="med"/>
-                    </a:lnB>
-                    <a:solidFill>
-                      <a:srgbClr val="FFFFFF"/>
-                    </a:solidFill>
-                  </a:tcPr>
-                </a:tc>
-                <a:tc>
-                  <a:txBody>
-                    <a:bodyPr/>
-                    <a:lstStyle/>
-                    <a:p>
-                      <a:pPr algn="ctr" indent="0" marL="0">
-                        <a:buNone/>
-                      </a:pPr>
-                      <a:r>
-                        <a:rPr lang="en-US" sz="2200" dirty="0">
-                          <a:solidFill>
-                            <a:srgbClr val="111111"/>
-                          </a:solidFill>
-                          <a:latin typeface="Calibri" pitchFamily="34" charset="0"/>
-                          <a:ea typeface="Calibri" pitchFamily="34" charset="-122"/>
-                          <a:cs typeface="Calibri" pitchFamily="34" charset="-120"/>
-                        </a:rPr>
-                        <a:t>L'indicateur</a:t>
-                      </a:r>
-                      <a:endParaRPr lang="en-US" sz="2200" dirty="0">
-                        <a:latin typeface="Calibri" charset="0"/>
-                        <a:ea typeface="Calibri" charset="0"/>
-                        <a:cs typeface="Calibri" charset="0"/>
-                      </a:endParaRPr>
-                    </a:p>
-                  </a:txBody>
-                  <a:tcPr marL="73152" marR="73152" marT="73152" marB="73152" anchor="ctr">
-                    <a:lnL w="12700" cap="flat" cmpd="sng" algn="ctr">
-                      <a:solidFill>
-                        <a:srgbClr val="BBBBBB"/>
-                      </a:solidFill>
-                      <a:prstDash val="solid"/>
-                      <a:round/>
-                      <a:headEnd type="none" w="med" len="med"/>
-                      <a:tailEnd type="none" w="med" len="med"/>
-                    </a:lnL>
-                    <a:lnR w="12700" cap="flat" cmpd="sng" algn="ctr">
-                      <a:solidFill>
-                        <a:srgbClr val="BBBBBB"/>
-                      </a:solidFill>
-                      <a:prstDash val="solid"/>
-                      <a:round/>
-                      <a:headEnd type="none" w="med" len="med"/>
-                      <a:tailEnd type="none" w="med" len="med"/>
-                    </a:lnR>
-                    <a:lnT w="12700" cap="flat" cmpd="sng" algn="ctr">
-                      <a:solidFill>
-                        <a:srgbClr val="BBBBBB"/>
-                      </a:solidFill>
-                      <a:prstDash val="solid"/>
-                      <a:round/>
-                      <a:headEnd type="none" w="med" len="med"/>
-                      <a:tailEnd type="none" w="med" len="med"/>
-                    </a:lnT>
-                    <a:lnB w="12700" cap="flat" cmpd="sng" algn="ctr">
-                      <a:solidFill>
-                        <a:srgbClr val="BBBBBB"/>
-                      </a:solidFill>
-                      <a:prstDash val="solid"/>
-                      <a:round/>
-                      <a:headEnd type="none" w="med" len="med"/>
-                      <a:tailEnd type="none" w="med" len="med"/>
-                    </a:lnB>
-                    <a:solidFill>
-                      <a:srgbClr val="FFFFFF"/>
-                    </a:solidFill>
-                  </a:tcPr>
-                </a:tc>
-              </a:tr>
-              <a:tr h="0">
-                <a:tc>
-                  <a:txBody>
-                    <a:bodyPr/>
-                    <a:lstStyle/>
-                    <a:p>
-                      <a:pPr algn="ctr" indent="0" marL="0">
-                        <a:buNone/>
-                      </a:pPr>
-                      <a:r>
-                        <a:rPr lang="en-US" sz="2200" dirty="0">
-                          <a:solidFill>
-                            <a:srgbClr val="111111"/>
-                          </a:solidFill>
-                          <a:latin typeface="Calibri" pitchFamily="34" charset="0"/>
-                          <a:ea typeface="Calibri" pitchFamily="34" charset="-122"/>
-                          <a:cs typeface="Calibri" pitchFamily="34" charset="-120"/>
-                        </a:rPr>
-                        <a:t>Solution</a:t>
-                      </a:r>
-                      <a:endParaRPr lang="en-US" sz="2200" dirty="0">
-                        <a:latin typeface="Calibri" charset="0"/>
-                        <a:ea typeface="Calibri" charset="0"/>
-                        <a:cs typeface="Calibri" charset="0"/>
-                      </a:endParaRPr>
-                    </a:p>
-                  </a:txBody>
-                  <a:tcPr marL="73152" marR="73152" marT="73152" marB="73152" anchor="ctr">
-                    <a:lnL w="12700" cap="flat" cmpd="sng" algn="ctr">
-                      <a:solidFill>
-                        <a:srgbClr val="BBBBBB"/>
-                      </a:solidFill>
-                      <a:prstDash val="solid"/>
-                      <a:round/>
-                      <a:headEnd type="none" w="med" len="med"/>
-                      <a:tailEnd type="none" w="med" len="med"/>
-                    </a:lnL>
-                    <a:lnR w="12700" cap="flat" cmpd="sng" algn="ctr">
-                      <a:solidFill>
-                        <a:srgbClr val="BBBBBB"/>
-                      </a:solidFill>
-                      <a:prstDash val="solid"/>
-                      <a:round/>
-                      <a:headEnd type="none" w="med" len="med"/>
-                      <a:tailEnd type="none" w="med" len="med"/>
-                    </a:lnR>
-                    <a:lnT w="12700" cap="flat" cmpd="sng" algn="ctr">
-                      <a:solidFill>
-                        <a:srgbClr val="BBBBBB"/>
-                      </a:solidFill>
-                      <a:prstDash val="solid"/>
-                      <a:round/>
-                      <a:headEnd type="none" w="med" len="med"/>
-                      <a:tailEnd type="none" w="med" len="med"/>
-                    </a:lnT>
-                    <a:lnB w="12700" cap="flat" cmpd="sng" algn="ctr">
-                      <a:solidFill>
-                        <a:srgbClr val="BBBBBB"/>
-                      </a:solidFill>
-                      <a:prstDash val="solid"/>
-                      <a:round/>
-                      <a:headEnd type="none" w="med" len="med"/>
-                      <a:tailEnd type="none" w="med" len="med"/>
-                    </a:lnB>
-                    <a:solidFill>
-                      <a:srgbClr val="F2F4F8"/>
-                    </a:solidFill>
-                  </a:tcPr>
-                </a:tc>
-                <a:tc>
-                  <a:txBody>
-                    <a:bodyPr/>
-                    <a:lstStyle/>
-                    <a:p>
-                      <a:pPr algn="ctr" indent="0" marL="0">
-                        <a:buNone/>
-                      </a:pPr>
-                      <a:r>
-                        <a:rPr lang="en-US" sz="2200" dirty="0">
-                          <a:solidFill>
-                            <a:srgbClr val="111111"/>
-                          </a:solidFill>
-                          <a:latin typeface="Calibri" pitchFamily="34" charset="0"/>
-                          <a:ea typeface="Calibri" pitchFamily="34" charset="-122"/>
-                          <a:cs typeface="Calibri" pitchFamily="34" charset="-120"/>
-                        </a:rPr>
-                        <a:t>La solution</a:t>
-                      </a:r>
-                      <a:endParaRPr lang="en-US" sz="2200" dirty="0">
-                        <a:latin typeface="Calibri" charset="0"/>
-                        <a:ea typeface="Calibri" charset="0"/>
-                        <a:cs typeface="Calibri" charset="0"/>
-                      </a:endParaRPr>
-                    </a:p>
-                  </a:txBody>
-                  <a:tcPr marL="73152" marR="73152" marT="73152" marB="73152" anchor="ctr">
-                    <a:lnL w="12700" cap="flat" cmpd="sng" algn="ctr">
-                      <a:solidFill>
-                        <a:srgbClr val="BBBBBB"/>
-                      </a:solidFill>
-                      <a:prstDash val="solid"/>
-                      <a:round/>
-                      <a:headEnd type="none" w="med" len="med"/>
-                      <a:tailEnd type="none" w="med" len="med"/>
-                    </a:lnL>
-                    <a:lnR w="12700" cap="flat" cmpd="sng" algn="ctr">
-                      <a:solidFill>
-                        <a:srgbClr val="BBBBBB"/>
-                      </a:solidFill>
-                      <a:prstDash val="solid"/>
-                      <a:round/>
-                      <a:headEnd type="none" w="med" len="med"/>
-                      <a:tailEnd type="none" w="med" len="med"/>
-                    </a:lnR>
-                    <a:lnT w="12700" cap="flat" cmpd="sng" algn="ctr">
-                      <a:solidFill>
-                        <a:srgbClr val="BBBBBB"/>
-                      </a:solidFill>
-                      <a:prstDash val="solid"/>
-                      <a:round/>
-                      <a:headEnd type="none" w="med" len="med"/>
-                      <a:tailEnd type="none" w="med" len="med"/>
-                    </a:lnT>
-                    <a:lnB w="12700" cap="flat" cmpd="sng" algn="ctr">
-                      <a:solidFill>
-                        <a:srgbClr val="BBBBBB"/>
-                      </a:solidFill>
-                      <a:prstDash val="solid"/>
-                      <a:round/>
-                      <a:headEnd type="none" w="med" len="med"/>
-                      <a:tailEnd type="none" w="med" len="med"/>
-                    </a:lnB>
-                    <a:solidFill>
-                      <a:srgbClr val="F2F4F8"/>
-                    </a:solidFill>
-                  </a:tcPr>
-                </a:tc>
-              </a:tr>
             </a:tbl>
           </a:graphicData>
         </a:graphic>
@@ -19081,7 +22227,7 @@
             <a:pPr algn="ctr"/>
             <a:fld id="{F7021451-1387-4CA6-816F-3879F97B5CBC}" type="slidenum">
               <a:rPr b="1" lang="en-US"/>
-              <a:t>51</a:t>
+              <a:t>59</a:t>
             </a:fld>
             <a:endParaRPr lang="en-US"/>
           </a:p>
@@ -19095,9 +22241,9 @@
 </p:sld>
 </file>
 
-<file path=ppt/slides/slide52.xml><?xml version="1.0" encoding="utf-8"?>
+<file path=ppt/slides/slide6.xml><?xml version="1.0" encoding="utf-8"?>
 <p:sld xmlns:a="http://schemas.openxmlformats.org/drawingml/2006/main" xmlns:r="http://schemas.openxmlformats.org/officeDocument/2006/relationships" xmlns:p="http://schemas.openxmlformats.org/presentationml/2006/main">
-  <p:cSld name="Slide 52">
+  <p:cSld name="Slide 6">
     <p:spTree>
       <p:nvGrpSpPr>
         <p:cNvPr id="1" name=""/>
@@ -19145,22 +22291,46 @@
                 <a:ea typeface="Calibri" pitchFamily="34" charset="-122"/>
                 <a:cs typeface="Calibri" pitchFamily="34" charset="-120"/>
               </a:rPr>
-              <a:t>LOGBOOK</a:t>
+              <a:t>LESSON PLAN</a:t>
             </a:r>
             <a:endParaRPr lang="en-US" sz="1400" dirty="0"/>
           </a:p>
         </p:txBody>
       </p:sp>
-      <p:sp>
-        <p:nvSpPr>
-          <p:cNvPr id="3" name="Text 1"/>
+      <p:pic>
+        <p:nvPicPr>
+          <p:cNvPr id="3" name="Image 0" descr="/home/claude/f4/img/minesec_sheet.png">    </p:cNvPr>
+          <p:cNvPicPr>
+            <a:picLocks noChangeAspect="1"/>
+          </p:cNvPicPr>
+          <p:nvPr/>
+        </p:nvPicPr>
+        <p:blipFill>
+          <a:blip r:embed="rId1"/>
+          <a:stretch>
+            <a:fillRect/>
+          </a:stretch>
+        </p:blipFill>
+        <p:spPr>
+          <a:xfrm>
+            <a:off x="0" y="658368"/>
+            <a:ext cx="2468880" cy="5833872"/>
+          </a:xfrm>
+          <a:prstGeom prst="rect">
+            <a:avLst/>
+          </a:prstGeom>
+        </p:spPr>
+      </p:pic>
+      <p:sp>
+        <p:nvSpPr>
+          <p:cNvPr id="4" name="Text 1"/>
           <p:cNvSpPr/>
           <p:nvPr/>
         </p:nvSpPr>
         <p:spPr>
           <a:xfrm>
-            <a:off x="457200" y="1005840"/>
-            <a:ext cx="11277295" cy="731520"/>
+            <a:off x="2697480" y="1005840"/>
+            <a:ext cx="9174175" cy="731520"/>
           </a:xfrm>
           <a:prstGeom prst="rect">
             <a:avLst/>
@@ -19169,7 +22339,9 @@
           <a:ln/>
         </p:spPr>
         <p:txBody>
-          <a:bodyPr wrap="square" lIns="0" tIns="0" rIns="0" bIns="0" rtlCol="0" anchor="ctr"/>
+          <a:bodyPr wrap="square" lIns="0" tIns="0" rIns="0" bIns="0" rtlCol="0" anchor="ctr">
+            <a:normAutofit/>
+          </a:bodyPr>
           <a:lstStyle/>
           <a:p>
             <a:pPr algn="ctr" indent="0" marL="0">
@@ -19184,6 +22356,311 @@
                 <a:ea typeface="Times New Roman" pitchFamily="34" charset="-122"/>
                 <a:cs typeface="Times New Roman" pitchFamily="34" charset="-120"/>
               </a:rPr>
+              <a:t>Lesson Plan</a:t>
+            </a:r>
+            <a:endParaRPr lang="en-US" sz="3600" dirty="0"/>
+          </a:p>
+        </p:txBody>
+      </p:sp>
+      <p:sp>
+        <p:nvSpPr>
+          <p:cNvPr id="5" name="Text 2"/>
+          <p:cNvSpPr/>
+          <p:nvPr/>
+        </p:nvSpPr>
+        <p:spPr>
+          <a:xfrm>
+            <a:off x="2697480" y="1783080"/>
+            <a:ext cx="9174175" cy="4663440"/>
+          </a:xfrm>
+          <a:prstGeom prst="rect">
+            <a:avLst/>
+          </a:prstGeom>
+          <a:noFill/>
+          <a:ln/>
+        </p:spPr>
+        <p:txBody>
+          <a:bodyPr wrap="square" lIns="0" tIns="0" rIns="0" bIns="0" rtlCol="0" anchor="t"/>
+          <a:lstStyle/>
+          <a:p>
+            <a:pPr algn="l" marL="342900" indent="-342900">
+              <a:spcAft>
+                <a:spcPts val="800"/>
+              </a:spcAft>
+              <a:buSzPct val="100000"/>
+              <a:buFont typeface="+mj-lt"/>
+              <a:buAutoNum type="arabicPeriod" startAt="1"/>
+            </a:pPr>
+            <a:r>
+              <a:rPr lang="en-US" sz="4000" dirty="0">
+                <a:solidFill>
+                  <a:srgbClr val="111111"/>
+                </a:solidFill>
+                <a:latin typeface="Times New Roman" pitchFamily="34" charset="0"/>
+                <a:ea typeface="Times New Roman" pitchFamily="34" charset="-122"/>
+                <a:cs typeface="Times New Roman" pitchFamily="34" charset="-120"/>
+              </a:rPr>
+              <a:t>Correction of the homework</a:t>
+            </a:r>
+            <a:endParaRPr lang="en-US" sz="4000" dirty="0"/>
+          </a:p>
+          <a:p>
+            <a:pPr algn="l" marL="342900" indent="-342900">
+              <a:spcAft>
+                <a:spcPts val="800"/>
+              </a:spcAft>
+              <a:buSzPct val="100000"/>
+              <a:buFont typeface="+mj-lt"/>
+              <a:buAutoNum type="arabicPeriod" startAt="1"/>
+            </a:pPr>
+            <a:r>
+              <a:rPr lang="en-US" sz="4000" dirty="0">
+                <a:solidFill>
+                  <a:srgbClr val="111111"/>
+                </a:solidFill>
+                <a:latin typeface="Times New Roman" pitchFamily="34" charset="0"/>
+                <a:ea typeface="Times New Roman" pitchFamily="34" charset="-122"/>
+                <a:cs typeface="Times New Roman" pitchFamily="34" charset="-120"/>
+              </a:rPr>
+              <a:t>Objectives and recall</a:t>
+            </a:r>
+            <a:endParaRPr lang="en-US" sz="4000" dirty="0"/>
+          </a:p>
+          <a:p>
+            <a:pPr algn="l" marL="342900" indent="-342900">
+              <a:spcAft>
+                <a:spcPts val="800"/>
+              </a:spcAft>
+              <a:buSzPct val="100000"/>
+              <a:buFont typeface="+mj-lt"/>
+              <a:buAutoNum type="arabicPeriod" startAt="1"/>
+            </a:pPr>
+            <a:r>
+              <a:rPr lang="en-US" sz="4000" dirty="0">
+                <a:solidFill>
+                  <a:srgbClr val="111111"/>
+                </a:solidFill>
+                <a:latin typeface="Times New Roman" pitchFamily="34" charset="0"/>
+                <a:ea typeface="Times New Roman" pitchFamily="34" charset="-122"/>
+                <a:cs typeface="Times New Roman" pitchFamily="34" charset="-120"/>
+              </a:rPr>
+              <a:t>Real-life situation and action to take</a:t>
+            </a:r>
+            <a:endParaRPr lang="en-US" sz="4000" dirty="0"/>
+          </a:p>
+          <a:p>
+            <a:pPr algn="l" marL="342900" indent="-342900">
+              <a:spcAft>
+                <a:spcPts val="800"/>
+              </a:spcAft>
+              <a:buSzPct val="100000"/>
+              <a:buFont typeface="+mj-lt"/>
+              <a:buAutoNum type="arabicPeriod" startAt="1"/>
+            </a:pPr>
+            <a:r>
+              <a:rPr lang="en-US" sz="4000" dirty="0">
+                <a:solidFill>
+                  <a:srgbClr val="111111"/>
+                </a:solidFill>
+                <a:latin typeface="Times New Roman" pitchFamily="34" charset="0"/>
+                <a:ea typeface="Times New Roman" pitchFamily="34" charset="-122"/>
+                <a:cs typeface="Times New Roman" pitchFamily="34" charset="-120"/>
+              </a:rPr>
+              <a:t>Learning activities</a:t>
+            </a:r>
+            <a:endParaRPr lang="en-US" sz="4000" dirty="0"/>
+          </a:p>
+          <a:p>
+            <a:pPr algn="l" marL="342900" indent="-342900">
+              <a:spcAft>
+                <a:spcPts val="800"/>
+              </a:spcAft>
+              <a:buSzPct val="100000"/>
+              <a:buFont typeface="+mj-lt"/>
+              <a:buAutoNum type="arabicPeriod" startAt="1"/>
+            </a:pPr>
+            <a:r>
+              <a:rPr lang="en-US" sz="4000" dirty="0">
+                <a:solidFill>
+                  <a:srgbClr val="111111"/>
+                </a:solidFill>
+                <a:latin typeface="Times New Roman" pitchFamily="34" charset="0"/>
+                <a:ea typeface="Times New Roman" pitchFamily="34" charset="-122"/>
+                <a:cs typeface="Times New Roman" pitchFamily="34" charset="-120"/>
+              </a:rPr>
+              <a:t>Board summary</a:t>
+            </a:r>
+            <a:endParaRPr lang="en-US" sz="4000" dirty="0"/>
+          </a:p>
+          <a:p>
+            <a:pPr algn="l" marL="342900" indent="-342900">
+              <a:spcAft>
+                <a:spcPts val="800"/>
+              </a:spcAft>
+              <a:buSzPct val="100000"/>
+              <a:buFont typeface="+mj-lt"/>
+              <a:buAutoNum type="arabicPeriod" startAt="1"/>
+            </a:pPr>
+            <a:r>
+              <a:rPr lang="en-US" sz="4000" dirty="0">
+                <a:solidFill>
+                  <a:srgbClr val="111111"/>
+                </a:solidFill>
+                <a:latin typeface="Times New Roman" pitchFamily="34" charset="0"/>
+                <a:ea typeface="Times New Roman" pitchFamily="34" charset="-122"/>
+                <a:cs typeface="Times New Roman" pitchFamily="34" charset="-120"/>
+              </a:rPr>
+              <a:t>Evaluation, remediation and homework</a:t>
+            </a:r>
+            <a:endParaRPr lang="en-US" sz="4000" dirty="0"/>
+          </a:p>
+        </p:txBody>
+      </p:sp>
+      <p:sp>
+        <p:nvSpPr>
+          <p:cNvPr id="25" name="Slide Number Placeholder 0"/>
+          <p:cNvSpPr>
+            <a:spLocks noGrp="1"/>
+          </p:cNvSpPr>
+          <p:nvPr>
+            <p:ph type="sldNum" sz="quarter" idx="4294967295"/>
+          </p:nvPr>
+        </p:nvSpPr>
+        <p:spPr>
+          <a:xfrm>
+            <a:off x="27432" y="91440"/>
+            <a:ext cx="585216" cy="475488"/>
+          </a:xfrm>
+          <a:prstGeom prst="rect">
+            <a:avLst/>
+          </a:prstGeom>
+          <a:extLst>
+            <a:ext uri="{C572A759-6A51-4108-AA02-DFA0A04FC94B}">
+              <ma14:wrappingTextBoxFlag xmlns:ma14="http://schemas.microsoft.com/office/mac/drawingml/2011/main" val="0"/>
+            </a:ext>
+          </a:extLst>
+        </p:spPr>
+        <p:txBody>
+          <a:bodyPr/>
+          <a:lstStyle>
+            <a:lvl1pPr>
+              <a:defRPr sz="2000">
+                <a:solidFill>
+                  <a:srgbClr val="FFFFFF"/>
+                </a:solidFill>
+                <a:latin typeface="Calibri"/>
+                <a:ea typeface="Calibri"/>
+                <a:cs typeface="Calibri"/>
+              </a:defRPr>
+            </a:lvl1pPr>
+          </a:lstStyle>
+          <a:p>
+            <a:pPr algn="ctr"/>
+            <a:fld id="{F7021451-1387-4CA6-816F-3879F97B5CBC}" type="slidenum">
+              <a:rPr b="1" lang="en-US"/>
+              <a:t>6</a:t>
+            </a:fld>
+            <a:endParaRPr lang="en-US"/>
+          </a:p>
+        </p:txBody>
+      </p:sp>
+    </p:spTree>
+  </p:cSld>
+  <p:clrMapOvr>
+    <a:masterClrMapping/>
+  </p:clrMapOvr>
+</p:sld>
+</file>
+
+<file path=ppt/slides/slide60.xml><?xml version="1.0" encoding="utf-8"?>
+<p:sld xmlns:a="http://schemas.openxmlformats.org/drawingml/2006/main" xmlns:r="http://schemas.openxmlformats.org/officeDocument/2006/relationships" xmlns:p="http://schemas.openxmlformats.org/presentationml/2006/main">
+  <p:cSld name="Slide 60">
+    <p:spTree>
+      <p:nvGrpSpPr>
+        <p:cNvPr id="1" name=""/>
+        <p:cNvGrpSpPr/>
+        <p:nvPr/>
+      </p:nvGrpSpPr>
+      <p:grpSpPr>
+        <a:xfrm>
+          <a:off x="0" y="0"/>
+          <a:ext cx="0" cy="0"/>
+          <a:chOff x="0" y="0"/>
+          <a:chExt cx="0" cy="0"/>
+        </a:xfrm>
+      </p:grpSpPr>
+      <p:sp>
+        <p:nvSpPr>
+          <p:cNvPr id="2" name="Text 0"/>
+          <p:cNvSpPr/>
+          <p:nvPr/>
+        </p:nvSpPr>
+        <p:spPr>
+          <a:xfrm>
+            <a:off x="457200" y="713232"/>
+            <a:ext cx="11368735" cy="274320"/>
+          </a:xfrm>
+          <a:prstGeom prst="rect">
+            <a:avLst/>
+          </a:prstGeom>
+          <a:noFill/>
+          <a:ln/>
+        </p:spPr>
+        <p:txBody>
+          <a:bodyPr wrap="square" lIns="0" tIns="0" rIns="0" bIns="0" rtlCol="0" anchor="ctr"/>
+          <a:lstStyle/>
+          <a:p>
+            <a:pPr algn="r" indent="0" marL="0">
+              <a:buNone/>
+            </a:pPr>
+            <a:r>
+              <a:rPr lang="en-US" sz="1400" b="1" dirty="0">
+                <a:solidFill>
+                  <a:srgbClr val="1C3F6E"/>
+                </a:solidFill>
+                <a:latin typeface="Calibri" pitchFamily="34" charset="0"/>
+                <a:ea typeface="Calibri" pitchFamily="34" charset="-122"/>
+                <a:cs typeface="Calibri" pitchFamily="34" charset="-120"/>
+              </a:rPr>
+              <a:t>LOGBOOK</a:t>
+            </a:r>
+            <a:endParaRPr lang="en-US" sz="1400" dirty="0"/>
+          </a:p>
+        </p:txBody>
+      </p:sp>
+      <p:sp>
+        <p:nvSpPr>
+          <p:cNvPr id="3" name="Text 1"/>
+          <p:cNvSpPr/>
+          <p:nvPr/>
+        </p:nvSpPr>
+        <p:spPr>
+          <a:xfrm>
+            <a:off x="457200" y="1005840"/>
+            <a:ext cx="11277295" cy="731520"/>
+          </a:xfrm>
+          <a:prstGeom prst="rect">
+            <a:avLst/>
+          </a:prstGeom>
+          <a:noFill/>
+          <a:ln/>
+        </p:spPr>
+        <p:txBody>
+          <a:bodyPr wrap="square" lIns="0" tIns="0" rIns="0" bIns="0" rtlCol="0" anchor="ctr"/>
+          <a:lstStyle/>
+          <a:p>
+            <a:pPr algn="ctr" indent="0" marL="0">
+              <a:buNone/>
+            </a:pPr>
+            <a:r>
+              <a:rPr lang="en-US" sz="3600" b="1" dirty="0">
+                <a:solidFill>
+                  <a:srgbClr val="990011"/>
+                </a:solidFill>
+                <a:latin typeface="Times New Roman" pitchFamily="34" charset="0"/>
+                <a:ea typeface="Times New Roman" pitchFamily="34" charset="-122"/>
+                <a:cs typeface="Times New Roman" pitchFamily="34" charset="-120"/>
+              </a:rPr>
               <a:t>Official Logbook (1/2)</a:t>
             </a:r>
             <a:endParaRPr lang="en-US" sz="3600" dirty="0"/>
@@ -19192,7 +22669,7 @@
       </p:sp>
       <p:graphicFrame>
         <p:nvGraphicFramePr>
-          <p:cNvPr id="53" name="Table 0"/>
+          <p:cNvPr id="61" name="Table 0"/>
           <p:cNvGraphicFramePr>
             <a:graphicFrameLocks noGrp="1"/>
           </p:cNvGraphicFramePr>
@@ -19578,7 +23055,7 @@
                           <a:ea typeface="Calibri" pitchFamily="34" charset="-122"/>
                           <a:cs typeface="Calibri" pitchFamily="34" charset="-120"/>
                         </a:rPr>
-                        <a:t>Define over-, under- and optimum population. Give indicators and examples of each. Explain causes, consequences and solutions.</a:t>
+                        <a:t>Define overpopulation, underpopulation and optimum population. Give the indicators and causes of each. Explain their consequences. Explain the factors of the carrying capacity of the land. Propose solutions to population-resource problems.</a:t>
                       </a:r>
                       <a:endParaRPr lang="en-US" sz="1600" dirty="0">
                         <a:latin typeface="Calibri" charset="0"/>
@@ -19716,7 +23193,7 @@
                           <a:ea typeface="Calibri" pitchFamily="34" charset="-122"/>
                           <a:cs typeface="Calibri" pitchFamily="34" charset="-120"/>
                         </a:rPr>
-                        <a:t>Learners are able to identify over-, under- and optimum population and suggest solutions.</a:t>
+                        <a:t>Learners are able to recognise the signs of overpopulation and underpopulation and propose solutions.</a:t>
                       </a:r>
                       <a:endParaRPr lang="en-US" sz="1600" dirty="0">
                         <a:latin typeface="Calibri" charset="0"/>
@@ -19814,7 +23291,7 @@
             <a:pPr algn="ctr"/>
             <a:fld id="{F7021451-1387-4CA6-816F-3879F97B5CBC}" type="slidenum">
               <a:rPr b="1" lang="en-US"/>
-              <a:t>52</a:t>
+              <a:t>60</a:t>
             </a:fld>
             <a:endParaRPr lang="en-US"/>
           </a:p>
@@ -19828,9 +23305,9 @@
 </p:sld>
 </file>
 
-<file path=ppt/slides/slide53.xml><?xml version="1.0" encoding="utf-8"?>
+<file path=ppt/slides/slide61.xml><?xml version="1.0" encoding="utf-8"?>
 <p:sld xmlns:a="http://schemas.openxmlformats.org/drawingml/2006/main" xmlns:r="http://schemas.openxmlformats.org/officeDocument/2006/relationships" xmlns:p="http://schemas.openxmlformats.org/presentationml/2006/main">
-  <p:cSld name="Slide 53">
+  <p:cSld name="Slide 61">
     <p:spTree>
       <p:nvGrpSpPr>
         <p:cNvPr id="1" name=""/>
@@ -19925,7 +23402,7 @@
       </p:sp>
       <p:graphicFrame>
         <p:nvGraphicFramePr>
-          <p:cNvPr id="54" name="Table 0"/>
+          <p:cNvPr id="62" name="Table 0"/>
           <p:cNvGraphicFramePr>
             <a:graphicFrameLocks noGrp="1"/>
           </p:cNvGraphicFramePr>
@@ -20035,7 +23512,7 @@
                           <a:ea typeface="Calibri" pitchFamily="34" charset="-122"/>
                           <a:cs typeface="Calibri" pitchFamily="34" charset="-120"/>
                         </a:rPr>
-                        <a:t>Meaning of the Concepts; Overpopulation; Underpopulation.</a:t>
+                        <a:t>DEFINITIONS; Overpopulation; Underpopulation; Optimum Population; Carrying Capacity of the Land.</a:t>
                       </a:r>
                       <a:endParaRPr lang="en-US" sz="1600" dirty="0">
                         <a:latin typeface="Calibri" charset="0"/>
@@ -20311,7 +23788,7 @@
                           <a:ea typeface="Calibri" pitchFamily="34" charset="-122"/>
                           <a:cs typeface="Calibri" pitchFamily="34" charset="-120"/>
                         </a:rPr>
-                        <a:t>Is Cameroon over-, under- or optimally populated? Write a paragraph with evidence.</a:t>
+                        <a:t>Give the date of Malthus's essay on population.</a:t>
                       </a:r>
                       <a:endParaRPr lang="en-US" sz="1600" dirty="0">
                         <a:latin typeface="Calibri" charset="0"/>
@@ -20685,7 +24162,7 @@
             <a:pPr algn="ctr"/>
             <a:fld id="{F7021451-1387-4CA6-816F-3879F97B5CBC}" type="slidenum">
               <a:rPr b="1" lang="en-US"/>
-              <a:t>53</a:t>
+              <a:t>61</a:t>
             </a:fld>
             <a:endParaRPr lang="en-US"/>
           </a:p>
@@ -20699,9 +24176,9 @@
 </p:sld>
 </file>
 
-<file path=ppt/slides/slide54.xml><?xml version="1.0" encoding="utf-8"?>
+<file path=ppt/slides/slide62.xml><?xml version="1.0" encoding="utf-8"?>
 <p:sld xmlns:a="http://schemas.openxmlformats.org/drawingml/2006/main" xmlns:r="http://schemas.openxmlformats.org/officeDocument/2006/relationships" xmlns:p="http://schemas.openxmlformats.org/presentationml/2006/main">
-  <p:cSld name="Slide 54">
+  <p:cSld name="Slide 62">
     <p:spTree>
       <p:nvGrpSpPr>
         <p:cNvPr id="1" name=""/>
@@ -20772,7 +24249,7 @@
         <p:spPr>
           <a:xfrm>
             <a:off x="0" y="658368"/>
-            <a:ext cx="5120640" cy="5833872"/>
+            <a:ext cx="3840480" cy="5833872"/>
           </a:xfrm>
           <a:prstGeom prst="rect">
             <a:avLst/>
@@ -20787,8 +24264,8 @@
         </p:nvSpPr>
         <p:spPr>
           <a:xfrm>
-            <a:off x="5349240" y="1005840"/>
-            <a:ext cx="6522415" cy="731520"/>
+            <a:off x="4069080" y="1005840"/>
+            <a:ext cx="7802575" cy="731520"/>
           </a:xfrm>
           <a:prstGeom prst="rect">
             <a:avLst/>
@@ -20828,8 +24305,8 @@
         </p:nvSpPr>
         <p:spPr>
           <a:xfrm>
-            <a:off x="5349240" y="1783080"/>
-            <a:ext cx="6522415" cy="4663440"/>
+            <a:off x="4069080" y="1783080"/>
+            <a:ext cx="7802575" cy="4663440"/>
           </a:xfrm>
           <a:prstGeom prst="rect">
             <a:avLst/>
@@ -20878,7 +24355,7 @@
                 <a:ea typeface="Calibri" pitchFamily="34" charset="-122"/>
                 <a:cs typeface="Calibri" pitchFamily="34" charset="-120"/>
               </a:rPr>
-              <a:t>Without the projector (Activity 1): draw the curve.</a:t>
+              <a:t>Without the projector (Activity 1): describe a crowded quarter.</a:t>
             </a:r>
             <a:endParaRPr lang="en-US" sz="2000" dirty="0"/>
           </a:p>
@@ -20899,7 +24376,7 @@
                 <a:ea typeface="Calibri" pitchFamily="34" charset="-122"/>
                 <a:cs typeface="Calibri" pitchFamily="34" charset="-120"/>
               </a:rPr>
-              <a:t>Without the projector (Activity 2): list indicators.</a:t>
+              <a:t>Without the projector (Activity 2): discuss the East Region of Cameroon.</a:t>
             </a:r>
             <a:endParaRPr lang="en-US" sz="2000" dirty="0"/>
           </a:p>
@@ -20920,7 +24397,7 @@
                 <a:ea typeface="Calibri" pitchFamily="34" charset="-122"/>
                 <a:cs typeface="Calibri" pitchFamily="34" charset="-120"/>
               </a:rPr>
-              <a:t>Without the projector (Activity 3): discuss the Sahel.</a:t>
+              <a:t>Without the projector (Activity 3): draw the curve.</a:t>
             </a:r>
             <a:endParaRPr lang="en-US" sz="2000" dirty="0"/>
           </a:p>
@@ -20941,7 +24418,7 @@
                 <a:ea typeface="Calibri" pitchFamily="34" charset="-122"/>
                 <a:cs typeface="Calibri" pitchFamily="34" charset="-120"/>
               </a:rPr>
-              <a:t>Without the projector (Activity 4): find Canada and Australia.</a:t>
+              <a:t>Without the projector (Activity 4): talk about irrigation at Lagdo.</a:t>
             </a:r>
             <a:endParaRPr lang="en-US" sz="2000" dirty="0"/>
           </a:p>
@@ -20962,7 +24439,7 @@
                 <a:ea typeface="Calibri" pitchFamily="34" charset="-122"/>
                 <a:cs typeface="Calibri" pitchFamily="34" charset="-120"/>
               </a:rPr>
-              <a:t>Without the projector (Activity 5): list solutions.</a:t>
+              <a:t>Without the projector (Activity 5): describe degraded land.</a:t>
             </a:r>
             <a:endParaRPr lang="en-US" sz="2000" dirty="0"/>
           </a:p>
@@ -21010,7 +24487,7 @@
             <a:pPr algn="ctr"/>
             <a:fld id="{F7021451-1387-4CA6-816F-3879F97B5CBC}" type="slidenum">
               <a:rPr b="1" lang="en-US"/>
-              <a:t>54</a:t>
+              <a:t>62</a:t>
             </a:fld>
             <a:endParaRPr lang="en-US"/>
           </a:p>
@@ -21024,9 +24501,9 @@
 </p:sld>
 </file>
 
-<file path=ppt/slides/slide55.xml><?xml version="1.0" encoding="utf-8"?>
+<file path=ppt/slides/slide63.xml><?xml version="1.0" encoding="utf-8"?>
 <p:sld xmlns:a="http://schemas.openxmlformats.org/drawingml/2006/main" xmlns:r="http://schemas.openxmlformats.org/officeDocument/2006/relationships" xmlns:p="http://schemas.openxmlformats.org/presentationml/2006/main">
-  <p:cSld name="Slide 55">
+  <p:cSld name="Slide 63">
     <p:spTree>
       <p:nvGrpSpPr>
         <p:cNvPr id="1" name=""/>
@@ -21182,7 +24659,7 @@
                 <a:ea typeface="Calibri" pitchFamily="34" charset="-122"/>
                 <a:cs typeface="Calibri" pitchFamily="34" charset="-120"/>
               </a:rPr>
-              <a:t>National Geography Syllabus, MINESEC/IGE/IP-SS, 2019 — Module 4 (Population Geography).</a:t>
+              <a:t>Geography Syllabus for Sixth Forms (Lower and Upper Sixth), MINESEC, 2019 — Module 4 (Population Geography).</a:t>
             </a:r>
             <a:endParaRPr lang="en-US" sz="1800" dirty="0"/>
           </a:p>
@@ -21203,7 +24680,7 @@
                 <a:ea typeface="Calibri" pitchFamily="34" charset="-122"/>
                 <a:cs typeface="Calibri" pitchFamily="34" charset="-120"/>
               </a:rPr>
-              <a:t>Photo, Activity 2: “Wax market” by zouzouwizman, CC BY 2.0, via Flickr (https://www.flickr.com/photos/61111202@N00/12129001)</a:t>
+              <a:t>Teacher's course notes: Mr KAMDEM E., Population Geography (USA), GBHS Garoua, 2026.</a:t>
             </a:r>
             <a:endParaRPr lang="en-US" sz="1800" dirty="0"/>
           </a:p>
@@ -21224,7 +24701,7 @@
                 <a:ea typeface="Calibri" pitchFamily="34" charset="-122"/>
                 <a:cs typeface="Calibri" pitchFamily="34" charset="-120"/>
               </a:rPr>
-              <a:t>Photo, Activity 3: “Imagine a world without trees” by aloshbennett, CC BY 2.0, via Flickr (https://www.flickr.com/photos/13203757@N00/3480223314)</a:t>
+              <a:t>United Nations, World Population Prospects 2024.</a:t>
             </a:r>
             <a:endParaRPr lang="en-US" sz="1800" dirty="0"/>
           </a:p>
@@ -21245,7 +24722,7 @@
                 <a:ea typeface="Calibri" pitchFamily="34" charset="-122"/>
                 <a:cs typeface="Calibri" pitchFamily="34" charset="-120"/>
               </a:rPr>
-              <a:t>Photo, Activity 4: “Wheat fields. New Zealand.” by Bernard Spragg, CC0 1.0, via Flickr (https://www.flickr.com/photos/88123769@N02/24607172362)</a:t>
+              <a:t>Photo, Activity 1: “Mathare” by Book Aid International, CC BY-NC-ND 2.0, via Flickr (https://www.flickr.com/photos/45024905@N07/4135561707)</a:t>
             </a:r>
             <a:endParaRPr lang="en-US" sz="1800" dirty="0"/>
           </a:p>
@@ -21266,7 +24743,7 @@
                 <a:ea typeface="Calibri" pitchFamily="34" charset="-122"/>
                 <a:cs typeface="Calibri" pitchFamily="34" charset="-120"/>
               </a:rPr>
-              <a:t>Photo, Activity 5: “Haitian Students Breathe New Life into Depleted Pine Forest” by United Nations Photo, CC BY-NC-ND 2.0, via Flickr (https://www.flickr.com/photos/35483578@N03/5860275159)</a:t>
+              <a:t>Photo, Activity 4: “Mid-West Agriculture” by Djof, CC BY-NC-SA 2.0, via Flickr (https://www.flickr.com/photos/10787942@N00/147222315)</a:t>
             </a:r>
             <a:endParaRPr lang="en-US" sz="1800" dirty="0"/>
           </a:p>
@@ -21287,6 +24764,27 @@
                 <a:ea typeface="Calibri" pitchFamily="34" charset="-122"/>
                 <a:cs typeface="Calibri" pitchFamily="34" charset="-120"/>
               </a:rPr>
+              <a:t>Photo, Activity 5: “Cracked Earth” by Aleatoric Consonance, CC BY 2.0, via Flickr (https://www.flickr.com/photos/93921318@N00/3772011444)</a:t>
+            </a:r>
+            <a:endParaRPr lang="en-US" sz="1800" dirty="0"/>
+          </a:p>
+          <a:p>
+            <a:pPr algn="l" marL="342900" indent="-342900">
+              <a:spcAft>
+                <a:spcPts val="800"/>
+              </a:spcAft>
+              <a:buSzPct val="100000"/>
+              <a:buChar char="•"/>
+            </a:pPr>
+            <a:r>
+              <a:rPr lang="en-US" sz="1800" dirty="0">
+                <a:solidFill>
+                  <a:srgbClr val="111111"/>
+                </a:solidFill>
+                <a:latin typeface="Calibri" pitchFamily="34" charset="0"/>
+                <a:ea typeface="Calibri" pitchFamily="34" charset="-122"/>
+                <a:cs typeface="Calibri" pitchFamily="34" charset="-120"/>
+              </a:rPr>
               <a:t>Diagrams and animations: drawn for this lesson (Geography Department).</a:t>
             </a:r>
             <a:endParaRPr lang="en-US" sz="1800" dirty="0"/>
@@ -21335,338 +24833,7 @@
             <a:pPr algn="ctr"/>
             <a:fld id="{F7021451-1387-4CA6-816F-3879F97B5CBC}" type="slidenum">
               <a:rPr b="1" lang="en-US"/>
-              <a:t>55</a:t>
-            </a:fld>
-            <a:endParaRPr lang="en-US"/>
-          </a:p>
-        </p:txBody>
-      </p:sp>
-    </p:spTree>
-  </p:cSld>
-  <p:clrMapOvr>
-    <a:masterClrMapping/>
-  </p:clrMapOvr>
-</p:sld>
-</file>
-
-<file path=ppt/slides/slide6.xml><?xml version="1.0" encoding="utf-8"?>
-<p:sld xmlns:a="http://schemas.openxmlformats.org/drawingml/2006/main" xmlns:r="http://schemas.openxmlformats.org/officeDocument/2006/relationships" xmlns:p="http://schemas.openxmlformats.org/presentationml/2006/main">
-  <p:cSld name="Slide 6">
-    <p:spTree>
-      <p:nvGrpSpPr>
-        <p:cNvPr id="1" name=""/>
-        <p:cNvGrpSpPr/>
-        <p:nvPr/>
-      </p:nvGrpSpPr>
-      <p:grpSpPr>
-        <a:xfrm>
-          <a:off x="0" y="0"/>
-          <a:ext cx="0" cy="0"/>
-          <a:chOff x="0" y="0"/>
-          <a:chExt cx="0" cy="0"/>
-        </a:xfrm>
-      </p:grpSpPr>
-      <p:sp>
-        <p:nvSpPr>
-          <p:cNvPr id="2" name="Text 0"/>
-          <p:cNvSpPr/>
-          <p:nvPr/>
-        </p:nvSpPr>
-        <p:spPr>
-          <a:xfrm>
-            <a:off x="457200" y="713232"/>
-            <a:ext cx="11368735" cy="274320"/>
-          </a:xfrm>
-          <a:prstGeom prst="rect">
-            <a:avLst/>
-          </a:prstGeom>
-          <a:noFill/>
-          <a:ln/>
-        </p:spPr>
-        <p:txBody>
-          <a:bodyPr wrap="square" lIns="0" tIns="0" rIns="0" bIns="0" rtlCol="0" anchor="ctr"/>
-          <a:lstStyle/>
-          <a:p>
-            <a:pPr algn="r" indent="0" marL="0">
-              <a:buNone/>
-            </a:pPr>
-            <a:r>
-              <a:rPr lang="en-US" sz="1400" b="1" dirty="0">
-                <a:solidFill>
-                  <a:srgbClr val="1C3F6E"/>
-                </a:solidFill>
-                <a:latin typeface="Calibri" pitchFamily="34" charset="0"/>
-                <a:ea typeface="Calibri" pitchFamily="34" charset="-122"/>
-                <a:cs typeface="Calibri" pitchFamily="34" charset="-120"/>
-              </a:rPr>
-              <a:t>LESSON PLAN</a:t>
-            </a:r>
-            <a:endParaRPr lang="en-US" sz="1400" dirty="0"/>
-          </a:p>
-        </p:txBody>
-      </p:sp>
-      <p:pic>
-        <p:nvPicPr>
-          <p:cNvPr id="3" name="Image 0" descr="/home/claude/f4/img/minesec_sheet.png">    </p:cNvPr>
-          <p:cNvPicPr>
-            <a:picLocks noChangeAspect="1"/>
-          </p:cNvPicPr>
-          <p:nvPr/>
-        </p:nvPicPr>
-        <p:blipFill>
-          <a:blip r:embed="rId1"/>
-          <a:stretch>
-            <a:fillRect/>
-          </a:stretch>
-        </p:blipFill>
-        <p:spPr>
-          <a:xfrm>
-            <a:off x="0" y="658368"/>
-            <a:ext cx="2468880" cy="5833872"/>
-          </a:xfrm>
-          <a:prstGeom prst="rect">
-            <a:avLst/>
-          </a:prstGeom>
-        </p:spPr>
-      </p:pic>
-      <p:sp>
-        <p:nvSpPr>
-          <p:cNvPr id="4" name="Text 1"/>
-          <p:cNvSpPr/>
-          <p:nvPr/>
-        </p:nvSpPr>
-        <p:spPr>
-          <a:xfrm>
-            <a:off x="2697480" y="1005840"/>
-            <a:ext cx="9174175" cy="731520"/>
-          </a:xfrm>
-          <a:prstGeom prst="rect">
-            <a:avLst/>
-          </a:prstGeom>
-          <a:noFill/>
-          <a:ln/>
-        </p:spPr>
-        <p:txBody>
-          <a:bodyPr wrap="square" lIns="0" tIns="0" rIns="0" bIns="0" rtlCol="0" anchor="ctr">
-            <a:normAutofit/>
-          </a:bodyPr>
-          <a:lstStyle/>
-          <a:p>
-            <a:pPr algn="ctr" indent="0" marL="0">
-              <a:buNone/>
-            </a:pPr>
-            <a:r>
-              <a:rPr lang="en-US" sz="3600" b="1" dirty="0">
-                <a:solidFill>
-                  <a:srgbClr val="990011"/>
-                </a:solidFill>
-                <a:latin typeface="Times New Roman" pitchFamily="34" charset="0"/>
-                <a:ea typeface="Times New Roman" pitchFamily="34" charset="-122"/>
-                <a:cs typeface="Times New Roman" pitchFamily="34" charset="-120"/>
-              </a:rPr>
-              <a:t>Lesson Plan</a:t>
-            </a:r>
-            <a:endParaRPr lang="en-US" sz="3600" dirty="0"/>
-          </a:p>
-        </p:txBody>
-      </p:sp>
-      <p:sp>
-        <p:nvSpPr>
-          <p:cNvPr id="5" name="Text 2"/>
-          <p:cNvSpPr/>
-          <p:nvPr/>
-        </p:nvSpPr>
-        <p:spPr>
-          <a:xfrm>
-            <a:off x="2697480" y="1783080"/>
-            <a:ext cx="9174175" cy="4663440"/>
-          </a:xfrm>
-          <a:prstGeom prst="rect">
-            <a:avLst/>
-          </a:prstGeom>
-          <a:noFill/>
-          <a:ln/>
-        </p:spPr>
-        <p:txBody>
-          <a:bodyPr wrap="square" lIns="0" tIns="0" rIns="0" bIns="0" rtlCol="0" anchor="t"/>
-          <a:lstStyle/>
-          <a:p>
-            <a:pPr algn="l" marL="342900" indent="-342900">
-              <a:spcAft>
-                <a:spcPts val="800"/>
-              </a:spcAft>
-              <a:buSzPct val="100000"/>
-              <a:buFont typeface="+mj-lt"/>
-              <a:buAutoNum type="arabicPeriod" startAt="1"/>
-            </a:pPr>
-            <a:r>
-              <a:rPr lang="en-US" sz="4000" dirty="0">
-                <a:solidFill>
-                  <a:srgbClr val="111111"/>
-                </a:solidFill>
-                <a:latin typeface="Times New Roman" pitchFamily="34" charset="0"/>
-                <a:ea typeface="Times New Roman" pitchFamily="34" charset="-122"/>
-                <a:cs typeface="Times New Roman" pitchFamily="34" charset="-120"/>
-              </a:rPr>
-              <a:t>Correction of the homework</a:t>
-            </a:r>
-            <a:endParaRPr lang="en-US" sz="4000" dirty="0"/>
-          </a:p>
-          <a:p>
-            <a:pPr algn="l" marL="342900" indent="-342900">
-              <a:spcAft>
-                <a:spcPts val="800"/>
-              </a:spcAft>
-              <a:buSzPct val="100000"/>
-              <a:buFont typeface="+mj-lt"/>
-              <a:buAutoNum type="arabicPeriod" startAt="1"/>
-            </a:pPr>
-            <a:r>
-              <a:rPr lang="en-US" sz="4000" dirty="0">
-                <a:solidFill>
-                  <a:srgbClr val="111111"/>
-                </a:solidFill>
-                <a:latin typeface="Times New Roman" pitchFamily="34" charset="0"/>
-                <a:ea typeface="Times New Roman" pitchFamily="34" charset="-122"/>
-                <a:cs typeface="Times New Roman" pitchFamily="34" charset="-120"/>
-              </a:rPr>
-              <a:t>Objectives and recall</a:t>
-            </a:r>
-            <a:endParaRPr lang="en-US" sz="4000" dirty="0"/>
-          </a:p>
-          <a:p>
-            <a:pPr algn="l" marL="342900" indent="-342900">
-              <a:spcAft>
-                <a:spcPts val="800"/>
-              </a:spcAft>
-              <a:buSzPct val="100000"/>
-              <a:buFont typeface="+mj-lt"/>
-              <a:buAutoNum type="arabicPeriod" startAt="1"/>
-            </a:pPr>
-            <a:r>
-              <a:rPr lang="en-US" sz="4000" dirty="0">
-                <a:solidFill>
-                  <a:srgbClr val="111111"/>
-                </a:solidFill>
-                <a:latin typeface="Times New Roman" pitchFamily="34" charset="0"/>
-                <a:ea typeface="Times New Roman" pitchFamily="34" charset="-122"/>
-                <a:cs typeface="Times New Roman" pitchFamily="34" charset="-120"/>
-              </a:rPr>
-              <a:t>Real-life situation and action to take</a:t>
-            </a:r>
-            <a:endParaRPr lang="en-US" sz="4000" dirty="0"/>
-          </a:p>
-          <a:p>
-            <a:pPr algn="l" marL="342900" indent="-342900">
-              <a:spcAft>
-                <a:spcPts val="800"/>
-              </a:spcAft>
-              <a:buSzPct val="100000"/>
-              <a:buFont typeface="+mj-lt"/>
-              <a:buAutoNum type="arabicPeriod" startAt="1"/>
-            </a:pPr>
-            <a:r>
-              <a:rPr lang="en-US" sz="4000" dirty="0">
-                <a:solidFill>
-                  <a:srgbClr val="111111"/>
-                </a:solidFill>
-                <a:latin typeface="Times New Roman" pitchFamily="34" charset="0"/>
-                <a:ea typeface="Times New Roman" pitchFamily="34" charset="-122"/>
-                <a:cs typeface="Times New Roman" pitchFamily="34" charset="-120"/>
-              </a:rPr>
-              <a:t>Learning activities</a:t>
-            </a:r>
-            <a:endParaRPr lang="en-US" sz="4000" dirty="0"/>
-          </a:p>
-          <a:p>
-            <a:pPr algn="l" marL="342900" indent="-342900">
-              <a:spcAft>
-                <a:spcPts val="800"/>
-              </a:spcAft>
-              <a:buSzPct val="100000"/>
-              <a:buFont typeface="+mj-lt"/>
-              <a:buAutoNum type="arabicPeriod" startAt="1"/>
-            </a:pPr>
-            <a:r>
-              <a:rPr lang="en-US" sz="4000" dirty="0">
-                <a:solidFill>
-                  <a:srgbClr val="111111"/>
-                </a:solidFill>
-                <a:latin typeface="Times New Roman" pitchFamily="34" charset="0"/>
-                <a:ea typeface="Times New Roman" pitchFamily="34" charset="-122"/>
-                <a:cs typeface="Times New Roman" pitchFamily="34" charset="-120"/>
-              </a:rPr>
-              <a:t>Board summary</a:t>
-            </a:r>
-            <a:endParaRPr lang="en-US" sz="4000" dirty="0"/>
-          </a:p>
-          <a:p>
-            <a:pPr algn="l" marL="342900" indent="-342900">
-              <a:spcAft>
-                <a:spcPts val="800"/>
-              </a:spcAft>
-              <a:buSzPct val="100000"/>
-              <a:buFont typeface="+mj-lt"/>
-              <a:buAutoNum type="arabicPeriod" startAt="1"/>
-            </a:pPr>
-            <a:r>
-              <a:rPr lang="en-US" sz="4000" dirty="0">
-                <a:solidFill>
-                  <a:srgbClr val="111111"/>
-                </a:solidFill>
-                <a:latin typeface="Times New Roman" pitchFamily="34" charset="0"/>
-                <a:ea typeface="Times New Roman" pitchFamily="34" charset="-122"/>
-                <a:cs typeface="Times New Roman" pitchFamily="34" charset="-120"/>
-              </a:rPr>
-              <a:t>Evaluation, remediation and homework</a:t>
-            </a:r>
-            <a:endParaRPr lang="en-US" sz="4000" dirty="0"/>
-          </a:p>
-        </p:txBody>
-      </p:sp>
-      <p:sp>
-        <p:nvSpPr>
-          <p:cNvPr id="25" name="Slide Number Placeholder 0"/>
-          <p:cNvSpPr>
-            <a:spLocks noGrp="1"/>
-          </p:cNvSpPr>
-          <p:nvPr>
-            <p:ph type="sldNum" sz="quarter" idx="4294967295"/>
-          </p:nvPr>
-        </p:nvSpPr>
-        <p:spPr>
-          <a:xfrm>
-            <a:off x="27432" y="91440"/>
-            <a:ext cx="585216" cy="475488"/>
-          </a:xfrm>
-          <a:prstGeom prst="rect">
-            <a:avLst/>
-          </a:prstGeom>
-          <a:extLst>
-            <a:ext uri="{C572A759-6A51-4108-AA02-DFA0A04FC94B}">
-              <ma14:wrappingTextBoxFlag xmlns:ma14="http://schemas.microsoft.com/office/mac/drawingml/2011/main" val="0"/>
-            </a:ext>
-          </a:extLst>
-        </p:spPr>
-        <p:txBody>
-          <a:bodyPr/>
-          <a:lstStyle>
-            <a:lvl1pPr>
-              <a:defRPr sz="2000">
-                <a:solidFill>
-                  <a:srgbClr val="FFFFFF"/>
-                </a:solidFill>
-                <a:latin typeface="Calibri"/>
-                <a:ea typeface="Calibri"/>
-                <a:cs typeface="Calibri"/>
-              </a:defRPr>
-            </a:lvl1pPr>
-          </a:lstStyle>
-          <a:p>
-            <a:pPr algn="ctr"/>
-            <a:fld id="{F7021451-1387-4CA6-816F-3879F97B5CBC}" type="slidenum">
-              <a:rPr b="1" lang="en-US"/>
-              <a:t>6</a:t>
+              <a:t>63</a:t>
             </a:fld>
             <a:endParaRPr lang="en-US"/>
           </a:p>
@@ -21753,7 +24920,7 @@
         <p:spPr>
           <a:xfrm>
             <a:off x="0" y="658368"/>
-            <a:ext cx="5120640" cy="5833872"/>
+            <a:ext cx="1463040" cy="5833872"/>
           </a:xfrm>
           <a:prstGeom prst="rect">
             <a:avLst/>
@@ -21768,8 +24935,8 @@
         </p:nvSpPr>
         <p:spPr>
           <a:xfrm>
-            <a:off x="5349240" y="1005840"/>
-            <a:ext cx="6522415" cy="731520"/>
+            <a:off x="1691640" y="1005840"/>
+            <a:ext cx="10180015" cy="731520"/>
           </a:xfrm>
           <a:prstGeom prst="rect">
             <a:avLst/>
@@ -21809,8 +24976,8 @@
         </p:nvSpPr>
         <p:spPr>
           <a:xfrm>
-            <a:off x="5349240" y="1783080"/>
-            <a:ext cx="6522415" cy="4663440"/>
+            <a:off x="1691640" y="1783080"/>
+            <a:ext cx="10180015" cy="4663440"/>
           </a:xfrm>
           <a:prstGeom prst="rect">
             <a:avLst/>
@@ -21859,7 +25026,7 @@
                 <a:ea typeface="Times New Roman" pitchFamily="34" charset="-122"/>
                 <a:cs typeface="Times New Roman" pitchFamily="34" charset="-120"/>
               </a:rPr>
-              <a:t>Define over-, under- and optimum population.</a:t>
+              <a:t>Define overpopulation, underpopulation and optimum population.</a:t>
             </a:r>
             <a:endParaRPr lang="en-US" sz="4000" dirty="0"/>
           </a:p>
@@ -21881,7 +25048,29 @@
                 <a:ea typeface="Times New Roman" pitchFamily="34" charset="-122"/>
                 <a:cs typeface="Times New Roman" pitchFamily="34" charset="-120"/>
               </a:rPr>
-              <a:t>Give indicators and examples of each.</a:t>
+              <a:t>Give the indicators and causes of each.</a:t>
+            </a:r>
+            <a:endParaRPr lang="en-US" sz="4000" dirty="0"/>
+          </a:p>
+          <a:p>
+            <a:pPr algn="l" marL="342900" indent="-342900">
+              <a:spcAft>
+                <a:spcPts val="800"/>
+              </a:spcAft>
+              <a:buSzPct val="100000"/>
+              <a:buFont typeface="+mj-lt"/>
+              <a:buAutoNum type="arabicPeriod" startAt="1"/>
+            </a:pPr>
+            <a:r>
+              <a:rPr lang="en-US" sz="4000" dirty="0">
+                <a:solidFill>
+                  <a:srgbClr val="111111"/>
+                </a:solidFill>
+                <a:latin typeface="Times New Roman" pitchFamily="34" charset="0"/>
+                <a:ea typeface="Times New Roman" pitchFamily="34" charset="-122"/>
+                <a:cs typeface="Times New Roman" pitchFamily="34" charset="-120"/>
+              </a:rPr>
+              <a:t>Explain their consequences.</a:t>
             </a:r>
             <a:endParaRPr lang="en-US" sz="4000" dirty="0"/>
           </a:p>
@@ -22102,7 +25291,29 @@
                 <a:ea typeface="Times New Roman" pitchFamily="34" charset="-122"/>
                 <a:cs typeface="Times New Roman" pitchFamily="34" charset="-120"/>
               </a:rPr>
-              <a:t>Explain causes, consequences and solutions.</a:t>
+              <a:t>Explain the factors of the carrying capacity of the land.</a:t>
+            </a:r>
+            <a:endParaRPr lang="en-US" sz="4000" dirty="0"/>
+          </a:p>
+          <a:p>
+            <a:pPr algn="l" marL="342900" indent="-342900">
+              <a:spcAft>
+                <a:spcPts val="800"/>
+              </a:spcAft>
+              <a:buSzPct val="100000"/>
+              <a:buFont typeface="+mj-lt"/>
+              <a:buAutoNum type="arabicPeriod" startAt="1"/>
+            </a:pPr>
+            <a:r>
+              <a:rPr lang="en-US" sz="4000" dirty="0">
+                <a:solidFill>
+                  <a:srgbClr val="111111"/>
+                </a:solidFill>
+                <a:latin typeface="Times New Roman" pitchFamily="34" charset="0"/>
+                <a:ea typeface="Times New Roman" pitchFamily="34" charset="-122"/>
+                <a:cs typeface="Times New Roman" pitchFamily="34" charset="-120"/>
+              </a:rPr>
+              <a:t>Propose solutions to population-resource problems.</a:t>
             </a:r>
             <a:endParaRPr lang="en-US" sz="4000" dirty="0"/>
           </a:p>
@@ -22322,7 +25533,7 @@
                 <a:ea typeface="Times New Roman" pitchFamily="34" charset="-122"/>
                 <a:cs typeface="Times New Roman" pitchFamily="34" charset="-120"/>
               </a:rPr>
-              <a:t>Carrying capacity is the limit of support.</a:t>
+              <a:t>Carrying capacity is the limit of an environment.</a:t>
             </a:r>
             <a:endParaRPr lang="en-US" sz="4000" dirty="0"/>
           </a:p>
@@ -22343,7 +25554,28 @@
                 <a:ea typeface="Times New Roman" pitchFamily="34" charset="-122"/>
                 <a:cs typeface="Times New Roman" pitchFamily="34" charset="-120"/>
               </a:rPr>
-              <a:t>Technology can raise production.</a:t>
+              <a:t>The J-curve overshoots and crashes.</a:t>
+            </a:r>
+            <a:endParaRPr lang="en-US" sz="4000" dirty="0"/>
+          </a:p>
+          <a:p>
+            <a:pPr algn="l" marL="342900" indent="-342900">
+              <a:spcAft>
+                <a:spcPts val="800"/>
+              </a:spcAft>
+              <a:buSzPct val="100000"/>
+              <a:buChar char="•"/>
+            </a:pPr>
+            <a:r>
+              <a:rPr lang="en-US" sz="4000" dirty="0">
+                <a:solidFill>
+                  <a:srgbClr val="111111"/>
+                </a:solidFill>
+                <a:latin typeface="Times New Roman" pitchFamily="34" charset="0"/>
+                <a:ea typeface="Times New Roman" pitchFamily="34" charset="-122"/>
+                <a:cs typeface="Times New Roman" pitchFamily="34" charset="-120"/>
+              </a:rPr>
+              <a:t>Technology can raise the carrying capacity.</a:t>
             </a:r>
             <a:endParaRPr lang="en-US" sz="4000" dirty="0"/>
           </a:p>

--- a/lecons/USA/Population Geography/21_USA_POP_L17_Overpopulation_Underpopulation_and_Optimum_Population.pptx
+++ b/lecons/USA/Population Geography/21_USA_POP_L17_Overpopulation_Underpopulation_and_Optimum_Population.pptx
@@ -68,9 +68,16 @@
     <p:sldId id="316" r:id="rId62"/>
     <p:sldId id="317" r:id="rId63"/>
     <p:sldId id="318" r:id="rId64"/>
+    <p:sldId id="319" r:id="rId65"/>
+    <p:sldId id="320" r:id="rId66"/>
+    <p:sldId id="321" r:id="rId67"/>
+    <p:sldId id="322" r:id="rId68"/>
+    <p:sldId id="323" r:id="rId69"/>
+    <p:sldId id="324" r:id="rId70"/>
+    <p:sldId id="325" r:id="rId71"/>
   </p:sldIdLst>
   <p:notesMasterIdLst>
-    <p:notesMasterId r:id="rId65"/>
+    <p:notesMasterId r:id="rId72"/>
   </p:notesMasterIdLst>
   <p:sldSz cx="12192000" cy="6858000"/>
   <p:notesSz cx="6858000" cy="12192000"/>
@@ -3204,7 +3211,7 @@
           <a:p>
             <a:r>
               <a:rPr lang="en-US" dirty="0"/>
-              <a:t>We continue with the definitions. On this slide we have Underpopulation and Optimum population. Write each point on a new line, with the key term first, and explain it in your own words when we revise.</a:t>
+              <a:t>We continue with the definitions. On this slide we have Underpopulation and Optimum population. Write each point on a new line, with the key term first, and explain it in your own words when we revise. When you finish, we go to the next slide.</a:t>
             </a:r>
             <a:endParaRPr lang="en-US" dirty="0"/>
           </a:p>
@@ -3292,7 +3299,7 @@
           <a:p>
             <a:r>
               <a:rPr lang="en-US" dirty="0"/>
-              <a:t>Let us copy Overpopulation. Overpopulation is presented as follows. Copy the point on Indicators on the left, then draw the diagram on the right: an overcrowded neighbourhood. Give it a title and label it clearly.</a:t>
+              <a:t>We continue with the definitions. On this slide we have Carrying capacity of the land. Write each point on a new line, with the key term first, and explain it in your own words when we revise.</a:t>
             </a:r>
             <a:endParaRPr lang="en-US" dirty="0"/>
           </a:p>
@@ -3380,7 +3387,7 @@
           <a:p>
             <a:r>
               <a:rPr lang="en-US" dirty="0"/>
-              <a:t>We continue with Overpopulation. On this slide we have Causes and Consequences. Write each point on a new line, with the key term first, and explain it in your own words when we revise. When you finish, we go to the next slide.</a:t>
+              <a:t>Let us copy Meaning, Indicators and Causes. Overpopulation is explained as follows. Copy the point on Meaning and situations on the left, then draw the diagram on the right: a slum. Give it a title and label it clearly.</a:t>
             </a:r>
             <a:endParaRPr lang="en-US" dirty="0"/>
           </a:p>
@@ -3556,7 +3563,7 @@
           <a:p>
             <a:r>
               <a:rPr lang="en-US" dirty="0"/>
-              <a:t>We continue with Overpopulation. On this slide we have Solutions. Write each point on a new line, with the key term first, and explain it in your own words when we revise.</a:t>
+              <a:t>We continue with Meaning, Indicators and Causes. Copy the point on Indicators and measurement: write the key term first, then its explanation.</a:t>
             </a:r>
             <a:endParaRPr lang="en-US" dirty="0"/>
           </a:p>
@@ -3644,7 +3651,7 @@
           <a:p>
             <a:r>
               <a:rPr lang="en-US" dirty="0"/>
-              <a:t>Let us copy Underpopulation. Underpopulation is presented as follows. Copy the point on Indicators on the left, then draw the diagram on the right: types of population-resource relations. Give it a title and label it clearly.</a:t>
+              <a:t>We continue with Meaning, Indicators and Causes. Copy the point on Causes: write the key term first, then its explanation.</a:t>
             </a:r>
             <a:endParaRPr lang="en-US" dirty="0"/>
           </a:p>
@@ -3732,7 +3739,7 @@
           <a:p>
             <a:r>
               <a:rPr lang="en-US" dirty="0"/>
-              <a:t>We continue with Underpopulation. On this slide we have Causes and Consequences. Write each point on a new line, with the key term first, and explain it in your own words when we revise. When you finish, we go to the next slide.</a:t>
+              <a:t>Let us copy Consequences and Solutions. Overpopulation has the following consequences and solutions. Copy the point on Consequences: write the key term first, then its explanation.</a:t>
             </a:r>
             <a:endParaRPr lang="en-US" dirty="0"/>
           </a:p>
@@ -3820,7 +3827,7 @@
           <a:p>
             <a:r>
               <a:rPr lang="en-US" dirty="0"/>
-              <a:t>We continue with Underpopulation. On this slide we have Solutions. Write each point on a new line, with the key term first, and explain it in your own words when we revise.</a:t>
+              <a:t>We continue with Consequences and Solutions. Copy the point on Family planning and education: write the key term first, then its explanation.</a:t>
             </a:r>
             <a:endParaRPr lang="en-US" dirty="0"/>
           </a:p>
@@ -3908,7 +3915,7 @@
           <a:p>
             <a:r>
               <a:rPr lang="en-US" dirty="0"/>
-              <a:t>Let us copy Optimum Population. The optimum population is presented as follows. Copy the point on Meaning on the left, then draw the diagram on the right: the optimum population. Give it a title and label it clearly.</a:t>
+              <a:t>We continue with Consequences and Solutions. Copy the point on Technology and jobs: write the key term first, then its explanation.</a:t>
             </a:r>
             <a:endParaRPr lang="en-US" dirty="0"/>
           </a:p>
@@ -3996,7 +4003,7 @@
           <a:p>
             <a:r>
               <a:rPr lang="en-US" dirty="0"/>
-              <a:t>We continue with Optimum Population. On this slide we have Indicators and Conditions. Write each point on a new line, with the key term first, and explain it in your own words when we revise. When you finish, we go to the next slide.</a:t>
+              <a:t>Let us copy Meaning, Indicators and Causes. Underpopulation is explained as follows. Copy the point on Meaning and situations on the left, then draw the diagram on the right: population and resources. Give it a title and label it clearly.</a:t>
             </a:r>
             <a:endParaRPr lang="en-US" dirty="0"/>
           </a:p>
@@ -4084,7 +4091,7 @@
           <a:p>
             <a:r>
               <a:rPr lang="en-US" dirty="0"/>
-              <a:t>We continue with Optimum Population. On this slide we have A moving target. Write each point on a new line, with the key term first, and explain it in your own words when we revise.</a:t>
+              <a:t>We continue with Meaning, Indicators and Causes. Copy the point on Indicators and measurement: write the key term first, then its explanation.</a:t>
             </a:r>
             <a:endParaRPr lang="en-US" dirty="0"/>
           </a:p>
@@ -4172,7 +4179,7 @@
           <a:p>
             <a:r>
               <a:rPr lang="en-US" dirty="0"/>
-              <a:t>Let us copy Carrying Capacity of the Land. The carrying capacity of the land is presented as follows. On this slide we have Meaning. Write each point on a new line, with the key term first, and explain it in your own words when we revise.</a:t>
+              <a:t>We continue with Meaning, Indicators and Causes. Copy the point on Causes: write the key term first, then its explanation.</a:t>
             </a:r>
             <a:endParaRPr lang="en-US" dirty="0"/>
           </a:p>
@@ -4260,7 +4267,7 @@
           <a:p>
             <a:r>
               <a:rPr lang="en-US" dirty="0"/>
-              <a:t>Copy the point on Warning signs on the left, then draw the diagram on the right: degraded soil. Give it a title and label it clearly.</a:t>
+              <a:t>Let us copy Consequences and Solutions. Underpopulation has the following consequences and solutions. Copy the point on Consequences: write the key term first, then its explanation.</a:t>
             </a:r>
             <a:endParaRPr lang="en-US" dirty="0"/>
           </a:p>
@@ -4348,7 +4355,7 @@
           <a:p>
             <a:r>
               <a:rPr lang="en-US" dirty="0"/>
-              <a:t>We continue with Carrying Capacity of the Land. On this slide we have Factors. Write each point on a new line, with the key term first, and explain it in your own words when we revise. When you finish, we go to the next slide.</a:t>
+              <a:t>We continue with Consequences and Solutions. Copy the point on Immigration and pro-natal policies: write the key term first, then its explanation.</a:t>
             </a:r>
             <a:endParaRPr lang="en-US" dirty="0"/>
           </a:p>
@@ -4524,7 +4531,7 @@
           <a:p>
             <a:r>
               <a:rPr lang="en-US" dirty="0"/>
-              <a:t>We continue with Carrying Capacity of the Land. On this slide we have If exceeded. Write each point on a new line, with the key term first, and explain it in your own words when we revise.</a:t>
+              <a:t>We continue with Consequences and Solutions. Copy the point on Machines and automation: write the key term first, then its explanation.</a:t>
             </a:r>
             <a:endParaRPr lang="en-US" dirty="0"/>
           </a:p>
@@ -4612,7 +4619,7 @@
           <a:p>
             <a:r>
               <a:rPr lang="en-US" dirty="0"/>
-              <a:t>Copy the point on Solutions on the left, then draw the diagram on the right: irrigation. Give it a title and label it clearly.</a:t>
+              <a:t>Let us copy Optimum Population. The optimum population is explained as follows. Copy the point on Meaning on the left, then draw the diagram on the right: the optimum population. Give it a title and label it clearly.</a:t>
             </a:r>
             <a:endParaRPr lang="en-US" dirty="0"/>
           </a:p>
@@ -4700,7 +4707,7 @@
           <a:p>
             <a:r>
               <a:rPr lang="en-US" dirty="0"/>
-              <a:t>Now let us check what you have understood. Question 1: Give two causes and two solutions of overpopulation. Answer in your exercise book.</a:t>
+              <a:t>We continue with Optimum Population. Copy the point on Indicators: write the key term first, then its explanation.</a:t>
             </a:r>
             <a:endParaRPr lang="en-US" dirty="0"/>
           </a:p>
@@ -4788,7 +4795,7 @@
           <a:p>
             <a:r>
               <a:rPr lang="en-US" dirty="0"/>
-              <a:t>The expected answer is: causes: high births, falling deaths, immigration; solutions: family planning, education of girls, technology, industrial jobs. If you got it right, well done.</a:t>
+              <a:t>We continue with Optimum Population. Copy the point on Conditions: write the key term first, then its explanation.</a:t>
             </a:r>
             <a:endParaRPr lang="en-US" dirty="0"/>
           </a:p>
@@ -4876,7 +4883,7 @@
           <a:p>
             <a:r>
               <a:rPr lang="en-US" dirty="0"/>
-              <a:t>Now let us check what you have understood. Question 2: How can a new irrigation system change the carrying capacity and the optimum population? Answer in your exercise book.</a:t>
+              <a:t>We continue with Optimum Population. Copy the point on A moving target: write the key term first, then its explanation.</a:t>
             </a:r>
             <a:endParaRPr lang="en-US" dirty="0"/>
           </a:p>
@@ -4964,7 +4971,7 @@
           <a:p>
             <a:r>
               <a:rPr lang="en-US" dirty="0"/>
-              <a:t>The expected answer is: it raises both, because the same land can feed more people at a higher standard of living. If you got it right, well done.</a:t>
+              <a:t>Let us copy Carrying Capacity of the Land. The carrying capacity of the land is explained as follows. Copy the point on Meaning and warning signs on the left, then draw the diagram on the right: dry, cracked soil. Give it a title and label it clearly.</a:t>
             </a:r>
             <a:endParaRPr lang="en-US" dirty="0"/>
           </a:p>
@@ -5052,7 +5059,7 @@
           <a:p>
             <a:r>
               <a:rPr lang="en-US" dirty="0"/>
-              <a:t>For those who need more practice, fill in the blanks in your exercise book. The answers are: number 1, underpopulation; number 2, optimum; number 3, raises.</a:t>
+              <a:t>We continue with Carrying Capacity of the Land. Copy the point on Factors: write the key term first, then its explanation.</a:t>
             </a:r>
             <a:endParaRPr lang="en-US" dirty="0"/>
           </a:p>
@@ -5140,7 +5147,7 @@
           <a:p>
             <a:r>
               <a:rPr lang="en-US" dirty="0"/>
-              <a:t>For your homework: Give the date of Malthus's essay on population. We shall correct it at the beginning of our next lesson.</a:t>
+              <a:t>We continue with Carrying Capacity of the Land. Copy the point on Consequences if exceeded: write the key term first, then its explanation.</a:t>
             </a:r>
             <a:endParaRPr lang="en-US" dirty="0"/>
           </a:p>
@@ -5228,7 +5235,7 @@
           <a:p>
             <a:r>
               <a:rPr lang="en-US" dirty="0"/>
-              <a:t>Our next lesson will be on Lesson 18: Theories of Population and Resources: Malthus and Boserup. Thank you for your attention, and see you next time.</a:t>
+              <a:t>Copy the point on Solutions on the left, then draw the diagram on the right: irrigation. Give it a title and label it clearly.</a:t>
             </a:r>
             <a:endParaRPr lang="en-US" dirty="0"/>
           </a:p>
@@ -5316,7 +5323,7 @@
           <a:p>
             <a:r>
               <a:rPr lang="en-US" dirty="0"/>
-              <a:t>Let us play the bilingual game. I say a word in English, and you give me the French word. Then we do the reverse.</a:t>
+              <a:t>Now let us check what you have understood. Question 1: Give two causes and two solutions of overpopulation. Answer in your exercise book.</a:t>
             </a:r>
             <a:endParaRPr lang="en-US" dirty="0"/>
           </a:p>
@@ -5492,7 +5499,7 @@
           <a:p>
             <a:r>
               <a:rPr lang="en-US" dirty="0"/>
-              <a:t>I record this information in the official logbook of the class after the lesson.</a:t>
+              <a:t>The expected answer is: causes: high births, falling deaths, immigration; solutions: family planning, education of girls, technology, industrial jobs. If you got it right, well done.</a:t>
             </a:r>
             <a:endParaRPr lang="en-US" dirty="0"/>
           </a:p>
@@ -5580,7 +5587,7 @@
           <a:p>
             <a:r>
               <a:rPr lang="en-US" dirty="0"/>
-              <a:t>I complete the second page of the logbook: the matter taught, the evaluation, the homework and the attendance.</a:t>
+              <a:t>Now let us check what you have understood. Question 2: How can a new irrigation system change the carrying capacity and the optimum population? Answer in your exercise book.</a:t>
             </a:r>
             <a:endParaRPr lang="en-US" dirty="0"/>
           </a:p>
@@ -5668,7 +5675,7 @@
           <a:p>
             <a:r>
               <a:rPr lang="en-US" dirty="0"/>
-              <a:t>This slide is for me, the teacher: it gives the timing of the lesson and what to do if the projector is not available.</a:t>
+              <a:t>The expected answer is: it raises both, because the same land can feed more people at a higher standard of living. If you got it right, well done.</a:t>
             </a:r>
             <a:endParaRPr lang="en-US" dirty="0"/>
           </a:p>
@@ -5756,7 +5763,7 @@
           <a:p>
             <a:r>
               <a:rPr lang="en-US" dirty="0"/>
-              <a:t>These are the references and picture credits used to prepare this lesson.</a:t>
+              <a:t>For those who need more practice, fill in the blanks in your exercise book. The answers are: number 1, underpopulation; number 2, optimum; number 3, raises.</a:t>
             </a:r>
             <a:endParaRPr lang="en-US" dirty="0"/>
           </a:p>
@@ -5780,6 +5787,534 @@
             <a:fld id="{F7021451-1387-4CA6-816F-3879F97B5CBC}" type="slidenum">
               <a:rPr lang="en-US"/>
               <a:t>63</a:t>
+            </a:fld>
+            <a:endParaRPr lang="en-US"/>
+          </a:p>
+        </p:txBody>
+      </p:sp>
+    </p:spTree>
+    <p:extLst>
+      <p:ext uri="{BB962C8B-B14F-4D97-AF65-F5344CB8AC3E}">
+        <p14:creationId xmlns:p14="http://schemas.microsoft.com/office/powerpoint/2010/main" val="1024086991"/>
+      </p:ext>
+    </p:extLst>
+  </p:cSld>
+  <p:clrMapOvr>
+    <a:masterClrMapping/>
+  </p:clrMapOvr>
+</p:notes>
+</file>
+
+<file path=ppt/notesSlides/notesSlide64.xml><?xml version="1.0" encoding="utf-8"?>
+<p:notes xmlns:a="http://schemas.openxmlformats.org/drawingml/2006/main" xmlns:r="http://schemas.openxmlformats.org/officeDocument/2006/relationships" xmlns:p="http://schemas.openxmlformats.org/presentationml/2006/main">
+  <p:cSld>
+    <p:spTree>
+      <p:nvGrpSpPr>
+        <p:cNvPr id="1" name=""/>
+        <p:cNvGrpSpPr/>
+        <p:nvPr/>
+      </p:nvGrpSpPr>
+      <p:grpSpPr>
+        <a:xfrm>
+          <a:off x="0" y="0"/>
+          <a:ext cx="0" cy="0"/>
+          <a:chOff x="0" y="0"/>
+          <a:chExt cx="0" cy="0"/>
+        </a:xfrm>
+      </p:grpSpPr>
+      <p:sp>
+        <p:nvSpPr>
+          <p:cNvPr id="2" name="Slide Image Placeholder 1"/>
+          <p:cNvSpPr>
+            <a:spLocks noGrp="1" noRot="1" noChangeAspect="1"/>
+          </p:cNvSpPr>
+          <p:nvPr>
+            <p:ph type="sldImg"/>
+          </p:nvPr>
+        </p:nvSpPr>
+        <p:spPr/>
+      </p:sp>
+      <p:sp>
+        <p:nvSpPr>
+          <p:cNvPr id="3" name="Notes Placeholder 2"/>
+          <p:cNvSpPr>
+            <a:spLocks noGrp="1"/>
+          </p:cNvSpPr>
+          <p:nvPr>
+            <p:ph type="body" idx="1"/>
+          </p:nvPr>
+        </p:nvSpPr>
+        <p:spPr/>
+        <p:txBody>
+          <a:bodyPr/>
+          <a:lstStyle/>
+          <a:p>
+            <a:r>
+              <a:rPr lang="en-US" dirty="0"/>
+              <a:t>For your homework: Give the date of Malthus's essay on population. We shall correct it at the beginning of our next lesson.</a:t>
+            </a:r>
+            <a:endParaRPr lang="en-US" dirty="0"/>
+          </a:p>
+        </p:txBody>
+      </p:sp>
+      <p:sp>
+        <p:nvSpPr>
+          <p:cNvPr id="4" name="Slide Number Placeholder 3"/>
+          <p:cNvSpPr>
+            <a:spLocks noGrp="1"/>
+          </p:cNvSpPr>
+          <p:nvPr>
+            <p:ph type="sldNum" sz="quarter" idx="10"/>
+          </p:nvPr>
+        </p:nvSpPr>
+        <p:spPr/>
+        <p:txBody>
+          <a:bodyPr/>
+          <a:lstStyle/>
+          <a:p>
+            <a:fld id="{F7021451-1387-4CA6-816F-3879F97B5CBC}" type="slidenum">
+              <a:rPr lang="en-US"/>
+              <a:t>64</a:t>
+            </a:fld>
+            <a:endParaRPr lang="en-US"/>
+          </a:p>
+        </p:txBody>
+      </p:sp>
+    </p:spTree>
+    <p:extLst>
+      <p:ext uri="{BB962C8B-B14F-4D97-AF65-F5344CB8AC3E}">
+        <p14:creationId xmlns:p14="http://schemas.microsoft.com/office/powerpoint/2010/main" val="1024086991"/>
+      </p:ext>
+    </p:extLst>
+  </p:cSld>
+  <p:clrMapOvr>
+    <a:masterClrMapping/>
+  </p:clrMapOvr>
+</p:notes>
+</file>
+
+<file path=ppt/notesSlides/notesSlide65.xml><?xml version="1.0" encoding="utf-8"?>
+<p:notes xmlns:a="http://schemas.openxmlformats.org/drawingml/2006/main" xmlns:r="http://schemas.openxmlformats.org/officeDocument/2006/relationships" xmlns:p="http://schemas.openxmlformats.org/presentationml/2006/main">
+  <p:cSld>
+    <p:spTree>
+      <p:nvGrpSpPr>
+        <p:cNvPr id="1" name=""/>
+        <p:cNvGrpSpPr/>
+        <p:nvPr/>
+      </p:nvGrpSpPr>
+      <p:grpSpPr>
+        <a:xfrm>
+          <a:off x="0" y="0"/>
+          <a:ext cx="0" cy="0"/>
+          <a:chOff x="0" y="0"/>
+          <a:chExt cx="0" cy="0"/>
+        </a:xfrm>
+      </p:grpSpPr>
+      <p:sp>
+        <p:nvSpPr>
+          <p:cNvPr id="2" name="Slide Image Placeholder 1"/>
+          <p:cNvSpPr>
+            <a:spLocks noGrp="1" noRot="1" noChangeAspect="1"/>
+          </p:cNvSpPr>
+          <p:nvPr>
+            <p:ph type="sldImg"/>
+          </p:nvPr>
+        </p:nvSpPr>
+        <p:spPr/>
+      </p:sp>
+      <p:sp>
+        <p:nvSpPr>
+          <p:cNvPr id="3" name="Notes Placeholder 2"/>
+          <p:cNvSpPr>
+            <a:spLocks noGrp="1"/>
+          </p:cNvSpPr>
+          <p:nvPr>
+            <p:ph type="body" idx="1"/>
+          </p:nvPr>
+        </p:nvSpPr>
+        <p:spPr/>
+        <p:txBody>
+          <a:bodyPr/>
+          <a:lstStyle/>
+          <a:p>
+            <a:r>
+              <a:rPr lang="en-US" dirty="0"/>
+              <a:t>Our next lesson will be on Lesson 18: Theories of Population and Resources: Malthus and Boserup. Thank you for your attention, and see you next time.</a:t>
+            </a:r>
+            <a:endParaRPr lang="en-US" dirty="0"/>
+          </a:p>
+        </p:txBody>
+      </p:sp>
+      <p:sp>
+        <p:nvSpPr>
+          <p:cNvPr id="4" name="Slide Number Placeholder 3"/>
+          <p:cNvSpPr>
+            <a:spLocks noGrp="1"/>
+          </p:cNvSpPr>
+          <p:nvPr>
+            <p:ph type="sldNum" sz="quarter" idx="10"/>
+          </p:nvPr>
+        </p:nvSpPr>
+        <p:spPr/>
+        <p:txBody>
+          <a:bodyPr/>
+          <a:lstStyle/>
+          <a:p>
+            <a:fld id="{F7021451-1387-4CA6-816F-3879F97B5CBC}" type="slidenum">
+              <a:rPr lang="en-US"/>
+              <a:t>65</a:t>
+            </a:fld>
+            <a:endParaRPr lang="en-US"/>
+          </a:p>
+        </p:txBody>
+      </p:sp>
+    </p:spTree>
+    <p:extLst>
+      <p:ext uri="{BB962C8B-B14F-4D97-AF65-F5344CB8AC3E}">
+        <p14:creationId xmlns:p14="http://schemas.microsoft.com/office/powerpoint/2010/main" val="1024086991"/>
+      </p:ext>
+    </p:extLst>
+  </p:cSld>
+  <p:clrMapOvr>
+    <a:masterClrMapping/>
+  </p:clrMapOvr>
+</p:notes>
+</file>
+
+<file path=ppt/notesSlides/notesSlide66.xml><?xml version="1.0" encoding="utf-8"?>
+<p:notes xmlns:a="http://schemas.openxmlformats.org/drawingml/2006/main" xmlns:r="http://schemas.openxmlformats.org/officeDocument/2006/relationships" xmlns:p="http://schemas.openxmlformats.org/presentationml/2006/main">
+  <p:cSld>
+    <p:spTree>
+      <p:nvGrpSpPr>
+        <p:cNvPr id="1" name=""/>
+        <p:cNvGrpSpPr/>
+        <p:nvPr/>
+      </p:nvGrpSpPr>
+      <p:grpSpPr>
+        <a:xfrm>
+          <a:off x="0" y="0"/>
+          <a:ext cx="0" cy="0"/>
+          <a:chOff x="0" y="0"/>
+          <a:chExt cx="0" cy="0"/>
+        </a:xfrm>
+      </p:grpSpPr>
+      <p:sp>
+        <p:nvSpPr>
+          <p:cNvPr id="2" name="Slide Image Placeholder 1"/>
+          <p:cNvSpPr>
+            <a:spLocks noGrp="1" noRot="1" noChangeAspect="1"/>
+          </p:cNvSpPr>
+          <p:nvPr>
+            <p:ph type="sldImg"/>
+          </p:nvPr>
+        </p:nvSpPr>
+        <p:spPr/>
+      </p:sp>
+      <p:sp>
+        <p:nvSpPr>
+          <p:cNvPr id="3" name="Notes Placeholder 2"/>
+          <p:cNvSpPr>
+            <a:spLocks noGrp="1"/>
+          </p:cNvSpPr>
+          <p:nvPr>
+            <p:ph type="body" idx="1"/>
+          </p:nvPr>
+        </p:nvSpPr>
+        <p:spPr/>
+        <p:txBody>
+          <a:bodyPr/>
+          <a:lstStyle/>
+          <a:p>
+            <a:r>
+              <a:rPr lang="en-US" dirty="0"/>
+              <a:t>Let us play the bilingual game. I say a word in English, and you give me the French word. Then we do the reverse.</a:t>
+            </a:r>
+            <a:endParaRPr lang="en-US" dirty="0"/>
+          </a:p>
+        </p:txBody>
+      </p:sp>
+      <p:sp>
+        <p:nvSpPr>
+          <p:cNvPr id="4" name="Slide Number Placeholder 3"/>
+          <p:cNvSpPr>
+            <a:spLocks noGrp="1"/>
+          </p:cNvSpPr>
+          <p:nvPr>
+            <p:ph type="sldNum" sz="quarter" idx="10"/>
+          </p:nvPr>
+        </p:nvSpPr>
+        <p:spPr/>
+        <p:txBody>
+          <a:bodyPr/>
+          <a:lstStyle/>
+          <a:p>
+            <a:fld id="{F7021451-1387-4CA6-816F-3879F97B5CBC}" type="slidenum">
+              <a:rPr lang="en-US"/>
+              <a:t>66</a:t>
+            </a:fld>
+            <a:endParaRPr lang="en-US"/>
+          </a:p>
+        </p:txBody>
+      </p:sp>
+    </p:spTree>
+    <p:extLst>
+      <p:ext uri="{BB962C8B-B14F-4D97-AF65-F5344CB8AC3E}">
+        <p14:creationId xmlns:p14="http://schemas.microsoft.com/office/powerpoint/2010/main" val="1024086991"/>
+      </p:ext>
+    </p:extLst>
+  </p:cSld>
+  <p:clrMapOvr>
+    <a:masterClrMapping/>
+  </p:clrMapOvr>
+</p:notes>
+</file>
+
+<file path=ppt/notesSlides/notesSlide67.xml><?xml version="1.0" encoding="utf-8"?>
+<p:notes xmlns:a="http://schemas.openxmlformats.org/drawingml/2006/main" xmlns:r="http://schemas.openxmlformats.org/officeDocument/2006/relationships" xmlns:p="http://schemas.openxmlformats.org/presentationml/2006/main">
+  <p:cSld>
+    <p:spTree>
+      <p:nvGrpSpPr>
+        <p:cNvPr id="1" name=""/>
+        <p:cNvGrpSpPr/>
+        <p:nvPr/>
+      </p:nvGrpSpPr>
+      <p:grpSpPr>
+        <a:xfrm>
+          <a:off x="0" y="0"/>
+          <a:ext cx="0" cy="0"/>
+          <a:chOff x="0" y="0"/>
+          <a:chExt cx="0" cy="0"/>
+        </a:xfrm>
+      </p:grpSpPr>
+      <p:sp>
+        <p:nvSpPr>
+          <p:cNvPr id="2" name="Slide Image Placeholder 1"/>
+          <p:cNvSpPr>
+            <a:spLocks noGrp="1" noRot="1" noChangeAspect="1"/>
+          </p:cNvSpPr>
+          <p:nvPr>
+            <p:ph type="sldImg"/>
+          </p:nvPr>
+        </p:nvSpPr>
+        <p:spPr/>
+      </p:sp>
+      <p:sp>
+        <p:nvSpPr>
+          <p:cNvPr id="3" name="Notes Placeholder 2"/>
+          <p:cNvSpPr>
+            <a:spLocks noGrp="1"/>
+          </p:cNvSpPr>
+          <p:nvPr>
+            <p:ph type="body" idx="1"/>
+          </p:nvPr>
+        </p:nvSpPr>
+        <p:spPr/>
+        <p:txBody>
+          <a:bodyPr/>
+          <a:lstStyle/>
+          <a:p>
+            <a:r>
+              <a:rPr lang="en-US" dirty="0"/>
+              <a:t>I record this information in the official logbook of the class after the lesson.</a:t>
+            </a:r>
+            <a:endParaRPr lang="en-US" dirty="0"/>
+          </a:p>
+        </p:txBody>
+      </p:sp>
+      <p:sp>
+        <p:nvSpPr>
+          <p:cNvPr id="4" name="Slide Number Placeholder 3"/>
+          <p:cNvSpPr>
+            <a:spLocks noGrp="1"/>
+          </p:cNvSpPr>
+          <p:nvPr>
+            <p:ph type="sldNum" sz="quarter" idx="10"/>
+          </p:nvPr>
+        </p:nvSpPr>
+        <p:spPr/>
+        <p:txBody>
+          <a:bodyPr/>
+          <a:lstStyle/>
+          <a:p>
+            <a:fld id="{F7021451-1387-4CA6-816F-3879F97B5CBC}" type="slidenum">
+              <a:rPr lang="en-US"/>
+              <a:t>67</a:t>
+            </a:fld>
+            <a:endParaRPr lang="en-US"/>
+          </a:p>
+        </p:txBody>
+      </p:sp>
+    </p:spTree>
+    <p:extLst>
+      <p:ext uri="{BB962C8B-B14F-4D97-AF65-F5344CB8AC3E}">
+        <p14:creationId xmlns:p14="http://schemas.microsoft.com/office/powerpoint/2010/main" val="1024086991"/>
+      </p:ext>
+    </p:extLst>
+  </p:cSld>
+  <p:clrMapOvr>
+    <a:masterClrMapping/>
+  </p:clrMapOvr>
+</p:notes>
+</file>
+
+<file path=ppt/notesSlides/notesSlide68.xml><?xml version="1.0" encoding="utf-8"?>
+<p:notes xmlns:a="http://schemas.openxmlformats.org/drawingml/2006/main" xmlns:r="http://schemas.openxmlformats.org/officeDocument/2006/relationships" xmlns:p="http://schemas.openxmlformats.org/presentationml/2006/main">
+  <p:cSld>
+    <p:spTree>
+      <p:nvGrpSpPr>
+        <p:cNvPr id="1" name=""/>
+        <p:cNvGrpSpPr/>
+        <p:nvPr/>
+      </p:nvGrpSpPr>
+      <p:grpSpPr>
+        <a:xfrm>
+          <a:off x="0" y="0"/>
+          <a:ext cx="0" cy="0"/>
+          <a:chOff x="0" y="0"/>
+          <a:chExt cx="0" cy="0"/>
+        </a:xfrm>
+      </p:grpSpPr>
+      <p:sp>
+        <p:nvSpPr>
+          <p:cNvPr id="2" name="Slide Image Placeholder 1"/>
+          <p:cNvSpPr>
+            <a:spLocks noGrp="1" noRot="1" noChangeAspect="1"/>
+          </p:cNvSpPr>
+          <p:nvPr>
+            <p:ph type="sldImg"/>
+          </p:nvPr>
+        </p:nvSpPr>
+        <p:spPr/>
+      </p:sp>
+      <p:sp>
+        <p:nvSpPr>
+          <p:cNvPr id="3" name="Notes Placeholder 2"/>
+          <p:cNvSpPr>
+            <a:spLocks noGrp="1"/>
+          </p:cNvSpPr>
+          <p:nvPr>
+            <p:ph type="body" idx="1"/>
+          </p:nvPr>
+        </p:nvSpPr>
+        <p:spPr/>
+        <p:txBody>
+          <a:bodyPr/>
+          <a:lstStyle/>
+          <a:p>
+            <a:r>
+              <a:rPr lang="en-US" dirty="0"/>
+              <a:t>I complete the second page of the logbook: the matter taught, the evaluation, the homework and the attendance.</a:t>
+            </a:r>
+            <a:endParaRPr lang="en-US" dirty="0"/>
+          </a:p>
+        </p:txBody>
+      </p:sp>
+      <p:sp>
+        <p:nvSpPr>
+          <p:cNvPr id="4" name="Slide Number Placeholder 3"/>
+          <p:cNvSpPr>
+            <a:spLocks noGrp="1"/>
+          </p:cNvSpPr>
+          <p:nvPr>
+            <p:ph type="sldNum" sz="quarter" idx="10"/>
+          </p:nvPr>
+        </p:nvSpPr>
+        <p:spPr/>
+        <p:txBody>
+          <a:bodyPr/>
+          <a:lstStyle/>
+          <a:p>
+            <a:fld id="{F7021451-1387-4CA6-816F-3879F97B5CBC}" type="slidenum">
+              <a:rPr lang="en-US"/>
+              <a:t>68</a:t>
+            </a:fld>
+            <a:endParaRPr lang="en-US"/>
+          </a:p>
+        </p:txBody>
+      </p:sp>
+    </p:spTree>
+    <p:extLst>
+      <p:ext uri="{BB962C8B-B14F-4D97-AF65-F5344CB8AC3E}">
+        <p14:creationId xmlns:p14="http://schemas.microsoft.com/office/powerpoint/2010/main" val="1024086991"/>
+      </p:ext>
+    </p:extLst>
+  </p:cSld>
+  <p:clrMapOvr>
+    <a:masterClrMapping/>
+  </p:clrMapOvr>
+</p:notes>
+</file>
+
+<file path=ppt/notesSlides/notesSlide69.xml><?xml version="1.0" encoding="utf-8"?>
+<p:notes xmlns:a="http://schemas.openxmlformats.org/drawingml/2006/main" xmlns:r="http://schemas.openxmlformats.org/officeDocument/2006/relationships" xmlns:p="http://schemas.openxmlformats.org/presentationml/2006/main">
+  <p:cSld>
+    <p:spTree>
+      <p:nvGrpSpPr>
+        <p:cNvPr id="1" name=""/>
+        <p:cNvGrpSpPr/>
+        <p:nvPr/>
+      </p:nvGrpSpPr>
+      <p:grpSpPr>
+        <a:xfrm>
+          <a:off x="0" y="0"/>
+          <a:ext cx="0" cy="0"/>
+          <a:chOff x="0" y="0"/>
+          <a:chExt cx="0" cy="0"/>
+        </a:xfrm>
+      </p:grpSpPr>
+      <p:sp>
+        <p:nvSpPr>
+          <p:cNvPr id="2" name="Slide Image Placeholder 1"/>
+          <p:cNvSpPr>
+            <a:spLocks noGrp="1" noRot="1" noChangeAspect="1"/>
+          </p:cNvSpPr>
+          <p:nvPr>
+            <p:ph type="sldImg"/>
+          </p:nvPr>
+        </p:nvSpPr>
+        <p:spPr/>
+      </p:sp>
+      <p:sp>
+        <p:nvSpPr>
+          <p:cNvPr id="3" name="Notes Placeholder 2"/>
+          <p:cNvSpPr>
+            <a:spLocks noGrp="1"/>
+          </p:cNvSpPr>
+          <p:nvPr>
+            <p:ph type="body" idx="1"/>
+          </p:nvPr>
+        </p:nvSpPr>
+        <p:spPr/>
+        <p:txBody>
+          <a:bodyPr/>
+          <a:lstStyle/>
+          <a:p>
+            <a:r>
+              <a:rPr lang="en-US" dirty="0"/>
+              <a:t>This slide is for me, the teacher: it gives the timing of the lesson and what to do if the projector is not available.</a:t>
+            </a:r>
+            <a:endParaRPr lang="en-US" dirty="0"/>
+          </a:p>
+        </p:txBody>
+      </p:sp>
+      <p:sp>
+        <p:nvSpPr>
+          <p:cNvPr id="4" name="Slide Number Placeholder 3"/>
+          <p:cNvSpPr>
+            <a:spLocks noGrp="1"/>
+          </p:cNvSpPr>
+          <p:nvPr>
+            <p:ph type="sldNum" sz="quarter" idx="10"/>
+          </p:nvPr>
+        </p:nvSpPr>
+        <p:spPr/>
+        <p:txBody>
+          <a:bodyPr/>
+          <a:lstStyle/>
+          <a:p>
+            <a:fld id="{F7021451-1387-4CA6-816F-3879F97B5CBC}" type="slidenum">
+              <a:rPr lang="en-US"/>
+              <a:t>69</a:t>
             </a:fld>
             <a:endParaRPr lang="en-US"/>
           </a:p>
@@ -5868,6 +6403,94 @@
             <a:fld id="{F7021451-1387-4CA6-816F-3879F97B5CBC}" type="slidenum">
               <a:rPr lang="en-US"/>
               <a:t>7</a:t>
+            </a:fld>
+            <a:endParaRPr lang="en-US"/>
+          </a:p>
+        </p:txBody>
+      </p:sp>
+    </p:spTree>
+    <p:extLst>
+      <p:ext uri="{BB962C8B-B14F-4D97-AF65-F5344CB8AC3E}">
+        <p14:creationId xmlns:p14="http://schemas.microsoft.com/office/powerpoint/2010/main" val="1024086991"/>
+      </p:ext>
+    </p:extLst>
+  </p:cSld>
+  <p:clrMapOvr>
+    <a:masterClrMapping/>
+  </p:clrMapOvr>
+</p:notes>
+</file>
+
+<file path=ppt/notesSlides/notesSlide70.xml><?xml version="1.0" encoding="utf-8"?>
+<p:notes xmlns:a="http://schemas.openxmlformats.org/drawingml/2006/main" xmlns:r="http://schemas.openxmlformats.org/officeDocument/2006/relationships" xmlns:p="http://schemas.openxmlformats.org/presentationml/2006/main">
+  <p:cSld>
+    <p:spTree>
+      <p:nvGrpSpPr>
+        <p:cNvPr id="1" name=""/>
+        <p:cNvGrpSpPr/>
+        <p:nvPr/>
+      </p:nvGrpSpPr>
+      <p:grpSpPr>
+        <a:xfrm>
+          <a:off x="0" y="0"/>
+          <a:ext cx="0" cy="0"/>
+          <a:chOff x="0" y="0"/>
+          <a:chExt cx="0" cy="0"/>
+        </a:xfrm>
+      </p:grpSpPr>
+      <p:sp>
+        <p:nvSpPr>
+          <p:cNvPr id="2" name="Slide Image Placeholder 1"/>
+          <p:cNvSpPr>
+            <a:spLocks noGrp="1" noRot="1" noChangeAspect="1"/>
+          </p:cNvSpPr>
+          <p:nvPr>
+            <p:ph type="sldImg"/>
+          </p:nvPr>
+        </p:nvSpPr>
+        <p:spPr/>
+      </p:sp>
+      <p:sp>
+        <p:nvSpPr>
+          <p:cNvPr id="3" name="Notes Placeholder 2"/>
+          <p:cNvSpPr>
+            <a:spLocks noGrp="1"/>
+          </p:cNvSpPr>
+          <p:nvPr>
+            <p:ph type="body" idx="1"/>
+          </p:nvPr>
+        </p:nvSpPr>
+        <p:spPr/>
+        <p:txBody>
+          <a:bodyPr/>
+          <a:lstStyle/>
+          <a:p>
+            <a:r>
+              <a:rPr lang="en-US" dirty="0"/>
+              <a:t>These are the references and picture credits used to prepare this lesson.</a:t>
+            </a:r>
+            <a:endParaRPr lang="en-US" dirty="0"/>
+          </a:p>
+        </p:txBody>
+      </p:sp>
+      <p:sp>
+        <p:nvSpPr>
+          <p:cNvPr id="4" name="Slide Number Placeholder 3"/>
+          <p:cNvSpPr>
+            <a:spLocks noGrp="1"/>
+          </p:cNvSpPr>
+          <p:nvPr>
+            <p:ph type="sldNum" sz="quarter" idx="10"/>
+          </p:nvPr>
+        </p:nvSpPr>
+        <p:spPr/>
+        <p:txBody>
+          <a:bodyPr/>
+          <a:lstStyle/>
+          <a:p>
+            <a:fld id="{F7021451-1387-4CA6-816F-3879F97B5CBC}" type="slidenum">
+              <a:rPr lang="en-US"/>
+              <a:t>70</a:t>
             </a:fld>
             <a:endParaRPr lang="en-US"/>
           </a:p>
@@ -15245,129 +15868,9 @@
           </a:p>
         </p:txBody>
       </p:sp>
-      <p:sp>
-        <p:nvSpPr>
-          <p:cNvPr id="3" name="Text 1"/>
-          <p:cNvSpPr/>
-          <p:nvPr/>
-        </p:nvSpPr>
-        <p:spPr>
-          <a:xfrm>
-            <a:off x="365760" y="1005840"/>
-            <a:ext cx="11460175" cy="731520"/>
-          </a:xfrm>
-          <a:prstGeom prst="rect">
-            <a:avLst/>
-          </a:prstGeom>
-          <a:noFill/>
-          <a:ln/>
-        </p:spPr>
-        <p:txBody>
-          <a:bodyPr wrap="square" lIns="0" tIns="0" rIns="0" bIns="0" rtlCol="0" anchor="ctr">
-            <a:normAutofit/>
-          </a:bodyPr>
-          <a:lstStyle/>
-          <a:p>
-            <a:pPr algn="ctr" indent="0" marL="0">
-              <a:buNone/>
-            </a:pPr>
-            <a:r>
-              <a:rPr lang="en-US" sz="3600" b="1" dirty="0">
-                <a:solidFill>
-                  <a:srgbClr val="990011"/>
-                </a:solidFill>
-                <a:latin typeface="Times New Roman" pitchFamily="34" charset="0"/>
-                <a:ea typeface="Times New Roman" pitchFamily="34" charset="-122"/>
-                <a:cs typeface="Times New Roman" pitchFamily="34" charset="-120"/>
-              </a:rPr>
-              <a:t>1. Overpopulation</a:t>
-            </a:r>
-            <a:endParaRPr lang="en-US" sz="3600" dirty="0"/>
-          </a:p>
-        </p:txBody>
-      </p:sp>
-      <p:sp>
-        <p:nvSpPr>
-          <p:cNvPr id="4" name="Text 2"/>
-          <p:cNvSpPr/>
-          <p:nvPr/>
-        </p:nvSpPr>
-        <p:spPr>
-          <a:xfrm>
-            <a:off x="365760" y="1783080"/>
-            <a:ext cx="4846320" cy="4617720"/>
-          </a:xfrm>
-          <a:prstGeom prst="rect">
-            <a:avLst/>
-          </a:prstGeom>
-          <a:noFill/>
-          <a:ln/>
-        </p:spPr>
-        <p:txBody>
-          <a:bodyPr wrap="square" lIns="0" tIns="0" rIns="0" bIns="0" rtlCol="0" anchor="t"/>
-          <a:lstStyle/>
-          <a:p>
-            <a:pPr algn="l" indent="0" marL="0">
-              <a:spcAft>
-                <a:spcPts val="800"/>
-              </a:spcAft>
-              <a:buNone/>
-            </a:pPr>
-            <a:r>
-              <a:rPr lang="en-US" sz="3600" i="1" dirty="0">
-                <a:solidFill>
-                  <a:srgbClr val="111111"/>
-                </a:solidFill>
-                <a:latin typeface="Times New Roman" pitchFamily="34" charset="0"/>
-                <a:ea typeface="Times New Roman" pitchFamily="34" charset="-122"/>
-                <a:cs typeface="Times New Roman" pitchFamily="34" charset="-120"/>
-              </a:rPr>
-              <a:t>Overpopulation is presented as follows:</a:t>
-            </a:r>
-            <a:endParaRPr lang="en-US" sz="3600" dirty="0"/>
-          </a:p>
-          <a:p>
-            <a:pPr algn="l" indent="0" marL="0">
-              <a:spcAft>
-                <a:spcPts val="800"/>
-              </a:spcAft>
-              <a:buNone/>
-            </a:pPr>
-            <a:r>
-              <a:rPr lang="en-US" sz="3600" b="1" dirty="0">
-                <a:solidFill>
-                  <a:srgbClr val="111111"/>
-                </a:solidFill>
-                <a:latin typeface="Times New Roman" pitchFamily="34" charset="0"/>
-                <a:ea typeface="Times New Roman" pitchFamily="34" charset="-122"/>
-                <a:cs typeface="Times New Roman" pitchFamily="34" charset="-120"/>
-              </a:rPr>
-              <a:t>Indicators: </a:t>
-            </a:r>
-            <a:pPr algn="l" indent="0" marL="0">
-              <a:spcAft>
-                <a:spcPts val="800"/>
-              </a:spcAft>
-              <a:buNone/>
-            </a:pPr>
-            <a:r>
-              <a:rPr lang="en-US" sz="3600" dirty="0">
-                <a:solidFill>
-                  <a:srgbClr val="111111"/>
-                </a:solidFill>
-                <a:latin typeface="Times New Roman" pitchFamily="34" charset="0"/>
-                <a:ea typeface="Times New Roman" pitchFamily="34" charset="-122"/>
-                <a:cs typeface="Times New Roman" pitchFamily="34" charset="-120"/>
-              </a:rPr>
-              <a:t>High unemployment, low income per person, poverty, malnutrition, slums and overloaded schools and hospitals.</a:t>
-            </a:r>
-            <a:endParaRPr lang="en-US" sz="3600" dirty="0"/>
-          </a:p>
-        </p:txBody>
-      </p:sp>
       <p:pic>
         <p:nvPicPr>
-          <p:cNvPr id="5" name="Image 0" descr="/home/claude/f4/img/v2/usa_slum.jpg">    </p:cNvPr>
+          <p:cNvPr id="3" name="Image 0" descr="/home/claude/f4/img/minesec_sheet.png">    </p:cNvPr>
           <p:cNvPicPr>
             <a:picLocks noChangeAspect="1"/>
           </p:cNvPicPr>
@@ -15381,8 +15884,8 @@
         </p:blipFill>
         <p:spPr>
           <a:xfrm>
-            <a:off x="5349240" y="2069407"/>
-            <a:ext cx="6659575" cy="3697594"/>
+            <a:off x="0" y="658368"/>
+            <a:ext cx="5120640" cy="5833872"/>
           </a:xfrm>
           <a:prstGeom prst="rect">
             <a:avLst/>
@@ -15391,14 +15894,14 @@
       </p:pic>
       <p:sp>
         <p:nvSpPr>
-          <p:cNvPr id="6" name="Text 3"/>
+          <p:cNvPr id="4" name="Text 1"/>
           <p:cNvSpPr/>
           <p:nvPr/>
         </p:nvSpPr>
         <p:spPr>
           <a:xfrm>
-            <a:off x="5349240" y="6089904"/>
-            <a:ext cx="6659575" cy="347472"/>
+            <a:off x="5349240" y="1005840"/>
+            <a:ext cx="6522415" cy="731520"/>
           </a:xfrm>
           <a:prstGeom prst="rect">
             <a:avLst/>
@@ -15407,24 +15910,85 @@
           <a:ln/>
         </p:spPr>
         <p:txBody>
-          <a:bodyPr wrap="square" lIns="0" tIns="0" rIns="0" bIns="0" rtlCol="0" anchor="ctr"/>
+          <a:bodyPr wrap="square" lIns="0" tIns="0" rIns="0" bIns="0" rtlCol="0" anchor="ctr">
+            <a:normAutofit/>
+          </a:bodyPr>
           <a:lstStyle/>
           <a:p>
             <a:pPr algn="ctr" indent="0" marL="0">
               <a:buNone/>
             </a:pPr>
             <a:r>
-              <a:rPr lang="en-US" sz="1600" i="1" dirty="0">
-                <a:solidFill>
-                  <a:srgbClr val="555555"/>
+              <a:rPr lang="en-US" sz="3600" b="1" dirty="0">
+                <a:solidFill>
+                  <a:srgbClr val="990011"/>
                 </a:solidFill>
                 <a:latin typeface="Times New Roman" pitchFamily="34" charset="0"/>
                 <a:ea typeface="Times New Roman" pitchFamily="34" charset="-122"/>
                 <a:cs typeface="Times New Roman" pitchFamily="34" charset="-120"/>
               </a:rPr>
-              <a:t>Illustration: an overcrowded neighbourhood</a:t>
-            </a:r>
-            <a:endParaRPr lang="en-US" sz="1600" dirty="0"/>
+              <a:t>DEFINITIONS (continued)</a:t>
+            </a:r>
+            <a:endParaRPr lang="en-US" sz="3600" dirty="0"/>
+          </a:p>
+        </p:txBody>
+      </p:sp>
+      <p:sp>
+        <p:nvSpPr>
+          <p:cNvPr id="5" name="Text 2"/>
+          <p:cNvSpPr/>
+          <p:nvPr/>
+        </p:nvSpPr>
+        <p:spPr>
+          <a:xfrm>
+            <a:off x="5349240" y="1783080"/>
+            <a:ext cx="6522415" cy="4663440"/>
+          </a:xfrm>
+          <a:prstGeom prst="rect">
+            <a:avLst/>
+          </a:prstGeom>
+          <a:noFill/>
+          <a:ln/>
+        </p:spPr>
+        <p:txBody>
+          <a:bodyPr wrap="square" lIns="0" tIns="0" rIns="0" bIns="0" rtlCol="0" anchor="t"/>
+          <a:lstStyle/>
+          <a:p>
+            <a:pPr algn="l" indent="0" marL="0">
+              <a:spcAft>
+                <a:spcPts val="800"/>
+              </a:spcAft>
+              <a:buNone/>
+            </a:pPr>
+            <a:r>
+              <a:rPr lang="en-US" sz="4000" b="1" dirty="0">
+                <a:solidFill>
+                  <a:srgbClr val="111111"/>
+                </a:solidFill>
+                <a:latin typeface="Times New Roman" pitchFamily="34" charset="0"/>
+                <a:ea typeface="Times New Roman" pitchFamily="34" charset="-122"/>
+                <a:cs typeface="Times New Roman" pitchFamily="34" charset="-120"/>
+              </a:rPr>
+              <a:t>Carrying capacity of the land: </a:t>
+            </a:r>
+            <a:pPr algn="l" indent="0" marL="0">
+              <a:spcAft>
+                <a:spcPts val="800"/>
+              </a:spcAft>
+              <a:buNone/>
+            </a:pPr>
+            <a:r>
+              <a:rPr lang="en-US" sz="4000" dirty="0">
+                <a:solidFill>
+                  <a:srgbClr val="111111"/>
+                </a:solidFill>
+                <a:latin typeface="Times New Roman" pitchFamily="34" charset="0"/>
+                <a:ea typeface="Times New Roman" pitchFamily="34" charset="-122"/>
+                <a:cs typeface="Times New Roman" pitchFamily="34" charset="-120"/>
+              </a:rPr>
+              <a:t>It is the maximum population an environment can support for a long time without permanent damage.</a:t>
+            </a:r>
+            <a:endParaRPr lang="en-US" sz="4000" dirty="0"/>
           </a:p>
         </p:txBody>
       </p:sp>
@@ -15540,9 +16104,170 @@
           </a:p>
         </p:txBody>
       </p:sp>
+      <p:sp>
+        <p:nvSpPr>
+          <p:cNvPr id="3" name="Text 1"/>
+          <p:cNvSpPr/>
+          <p:nvPr/>
+        </p:nvSpPr>
+        <p:spPr>
+          <a:xfrm>
+            <a:off x="365760" y="1005840"/>
+            <a:ext cx="11460175" cy="731520"/>
+          </a:xfrm>
+          <a:prstGeom prst="rect">
+            <a:avLst/>
+          </a:prstGeom>
+          <a:noFill/>
+          <a:ln/>
+        </p:spPr>
+        <p:txBody>
+          <a:bodyPr wrap="square" lIns="0" tIns="0" rIns="0" bIns="0" rtlCol="0" anchor="ctr">
+            <a:normAutofit/>
+          </a:bodyPr>
+          <a:lstStyle/>
+          <a:p>
+            <a:pPr algn="ctr" indent="0" marL="0">
+              <a:buNone/>
+            </a:pPr>
+            <a:r>
+              <a:rPr lang="en-US" sz="3600" b="1" dirty="0">
+                <a:solidFill>
+                  <a:srgbClr val="990011"/>
+                </a:solidFill>
+                <a:latin typeface="Times New Roman" pitchFamily="34" charset="0"/>
+                <a:ea typeface="Times New Roman" pitchFamily="34" charset="-122"/>
+                <a:cs typeface="Times New Roman" pitchFamily="34" charset="-120"/>
+              </a:rPr>
+              <a:t>1. Overpopulation</a:t>
+            </a:r>
+            <a:endParaRPr lang="en-US" sz="3600" dirty="0"/>
+          </a:p>
+        </p:txBody>
+      </p:sp>
+      <p:sp>
+        <p:nvSpPr>
+          <p:cNvPr id="4" name="Text 2"/>
+          <p:cNvSpPr/>
+          <p:nvPr/>
+        </p:nvSpPr>
+        <p:spPr>
+          <a:xfrm>
+            <a:off x="365760" y="1737360"/>
+            <a:ext cx="6035040" cy="457200"/>
+          </a:xfrm>
+          <a:prstGeom prst="rect">
+            <a:avLst/>
+          </a:prstGeom>
+          <a:noFill/>
+          <a:ln/>
+        </p:spPr>
+        <p:txBody>
+          <a:bodyPr wrap="square" lIns="0" tIns="0" rIns="0" bIns="0" rtlCol="0" anchor="ctr">
+            <a:normAutofit/>
+          </a:bodyPr>
+          <a:lstStyle/>
+          <a:p>
+            <a:pPr algn="l" indent="0" marL="0">
+              <a:buNone/>
+            </a:pPr>
+            <a:r>
+              <a:rPr lang="en-US" sz="3000" b="1" dirty="0">
+                <a:solidFill>
+                  <a:srgbClr val="990011"/>
+                </a:solidFill>
+                <a:latin typeface="Times New Roman" pitchFamily="34" charset="0"/>
+                <a:ea typeface="Times New Roman" pitchFamily="34" charset="-122"/>
+                <a:cs typeface="Times New Roman" pitchFamily="34" charset="-120"/>
+              </a:rPr>
+              <a:t>A) Meaning, Indicators and Causes</a:t>
+            </a:r>
+            <a:endParaRPr lang="en-US" sz="3000" dirty="0"/>
+          </a:p>
+        </p:txBody>
+      </p:sp>
+      <p:sp>
+        <p:nvSpPr>
+          <p:cNvPr id="5" name="Text 3"/>
+          <p:cNvSpPr/>
+          <p:nvPr/>
+        </p:nvSpPr>
+        <p:spPr>
+          <a:xfrm>
+            <a:off x="365760" y="2240280"/>
+            <a:ext cx="6035040" cy="4160520"/>
+          </a:xfrm>
+          <a:prstGeom prst="rect">
+            <a:avLst/>
+          </a:prstGeom>
+          <a:noFill/>
+          <a:ln/>
+        </p:spPr>
+        <p:txBody>
+          <a:bodyPr wrap="square" lIns="0" tIns="0" rIns="0" bIns="0" rtlCol="0" anchor="t"/>
+          <a:lstStyle/>
+          <a:p>
+            <a:pPr algn="l" indent="0" marL="0">
+              <a:spcAft>
+                <a:spcPts val="800"/>
+              </a:spcAft>
+              <a:buNone/>
+            </a:pPr>
+            <a:r>
+              <a:rPr lang="en-US" sz="3000" i="1" dirty="0">
+                <a:solidFill>
+                  <a:srgbClr val="111111"/>
+                </a:solidFill>
+                <a:latin typeface="Times New Roman" pitchFamily="34" charset="0"/>
+                <a:ea typeface="Times New Roman" pitchFamily="34" charset="-122"/>
+                <a:cs typeface="Times New Roman" pitchFamily="34" charset="-120"/>
+              </a:rPr>
+              <a:t>Overpopulation is explained as follows:</a:t>
+            </a:r>
+            <a:endParaRPr lang="en-US" sz="3000" dirty="0"/>
+          </a:p>
+          <a:p>
+            <a:pPr algn="l" indent="0" marL="0">
+              <a:spcAft>
+                <a:spcPts val="800"/>
+              </a:spcAft>
+              <a:buNone/>
+            </a:pPr>
+            <a:r>
+              <a:rPr lang="en-US" sz="3000" b="1" dirty="0">
+                <a:solidFill>
+                  <a:srgbClr val="111111"/>
+                </a:solidFill>
+                <a:latin typeface="Times New Roman" pitchFamily="34" charset="0"/>
+                <a:ea typeface="Times New Roman" pitchFamily="34" charset="-122"/>
+                <a:cs typeface="Times New Roman" pitchFamily="34" charset="-120"/>
+              </a:rPr>
+              <a:t>Meaning and situations: </a:t>
+            </a:r>
+            <a:pPr algn="l" indent="0" marL="0">
+              <a:spcAft>
+                <a:spcPts val="800"/>
+              </a:spcAft>
+              <a:buNone/>
+            </a:pPr>
+            <a:r>
+              <a:rPr lang="en-US" sz="3000" dirty="0">
+                <a:solidFill>
+                  <a:srgbClr val="111111"/>
+                </a:solidFill>
+                <a:latin typeface="Times New Roman" pitchFamily="34" charset="0"/>
+                <a:ea typeface="Times New Roman" pitchFamily="34" charset="-122"/>
+                <a:cs typeface="Times New Roman" pitchFamily="34" charset="-120"/>
+              </a:rPr>
+              <a:t>An area is overpopulated when its resources and technology cannot give everyone a decent living. This is the case in parts of Bangladesh, the Sahel and the Mandara Mountains.</a:t>
+            </a:r>
+            <a:endParaRPr lang="en-US" sz="3000" dirty="0"/>
+          </a:p>
+        </p:txBody>
+      </p:sp>
       <p:pic>
         <p:nvPicPr>
-          <p:cNvPr id="3" name="Image 0" descr="/home/claude/f4/img/minesec_sheet.png">    </p:cNvPr>
+          <p:cNvPr id="6" name="Image 0" descr="/home/claude/f4/img/v2/usa_slum.jpg">    </p:cNvPr>
           <p:cNvPicPr>
             <a:picLocks noChangeAspect="1"/>
           </p:cNvPicPr>
@@ -15556,8 +16281,8 @@
         </p:blipFill>
         <p:spPr>
           <a:xfrm>
-            <a:off x="0" y="658368"/>
-            <a:ext cx="5120640" cy="5833872"/>
+            <a:off x="6537960" y="2399413"/>
+            <a:ext cx="5470855" cy="3037581"/>
           </a:xfrm>
           <a:prstGeom prst="rect">
             <a:avLst/>
@@ -15566,14 +16291,14 @@
       </p:pic>
       <p:sp>
         <p:nvSpPr>
-          <p:cNvPr id="4" name="Text 1"/>
+          <p:cNvPr id="7" name="Text 4"/>
           <p:cNvSpPr/>
           <p:nvPr/>
         </p:nvSpPr>
         <p:spPr>
           <a:xfrm>
-            <a:off x="5349240" y="1005840"/>
-            <a:ext cx="6522415" cy="731520"/>
+            <a:off x="6537960" y="6089904"/>
+            <a:ext cx="5470855" cy="347472"/>
           </a:xfrm>
           <a:prstGeom prst="rect">
             <a:avLst/>
@@ -15582,122 +16307,24 @@
           <a:ln/>
         </p:spPr>
         <p:txBody>
-          <a:bodyPr wrap="square" lIns="0" tIns="0" rIns="0" bIns="0" rtlCol="0" anchor="ctr">
-            <a:normAutofit/>
-          </a:bodyPr>
+          <a:bodyPr wrap="square" lIns="0" tIns="0" rIns="0" bIns="0" rtlCol="0" anchor="ctr"/>
           <a:lstStyle/>
           <a:p>
             <a:pPr algn="ctr" indent="0" marL="0">
               <a:buNone/>
             </a:pPr>
             <a:r>
-              <a:rPr lang="en-US" sz="3600" b="1" dirty="0">
-                <a:solidFill>
-                  <a:srgbClr val="990011"/>
+              <a:rPr lang="en-US" sz="1600" i="1" dirty="0">
+                <a:solidFill>
+                  <a:srgbClr val="555555"/>
                 </a:solidFill>
                 <a:latin typeface="Times New Roman" pitchFamily="34" charset="0"/>
                 <a:ea typeface="Times New Roman" pitchFamily="34" charset="-122"/>
                 <a:cs typeface="Times New Roman" pitchFamily="34" charset="-120"/>
               </a:rPr>
-              <a:t>1. Overpopulation</a:t>
-            </a:r>
-            <a:endParaRPr lang="en-US" sz="3600" dirty="0"/>
-          </a:p>
-        </p:txBody>
-      </p:sp>
-      <p:sp>
-        <p:nvSpPr>
-          <p:cNvPr id="5" name="Text 2"/>
-          <p:cNvSpPr/>
-          <p:nvPr/>
-        </p:nvSpPr>
-        <p:spPr>
-          <a:xfrm>
-            <a:off x="5349240" y="1783080"/>
-            <a:ext cx="6522415" cy="4663440"/>
-          </a:xfrm>
-          <a:prstGeom prst="rect">
-            <a:avLst/>
-          </a:prstGeom>
-          <a:noFill/>
-          <a:ln/>
-        </p:spPr>
-        <p:txBody>
-          <a:bodyPr wrap="square" lIns="0" tIns="0" rIns="0" bIns="0" rtlCol="0" anchor="t"/>
-          <a:lstStyle/>
-          <a:p>
-            <a:pPr algn="l" indent="0" marL="0">
-              <a:spcAft>
-                <a:spcPts val="800"/>
-              </a:spcAft>
-              <a:buNone/>
-            </a:pPr>
-            <a:r>
-              <a:rPr lang="en-US" sz="4000" b="1" dirty="0">
-                <a:solidFill>
-                  <a:srgbClr val="111111"/>
-                </a:solidFill>
-                <a:latin typeface="Times New Roman" pitchFamily="34" charset="0"/>
-                <a:ea typeface="Times New Roman" pitchFamily="34" charset="-122"/>
-                <a:cs typeface="Times New Roman" pitchFamily="34" charset="-120"/>
-              </a:rPr>
-              <a:t>Causes: </a:t>
-            </a:r>
-            <a:pPr algn="l" indent="0" marL="0">
-              <a:spcAft>
-                <a:spcPts val="800"/>
-              </a:spcAft>
-              <a:buNone/>
-            </a:pPr>
-            <a:r>
-              <a:rPr lang="en-US" sz="4000" dirty="0">
-                <a:solidFill>
-                  <a:srgbClr val="111111"/>
-                </a:solidFill>
-                <a:latin typeface="Times New Roman" pitchFamily="34" charset="0"/>
-                <a:ea typeface="Times New Roman" pitchFamily="34" charset="-122"/>
-                <a:cs typeface="Times New Roman" pitchFamily="34" charset="-120"/>
-              </a:rPr>
-              <a:t>High birth rates, falling death rates and strong immigration.</a:t>
-            </a:r>
-            <a:endParaRPr lang="en-US" sz="4000" dirty="0"/>
-          </a:p>
-          <a:p>
-            <a:pPr algn="l" indent="0" marL="0">
-              <a:spcAft>
-                <a:spcPts val="800"/>
-              </a:spcAft>
-              <a:buNone/>
-            </a:pPr>
-            <a:r>
-              <a:rPr lang="en-US" sz="4000" b="1" dirty="0">
-                <a:solidFill>
-                  <a:srgbClr val="111111"/>
-                </a:solidFill>
-                <a:latin typeface="Times New Roman" pitchFamily="34" charset="0"/>
-                <a:ea typeface="Times New Roman" pitchFamily="34" charset="-122"/>
-                <a:cs typeface="Times New Roman" pitchFamily="34" charset="-120"/>
-              </a:rPr>
-              <a:t>Consequences: </a:t>
-            </a:r>
-            <a:pPr algn="l" indent="0" marL="0">
-              <a:spcAft>
-                <a:spcPts val="800"/>
-              </a:spcAft>
-              <a:buNone/>
-            </a:pPr>
-            <a:r>
-              <a:rPr lang="en-US" sz="4000" dirty="0">
-                <a:solidFill>
-                  <a:srgbClr val="111111"/>
-                </a:solidFill>
-                <a:latin typeface="Times New Roman" pitchFamily="34" charset="0"/>
-                <a:ea typeface="Times New Roman" pitchFamily="34" charset="-122"/>
-                <a:cs typeface="Times New Roman" pitchFamily="34" charset="-120"/>
-              </a:rPr>
-              <a:t>Deforestation, pollution, exhaustion of resources, social unrest, poverty and famine.</a:t>
-            </a:r>
-            <a:endParaRPr lang="en-US" sz="4000" dirty="0"/>
+              <a:t>Illustration: a slum</a:t>
+            </a:r>
+            <a:endParaRPr lang="en-US" sz="1600" dirty="0"/>
           </a:p>
         </p:txBody>
       </p:sp>
@@ -16111,7 +16738,7 @@
                 <a:ea typeface="Times New Roman" pitchFamily="34" charset="-122"/>
                 <a:cs typeface="Times New Roman" pitchFamily="34" charset="-120"/>
               </a:rPr>
-              <a:t>1. Overpopulation (continued)</a:t>
+              <a:t>1. Overpopulation</a:t>
             </a:r>
             <a:endParaRPr lang="en-US" sz="3600" dirty="0"/>
           </a:p>
@@ -16125,8 +16752,47 @@
         </p:nvSpPr>
         <p:spPr>
           <a:xfrm>
-            <a:off x="2697480" y="1783080"/>
-            <a:ext cx="9174175" cy="4663440"/>
+            <a:off x="2697480" y="1737360"/>
+            <a:ext cx="9174175" cy="457200"/>
+          </a:xfrm>
+          <a:prstGeom prst="rect">
+            <a:avLst/>
+          </a:prstGeom>
+          <a:noFill/>
+          <a:ln/>
+        </p:spPr>
+        <p:txBody>
+          <a:bodyPr wrap="square" lIns="0" tIns="0" rIns="0" bIns="0" rtlCol="0" anchor="ctr"/>
+          <a:lstStyle/>
+          <a:p>
+            <a:pPr algn="l" indent="0" marL="0">
+              <a:buNone/>
+            </a:pPr>
+            <a:r>
+              <a:rPr lang="en-US" sz="3200" b="1" dirty="0">
+                <a:solidFill>
+                  <a:srgbClr val="990011"/>
+                </a:solidFill>
+                <a:latin typeface="Times New Roman" pitchFamily="34" charset="0"/>
+                <a:ea typeface="Times New Roman" pitchFamily="34" charset="-122"/>
+                <a:cs typeface="Times New Roman" pitchFamily="34" charset="-120"/>
+              </a:rPr>
+              <a:t>A) Meaning, Indicators and Causes</a:t>
+            </a:r>
+            <a:endParaRPr lang="en-US" sz="3200" dirty="0"/>
+          </a:p>
+        </p:txBody>
+      </p:sp>
+      <p:sp>
+        <p:nvSpPr>
+          <p:cNvPr id="6" name="Text 3"/>
+          <p:cNvSpPr/>
+          <p:nvPr/>
+        </p:nvSpPr>
+        <p:spPr>
+          <a:xfrm>
+            <a:off x="2697480" y="2240280"/>
+            <a:ext cx="9174175" cy="4206240"/>
           </a:xfrm>
           <a:prstGeom prst="rect">
             <a:avLst/>
@@ -16145,7 +16811,7 @@
               <a:buNone/>
             </a:pPr>
             <a:r>
-              <a:rPr lang="en-US" sz="4000" b="1" dirty="0">
+              <a:rPr lang="en-US" sz="3800" b="1" dirty="0">
                 <a:solidFill>
                   <a:srgbClr val="111111"/>
                 </a:solidFill>
@@ -16153,20 +16819,16 @@
                 <a:ea typeface="Times New Roman" pitchFamily="34" charset="-122"/>
                 <a:cs typeface="Times New Roman" pitchFamily="34" charset="-120"/>
               </a:rPr>
-              <a:t>Solutions:</a:t>
-            </a:r>
-            <a:endParaRPr lang="en-US" sz="4000" dirty="0"/>
-          </a:p>
-          <a:p>
-            <a:pPr algn="l" marL="342900" indent="-342900">
+              <a:t>Indicators and measurement: </a:t>
+            </a:r>
+            <a:pPr algn="l" indent="0" marL="0">
               <a:spcAft>
                 <a:spcPts val="800"/>
               </a:spcAft>
-              <a:buSzPct val="100000"/>
-              <a:buChar char="•"/>
-            </a:pPr>
-            <a:r>
-              <a:rPr lang="en-US" sz="4000" dirty="0">
+              <a:buNone/>
+            </a:pPr>
+            <a:r>
+              <a:rPr lang="en-US" sz="3800" dirty="0">
                 <a:solidFill>
                   <a:srgbClr val="111111"/>
                 </a:solidFill>
@@ -16174,51 +16836,9 @@
                 <a:ea typeface="Times New Roman" pitchFamily="34" charset="-122"/>
                 <a:cs typeface="Times New Roman" pitchFamily="34" charset="-120"/>
               </a:rPr>
-              <a:t>Family planning and the education of girls.</a:t>
-            </a:r>
-            <a:endParaRPr lang="en-US" sz="4000" dirty="0"/>
-          </a:p>
-          <a:p>
-            <a:pPr algn="l" marL="342900" indent="-342900">
-              <a:spcAft>
-                <a:spcPts val="800"/>
-              </a:spcAft>
-              <a:buSzPct val="100000"/>
-              <a:buChar char="•"/>
-            </a:pPr>
-            <a:r>
-              <a:rPr lang="en-US" sz="4000" dirty="0">
-                <a:solidFill>
-                  <a:srgbClr val="111111"/>
-                </a:solidFill>
-                <a:latin typeface="Times New Roman" pitchFamily="34" charset="0"/>
-                <a:ea typeface="Times New Roman" pitchFamily="34" charset="-122"/>
-                <a:cs typeface="Times New Roman" pitchFamily="34" charset="-120"/>
-              </a:rPr>
-              <a:t>Technology to use resources better.</a:t>
-            </a:r>
-            <a:endParaRPr lang="en-US" sz="4000" dirty="0"/>
-          </a:p>
-          <a:p>
-            <a:pPr algn="l" marL="342900" indent="-342900">
-              <a:spcAft>
-                <a:spcPts val="800"/>
-              </a:spcAft>
-              <a:buSzPct val="100000"/>
-              <a:buChar char="•"/>
-            </a:pPr>
-            <a:r>
-              <a:rPr lang="en-US" sz="4000" dirty="0">
-                <a:solidFill>
-                  <a:srgbClr val="111111"/>
-                </a:solidFill>
-                <a:latin typeface="Times New Roman" pitchFamily="34" charset="0"/>
-                <a:ea typeface="Times New Roman" pitchFamily="34" charset="-122"/>
-                <a:cs typeface="Times New Roman" pitchFamily="34" charset="-120"/>
-              </a:rPr>
-              <a:t>Industrial jobs to reduce pressure on land.</a:t>
-            </a:r>
-            <a:endParaRPr lang="en-US" sz="4000" dirty="0"/>
+              <a:t>The indicators are high unemployment, low income per person, malnutrition, slums and overloaded schools and hospitals. It is measured by comparing the population with the resources, for example the income or food available per person.</a:t>
+            </a:r>
+            <a:endParaRPr lang="en-US" sz="3800" dirty="0"/>
           </a:p>
         </p:txBody>
       </p:sp>
@@ -16334,129 +16954,9 @@
           </a:p>
         </p:txBody>
       </p:sp>
-      <p:sp>
-        <p:nvSpPr>
-          <p:cNvPr id="3" name="Text 1"/>
-          <p:cNvSpPr/>
-          <p:nvPr/>
-        </p:nvSpPr>
-        <p:spPr>
-          <a:xfrm>
-            <a:off x="365760" y="1005840"/>
-            <a:ext cx="11460175" cy="731520"/>
-          </a:xfrm>
-          <a:prstGeom prst="rect">
-            <a:avLst/>
-          </a:prstGeom>
-          <a:noFill/>
-          <a:ln/>
-        </p:spPr>
-        <p:txBody>
-          <a:bodyPr wrap="square" lIns="0" tIns="0" rIns="0" bIns="0" rtlCol="0" anchor="ctr">
-            <a:normAutofit/>
-          </a:bodyPr>
-          <a:lstStyle/>
-          <a:p>
-            <a:pPr algn="ctr" indent="0" marL="0">
-              <a:buNone/>
-            </a:pPr>
-            <a:r>
-              <a:rPr lang="en-US" sz="3600" b="1" dirty="0">
-                <a:solidFill>
-                  <a:srgbClr val="990011"/>
-                </a:solidFill>
-                <a:latin typeface="Times New Roman" pitchFamily="34" charset="0"/>
-                <a:ea typeface="Times New Roman" pitchFamily="34" charset="-122"/>
-                <a:cs typeface="Times New Roman" pitchFamily="34" charset="-120"/>
-              </a:rPr>
-              <a:t>2. Underpopulation</a:t>
-            </a:r>
-            <a:endParaRPr lang="en-US" sz="3600" dirty="0"/>
-          </a:p>
-        </p:txBody>
-      </p:sp>
-      <p:sp>
-        <p:nvSpPr>
-          <p:cNvPr id="4" name="Text 2"/>
-          <p:cNvSpPr/>
-          <p:nvPr/>
-        </p:nvSpPr>
-        <p:spPr>
-          <a:xfrm>
-            <a:off x="365760" y="1783080"/>
-            <a:ext cx="4846320" cy="4617720"/>
-          </a:xfrm>
-          <a:prstGeom prst="rect">
-            <a:avLst/>
-          </a:prstGeom>
-          <a:noFill/>
-          <a:ln/>
-        </p:spPr>
-        <p:txBody>
-          <a:bodyPr wrap="square" lIns="0" tIns="0" rIns="0" bIns="0" rtlCol="0" anchor="t"/>
-          <a:lstStyle/>
-          <a:p>
-            <a:pPr algn="l" indent="0" marL="0">
-              <a:spcAft>
-                <a:spcPts val="800"/>
-              </a:spcAft>
-              <a:buNone/>
-            </a:pPr>
-            <a:r>
-              <a:rPr lang="en-US" sz="3600" i="1" dirty="0">
-                <a:solidFill>
-                  <a:srgbClr val="111111"/>
-                </a:solidFill>
-                <a:latin typeface="Times New Roman" pitchFamily="34" charset="0"/>
-                <a:ea typeface="Times New Roman" pitchFamily="34" charset="-122"/>
-                <a:cs typeface="Times New Roman" pitchFamily="34" charset="-120"/>
-              </a:rPr>
-              <a:t>Underpopulation is presented as follows:</a:t>
-            </a:r>
-            <a:endParaRPr lang="en-US" sz="3600" dirty="0"/>
-          </a:p>
-          <a:p>
-            <a:pPr algn="l" indent="0" marL="0">
-              <a:spcAft>
-                <a:spcPts val="800"/>
-              </a:spcAft>
-              <a:buNone/>
-            </a:pPr>
-            <a:r>
-              <a:rPr lang="en-US" sz="3600" b="1" dirty="0">
-                <a:solidFill>
-                  <a:srgbClr val="111111"/>
-                </a:solidFill>
-                <a:latin typeface="Times New Roman" pitchFamily="34" charset="0"/>
-                <a:ea typeface="Times New Roman" pitchFamily="34" charset="-122"/>
-                <a:cs typeface="Times New Roman" pitchFamily="34" charset="-120"/>
-              </a:rPr>
-              <a:t>Indicators: </a:t>
-            </a:r>
-            <a:pPr algn="l" indent="0" marL="0">
-              <a:spcAft>
-                <a:spcPts val="800"/>
-              </a:spcAft>
-              <a:buNone/>
-            </a:pPr>
-            <a:r>
-              <a:rPr lang="en-US" sz="3600" dirty="0">
-                <a:solidFill>
-                  <a:srgbClr val="111111"/>
-                </a:solidFill>
-                <a:latin typeface="Times New Roman" pitchFamily="34" charset="0"/>
-                <a:ea typeface="Times New Roman" pitchFamily="34" charset="-122"/>
-                <a:cs typeface="Times New Roman" pitchFamily="34" charset="-120"/>
-              </a:rPr>
-              <a:t>Many resources per person, labour shortages, empty schools and slow economic growth.</a:t>
-            </a:r>
-            <a:endParaRPr lang="en-US" sz="3600" dirty="0"/>
-          </a:p>
-        </p:txBody>
-      </p:sp>
       <p:pic>
         <p:nvPicPr>
-          <p:cNvPr id="5" name="Image 0" descr="/home/claude/f4/img/v2/regimes_big.png">    </p:cNvPr>
+          <p:cNvPr id="3" name="Image 0" descr="/home/claude/f4/img/minesec_sheet.png">    </p:cNvPr>
           <p:cNvPicPr>
             <a:picLocks noChangeAspect="1"/>
           </p:cNvPicPr>
@@ -16470,8 +16970,8 @@
         </p:blipFill>
         <p:spPr>
           <a:xfrm>
-            <a:off x="5349240" y="2617506"/>
-            <a:ext cx="6659575" cy="2601397"/>
+            <a:off x="0" y="658368"/>
+            <a:ext cx="3840480" cy="5833872"/>
           </a:xfrm>
           <a:prstGeom prst="rect">
             <a:avLst/>
@@ -16480,14 +16980,14 @@
       </p:pic>
       <p:sp>
         <p:nvSpPr>
-          <p:cNvPr id="6" name="Text 3"/>
+          <p:cNvPr id="4" name="Text 1"/>
           <p:cNvSpPr/>
           <p:nvPr/>
         </p:nvSpPr>
         <p:spPr>
           <a:xfrm>
-            <a:off x="5349240" y="6089904"/>
-            <a:ext cx="6659575" cy="347472"/>
+            <a:off x="4069080" y="1005840"/>
+            <a:ext cx="7802575" cy="731520"/>
           </a:xfrm>
           <a:prstGeom prst="rect">
             <a:avLst/>
@@ -16496,24 +16996,124 @@
           <a:ln/>
         </p:spPr>
         <p:txBody>
-          <a:bodyPr wrap="square" lIns="0" tIns="0" rIns="0" bIns="0" rtlCol="0" anchor="ctr"/>
+          <a:bodyPr wrap="square" lIns="0" tIns="0" rIns="0" bIns="0" rtlCol="0" anchor="ctr">
+            <a:normAutofit/>
+          </a:bodyPr>
           <a:lstStyle/>
           <a:p>
             <a:pPr algn="ctr" indent="0" marL="0">
               <a:buNone/>
             </a:pPr>
             <a:r>
-              <a:rPr lang="en-US" sz="1600" i="1" dirty="0">
-                <a:solidFill>
-                  <a:srgbClr val="555555"/>
+              <a:rPr lang="en-US" sz="3600" b="1" dirty="0">
+                <a:solidFill>
+                  <a:srgbClr val="990011"/>
                 </a:solidFill>
                 <a:latin typeface="Times New Roman" pitchFamily="34" charset="0"/>
                 <a:ea typeface="Times New Roman" pitchFamily="34" charset="-122"/>
                 <a:cs typeface="Times New Roman" pitchFamily="34" charset="-120"/>
               </a:rPr>
-              <a:t>Illustration: types of population-resource relations</a:t>
-            </a:r>
-            <a:endParaRPr lang="en-US" sz="1600" dirty="0"/>
+              <a:t>1. Overpopulation</a:t>
+            </a:r>
+            <a:endParaRPr lang="en-US" sz="3600" dirty="0"/>
+          </a:p>
+        </p:txBody>
+      </p:sp>
+      <p:sp>
+        <p:nvSpPr>
+          <p:cNvPr id="5" name="Text 2"/>
+          <p:cNvSpPr/>
+          <p:nvPr/>
+        </p:nvSpPr>
+        <p:spPr>
+          <a:xfrm>
+            <a:off x="4069080" y="1737360"/>
+            <a:ext cx="7802575" cy="457200"/>
+          </a:xfrm>
+          <a:prstGeom prst="rect">
+            <a:avLst/>
+          </a:prstGeom>
+          <a:noFill/>
+          <a:ln/>
+        </p:spPr>
+        <p:txBody>
+          <a:bodyPr wrap="square" lIns="0" tIns="0" rIns="0" bIns="0" rtlCol="0" anchor="ctr"/>
+          <a:lstStyle/>
+          <a:p>
+            <a:pPr algn="l" indent="0" marL="0">
+              <a:buNone/>
+            </a:pPr>
+            <a:r>
+              <a:rPr lang="en-US" sz="3200" b="1" dirty="0">
+                <a:solidFill>
+                  <a:srgbClr val="990011"/>
+                </a:solidFill>
+                <a:latin typeface="Times New Roman" pitchFamily="34" charset="0"/>
+                <a:ea typeface="Times New Roman" pitchFamily="34" charset="-122"/>
+                <a:cs typeface="Times New Roman" pitchFamily="34" charset="-120"/>
+              </a:rPr>
+              <a:t>A) Meaning, Indicators and Causes</a:t>
+            </a:r>
+            <a:endParaRPr lang="en-US" sz="3200" dirty="0"/>
+          </a:p>
+        </p:txBody>
+      </p:sp>
+      <p:sp>
+        <p:nvSpPr>
+          <p:cNvPr id="6" name="Text 3"/>
+          <p:cNvSpPr/>
+          <p:nvPr/>
+        </p:nvSpPr>
+        <p:spPr>
+          <a:xfrm>
+            <a:off x="4069080" y="2240280"/>
+            <a:ext cx="7802575" cy="4206240"/>
+          </a:xfrm>
+          <a:prstGeom prst="rect">
+            <a:avLst/>
+          </a:prstGeom>
+          <a:noFill/>
+          <a:ln/>
+        </p:spPr>
+        <p:txBody>
+          <a:bodyPr wrap="square" lIns="0" tIns="0" rIns="0" bIns="0" rtlCol="0" anchor="t"/>
+          <a:lstStyle/>
+          <a:p>
+            <a:pPr algn="l" indent="0" marL="0">
+              <a:spcAft>
+                <a:spcPts val="800"/>
+              </a:spcAft>
+              <a:buNone/>
+            </a:pPr>
+            <a:r>
+              <a:rPr lang="en-US" sz="4000" b="1" dirty="0">
+                <a:solidFill>
+                  <a:srgbClr val="111111"/>
+                </a:solidFill>
+                <a:latin typeface="Times New Roman" pitchFamily="34" charset="0"/>
+                <a:ea typeface="Times New Roman" pitchFamily="34" charset="-122"/>
+                <a:cs typeface="Times New Roman" pitchFamily="34" charset="-120"/>
+              </a:rPr>
+              <a:t>Causes: </a:t>
+            </a:r>
+            <a:pPr algn="l" indent="0" marL="0">
+              <a:spcAft>
+                <a:spcPts val="800"/>
+              </a:spcAft>
+              <a:buNone/>
+            </a:pPr>
+            <a:r>
+              <a:rPr lang="en-US" sz="4000" dirty="0">
+                <a:solidFill>
+                  <a:srgbClr val="111111"/>
+                </a:solidFill>
+                <a:latin typeface="Times New Roman" pitchFamily="34" charset="0"/>
+                <a:ea typeface="Times New Roman" pitchFamily="34" charset="-122"/>
+                <a:cs typeface="Times New Roman" pitchFamily="34" charset="-120"/>
+              </a:rPr>
+              <a:t>High birth rates and falling death rates make the population grow faster than resources. Strong immigration and poor technology add to the problem.</a:t>
+            </a:r>
+            <a:endParaRPr lang="en-US" sz="4000" dirty="0"/>
           </a:p>
         </p:txBody>
       </p:sp>
@@ -16688,7 +17288,7 @@
                 <a:ea typeface="Times New Roman" pitchFamily="34" charset="-122"/>
                 <a:cs typeface="Times New Roman" pitchFamily="34" charset="-120"/>
               </a:rPr>
-              <a:t>2. Underpopulation</a:t>
+              <a:t>1. Overpopulation</a:t>
             </a:r>
             <a:endParaRPr lang="en-US" sz="3600" dirty="0"/>
           </a:p>
@@ -16702,8 +17302,47 @@
         </p:nvSpPr>
         <p:spPr>
           <a:xfrm>
-            <a:off x="4069080" y="1783080"/>
-            <a:ext cx="7802575" cy="4663440"/>
+            <a:off x="4069080" y="1737360"/>
+            <a:ext cx="7802575" cy="457200"/>
+          </a:xfrm>
+          <a:prstGeom prst="rect">
+            <a:avLst/>
+          </a:prstGeom>
+          <a:noFill/>
+          <a:ln/>
+        </p:spPr>
+        <p:txBody>
+          <a:bodyPr wrap="square" lIns="0" tIns="0" rIns="0" bIns="0" rtlCol="0" anchor="ctr"/>
+          <a:lstStyle/>
+          <a:p>
+            <a:pPr algn="l" indent="0" marL="0">
+              <a:buNone/>
+            </a:pPr>
+            <a:r>
+              <a:rPr lang="en-US" sz="3200" b="1" dirty="0">
+                <a:solidFill>
+                  <a:srgbClr val="990011"/>
+                </a:solidFill>
+                <a:latin typeface="Times New Roman" pitchFamily="34" charset="0"/>
+                <a:ea typeface="Times New Roman" pitchFamily="34" charset="-122"/>
+                <a:cs typeface="Times New Roman" pitchFamily="34" charset="-120"/>
+              </a:rPr>
+              <a:t>B) Consequences and Solutions</a:t>
+            </a:r>
+            <a:endParaRPr lang="en-US" sz="3200" dirty="0"/>
+          </a:p>
+        </p:txBody>
+      </p:sp>
+      <p:sp>
+        <p:nvSpPr>
+          <p:cNvPr id="6" name="Text 3"/>
+          <p:cNvSpPr/>
+          <p:nvPr/>
+        </p:nvSpPr>
+        <p:spPr>
+          <a:xfrm>
+            <a:off x="4069080" y="2240280"/>
+            <a:ext cx="7802575" cy="4206240"/>
           </a:xfrm>
           <a:prstGeom prst="rect">
             <a:avLst/>
@@ -16722,7 +17361,7 @@
               <a:buNone/>
             </a:pPr>
             <a:r>
-              <a:rPr lang="en-US" sz="4000" b="1" dirty="0">
+              <a:rPr lang="en-US" sz="4000" i="1" dirty="0">
                 <a:solidFill>
                   <a:srgbClr val="111111"/>
                 </a:solidFill>
@@ -16730,8 +17369,11 @@
                 <a:ea typeface="Times New Roman" pitchFamily="34" charset="-122"/>
                 <a:cs typeface="Times New Roman" pitchFamily="34" charset="-120"/>
               </a:rPr>
-              <a:t>Causes: </a:t>
-            </a:r>
+              <a:t>Overpopulation has the following consequences and solutions:</a:t>
+            </a:r>
+            <a:endParaRPr lang="en-US" sz="4000" dirty="0"/>
+          </a:p>
+          <a:p>
             <a:pPr algn="l" indent="0" marL="0">
               <a:spcAft>
                 <a:spcPts val="800"/>
@@ -16739,7 +17381,7 @@
               <a:buNone/>
             </a:pPr>
             <a:r>
-              <a:rPr lang="en-US" sz="4000" dirty="0">
+              <a:rPr lang="en-US" sz="4000" b="1" dirty="0">
                 <a:solidFill>
                   <a:srgbClr val="111111"/>
                 </a:solidFill>
@@ -16747,11 +17389,8 @@
                 <a:ea typeface="Times New Roman" pitchFamily="34" charset="-122"/>
                 <a:cs typeface="Times New Roman" pitchFamily="34" charset="-120"/>
               </a:rPr>
-              <a:t>Low birth rates, high death rates and strong emigration.</a:t>
-            </a:r>
-            <a:endParaRPr lang="en-US" sz="4000" dirty="0"/>
-          </a:p>
-          <a:p>
+              <a:t>Consequences: </a:t>
+            </a:r>
             <a:pPr algn="l" indent="0" marL="0">
               <a:spcAft>
                 <a:spcPts val="800"/>
@@ -16759,7 +17398,7 @@
               <a:buNone/>
             </a:pPr>
             <a:r>
-              <a:rPr lang="en-US" sz="4000" b="1" dirty="0">
+              <a:rPr lang="en-US" sz="4000" dirty="0">
                 <a:solidFill>
                   <a:srgbClr val="111111"/>
                 </a:solidFill>
@@ -16767,24 +17406,7 @@
                 <a:ea typeface="Times New Roman" pitchFamily="34" charset="-122"/>
                 <a:cs typeface="Times New Roman" pitchFamily="34" charset="-120"/>
               </a:rPr>
-              <a:t>Consequences: </a:t>
-            </a:r>
-            <a:pPr algn="l" indent="0" marL="0">
-              <a:spcAft>
-                <a:spcPts val="800"/>
-              </a:spcAft>
-              <a:buNone/>
-            </a:pPr>
-            <a:r>
-              <a:rPr lang="en-US" sz="4000" dirty="0">
-                <a:solidFill>
-                  <a:srgbClr val="111111"/>
-                </a:solidFill>
-                <a:latin typeface="Times New Roman" pitchFamily="34" charset="0"/>
-                <a:ea typeface="Times New Roman" pitchFamily="34" charset="-122"/>
-                <a:cs typeface="Times New Roman" pitchFamily="34" charset="-120"/>
-              </a:rPr>
-              <a:t>Resources are left unused, the domestic market is small and the country may be difficult to defend.</a:t>
+              <a:t>Forests are cleared, soils are exhausted and pollution increases. Poverty, famine and social unrest follow.</a:t>
             </a:r>
             <a:endParaRPr lang="en-US" sz="4000" dirty="0"/>
           </a:p>
@@ -16919,7 +17541,7 @@
         <p:spPr>
           <a:xfrm>
             <a:off x="0" y="658368"/>
-            <a:ext cx="5120640" cy="5833872"/>
+            <a:ext cx="3840480" cy="5833872"/>
           </a:xfrm>
           <a:prstGeom prst="rect">
             <a:avLst/>
@@ -16934,8 +17556,8 @@
         </p:nvSpPr>
         <p:spPr>
           <a:xfrm>
-            <a:off x="5349240" y="1005840"/>
-            <a:ext cx="6522415" cy="731520"/>
+            <a:off x="4069080" y="1005840"/>
+            <a:ext cx="7802575" cy="731520"/>
           </a:xfrm>
           <a:prstGeom prst="rect">
             <a:avLst/>
@@ -16961,7 +17583,7 @@
                 <a:ea typeface="Times New Roman" pitchFamily="34" charset="-122"/>
                 <a:cs typeface="Times New Roman" pitchFamily="34" charset="-120"/>
               </a:rPr>
-              <a:t>2. Underpopulation (continued)</a:t>
+              <a:t>1. Overpopulation</a:t>
             </a:r>
             <a:endParaRPr lang="en-US" sz="3600" dirty="0"/>
           </a:p>
@@ -16975,8 +17597,47 @@
         </p:nvSpPr>
         <p:spPr>
           <a:xfrm>
-            <a:off x="5349240" y="1783080"/>
-            <a:ext cx="6522415" cy="4663440"/>
+            <a:off x="4069080" y="1737360"/>
+            <a:ext cx="7802575" cy="457200"/>
+          </a:xfrm>
+          <a:prstGeom prst="rect">
+            <a:avLst/>
+          </a:prstGeom>
+          <a:noFill/>
+          <a:ln/>
+        </p:spPr>
+        <p:txBody>
+          <a:bodyPr wrap="square" lIns="0" tIns="0" rIns="0" bIns="0" rtlCol="0" anchor="ctr"/>
+          <a:lstStyle/>
+          <a:p>
+            <a:pPr algn="l" indent="0" marL="0">
+              <a:buNone/>
+            </a:pPr>
+            <a:r>
+              <a:rPr lang="en-US" sz="3200" b="1" dirty="0">
+                <a:solidFill>
+                  <a:srgbClr val="990011"/>
+                </a:solidFill>
+                <a:latin typeface="Times New Roman" pitchFamily="34" charset="0"/>
+                <a:ea typeface="Times New Roman" pitchFamily="34" charset="-122"/>
+                <a:cs typeface="Times New Roman" pitchFamily="34" charset="-120"/>
+              </a:rPr>
+              <a:t>B) Consequences and Solutions</a:t>
+            </a:r>
+            <a:endParaRPr lang="en-US" sz="3200" dirty="0"/>
+          </a:p>
+        </p:txBody>
+      </p:sp>
+      <p:sp>
+        <p:nvSpPr>
+          <p:cNvPr id="6" name="Text 3"/>
+          <p:cNvSpPr/>
+          <p:nvPr/>
+        </p:nvSpPr>
+        <p:spPr>
+          <a:xfrm>
+            <a:off x="4069080" y="2240280"/>
+            <a:ext cx="7802575" cy="4206240"/>
           </a:xfrm>
           <a:prstGeom prst="rect">
             <a:avLst/>
@@ -17003,17 +17664,13 @@
                 <a:ea typeface="Times New Roman" pitchFamily="34" charset="-122"/>
                 <a:cs typeface="Times New Roman" pitchFamily="34" charset="-120"/>
               </a:rPr>
-              <a:t>Solutions:</a:t>
-            </a:r>
-            <a:endParaRPr lang="en-US" sz="4000" dirty="0"/>
-          </a:p>
-          <a:p>
-            <a:pPr algn="l" marL="342900" indent="-342900">
+              <a:t>Family planning and education: </a:t>
+            </a:r>
+            <a:pPr algn="l" indent="0" marL="0">
               <a:spcAft>
                 <a:spcPts val="800"/>
               </a:spcAft>
-              <a:buSzPct val="100000"/>
-              <a:buChar char="•"/>
+              <a:buNone/>
             </a:pPr>
             <a:r>
               <a:rPr lang="en-US" sz="4000" dirty="0">
@@ -17024,49 +17681,7 @@
                 <a:ea typeface="Times New Roman" pitchFamily="34" charset="-122"/>
                 <a:cs typeface="Times New Roman" pitchFamily="34" charset="-120"/>
               </a:rPr>
-              <a:t>Immigration of skilled workers.</a:t>
-            </a:r>
-            <a:endParaRPr lang="en-US" sz="4000" dirty="0"/>
-          </a:p>
-          <a:p>
-            <a:pPr algn="l" marL="342900" indent="-342900">
-              <a:spcAft>
-                <a:spcPts val="800"/>
-              </a:spcAft>
-              <a:buSzPct val="100000"/>
-              <a:buChar char="•"/>
-            </a:pPr>
-            <a:r>
-              <a:rPr lang="en-US" sz="4000" dirty="0">
-                <a:solidFill>
-                  <a:srgbClr val="111111"/>
-                </a:solidFill>
-                <a:latin typeface="Times New Roman" pitchFamily="34" charset="0"/>
-                <a:ea typeface="Times New Roman" pitchFamily="34" charset="-122"/>
-                <a:cs typeface="Times New Roman" pitchFamily="34" charset="-120"/>
-              </a:rPr>
-              <a:t>Pro-natalist policies.</a:t>
-            </a:r>
-            <a:endParaRPr lang="en-US" sz="4000" dirty="0"/>
-          </a:p>
-          <a:p>
-            <a:pPr algn="l" marL="342900" indent="-342900">
-              <a:spcAft>
-                <a:spcPts val="800"/>
-              </a:spcAft>
-              <a:buSzPct val="100000"/>
-              <a:buChar char="•"/>
-            </a:pPr>
-            <a:r>
-              <a:rPr lang="en-US" sz="4000" dirty="0">
-                <a:solidFill>
-                  <a:srgbClr val="111111"/>
-                </a:solidFill>
-                <a:latin typeface="Times New Roman" pitchFamily="34" charset="0"/>
-                <a:ea typeface="Times New Roman" pitchFamily="34" charset="-122"/>
-                <a:cs typeface="Times New Roman" pitchFamily="34" charset="-120"/>
-              </a:rPr>
-              <a:t>Machines and automation.</a:t>
+              <a:t>Family planning and the education of girls reduce the number of births. The population then grows more slowly than the resources.</a:t>
             </a:r>
             <a:endParaRPr lang="en-US" sz="4000" dirty="0"/>
           </a:p>
@@ -17184,129 +17799,9 @@
           </a:p>
         </p:txBody>
       </p:sp>
-      <p:sp>
-        <p:nvSpPr>
-          <p:cNvPr id="3" name="Text 1"/>
-          <p:cNvSpPr/>
-          <p:nvPr/>
-        </p:nvSpPr>
-        <p:spPr>
-          <a:xfrm>
-            <a:off x="365760" y="1005840"/>
-            <a:ext cx="11460175" cy="731520"/>
-          </a:xfrm>
-          <a:prstGeom prst="rect">
-            <a:avLst/>
-          </a:prstGeom>
-          <a:noFill/>
-          <a:ln/>
-        </p:spPr>
-        <p:txBody>
-          <a:bodyPr wrap="square" lIns="0" tIns="0" rIns="0" bIns="0" rtlCol="0" anchor="ctr">
-            <a:normAutofit/>
-          </a:bodyPr>
-          <a:lstStyle/>
-          <a:p>
-            <a:pPr algn="ctr" indent="0" marL="0">
-              <a:buNone/>
-            </a:pPr>
-            <a:r>
-              <a:rPr lang="en-US" sz="3600" b="1" dirty="0">
-                <a:solidFill>
-                  <a:srgbClr val="990011"/>
-                </a:solidFill>
-                <a:latin typeface="Times New Roman" pitchFamily="34" charset="0"/>
-                <a:ea typeface="Times New Roman" pitchFamily="34" charset="-122"/>
-                <a:cs typeface="Times New Roman" pitchFamily="34" charset="-120"/>
-              </a:rPr>
-              <a:t>3. Optimum Population</a:t>
-            </a:r>
-            <a:endParaRPr lang="en-US" sz="3600" dirty="0"/>
-          </a:p>
-        </p:txBody>
-      </p:sp>
-      <p:sp>
-        <p:nvSpPr>
-          <p:cNvPr id="4" name="Text 2"/>
-          <p:cNvSpPr/>
-          <p:nvPr/>
-        </p:nvSpPr>
-        <p:spPr>
-          <a:xfrm>
-            <a:off x="365760" y="1783080"/>
-            <a:ext cx="4846320" cy="4617720"/>
-          </a:xfrm>
-          <a:prstGeom prst="rect">
-            <a:avLst/>
-          </a:prstGeom>
-          <a:noFill/>
-          <a:ln/>
-        </p:spPr>
-        <p:txBody>
-          <a:bodyPr wrap="square" lIns="0" tIns="0" rIns="0" bIns="0" rtlCol="0" anchor="t"/>
-          <a:lstStyle/>
-          <a:p>
-            <a:pPr algn="l" indent="0" marL="0">
-              <a:spcAft>
-                <a:spcPts val="800"/>
-              </a:spcAft>
-              <a:buNone/>
-            </a:pPr>
-            <a:r>
-              <a:rPr lang="en-US" sz="3600" i="1" dirty="0">
-                <a:solidFill>
-                  <a:srgbClr val="111111"/>
-                </a:solidFill>
-                <a:latin typeface="Times New Roman" pitchFamily="34" charset="0"/>
-                <a:ea typeface="Times New Roman" pitchFamily="34" charset="-122"/>
-                <a:cs typeface="Times New Roman" pitchFamily="34" charset="-120"/>
-              </a:rPr>
-              <a:t>The optimum population is presented as follows:</a:t>
-            </a:r>
-            <a:endParaRPr lang="en-US" sz="3600" dirty="0"/>
-          </a:p>
-          <a:p>
-            <a:pPr algn="l" indent="0" marL="0">
-              <a:spcAft>
-                <a:spcPts val="800"/>
-              </a:spcAft>
-              <a:buNone/>
-            </a:pPr>
-            <a:r>
-              <a:rPr lang="en-US" sz="3600" b="1" dirty="0">
-                <a:solidFill>
-                  <a:srgbClr val="111111"/>
-                </a:solidFill>
-                <a:latin typeface="Times New Roman" pitchFamily="34" charset="0"/>
-                <a:ea typeface="Times New Roman" pitchFamily="34" charset="-122"/>
-                <a:cs typeface="Times New Roman" pitchFamily="34" charset="-120"/>
-              </a:rPr>
-              <a:t>Meaning: </a:t>
-            </a:r>
-            <a:pPr algn="l" indent="0" marL="0">
-              <a:spcAft>
-                <a:spcPts val="800"/>
-              </a:spcAft>
-              <a:buNone/>
-            </a:pPr>
-            <a:r>
-              <a:rPr lang="en-US" sz="3600" dirty="0">
-                <a:solidFill>
-                  <a:srgbClr val="111111"/>
-                </a:solidFill>
-                <a:latin typeface="Times New Roman" pitchFamily="34" charset="0"/>
-                <a:ea typeface="Times New Roman" pitchFamily="34" charset="-122"/>
-                <a:cs typeface="Times New Roman" pitchFamily="34" charset="-120"/>
-              </a:rPr>
-              <a:t>It is a dynamic balance where output per person is highest.</a:t>
-            </a:r>
-            <a:endParaRPr lang="en-US" sz="3600" dirty="0"/>
-          </a:p>
-        </p:txBody>
-      </p:sp>
       <p:pic>
         <p:nvPicPr>
-          <p:cNvPr id="5" name="Image 0" descr="/home/claude/f4/img/v2/optimum_big.png">    </p:cNvPr>
+          <p:cNvPr id="3" name="Image 0" descr="/home/claude/f4/img/minesec_sheet.png">    </p:cNvPr>
           <p:cNvPicPr>
             <a:picLocks noChangeAspect="1"/>
           </p:cNvPicPr>
@@ -17320,8 +17815,8 @@
         </p:blipFill>
         <p:spPr>
           <a:xfrm>
-            <a:off x="5349240" y="2461422"/>
-            <a:ext cx="6659575" cy="2913564"/>
+            <a:off x="0" y="658368"/>
+            <a:ext cx="3840480" cy="5833872"/>
           </a:xfrm>
           <a:prstGeom prst="rect">
             <a:avLst/>
@@ -17330,14 +17825,14 @@
       </p:pic>
       <p:sp>
         <p:nvSpPr>
-          <p:cNvPr id="6" name="Text 3"/>
+          <p:cNvPr id="4" name="Text 1"/>
           <p:cNvSpPr/>
           <p:nvPr/>
         </p:nvSpPr>
         <p:spPr>
           <a:xfrm>
-            <a:off x="5349240" y="6089904"/>
-            <a:ext cx="6659575" cy="347472"/>
+            <a:off x="4069080" y="1005840"/>
+            <a:ext cx="7802575" cy="731520"/>
           </a:xfrm>
           <a:prstGeom prst="rect">
             <a:avLst/>
@@ -17346,24 +17841,124 @@
           <a:ln/>
         </p:spPr>
         <p:txBody>
-          <a:bodyPr wrap="square" lIns="0" tIns="0" rIns="0" bIns="0" rtlCol="0" anchor="ctr"/>
+          <a:bodyPr wrap="square" lIns="0" tIns="0" rIns="0" bIns="0" rtlCol="0" anchor="ctr">
+            <a:normAutofit/>
+          </a:bodyPr>
           <a:lstStyle/>
           <a:p>
             <a:pPr algn="ctr" indent="0" marL="0">
               <a:buNone/>
             </a:pPr>
             <a:r>
-              <a:rPr lang="en-US" sz="1600" i="1" dirty="0">
-                <a:solidFill>
-                  <a:srgbClr val="555555"/>
+              <a:rPr lang="en-US" sz="3600" b="1" dirty="0">
+                <a:solidFill>
+                  <a:srgbClr val="990011"/>
                 </a:solidFill>
                 <a:latin typeface="Times New Roman" pitchFamily="34" charset="0"/>
                 <a:ea typeface="Times New Roman" pitchFamily="34" charset="-122"/>
                 <a:cs typeface="Times New Roman" pitchFamily="34" charset="-120"/>
               </a:rPr>
-              <a:t>Illustration: the optimum population</a:t>
-            </a:r>
-            <a:endParaRPr lang="en-US" sz="1600" dirty="0"/>
+              <a:t>1. Overpopulation</a:t>
+            </a:r>
+            <a:endParaRPr lang="en-US" sz="3600" dirty="0"/>
+          </a:p>
+        </p:txBody>
+      </p:sp>
+      <p:sp>
+        <p:nvSpPr>
+          <p:cNvPr id="5" name="Text 2"/>
+          <p:cNvSpPr/>
+          <p:nvPr/>
+        </p:nvSpPr>
+        <p:spPr>
+          <a:xfrm>
+            <a:off x="4069080" y="1737360"/>
+            <a:ext cx="7802575" cy="457200"/>
+          </a:xfrm>
+          <a:prstGeom prst="rect">
+            <a:avLst/>
+          </a:prstGeom>
+          <a:noFill/>
+          <a:ln/>
+        </p:spPr>
+        <p:txBody>
+          <a:bodyPr wrap="square" lIns="0" tIns="0" rIns="0" bIns="0" rtlCol="0" anchor="ctr"/>
+          <a:lstStyle/>
+          <a:p>
+            <a:pPr algn="l" indent="0" marL="0">
+              <a:buNone/>
+            </a:pPr>
+            <a:r>
+              <a:rPr lang="en-US" sz="3200" b="1" dirty="0">
+                <a:solidFill>
+                  <a:srgbClr val="990011"/>
+                </a:solidFill>
+                <a:latin typeface="Times New Roman" pitchFamily="34" charset="0"/>
+                <a:ea typeface="Times New Roman" pitchFamily="34" charset="-122"/>
+                <a:cs typeface="Times New Roman" pitchFamily="34" charset="-120"/>
+              </a:rPr>
+              <a:t>B) Consequences and Solutions</a:t>
+            </a:r>
+            <a:endParaRPr lang="en-US" sz="3200" dirty="0"/>
+          </a:p>
+        </p:txBody>
+      </p:sp>
+      <p:sp>
+        <p:nvSpPr>
+          <p:cNvPr id="6" name="Text 3"/>
+          <p:cNvSpPr/>
+          <p:nvPr/>
+        </p:nvSpPr>
+        <p:spPr>
+          <a:xfrm>
+            <a:off x="4069080" y="2240280"/>
+            <a:ext cx="7802575" cy="4206240"/>
+          </a:xfrm>
+          <a:prstGeom prst="rect">
+            <a:avLst/>
+          </a:prstGeom>
+          <a:noFill/>
+          <a:ln/>
+        </p:spPr>
+        <p:txBody>
+          <a:bodyPr wrap="square" lIns="0" tIns="0" rIns="0" bIns="0" rtlCol="0" anchor="t"/>
+          <a:lstStyle/>
+          <a:p>
+            <a:pPr algn="l" indent="0" marL="0">
+              <a:spcAft>
+                <a:spcPts val="800"/>
+              </a:spcAft>
+              <a:buNone/>
+            </a:pPr>
+            <a:r>
+              <a:rPr lang="en-US" sz="4000" b="1" dirty="0">
+                <a:solidFill>
+                  <a:srgbClr val="111111"/>
+                </a:solidFill>
+                <a:latin typeface="Times New Roman" pitchFamily="34" charset="0"/>
+                <a:ea typeface="Times New Roman" pitchFamily="34" charset="-122"/>
+                <a:cs typeface="Times New Roman" pitchFamily="34" charset="-120"/>
+              </a:rPr>
+              <a:t>Technology and jobs: </a:t>
+            </a:r>
+            <a:pPr algn="l" indent="0" marL="0">
+              <a:spcAft>
+                <a:spcPts val="800"/>
+              </a:spcAft>
+              <a:buNone/>
+            </a:pPr>
+            <a:r>
+              <a:rPr lang="en-US" sz="4000" dirty="0">
+                <a:solidFill>
+                  <a:srgbClr val="111111"/>
+                </a:solidFill>
+                <a:latin typeface="Times New Roman" pitchFamily="34" charset="0"/>
+                <a:ea typeface="Times New Roman" pitchFamily="34" charset="-122"/>
+                <a:cs typeface="Times New Roman" pitchFamily="34" charset="-120"/>
+              </a:rPr>
+              <a:t>New technology, such as irrigation and improved seeds, increases production from the same land. Industrial jobs reduce the pressure on farmland.</a:t>
+            </a:r>
+            <a:endParaRPr lang="en-US" sz="4000" dirty="0"/>
           </a:p>
         </p:txBody>
       </p:sp>
@@ -17479,9 +18074,170 @@
           </a:p>
         </p:txBody>
       </p:sp>
+      <p:sp>
+        <p:nvSpPr>
+          <p:cNvPr id="3" name="Text 1"/>
+          <p:cNvSpPr/>
+          <p:nvPr/>
+        </p:nvSpPr>
+        <p:spPr>
+          <a:xfrm>
+            <a:off x="365760" y="1005840"/>
+            <a:ext cx="11460175" cy="731520"/>
+          </a:xfrm>
+          <a:prstGeom prst="rect">
+            <a:avLst/>
+          </a:prstGeom>
+          <a:noFill/>
+          <a:ln/>
+        </p:spPr>
+        <p:txBody>
+          <a:bodyPr wrap="square" lIns="0" tIns="0" rIns="0" bIns="0" rtlCol="0" anchor="ctr">
+            <a:normAutofit/>
+          </a:bodyPr>
+          <a:lstStyle/>
+          <a:p>
+            <a:pPr algn="ctr" indent="0" marL="0">
+              <a:buNone/>
+            </a:pPr>
+            <a:r>
+              <a:rPr lang="en-US" sz="3600" b="1" dirty="0">
+                <a:solidFill>
+                  <a:srgbClr val="990011"/>
+                </a:solidFill>
+                <a:latin typeface="Times New Roman" pitchFamily="34" charset="0"/>
+                <a:ea typeface="Times New Roman" pitchFamily="34" charset="-122"/>
+                <a:cs typeface="Times New Roman" pitchFamily="34" charset="-120"/>
+              </a:rPr>
+              <a:t>2. Underpopulation</a:t>
+            </a:r>
+            <a:endParaRPr lang="en-US" sz="3600" dirty="0"/>
+          </a:p>
+        </p:txBody>
+      </p:sp>
+      <p:sp>
+        <p:nvSpPr>
+          <p:cNvPr id="4" name="Text 2"/>
+          <p:cNvSpPr/>
+          <p:nvPr/>
+        </p:nvSpPr>
+        <p:spPr>
+          <a:xfrm>
+            <a:off x="365760" y="1737360"/>
+            <a:ext cx="6035040" cy="457200"/>
+          </a:xfrm>
+          <a:prstGeom prst="rect">
+            <a:avLst/>
+          </a:prstGeom>
+          <a:noFill/>
+          <a:ln/>
+        </p:spPr>
+        <p:txBody>
+          <a:bodyPr wrap="square" lIns="0" tIns="0" rIns="0" bIns="0" rtlCol="0" anchor="ctr">
+            <a:normAutofit/>
+          </a:bodyPr>
+          <a:lstStyle/>
+          <a:p>
+            <a:pPr algn="l" indent="0" marL="0">
+              <a:buNone/>
+            </a:pPr>
+            <a:r>
+              <a:rPr lang="en-US" sz="3000" b="1" dirty="0">
+                <a:solidFill>
+                  <a:srgbClr val="990011"/>
+                </a:solidFill>
+                <a:latin typeface="Times New Roman" pitchFamily="34" charset="0"/>
+                <a:ea typeface="Times New Roman" pitchFamily="34" charset="-122"/>
+                <a:cs typeface="Times New Roman" pitchFamily="34" charset="-120"/>
+              </a:rPr>
+              <a:t>A) Meaning, Indicators and Causes</a:t>
+            </a:r>
+            <a:endParaRPr lang="en-US" sz="3000" dirty="0"/>
+          </a:p>
+        </p:txBody>
+      </p:sp>
+      <p:sp>
+        <p:nvSpPr>
+          <p:cNvPr id="5" name="Text 3"/>
+          <p:cNvSpPr/>
+          <p:nvPr/>
+        </p:nvSpPr>
+        <p:spPr>
+          <a:xfrm>
+            <a:off x="365760" y="2240280"/>
+            <a:ext cx="6035040" cy="4160520"/>
+          </a:xfrm>
+          <a:prstGeom prst="rect">
+            <a:avLst/>
+          </a:prstGeom>
+          <a:noFill/>
+          <a:ln/>
+        </p:spPr>
+        <p:txBody>
+          <a:bodyPr wrap="square" lIns="0" tIns="0" rIns="0" bIns="0" rtlCol="0" anchor="t"/>
+          <a:lstStyle/>
+          <a:p>
+            <a:pPr algn="l" indent="0" marL="0">
+              <a:spcAft>
+                <a:spcPts val="800"/>
+              </a:spcAft>
+              <a:buNone/>
+            </a:pPr>
+            <a:r>
+              <a:rPr lang="en-US" sz="3200" i="1" dirty="0">
+                <a:solidFill>
+                  <a:srgbClr val="111111"/>
+                </a:solidFill>
+                <a:latin typeface="Times New Roman" pitchFamily="34" charset="0"/>
+                <a:ea typeface="Times New Roman" pitchFamily="34" charset="-122"/>
+                <a:cs typeface="Times New Roman" pitchFamily="34" charset="-120"/>
+              </a:rPr>
+              <a:t>Underpopulation is explained as follows:</a:t>
+            </a:r>
+            <a:endParaRPr lang="en-US" sz="3200" dirty="0"/>
+          </a:p>
+          <a:p>
+            <a:pPr algn="l" indent="0" marL="0">
+              <a:spcAft>
+                <a:spcPts val="800"/>
+              </a:spcAft>
+              <a:buNone/>
+            </a:pPr>
+            <a:r>
+              <a:rPr lang="en-US" sz="3200" b="1" dirty="0">
+                <a:solidFill>
+                  <a:srgbClr val="111111"/>
+                </a:solidFill>
+                <a:latin typeface="Times New Roman" pitchFamily="34" charset="0"/>
+                <a:ea typeface="Times New Roman" pitchFamily="34" charset="-122"/>
+                <a:cs typeface="Times New Roman" pitchFamily="34" charset="-120"/>
+              </a:rPr>
+              <a:t>Meaning and situations: </a:t>
+            </a:r>
+            <a:pPr algn="l" indent="0" marL="0">
+              <a:spcAft>
+                <a:spcPts val="800"/>
+              </a:spcAft>
+              <a:buNone/>
+            </a:pPr>
+            <a:r>
+              <a:rPr lang="en-US" sz="3200" dirty="0">
+                <a:solidFill>
+                  <a:srgbClr val="111111"/>
+                </a:solidFill>
+                <a:latin typeface="Times New Roman" pitchFamily="34" charset="0"/>
+                <a:ea typeface="Times New Roman" pitchFamily="34" charset="-122"/>
+                <a:cs typeface="Times New Roman" pitchFamily="34" charset="-120"/>
+              </a:rPr>
+              <a:t>An area is underpopulated when it has too few people to develop its resources fully. Examples are Canada, Australia and the East Region of Cameroon.</a:t>
+            </a:r>
+            <a:endParaRPr lang="en-US" sz="3200" dirty="0"/>
+          </a:p>
+        </p:txBody>
+      </p:sp>
       <p:pic>
         <p:nvPicPr>
-          <p:cNvPr id="3" name="Image 0" descr="/home/claude/f4/img/minesec_sheet.png">    </p:cNvPr>
+          <p:cNvPr id="6" name="Image 0" descr="/home/claude/f4/img/v2/regimes_big.png">    </p:cNvPr>
           <p:cNvPicPr>
             <a:picLocks noChangeAspect="1"/>
           </p:cNvPicPr>
@@ -17495,8 +18251,8 @@
         </p:blipFill>
         <p:spPr>
           <a:xfrm>
-            <a:off x="0" y="658368"/>
-            <a:ext cx="2468880" cy="5833872"/>
+            <a:off x="6537960" y="2849678"/>
+            <a:ext cx="5470855" cy="2137053"/>
           </a:xfrm>
           <a:prstGeom prst="rect">
             <a:avLst/>
@@ -17505,14 +18261,14 @@
       </p:pic>
       <p:sp>
         <p:nvSpPr>
-          <p:cNvPr id="4" name="Text 1"/>
+          <p:cNvPr id="7" name="Text 4"/>
           <p:cNvSpPr/>
           <p:nvPr/>
         </p:nvSpPr>
         <p:spPr>
           <a:xfrm>
-            <a:off x="2697480" y="1005840"/>
-            <a:ext cx="9174175" cy="731520"/>
+            <a:off x="6537960" y="6089904"/>
+            <a:ext cx="5470855" cy="347472"/>
           </a:xfrm>
           <a:prstGeom prst="rect">
             <a:avLst/>
@@ -17521,122 +18277,24 @@
           <a:ln/>
         </p:spPr>
         <p:txBody>
-          <a:bodyPr wrap="square" lIns="0" tIns="0" rIns="0" bIns="0" rtlCol="0" anchor="ctr">
-            <a:normAutofit/>
-          </a:bodyPr>
+          <a:bodyPr wrap="square" lIns="0" tIns="0" rIns="0" bIns="0" rtlCol="0" anchor="ctr"/>
           <a:lstStyle/>
           <a:p>
             <a:pPr algn="ctr" indent="0" marL="0">
               <a:buNone/>
             </a:pPr>
             <a:r>
-              <a:rPr lang="en-US" sz="3600" b="1" dirty="0">
-                <a:solidFill>
-                  <a:srgbClr val="990011"/>
+              <a:rPr lang="en-US" sz="1600" i="1" dirty="0">
+                <a:solidFill>
+                  <a:srgbClr val="555555"/>
                 </a:solidFill>
                 <a:latin typeface="Times New Roman" pitchFamily="34" charset="0"/>
                 <a:ea typeface="Times New Roman" pitchFamily="34" charset="-122"/>
                 <a:cs typeface="Times New Roman" pitchFamily="34" charset="-120"/>
               </a:rPr>
-              <a:t>3. Optimum Population</a:t>
-            </a:r>
-            <a:endParaRPr lang="en-US" sz="3600" dirty="0"/>
-          </a:p>
-        </p:txBody>
-      </p:sp>
-      <p:sp>
-        <p:nvSpPr>
-          <p:cNvPr id="5" name="Text 2"/>
-          <p:cNvSpPr/>
-          <p:nvPr/>
-        </p:nvSpPr>
-        <p:spPr>
-          <a:xfrm>
-            <a:off x="2697480" y="1783080"/>
-            <a:ext cx="9174175" cy="4663440"/>
-          </a:xfrm>
-          <a:prstGeom prst="rect">
-            <a:avLst/>
-          </a:prstGeom>
-          <a:noFill/>
-          <a:ln/>
-        </p:spPr>
-        <p:txBody>
-          <a:bodyPr wrap="square" lIns="0" tIns="0" rIns="0" bIns="0" rtlCol="0" anchor="t"/>
-          <a:lstStyle/>
-          <a:p>
-            <a:pPr algn="l" indent="0" marL="0">
-              <a:spcAft>
-                <a:spcPts val="800"/>
-              </a:spcAft>
-              <a:buNone/>
-            </a:pPr>
-            <a:r>
-              <a:rPr lang="en-US" sz="4000" b="1" dirty="0">
-                <a:solidFill>
-                  <a:srgbClr val="111111"/>
-                </a:solidFill>
-                <a:latin typeface="Times New Roman" pitchFamily="34" charset="0"/>
-                <a:ea typeface="Times New Roman" pitchFamily="34" charset="-122"/>
-                <a:cs typeface="Times New Roman" pitchFamily="34" charset="-120"/>
-              </a:rPr>
-              <a:t>Indicators: </a:t>
-            </a:r>
-            <a:pPr algn="l" indent="0" marL="0">
-              <a:spcAft>
-                <a:spcPts val="800"/>
-              </a:spcAft>
-              <a:buNone/>
-            </a:pPr>
-            <a:r>
-              <a:rPr lang="en-US" sz="4000" dirty="0">
-                <a:solidFill>
-                  <a:srgbClr val="111111"/>
-                </a:solidFill>
-                <a:latin typeface="Times New Roman" pitchFamily="34" charset="0"/>
-                <a:ea typeface="Times New Roman" pitchFamily="34" charset="-122"/>
-                <a:cs typeface="Times New Roman" pitchFamily="34" charset="-120"/>
-              </a:rPr>
-              <a:t>High income per person, full employment, sustainable use of resources and good social services.</a:t>
-            </a:r>
-            <a:endParaRPr lang="en-US" sz="4000" dirty="0"/>
-          </a:p>
-          <a:p>
-            <a:pPr algn="l" indent="0" marL="0">
-              <a:spcAft>
-                <a:spcPts val="800"/>
-              </a:spcAft>
-              <a:buNone/>
-            </a:pPr>
-            <a:r>
-              <a:rPr lang="en-US" sz="4000" b="1" dirty="0">
-                <a:solidFill>
-                  <a:srgbClr val="111111"/>
-                </a:solidFill>
-                <a:latin typeface="Times New Roman" pitchFamily="34" charset="0"/>
-                <a:ea typeface="Times New Roman" pitchFamily="34" charset="-122"/>
-                <a:cs typeface="Times New Roman" pitchFamily="34" charset="-120"/>
-              </a:rPr>
-              <a:t>Conditions: </a:t>
-            </a:r>
-            <a:pPr algn="l" indent="0" marL="0">
-              <a:spcAft>
-                <a:spcPts val="800"/>
-              </a:spcAft>
-              <a:buNone/>
-            </a:pPr>
-            <a:r>
-              <a:rPr lang="en-US" sz="4000" dirty="0">
-                <a:solidFill>
-                  <a:srgbClr val="111111"/>
-                </a:solidFill>
-                <a:latin typeface="Times New Roman" pitchFamily="34" charset="0"/>
-                <a:ea typeface="Times New Roman" pitchFamily="34" charset="-122"/>
-                <a:cs typeface="Times New Roman" pitchFamily="34" charset="-120"/>
-              </a:rPr>
-              <a:t>Balanced births and deaths, controlled immigration, advanced technology and good resource management.</a:t>
-            </a:r>
-            <a:endParaRPr lang="en-US" sz="4000" dirty="0"/>
+              <a:t>Illustration: population and resources</a:t>
+            </a:r>
+            <a:endParaRPr lang="en-US" sz="1600" dirty="0"/>
           </a:p>
         </p:txBody>
       </p:sp>
@@ -17769,7 +18427,7 @@
         <p:spPr>
           <a:xfrm>
             <a:off x="0" y="658368"/>
-            <a:ext cx="5120640" cy="5833872"/>
+            <a:ext cx="3840480" cy="5833872"/>
           </a:xfrm>
           <a:prstGeom prst="rect">
             <a:avLst/>
@@ -17784,8 +18442,8 @@
         </p:nvSpPr>
         <p:spPr>
           <a:xfrm>
-            <a:off x="5349240" y="1005840"/>
-            <a:ext cx="6522415" cy="731520"/>
+            <a:off x="4069080" y="1005840"/>
+            <a:ext cx="7802575" cy="731520"/>
           </a:xfrm>
           <a:prstGeom prst="rect">
             <a:avLst/>
@@ -17811,7 +18469,7 @@
                 <a:ea typeface="Times New Roman" pitchFamily="34" charset="-122"/>
                 <a:cs typeface="Times New Roman" pitchFamily="34" charset="-120"/>
               </a:rPr>
-              <a:t>3. Optimum Population (continued)</a:t>
+              <a:t>2. Underpopulation</a:t>
             </a:r>
             <a:endParaRPr lang="en-US" sz="3600" dirty="0"/>
           </a:p>
@@ -17825,8 +18483,47 @@
         </p:nvSpPr>
         <p:spPr>
           <a:xfrm>
-            <a:off x="5349240" y="1783080"/>
-            <a:ext cx="6522415" cy="4663440"/>
+            <a:off x="4069080" y="1737360"/>
+            <a:ext cx="7802575" cy="457200"/>
+          </a:xfrm>
+          <a:prstGeom prst="rect">
+            <a:avLst/>
+          </a:prstGeom>
+          <a:noFill/>
+          <a:ln/>
+        </p:spPr>
+        <p:txBody>
+          <a:bodyPr wrap="square" lIns="0" tIns="0" rIns="0" bIns="0" rtlCol="0" anchor="ctr"/>
+          <a:lstStyle/>
+          <a:p>
+            <a:pPr algn="l" indent="0" marL="0">
+              <a:buNone/>
+            </a:pPr>
+            <a:r>
+              <a:rPr lang="en-US" sz="3200" b="1" dirty="0">
+                <a:solidFill>
+                  <a:srgbClr val="990011"/>
+                </a:solidFill>
+                <a:latin typeface="Times New Roman" pitchFamily="34" charset="0"/>
+                <a:ea typeface="Times New Roman" pitchFamily="34" charset="-122"/>
+                <a:cs typeface="Times New Roman" pitchFamily="34" charset="-120"/>
+              </a:rPr>
+              <a:t>A) Meaning, Indicators and Causes</a:t>
+            </a:r>
+            <a:endParaRPr lang="en-US" sz="3200" dirty="0"/>
+          </a:p>
+        </p:txBody>
+      </p:sp>
+      <p:sp>
+        <p:nvSpPr>
+          <p:cNvPr id="6" name="Text 3"/>
+          <p:cNvSpPr/>
+          <p:nvPr/>
+        </p:nvSpPr>
+        <p:spPr>
+          <a:xfrm>
+            <a:off x="4069080" y="2240280"/>
+            <a:ext cx="7802575" cy="4206240"/>
           </a:xfrm>
           <a:prstGeom prst="rect">
             <a:avLst/>
@@ -17853,7 +18550,7 @@
                 <a:ea typeface="Times New Roman" pitchFamily="34" charset="-122"/>
                 <a:cs typeface="Times New Roman" pitchFamily="34" charset="-120"/>
               </a:rPr>
-              <a:t>A moving target: </a:t>
+              <a:t>Indicators and measurement: </a:t>
             </a:r>
             <a:pPr algn="l" indent="0" marL="0">
               <a:spcAft>
@@ -17870,7 +18567,7 @@
                 <a:ea typeface="Times New Roman" pitchFamily="34" charset="-122"/>
                 <a:cs typeface="Times New Roman" pitchFamily="34" charset="-120"/>
               </a:rPr>
-              <a:t>The optimum changes with technology, so it needs continuous planning.</a:t>
+              <a:t>The indicators are many resources per person, labour shortages, empty schools and slow economic growth. It is measured by the ratio of resources to population.</a:t>
             </a:r>
             <a:endParaRPr lang="en-US" sz="4000" dirty="0"/>
           </a:p>
@@ -18047,7 +18744,7 @@
                 <a:ea typeface="Times New Roman" pitchFamily="34" charset="-122"/>
                 <a:cs typeface="Times New Roman" pitchFamily="34" charset="-120"/>
               </a:rPr>
-              <a:t>4. Carrying Capacity of the Land</a:t>
+              <a:t>2. Underpopulation</a:t>
             </a:r>
             <a:endParaRPr lang="en-US" sz="3600" dirty="0"/>
           </a:p>
@@ -18061,8 +18758,47 @@
         </p:nvSpPr>
         <p:spPr>
           <a:xfrm>
-            <a:off x="5349240" y="1783080"/>
-            <a:ext cx="6522415" cy="4663440"/>
+            <a:off x="5349240" y="1737360"/>
+            <a:ext cx="6522415" cy="457200"/>
+          </a:xfrm>
+          <a:prstGeom prst="rect">
+            <a:avLst/>
+          </a:prstGeom>
+          <a:noFill/>
+          <a:ln/>
+        </p:spPr>
+        <p:txBody>
+          <a:bodyPr wrap="square" lIns="0" tIns="0" rIns="0" bIns="0" rtlCol="0" anchor="ctr"/>
+          <a:lstStyle/>
+          <a:p>
+            <a:pPr algn="l" indent="0" marL="0">
+              <a:buNone/>
+            </a:pPr>
+            <a:r>
+              <a:rPr lang="en-US" sz="3100" b="1" dirty="0">
+                <a:solidFill>
+                  <a:srgbClr val="990011"/>
+                </a:solidFill>
+                <a:latin typeface="Times New Roman" pitchFamily="34" charset="0"/>
+                <a:ea typeface="Times New Roman" pitchFamily="34" charset="-122"/>
+                <a:cs typeface="Times New Roman" pitchFamily="34" charset="-120"/>
+              </a:rPr>
+              <a:t>A) Meaning, Indicators and Causes</a:t>
+            </a:r>
+            <a:endParaRPr lang="en-US" sz="3100" dirty="0"/>
+          </a:p>
+        </p:txBody>
+      </p:sp>
+      <p:sp>
+        <p:nvSpPr>
+          <p:cNvPr id="6" name="Text 3"/>
+          <p:cNvSpPr/>
+          <p:nvPr/>
+        </p:nvSpPr>
+        <p:spPr>
+          <a:xfrm>
+            <a:off x="5349240" y="2240280"/>
+            <a:ext cx="6522415" cy="4206240"/>
           </a:xfrm>
           <a:prstGeom prst="rect">
             <a:avLst/>
@@ -18081,7 +18817,7 @@
               <a:buNone/>
             </a:pPr>
             <a:r>
-              <a:rPr lang="en-US" sz="4000" i="1" dirty="0">
+              <a:rPr lang="en-US" sz="4000" b="1" dirty="0">
                 <a:solidFill>
                   <a:srgbClr val="111111"/>
                 </a:solidFill>
@@ -18089,11 +18825,8 @@
                 <a:ea typeface="Times New Roman" pitchFamily="34" charset="-122"/>
                 <a:cs typeface="Times New Roman" pitchFamily="34" charset="-120"/>
               </a:rPr>
-              <a:t>The carrying capacity of the land is presented as follows:</a:t>
-            </a:r>
-            <a:endParaRPr lang="en-US" sz="4000" dirty="0"/>
-          </a:p>
-          <a:p>
+              <a:t>Causes: </a:t>
+            </a:r>
             <a:pPr algn="l" indent="0" marL="0">
               <a:spcAft>
                 <a:spcPts val="800"/>
@@ -18101,7 +18834,7 @@
               <a:buNone/>
             </a:pPr>
             <a:r>
-              <a:rPr lang="en-US" sz="4000" b="1" dirty="0">
+              <a:rPr lang="en-US" sz="4000" dirty="0">
                 <a:solidFill>
                   <a:srgbClr val="111111"/>
                 </a:solidFill>
@@ -18109,24 +18842,7 @@
                 <a:ea typeface="Times New Roman" pitchFamily="34" charset="-122"/>
                 <a:cs typeface="Times New Roman" pitchFamily="34" charset="-120"/>
               </a:rPr>
-              <a:t>Meaning: </a:t>
-            </a:r>
-            <a:pPr algn="l" indent="0" marL="0">
-              <a:spcAft>
-                <a:spcPts val="800"/>
-              </a:spcAft>
-              <a:buNone/>
-            </a:pPr>
-            <a:r>
-              <a:rPr lang="en-US" sz="4000" dirty="0">
-                <a:solidFill>
-                  <a:srgbClr val="111111"/>
-                </a:solidFill>
-                <a:latin typeface="Times New Roman" pitchFamily="34" charset="0"/>
-                <a:ea typeface="Times New Roman" pitchFamily="34" charset="-122"/>
-                <a:cs typeface="Times New Roman" pitchFamily="34" charset="-120"/>
-              </a:rPr>
-              <a:t>It is the maximum population an environment can support for a long time without permanent damage.</a:t>
+              <a:t>Low birth rates, high death rates and strong emigration reduce the population. A harsh environment can also discourage settlement.</a:t>
             </a:r>
             <a:endParaRPr lang="en-US" sz="4000" dirty="0"/>
           </a:p>
@@ -18244,109 +18960,9 @@
           </a:p>
         </p:txBody>
       </p:sp>
-      <p:sp>
-        <p:nvSpPr>
-          <p:cNvPr id="3" name="Text 1"/>
-          <p:cNvSpPr/>
-          <p:nvPr/>
-        </p:nvSpPr>
-        <p:spPr>
-          <a:xfrm>
-            <a:off x="365760" y="1005840"/>
-            <a:ext cx="11460175" cy="731520"/>
-          </a:xfrm>
-          <a:prstGeom prst="rect">
-            <a:avLst/>
-          </a:prstGeom>
-          <a:noFill/>
-          <a:ln/>
-        </p:spPr>
-        <p:txBody>
-          <a:bodyPr wrap="square" lIns="0" tIns="0" rIns="0" bIns="0" rtlCol="0" anchor="ctr">
-            <a:normAutofit/>
-          </a:bodyPr>
-          <a:lstStyle/>
-          <a:p>
-            <a:pPr algn="ctr" indent="0" marL="0">
-              <a:buNone/>
-            </a:pPr>
-            <a:r>
-              <a:rPr lang="en-US" sz="3600" b="1" dirty="0">
-                <a:solidFill>
-                  <a:srgbClr val="990011"/>
-                </a:solidFill>
-                <a:latin typeface="Times New Roman" pitchFamily="34" charset="0"/>
-                <a:ea typeface="Times New Roman" pitchFamily="34" charset="-122"/>
-                <a:cs typeface="Times New Roman" pitchFamily="34" charset="-120"/>
-              </a:rPr>
-              <a:t>4. Carrying Capacity of the Land</a:t>
-            </a:r>
-            <a:endParaRPr lang="en-US" sz="3600" dirty="0"/>
-          </a:p>
-        </p:txBody>
-      </p:sp>
-      <p:sp>
-        <p:nvSpPr>
-          <p:cNvPr id="4" name="Text 2"/>
-          <p:cNvSpPr/>
-          <p:nvPr/>
-        </p:nvSpPr>
-        <p:spPr>
-          <a:xfrm>
-            <a:off x="365760" y="1783080"/>
-            <a:ext cx="4846320" cy="4617720"/>
-          </a:xfrm>
-          <a:prstGeom prst="rect">
-            <a:avLst/>
-          </a:prstGeom>
-          <a:noFill/>
-          <a:ln/>
-        </p:spPr>
-        <p:txBody>
-          <a:bodyPr wrap="square" lIns="0" tIns="0" rIns="0" bIns="0" rtlCol="0" anchor="t"/>
-          <a:lstStyle/>
-          <a:p>
-            <a:pPr algn="l" indent="0" marL="0">
-              <a:spcAft>
-                <a:spcPts val="800"/>
-              </a:spcAft>
-              <a:buNone/>
-            </a:pPr>
-            <a:r>
-              <a:rPr lang="en-US" sz="3600" b="1" dirty="0">
-                <a:solidFill>
-                  <a:srgbClr val="111111"/>
-                </a:solidFill>
-                <a:latin typeface="Times New Roman" pitchFamily="34" charset="0"/>
-                <a:ea typeface="Times New Roman" pitchFamily="34" charset="-122"/>
-                <a:cs typeface="Times New Roman" pitchFamily="34" charset="-120"/>
-              </a:rPr>
-              <a:t>Warning signs: </a:t>
-            </a:r>
-            <a:pPr algn="l" indent="0" marL="0">
-              <a:spcAft>
-                <a:spcPts val="800"/>
-              </a:spcAft>
-              <a:buNone/>
-            </a:pPr>
-            <a:r>
-              <a:rPr lang="en-US" sz="3600" dirty="0">
-                <a:solidFill>
-                  <a:srgbClr val="111111"/>
-                </a:solidFill>
-                <a:latin typeface="Times New Roman" pitchFamily="34" charset="0"/>
-                <a:ea typeface="Times New Roman" pitchFamily="34" charset="-122"/>
-                <a:cs typeface="Times New Roman" pitchFamily="34" charset="-120"/>
-              </a:rPr>
-              <a:t>Falling water tables, soil erosion, deforestation and loss of biodiversity show that it is being exceeded.</a:t>
-            </a:r>
-            <a:endParaRPr lang="en-US" sz="3600" dirty="0"/>
-          </a:p>
-        </p:txBody>
-      </p:sp>
       <p:pic>
         <p:nvPicPr>
-          <p:cNvPr id="5" name="Image 0" descr="/home/claude/f4/img/v2/f2t_cracked_soil.jpg">    </p:cNvPr>
+          <p:cNvPr id="3" name="Image 0" descr="/home/claude/f4/img/minesec_sheet.png">    </p:cNvPr>
           <p:cNvPicPr>
             <a:picLocks noChangeAspect="1"/>
           </p:cNvPicPr>
@@ -18360,8 +18976,8 @@
         </p:blipFill>
         <p:spPr>
           <a:xfrm>
-            <a:off x="5349240" y="2071212"/>
-            <a:ext cx="6659575" cy="3693983"/>
+            <a:off x="0" y="658368"/>
+            <a:ext cx="2468880" cy="5833872"/>
           </a:xfrm>
           <a:prstGeom prst="rect">
             <a:avLst/>
@@ -18370,14 +18986,14 @@
       </p:pic>
       <p:sp>
         <p:nvSpPr>
-          <p:cNvPr id="6" name="Text 3"/>
+          <p:cNvPr id="4" name="Text 1"/>
           <p:cNvSpPr/>
           <p:nvPr/>
         </p:nvSpPr>
         <p:spPr>
           <a:xfrm>
-            <a:off x="5349240" y="6089904"/>
-            <a:ext cx="6659575" cy="347472"/>
+            <a:off x="2697480" y="1005840"/>
+            <a:ext cx="9174175" cy="731520"/>
           </a:xfrm>
           <a:prstGeom prst="rect">
             <a:avLst/>
@@ -18386,24 +19002,144 @@
           <a:ln/>
         </p:spPr>
         <p:txBody>
-          <a:bodyPr wrap="square" lIns="0" tIns="0" rIns="0" bIns="0" rtlCol="0" anchor="ctr"/>
+          <a:bodyPr wrap="square" lIns="0" tIns="0" rIns="0" bIns="0" rtlCol="0" anchor="ctr">
+            <a:normAutofit/>
+          </a:bodyPr>
           <a:lstStyle/>
           <a:p>
             <a:pPr algn="ctr" indent="0" marL="0">
               <a:buNone/>
             </a:pPr>
             <a:r>
-              <a:rPr lang="en-US" sz="1600" i="1" dirty="0">
-                <a:solidFill>
-                  <a:srgbClr val="555555"/>
+              <a:rPr lang="en-US" sz="3600" b="1" dirty="0">
+                <a:solidFill>
+                  <a:srgbClr val="990011"/>
                 </a:solidFill>
                 <a:latin typeface="Times New Roman" pitchFamily="34" charset="0"/>
                 <a:ea typeface="Times New Roman" pitchFamily="34" charset="-122"/>
                 <a:cs typeface="Times New Roman" pitchFamily="34" charset="-120"/>
               </a:rPr>
-              <a:t>Illustration: degraded soil</a:t>
-            </a:r>
-            <a:endParaRPr lang="en-US" sz="1600" dirty="0"/>
+              <a:t>2. Underpopulation</a:t>
+            </a:r>
+            <a:endParaRPr lang="en-US" sz="3600" dirty="0"/>
+          </a:p>
+        </p:txBody>
+      </p:sp>
+      <p:sp>
+        <p:nvSpPr>
+          <p:cNvPr id="5" name="Text 2"/>
+          <p:cNvSpPr/>
+          <p:nvPr/>
+        </p:nvSpPr>
+        <p:spPr>
+          <a:xfrm>
+            <a:off x="2697480" y="1737360"/>
+            <a:ext cx="9174175" cy="457200"/>
+          </a:xfrm>
+          <a:prstGeom prst="rect">
+            <a:avLst/>
+          </a:prstGeom>
+          <a:noFill/>
+          <a:ln/>
+        </p:spPr>
+        <p:txBody>
+          <a:bodyPr wrap="square" lIns="0" tIns="0" rIns="0" bIns="0" rtlCol="0" anchor="ctr"/>
+          <a:lstStyle/>
+          <a:p>
+            <a:pPr algn="l" indent="0" marL="0">
+              <a:buNone/>
+            </a:pPr>
+            <a:r>
+              <a:rPr lang="en-US" sz="3200" b="1" dirty="0">
+                <a:solidFill>
+                  <a:srgbClr val="990011"/>
+                </a:solidFill>
+                <a:latin typeface="Times New Roman" pitchFamily="34" charset="0"/>
+                <a:ea typeface="Times New Roman" pitchFamily="34" charset="-122"/>
+                <a:cs typeface="Times New Roman" pitchFamily="34" charset="-120"/>
+              </a:rPr>
+              <a:t>B) Consequences and Solutions</a:t>
+            </a:r>
+            <a:endParaRPr lang="en-US" sz="3200" dirty="0"/>
+          </a:p>
+        </p:txBody>
+      </p:sp>
+      <p:sp>
+        <p:nvSpPr>
+          <p:cNvPr id="6" name="Text 3"/>
+          <p:cNvSpPr/>
+          <p:nvPr/>
+        </p:nvSpPr>
+        <p:spPr>
+          <a:xfrm>
+            <a:off x="2697480" y="2240280"/>
+            <a:ext cx="9174175" cy="4206240"/>
+          </a:xfrm>
+          <a:prstGeom prst="rect">
+            <a:avLst/>
+          </a:prstGeom>
+          <a:noFill/>
+          <a:ln/>
+        </p:spPr>
+        <p:txBody>
+          <a:bodyPr wrap="square" lIns="0" tIns="0" rIns="0" bIns="0" rtlCol="0" anchor="t"/>
+          <a:lstStyle/>
+          <a:p>
+            <a:pPr algn="l" indent="0" marL="0">
+              <a:spcAft>
+                <a:spcPts val="800"/>
+              </a:spcAft>
+              <a:buNone/>
+            </a:pPr>
+            <a:r>
+              <a:rPr lang="en-US" sz="4000" i="1" dirty="0">
+                <a:solidFill>
+                  <a:srgbClr val="111111"/>
+                </a:solidFill>
+                <a:latin typeface="Times New Roman" pitchFamily="34" charset="0"/>
+                <a:ea typeface="Times New Roman" pitchFamily="34" charset="-122"/>
+                <a:cs typeface="Times New Roman" pitchFamily="34" charset="-120"/>
+              </a:rPr>
+              <a:t>Underpopulation has the following consequences and solutions:</a:t>
+            </a:r>
+            <a:endParaRPr lang="en-US" sz="4000" dirty="0"/>
+          </a:p>
+          <a:p>
+            <a:pPr algn="l" indent="0" marL="0">
+              <a:spcAft>
+                <a:spcPts val="800"/>
+              </a:spcAft>
+              <a:buNone/>
+            </a:pPr>
+            <a:r>
+              <a:rPr lang="en-US" sz="4000" b="1" dirty="0">
+                <a:solidFill>
+                  <a:srgbClr val="111111"/>
+                </a:solidFill>
+                <a:latin typeface="Times New Roman" pitchFamily="34" charset="0"/>
+                <a:ea typeface="Times New Roman" pitchFamily="34" charset="-122"/>
+                <a:cs typeface="Times New Roman" pitchFamily="34" charset="-120"/>
+              </a:rPr>
+              <a:t>Consequences: </a:t>
+            </a:r>
+            <a:pPr algn="l" indent="0" marL="0">
+              <a:spcAft>
+                <a:spcPts val="800"/>
+              </a:spcAft>
+              <a:buNone/>
+            </a:pPr>
+            <a:r>
+              <a:rPr lang="en-US" sz="4000" dirty="0">
+                <a:solidFill>
+                  <a:srgbClr val="111111"/>
+                </a:solidFill>
+                <a:latin typeface="Times New Roman" pitchFamily="34" charset="0"/>
+                <a:ea typeface="Times New Roman" pitchFamily="34" charset="-122"/>
+                <a:cs typeface="Times New Roman" pitchFamily="34" charset="-120"/>
+              </a:rPr>
+              <a:t>Resources are left unused, and the domestic market is too small for industries. The country may also be difficult to defend and develop.</a:t>
+            </a:r>
+            <a:endParaRPr lang="en-US" sz="4000" dirty="0"/>
           </a:p>
         </p:txBody>
       </p:sp>
@@ -18536,7 +19272,7 @@
         <p:spPr>
           <a:xfrm>
             <a:off x="0" y="658368"/>
-            <a:ext cx="1463040" cy="5833872"/>
+            <a:ext cx="5120640" cy="5833872"/>
           </a:xfrm>
           <a:prstGeom prst="rect">
             <a:avLst/>
@@ -18551,8 +19287,8 @@
         </p:nvSpPr>
         <p:spPr>
           <a:xfrm>
-            <a:off x="1691640" y="1005840"/>
-            <a:ext cx="10180015" cy="731520"/>
+            <a:off x="5349240" y="1005840"/>
+            <a:ext cx="6522415" cy="731520"/>
           </a:xfrm>
           <a:prstGeom prst="rect">
             <a:avLst/>
@@ -18578,7 +19314,7 @@
                 <a:ea typeface="Times New Roman" pitchFamily="34" charset="-122"/>
                 <a:cs typeface="Times New Roman" pitchFamily="34" charset="-120"/>
               </a:rPr>
-              <a:t>4. Carrying Capacity of the Land</a:t>
+              <a:t>2. Underpopulation</a:t>
             </a:r>
             <a:endParaRPr lang="en-US" sz="3600" dirty="0"/>
           </a:p>
@@ -18592,8 +19328,47 @@
         </p:nvSpPr>
         <p:spPr>
           <a:xfrm>
-            <a:off x="1691640" y="1783080"/>
-            <a:ext cx="10180015" cy="4663440"/>
+            <a:off x="5349240" y="1737360"/>
+            <a:ext cx="6522415" cy="457200"/>
+          </a:xfrm>
+          <a:prstGeom prst="rect">
+            <a:avLst/>
+          </a:prstGeom>
+          <a:noFill/>
+          <a:ln/>
+        </p:spPr>
+        <p:txBody>
+          <a:bodyPr wrap="square" lIns="0" tIns="0" rIns="0" bIns="0" rtlCol="0" anchor="ctr"/>
+          <a:lstStyle/>
+          <a:p>
+            <a:pPr algn="l" indent="0" marL="0">
+              <a:buNone/>
+            </a:pPr>
+            <a:r>
+              <a:rPr lang="en-US" sz="3200" b="1" dirty="0">
+                <a:solidFill>
+                  <a:srgbClr val="990011"/>
+                </a:solidFill>
+                <a:latin typeface="Times New Roman" pitchFamily="34" charset="0"/>
+                <a:ea typeface="Times New Roman" pitchFamily="34" charset="-122"/>
+                <a:cs typeface="Times New Roman" pitchFamily="34" charset="-120"/>
+              </a:rPr>
+              <a:t>B) Consequences and Solutions</a:t>
+            </a:r>
+            <a:endParaRPr lang="en-US" sz="3200" dirty="0"/>
+          </a:p>
+        </p:txBody>
+      </p:sp>
+      <p:sp>
+        <p:nvSpPr>
+          <p:cNvPr id="6" name="Text 3"/>
+          <p:cNvSpPr/>
+          <p:nvPr/>
+        </p:nvSpPr>
+        <p:spPr>
+          <a:xfrm>
+            <a:off x="5349240" y="2240280"/>
+            <a:ext cx="6522415" cy="4206240"/>
           </a:xfrm>
           <a:prstGeom prst="rect">
             <a:avLst/>
@@ -18620,17 +19395,13 @@
                 <a:ea typeface="Times New Roman" pitchFamily="34" charset="-122"/>
                 <a:cs typeface="Times New Roman" pitchFamily="34" charset="-120"/>
               </a:rPr>
-              <a:t>Factors:</a:t>
-            </a:r>
-            <a:endParaRPr lang="en-US" sz="4000" dirty="0"/>
-          </a:p>
-          <a:p>
-            <a:pPr algn="l" marL="342900" indent="-342900">
+              <a:t>Immigration and pro-natal policies: </a:t>
+            </a:r>
+            <a:pPr algn="l" indent="0" marL="0">
               <a:spcAft>
                 <a:spcPts val="800"/>
               </a:spcAft>
-              <a:buSzPct val="100000"/>
-              <a:buChar char="•"/>
+              <a:buNone/>
             </a:pPr>
             <a:r>
               <a:rPr lang="en-US" sz="4000" dirty="0">
@@ -18641,49 +19412,7 @@
                 <a:ea typeface="Times New Roman" pitchFamily="34" charset="-122"/>
                 <a:cs typeface="Times New Roman" pitchFamily="34" charset="-120"/>
               </a:rPr>
-              <a:t>The amount of land, water and minerals.</a:t>
-            </a:r>
-            <a:endParaRPr lang="en-US" sz="4000" dirty="0"/>
-          </a:p>
-          <a:p>
-            <a:pPr algn="l" marL="342900" indent="-342900">
-              <a:spcAft>
-                <a:spcPts val="800"/>
-              </a:spcAft>
-              <a:buSzPct val="100000"/>
-              <a:buChar char="•"/>
-            </a:pPr>
-            <a:r>
-              <a:rPr lang="en-US" sz="4000" dirty="0">
-                <a:solidFill>
-                  <a:srgbClr val="111111"/>
-                </a:solidFill>
-                <a:latin typeface="Times New Roman" pitchFamily="34" charset="0"/>
-                <a:ea typeface="Times New Roman" pitchFamily="34" charset="-122"/>
-                <a:cs typeface="Times New Roman" pitchFamily="34" charset="-120"/>
-              </a:rPr>
-              <a:t>Technology: irrigation and tractors raise it compared with the hoe.</a:t>
-            </a:r>
-            <a:endParaRPr lang="en-US" sz="4000" dirty="0"/>
-          </a:p>
-          <a:p>
-            <a:pPr algn="l" marL="342900" indent="-342900">
-              <a:spcAft>
-                <a:spcPts val="800"/>
-              </a:spcAft>
-              <a:buSzPct val="100000"/>
-              <a:buChar char="•"/>
-            </a:pPr>
-            <a:r>
-              <a:rPr lang="en-US" sz="4000" dirty="0">
-                <a:solidFill>
-                  <a:srgbClr val="111111"/>
-                </a:solidFill>
-                <a:latin typeface="Times New Roman" pitchFamily="34" charset="0"/>
-                <a:ea typeface="Times New Roman" pitchFamily="34" charset="-122"/>
-                <a:cs typeface="Times New Roman" pitchFamily="34" charset="-120"/>
-              </a:rPr>
-              <a:t>Lifestyles: high consumption per person, as in the USA, lowers it.</a:t>
+              <a:t>The immigration of skilled workers fills labour shortages. Pro-natal policies encourage families to have more children.</a:t>
             </a:r>
             <a:endParaRPr lang="en-US" sz="4000" dirty="0"/>
           </a:p>
@@ -19079,7 +19808,7 @@
                 <a:ea typeface="Times New Roman" pitchFamily="34" charset="-122"/>
                 <a:cs typeface="Times New Roman" pitchFamily="34" charset="-120"/>
               </a:rPr>
-              <a:t>4. Carrying Capacity of the Land (continued)</a:t>
+              <a:t>2. Underpopulation</a:t>
             </a:r>
             <a:endParaRPr lang="en-US" sz="3600" dirty="0"/>
           </a:p>
@@ -19093,8 +19822,47 @@
         </p:nvSpPr>
         <p:spPr>
           <a:xfrm>
-            <a:off x="5349240" y="1783080"/>
-            <a:ext cx="6522415" cy="4663440"/>
+            <a:off x="5349240" y="1737360"/>
+            <a:ext cx="6522415" cy="457200"/>
+          </a:xfrm>
+          <a:prstGeom prst="rect">
+            <a:avLst/>
+          </a:prstGeom>
+          <a:noFill/>
+          <a:ln/>
+        </p:spPr>
+        <p:txBody>
+          <a:bodyPr wrap="square" lIns="0" tIns="0" rIns="0" bIns="0" rtlCol="0" anchor="ctr"/>
+          <a:lstStyle/>
+          <a:p>
+            <a:pPr algn="l" indent="0" marL="0">
+              <a:buNone/>
+            </a:pPr>
+            <a:r>
+              <a:rPr lang="en-US" sz="3200" b="1" dirty="0">
+                <a:solidFill>
+                  <a:srgbClr val="990011"/>
+                </a:solidFill>
+                <a:latin typeface="Times New Roman" pitchFamily="34" charset="0"/>
+                <a:ea typeface="Times New Roman" pitchFamily="34" charset="-122"/>
+                <a:cs typeface="Times New Roman" pitchFamily="34" charset="-120"/>
+              </a:rPr>
+              <a:t>B) Consequences and Solutions</a:t>
+            </a:r>
+            <a:endParaRPr lang="en-US" sz="3200" dirty="0"/>
+          </a:p>
+        </p:txBody>
+      </p:sp>
+      <p:sp>
+        <p:nvSpPr>
+          <p:cNvPr id="6" name="Text 3"/>
+          <p:cNvSpPr/>
+          <p:nvPr/>
+        </p:nvSpPr>
+        <p:spPr>
+          <a:xfrm>
+            <a:off x="5349240" y="2240280"/>
+            <a:ext cx="6522415" cy="4206240"/>
           </a:xfrm>
           <a:prstGeom prst="rect">
             <a:avLst/>
@@ -19121,7 +19889,7 @@
                 <a:ea typeface="Times New Roman" pitchFamily="34" charset="-122"/>
                 <a:cs typeface="Times New Roman" pitchFamily="34" charset="-120"/>
               </a:rPr>
-              <a:t>If exceeded: </a:t>
+              <a:t>Machines and automation: </a:t>
             </a:r>
             <a:pPr algn="l" indent="0" marL="0">
               <a:spcAft>
@@ -19138,7 +19906,7 @@
                 <a:ea typeface="Times New Roman" pitchFamily="34" charset="-122"/>
                 <a:cs typeface="Times New Roman" pitchFamily="34" charset="-120"/>
               </a:rPr>
-              <a:t>Famine, disease, conflict, desertification and forced migration may follow.</a:t>
+              <a:t>Machines and robots replace missing workers. They allow a small population to use its resources fully.</a:t>
             </a:r>
             <a:endParaRPr lang="en-US" sz="4000" dirty="0"/>
           </a:p>
@@ -19291,7 +20059,7 @@
                 <a:ea typeface="Times New Roman" pitchFamily="34" charset="-122"/>
                 <a:cs typeface="Times New Roman" pitchFamily="34" charset="-120"/>
               </a:rPr>
-              <a:t>4. Carrying Capacity of the Land</a:t>
+              <a:t>3. Optimum Population</a:t>
             </a:r>
             <a:endParaRPr lang="en-US" sz="3600" dirty="0"/>
           </a:p>
@@ -19306,7 +20074,7 @@
         <p:spPr>
           <a:xfrm>
             <a:off x="365760" y="1783080"/>
-            <a:ext cx="4846320" cy="4617720"/>
+            <a:ext cx="6035040" cy="4617720"/>
           </a:xfrm>
           <a:prstGeom prst="rect">
             <a:avLst/>
@@ -19325,7 +20093,7 @@
               <a:buNone/>
             </a:pPr>
             <a:r>
-              <a:rPr lang="en-US" sz="3600" b="1" dirty="0">
+              <a:rPr lang="en-US" sz="3200" i="1" dirty="0">
                 <a:solidFill>
                   <a:srgbClr val="111111"/>
                 </a:solidFill>
@@ -19333,8 +20101,11 @@
                 <a:ea typeface="Times New Roman" pitchFamily="34" charset="-122"/>
                 <a:cs typeface="Times New Roman" pitchFamily="34" charset="-120"/>
               </a:rPr>
-              <a:t>Solutions: </a:t>
-            </a:r>
+              <a:t>The optimum population is explained as follows:</a:t>
+            </a:r>
+            <a:endParaRPr lang="en-US" sz="3200" dirty="0"/>
+          </a:p>
+          <a:p>
             <a:pPr algn="l" indent="0" marL="0">
               <a:spcAft>
                 <a:spcPts val="800"/>
@@ -19342,7 +20113,7 @@
               <a:buNone/>
             </a:pPr>
             <a:r>
-              <a:rPr lang="en-US" sz="3600" dirty="0">
+              <a:rPr lang="en-US" sz="3200" b="1" dirty="0">
                 <a:solidFill>
                   <a:srgbClr val="111111"/>
                 </a:solidFill>
@@ -19350,15 +20121,32 @@
                 <a:ea typeface="Times New Roman" pitchFamily="34" charset="-122"/>
                 <a:cs typeface="Times New Roman" pitchFamily="34" charset="-120"/>
               </a:rPr>
-              <a:t>Irrigation, renewable energy, recycling, sustainable farming and control of population growth.</a:t>
-            </a:r>
-            <a:endParaRPr lang="en-US" sz="3600" dirty="0"/>
+              <a:t>Meaning: </a:t>
+            </a:r>
+            <a:pPr algn="l" indent="0" marL="0">
+              <a:spcAft>
+                <a:spcPts val="800"/>
+              </a:spcAft>
+              <a:buNone/>
+            </a:pPr>
+            <a:r>
+              <a:rPr lang="en-US" sz="3200" dirty="0">
+                <a:solidFill>
+                  <a:srgbClr val="111111"/>
+                </a:solidFill>
+                <a:latin typeface="Times New Roman" pitchFamily="34" charset="0"/>
+                <a:ea typeface="Times New Roman" pitchFamily="34" charset="-122"/>
+                <a:cs typeface="Times New Roman" pitchFamily="34" charset="-120"/>
+              </a:rPr>
+              <a:t>The optimum population is the number of people that gives the highest output and standard of living per person. It is a balance between population, resources and technology.</a:t>
+            </a:r>
+            <a:endParaRPr lang="en-US" sz="3200" dirty="0"/>
           </a:p>
         </p:txBody>
       </p:sp>
       <p:pic>
         <p:nvPicPr>
-          <p:cNvPr id="5" name="Image 0" descr="/home/claude/f4/img/v2/f2t_pivot.jpg">    </p:cNvPr>
+          <p:cNvPr id="5" name="Image 0" descr="/home/claude/f4/img/v2/optimum_big.png">    </p:cNvPr>
           <p:cNvPicPr>
             <a:picLocks noChangeAspect="1"/>
           </p:cNvPicPr>
@@ -19372,8 +20160,8 @@
         </p:blipFill>
         <p:spPr>
           <a:xfrm>
-            <a:off x="5349240" y="2071212"/>
-            <a:ext cx="6659575" cy="3693983"/>
+            <a:off x="6537960" y="2721454"/>
+            <a:ext cx="5470855" cy="2393499"/>
           </a:xfrm>
           <a:prstGeom prst="rect">
             <a:avLst/>
@@ -19388,8 +20176,8 @@
         </p:nvSpPr>
         <p:spPr>
           <a:xfrm>
-            <a:off x="5349240" y="6089904"/>
-            <a:ext cx="6659575" cy="347472"/>
+            <a:off x="6537960" y="6089904"/>
+            <a:ext cx="5470855" cy="347472"/>
           </a:xfrm>
           <a:prstGeom prst="rect">
             <a:avLst/>
@@ -19413,7 +20201,7 @@
                 <a:ea typeface="Times New Roman" pitchFamily="34" charset="-122"/>
                 <a:cs typeface="Times New Roman" pitchFamily="34" charset="-120"/>
               </a:rPr>
-              <a:t>Illustration: irrigation</a:t>
+              <a:t>Illustration: the optimum population</a:t>
             </a:r>
             <a:endParaRPr lang="en-US" sz="1600" dirty="0"/>
           </a:p>
@@ -19525,7 +20313,7 @@
                 <a:ea typeface="Calibri" pitchFamily="34" charset="-122"/>
                 <a:cs typeface="Calibri" pitchFamily="34" charset="-120"/>
               </a:rPr>
-              <a:t>FORMATIVE EVALUATION</a:t>
+              <a:t>BOARD SUMMARY</a:t>
             </a:r>
             <a:endParaRPr lang="en-US" sz="1400" dirty="0"/>
           </a:p>
@@ -19590,7 +20378,7 @@
                 <a:ea typeface="Times New Roman" pitchFamily="34" charset="-122"/>
                 <a:cs typeface="Times New Roman" pitchFamily="34" charset="-120"/>
               </a:rPr>
-              <a:t>Evaluation 1</a:t>
+              <a:t>3. Optimum Population</a:t>
             </a:r>
             <a:endParaRPr lang="en-US" sz="3600" dirty="0"/>
           </a:p>
@@ -19624,7 +20412,7 @@
               <a:buNone/>
             </a:pPr>
             <a:r>
-              <a:rPr lang="en-US" sz="4000" dirty="0">
+              <a:rPr lang="en-US" sz="4000" b="1" dirty="0">
                 <a:solidFill>
                   <a:srgbClr val="111111"/>
                 </a:solidFill>
@@ -19632,7 +20420,24 @@
                 <a:ea typeface="Times New Roman" pitchFamily="34" charset="-122"/>
                 <a:cs typeface="Times New Roman" pitchFamily="34" charset="-120"/>
               </a:rPr>
-              <a:t>Give two causes and two solutions of overpopulation.</a:t>
+              <a:t>Indicators: </a:t>
+            </a:r>
+            <a:pPr algn="l" indent="0" marL="0">
+              <a:spcAft>
+                <a:spcPts val="800"/>
+              </a:spcAft>
+              <a:buNone/>
+            </a:pPr>
+            <a:r>
+              <a:rPr lang="en-US" sz="4000" dirty="0">
+                <a:solidFill>
+                  <a:srgbClr val="111111"/>
+                </a:solidFill>
+                <a:latin typeface="Times New Roman" pitchFamily="34" charset="0"/>
+                <a:ea typeface="Times New Roman" pitchFamily="34" charset="-122"/>
+                <a:cs typeface="Times New Roman" pitchFamily="34" charset="-120"/>
+              </a:rPr>
+              <a:t>The indicators are a high income per person, full employment and good social services. Resources are used in a sustainable way.</a:t>
             </a:r>
             <a:endParaRPr lang="en-US" sz="4000" dirty="0"/>
           </a:p>
@@ -19744,7 +20549,7 @@
                 <a:ea typeface="Calibri" pitchFamily="34" charset="-122"/>
                 <a:cs typeface="Calibri" pitchFamily="34" charset="-120"/>
               </a:rPr>
-              <a:t>FORMATIVE EVALUATION</a:t>
+              <a:t>BOARD SUMMARY</a:t>
             </a:r>
             <a:endParaRPr lang="en-US" sz="1400" dirty="0"/>
           </a:p>
@@ -19809,7 +20614,7 @@
                 <a:ea typeface="Times New Roman" pitchFamily="34" charset="-122"/>
                 <a:cs typeface="Times New Roman" pitchFamily="34" charset="-120"/>
               </a:rPr>
-              <a:t>Expected Answer</a:t>
+              <a:t>3. Optimum Population</a:t>
             </a:r>
             <a:endParaRPr lang="en-US" sz="3600" dirty="0"/>
           </a:p>
@@ -19843,7 +20648,7 @@
               <a:buNone/>
             </a:pPr>
             <a:r>
-              <a:rPr lang="en-US" sz="4000" dirty="0">
+              <a:rPr lang="en-US" sz="4000" b="1" dirty="0">
                 <a:solidFill>
                   <a:srgbClr val="111111"/>
                 </a:solidFill>
@@ -19851,7 +20656,24 @@
                 <a:ea typeface="Times New Roman" pitchFamily="34" charset="-122"/>
                 <a:cs typeface="Times New Roman" pitchFamily="34" charset="-120"/>
               </a:rPr>
-              <a:t>Causes: high births, falling deaths, immigration; solutions: family planning, education of girls, technology, industrial jobs.</a:t>
+              <a:t>Conditions: </a:t>
+            </a:r>
+            <a:pPr algn="l" indent="0" marL="0">
+              <a:spcAft>
+                <a:spcPts val="800"/>
+              </a:spcAft>
+              <a:buNone/>
+            </a:pPr>
+            <a:r>
+              <a:rPr lang="en-US" sz="4000" dirty="0">
+                <a:solidFill>
+                  <a:srgbClr val="111111"/>
+                </a:solidFill>
+                <a:latin typeface="Times New Roman" pitchFamily="34" charset="0"/>
+                <a:ea typeface="Times New Roman" pitchFamily="34" charset="-122"/>
+                <a:cs typeface="Times New Roman" pitchFamily="34" charset="-120"/>
+              </a:rPr>
+              <a:t>The optimum needs balanced births and deaths, controlled immigration and advanced technology. Resources must also be well managed.</a:t>
             </a:r>
             <a:endParaRPr lang="en-US" sz="4000" dirty="0"/>
           </a:p>
@@ -19963,7 +20785,7 @@
                 <a:ea typeface="Calibri" pitchFamily="34" charset="-122"/>
                 <a:cs typeface="Calibri" pitchFamily="34" charset="-120"/>
               </a:rPr>
-              <a:t>FORMATIVE EVALUATION</a:t>
+              <a:t>BOARD SUMMARY</a:t>
             </a:r>
             <a:endParaRPr lang="en-US" sz="1400" dirty="0"/>
           </a:p>
@@ -20028,7 +20850,7 @@
                 <a:ea typeface="Times New Roman" pitchFamily="34" charset="-122"/>
                 <a:cs typeface="Times New Roman" pitchFamily="34" charset="-120"/>
               </a:rPr>
-              <a:t>Evaluation 2</a:t>
+              <a:t>3. Optimum Population</a:t>
             </a:r>
             <a:endParaRPr lang="en-US" sz="3600" dirty="0"/>
           </a:p>
@@ -20062,7 +20884,7 @@
               <a:buNone/>
             </a:pPr>
             <a:r>
-              <a:rPr lang="en-US" sz="4000" dirty="0">
+              <a:rPr lang="en-US" sz="4000" b="1" dirty="0">
                 <a:solidFill>
                   <a:srgbClr val="111111"/>
                 </a:solidFill>
@@ -20070,7 +20892,24 @@
                 <a:ea typeface="Times New Roman" pitchFamily="34" charset="-122"/>
                 <a:cs typeface="Times New Roman" pitchFamily="34" charset="-120"/>
               </a:rPr>
-              <a:t>How can a new irrigation system change the carrying capacity and the optimum population?</a:t>
+              <a:t>A moving target: </a:t>
+            </a:r>
+            <a:pPr algn="l" indent="0" marL="0">
+              <a:spcAft>
+                <a:spcPts val="800"/>
+              </a:spcAft>
+              <a:buNone/>
+            </a:pPr>
+            <a:r>
+              <a:rPr lang="en-US" sz="4000" dirty="0">
+                <a:solidFill>
+                  <a:srgbClr val="111111"/>
+                </a:solidFill>
+                <a:latin typeface="Times New Roman" pitchFamily="34" charset="0"/>
+                <a:ea typeface="Times New Roman" pitchFamily="34" charset="-122"/>
+                <a:cs typeface="Times New Roman" pitchFamily="34" charset="-120"/>
+              </a:rPr>
+              <a:t>The optimum changes when technology or resources change. It therefore needs continuous planning.</a:t>
             </a:r>
             <a:endParaRPr lang="en-US" sz="4000" dirty="0"/>
           </a:p>
@@ -20182,15 +21021,135 @@
                 <a:ea typeface="Calibri" pitchFamily="34" charset="-122"/>
                 <a:cs typeface="Calibri" pitchFamily="34" charset="-120"/>
               </a:rPr>
-              <a:t>FORMATIVE EVALUATION</a:t>
+              <a:t>BOARD SUMMARY</a:t>
             </a:r>
             <a:endParaRPr lang="en-US" sz="1400" dirty="0"/>
+          </a:p>
+        </p:txBody>
+      </p:sp>
+      <p:sp>
+        <p:nvSpPr>
+          <p:cNvPr id="3" name="Text 1"/>
+          <p:cNvSpPr/>
+          <p:nvPr/>
+        </p:nvSpPr>
+        <p:spPr>
+          <a:xfrm>
+            <a:off x="365760" y="1005840"/>
+            <a:ext cx="11460175" cy="731520"/>
+          </a:xfrm>
+          <a:prstGeom prst="rect">
+            <a:avLst/>
+          </a:prstGeom>
+          <a:noFill/>
+          <a:ln/>
+        </p:spPr>
+        <p:txBody>
+          <a:bodyPr wrap="square" lIns="0" tIns="0" rIns="0" bIns="0" rtlCol="0" anchor="ctr">
+            <a:normAutofit/>
+          </a:bodyPr>
+          <a:lstStyle/>
+          <a:p>
+            <a:pPr algn="ctr" indent="0" marL="0">
+              <a:buNone/>
+            </a:pPr>
+            <a:r>
+              <a:rPr lang="en-US" sz="3600" b="1" dirty="0">
+                <a:solidFill>
+                  <a:srgbClr val="990011"/>
+                </a:solidFill>
+                <a:latin typeface="Times New Roman" pitchFamily="34" charset="0"/>
+                <a:ea typeface="Times New Roman" pitchFamily="34" charset="-122"/>
+                <a:cs typeface="Times New Roman" pitchFamily="34" charset="-120"/>
+              </a:rPr>
+              <a:t>4. Carrying Capacity of the Land</a:t>
+            </a:r>
+            <a:endParaRPr lang="en-US" sz="3600" dirty="0"/>
+          </a:p>
+        </p:txBody>
+      </p:sp>
+      <p:sp>
+        <p:nvSpPr>
+          <p:cNvPr id="4" name="Text 2"/>
+          <p:cNvSpPr/>
+          <p:nvPr/>
+        </p:nvSpPr>
+        <p:spPr>
+          <a:xfrm>
+            <a:off x="365760" y="1783080"/>
+            <a:ext cx="6035040" cy="4617720"/>
+          </a:xfrm>
+          <a:prstGeom prst="rect">
+            <a:avLst/>
+          </a:prstGeom>
+          <a:noFill/>
+          <a:ln/>
+        </p:spPr>
+        <p:txBody>
+          <a:bodyPr wrap="square" lIns="0" tIns="0" rIns="0" bIns="0" rtlCol="0" anchor="t"/>
+          <a:lstStyle/>
+          <a:p>
+            <a:pPr algn="l" indent="0" marL="0">
+              <a:spcAft>
+                <a:spcPts val="800"/>
+              </a:spcAft>
+              <a:buNone/>
+            </a:pPr>
+            <a:r>
+              <a:rPr lang="en-US" sz="3000" i="1" dirty="0">
+                <a:solidFill>
+                  <a:srgbClr val="111111"/>
+                </a:solidFill>
+                <a:latin typeface="Times New Roman" pitchFamily="34" charset="0"/>
+                <a:ea typeface="Times New Roman" pitchFamily="34" charset="-122"/>
+                <a:cs typeface="Times New Roman" pitchFamily="34" charset="-120"/>
+              </a:rPr>
+              <a:t>The carrying capacity of the land is explained as follows:</a:t>
+            </a:r>
+            <a:endParaRPr lang="en-US" sz="3000" dirty="0"/>
+          </a:p>
+          <a:p>
+            <a:pPr algn="l" indent="0" marL="0">
+              <a:spcAft>
+                <a:spcPts val="800"/>
+              </a:spcAft>
+              <a:buNone/>
+            </a:pPr>
+            <a:r>
+              <a:rPr lang="en-US" sz="3000" b="1" dirty="0">
+                <a:solidFill>
+                  <a:srgbClr val="111111"/>
+                </a:solidFill>
+                <a:latin typeface="Times New Roman" pitchFamily="34" charset="0"/>
+                <a:ea typeface="Times New Roman" pitchFamily="34" charset="-122"/>
+                <a:cs typeface="Times New Roman" pitchFamily="34" charset="-120"/>
+              </a:rPr>
+              <a:t>Meaning and warning signs: </a:t>
+            </a:r>
+            <a:pPr algn="l" indent="0" marL="0">
+              <a:spcAft>
+                <a:spcPts val="800"/>
+              </a:spcAft>
+              <a:buNone/>
+            </a:pPr>
+            <a:r>
+              <a:rPr lang="en-US" sz="3000" dirty="0">
+                <a:solidFill>
+                  <a:srgbClr val="111111"/>
+                </a:solidFill>
+                <a:latin typeface="Times New Roman" pitchFamily="34" charset="0"/>
+                <a:ea typeface="Times New Roman" pitchFamily="34" charset="-122"/>
+                <a:cs typeface="Times New Roman" pitchFamily="34" charset="-120"/>
+              </a:rPr>
+              <a:t>It is the largest population that an area can support without permanent damage. Falling water tables, soil erosion, deforestation and loss of biodiversity show that it is being exceeded.</a:t>
+            </a:r>
+            <a:endParaRPr lang="en-US" sz="3000" dirty="0"/>
           </a:p>
         </p:txBody>
       </p:sp>
       <p:pic>
         <p:nvPicPr>
-          <p:cNvPr id="3" name="Image 0" descr="/home/claude/f4/img/minesec_sheet.png">    </p:cNvPr>
+          <p:cNvPr id="5" name="Image 0" descr="/home/claude/f4/img/v2/f2t_cracked_soil.jpg">    </p:cNvPr>
           <p:cNvPicPr>
             <a:picLocks noChangeAspect="1"/>
           </p:cNvPicPr>
@@ -20204,8 +21163,8 @@
         </p:blipFill>
         <p:spPr>
           <a:xfrm>
-            <a:off x="0" y="658368"/>
-            <a:ext cx="5120640" cy="5833872"/>
+            <a:off x="6537960" y="2400897"/>
+            <a:ext cx="5470855" cy="3034615"/>
           </a:xfrm>
           <a:prstGeom prst="rect">
             <a:avLst/>
@@ -20214,14 +21173,14 @@
       </p:pic>
       <p:sp>
         <p:nvSpPr>
-          <p:cNvPr id="4" name="Text 1"/>
+          <p:cNvPr id="6" name="Text 3"/>
           <p:cNvSpPr/>
           <p:nvPr/>
         </p:nvSpPr>
         <p:spPr>
           <a:xfrm>
-            <a:off x="5349240" y="1005840"/>
-            <a:ext cx="6522415" cy="731520"/>
+            <a:off x="6537960" y="6089904"/>
+            <a:ext cx="5470855" cy="347472"/>
           </a:xfrm>
           <a:prstGeom prst="rect">
             <a:avLst/>
@@ -20230,68 +21189,24 @@
           <a:ln/>
         </p:spPr>
         <p:txBody>
-          <a:bodyPr wrap="square" lIns="0" tIns="0" rIns="0" bIns="0" rtlCol="0" anchor="ctr">
-            <a:normAutofit/>
-          </a:bodyPr>
+          <a:bodyPr wrap="square" lIns="0" tIns="0" rIns="0" bIns="0" rtlCol="0" anchor="ctr"/>
           <a:lstStyle/>
           <a:p>
             <a:pPr algn="ctr" indent="0" marL="0">
               <a:buNone/>
             </a:pPr>
             <a:r>
-              <a:rPr lang="en-US" sz="3600" b="1" dirty="0">
-                <a:solidFill>
-                  <a:srgbClr val="990011"/>
+              <a:rPr lang="en-US" sz="1600" i="1" dirty="0">
+                <a:solidFill>
+                  <a:srgbClr val="555555"/>
                 </a:solidFill>
                 <a:latin typeface="Times New Roman" pitchFamily="34" charset="0"/>
                 <a:ea typeface="Times New Roman" pitchFamily="34" charset="-122"/>
                 <a:cs typeface="Times New Roman" pitchFamily="34" charset="-120"/>
               </a:rPr>
-              <a:t>Expected Answer</a:t>
-            </a:r>
-            <a:endParaRPr lang="en-US" sz="3600" dirty="0"/>
-          </a:p>
-        </p:txBody>
-      </p:sp>
-      <p:sp>
-        <p:nvSpPr>
-          <p:cNvPr id="5" name="Text 2"/>
-          <p:cNvSpPr/>
-          <p:nvPr/>
-        </p:nvSpPr>
-        <p:spPr>
-          <a:xfrm>
-            <a:off x="5349240" y="1783080"/>
-            <a:ext cx="6522415" cy="4663440"/>
-          </a:xfrm>
-          <a:prstGeom prst="rect">
-            <a:avLst/>
-          </a:prstGeom>
-          <a:noFill/>
-          <a:ln/>
-        </p:spPr>
-        <p:txBody>
-          <a:bodyPr wrap="square" lIns="0" tIns="0" rIns="0" bIns="0" rtlCol="0" anchor="t"/>
-          <a:lstStyle/>
-          <a:p>
-            <a:pPr algn="l" indent="0" marL="0">
-              <a:spcAft>
-                <a:spcPts val="800"/>
-              </a:spcAft>
-              <a:buNone/>
-            </a:pPr>
-            <a:r>
-              <a:rPr lang="en-US" sz="4000" dirty="0">
-                <a:solidFill>
-                  <a:srgbClr val="111111"/>
-                </a:solidFill>
-                <a:latin typeface="Times New Roman" pitchFamily="34" charset="0"/>
-                <a:ea typeface="Times New Roman" pitchFamily="34" charset="-122"/>
-                <a:cs typeface="Times New Roman" pitchFamily="34" charset="-120"/>
-              </a:rPr>
-              <a:t>It raises both, because the same land can feed more people at a higher standard of living.</a:t>
-            </a:r>
-            <a:endParaRPr lang="en-US" sz="4000" dirty="0"/>
+              <a:t>Illustration: dry, cracked soil</a:t>
+            </a:r>
+            <a:endParaRPr lang="en-US" sz="1600" dirty="0"/>
           </a:p>
         </p:txBody>
       </p:sp>
@@ -20401,7 +21316,7 @@
                 <a:ea typeface="Calibri" pitchFamily="34" charset="-122"/>
                 <a:cs typeface="Calibri" pitchFamily="34" charset="-120"/>
               </a:rPr>
-              <a:t>REMEDIATION</a:t>
+              <a:t>BOARD SUMMARY</a:t>
             </a:r>
             <a:endParaRPr lang="en-US" sz="1400" dirty="0"/>
           </a:p>
@@ -20424,7 +21339,7 @@
         <p:spPr>
           <a:xfrm>
             <a:off x="0" y="658368"/>
-            <a:ext cx="1463040" cy="5833872"/>
+            <a:ext cx="2468880" cy="5833872"/>
           </a:xfrm>
           <a:prstGeom prst="rect">
             <a:avLst/>
@@ -20439,8 +21354,8 @@
         </p:nvSpPr>
         <p:spPr>
           <a:xfrm>
-            <a:off x="1691640" y="1005840"/>
-            <a:ext cx="10180015" cy="731520"/>
+            <a:off x="2697480" y="1005840"/>
+            <a:ext cx="9174175" cy="731520"/>
           </a:xfrm>
           <a:prstGeom prst="rect">
             <a:avLst/>
@@ -20466,7 +21381,7 @@
                 <a:ea typeface="Times New Roman" pitchFamily="34" charset="-122"/>
                 <a:cs typeface="Times New Roman" pitchFamily="34" charset="-120"/>
               </a:rPr>
-              <a:t>Remediation</a:t>
+              <a:t>4. Carrying Capacity of the Land</a:t>
             </a:r>
             <a:endParaRPr lang="en-US" sz="3600" dirty="0"/>
           </a:p>
@@ -20480,8 +21395,8 @@
         </p:nvSpPr>
         <p:spPr>
           <a:xfrm>
-            <a:off x="1691640" y="1783080"/>
-            <a:ext cx="10180015" cy="4663440"/>
+            <a:off x="2697480" y="1783080"/>
+            <a:ext cx="9174175" cy="4663440"/>
           </a:xfrm>
           <a:prstGeom prst="rect">
             <a:avLst/>
@@ -20508,18 +21423,13 @@
                 <a:ea typeface="Times New Roman" pitchFamily="34" charset="-122"/>
                 <a:cs typeface="Times New Roman" pitchFamily="34" charset="-120"/>
               </a:rPr>
-              <a:t>Fill in the blanks:</a:t>
-            </a:r>
-            <a:endParaRPr lang="en-US" sz="4000" dirty="0"/>
-          </a:p>
-          <a:p>
-            <a:pPr algn="l" marL="342900" indent="-342900">
+              <a:t>Factors: </a:t>
+            </a:r>
+            <a:pPr algn="l" indent="0" marL="0">
               <a:spcAft>
                 <a:spcPts val="800"/>
               </a:spcAft>
-              <a:buSzPct val="100000"/>
-              <a:buFont typeface="+mj-lt"/>
-              <a:buAutoNum type="arabicPeriod" startAt="1"/>
+              <a:buNone/>
             </a:pPr>
             <a:r>
               <a:rPr lang="en-US" sz="4000" dirty="0">
@@ -20530,51 +21440,7 @@
                 <a:ea typeface="Times New Roman" pitchFamily="34" charset="-122"/>
                 <a:cs typeface="Times New Roman" pitchFamily="34" charset="-120"/>
               </a:rPr>
-              <a:t>Too few people to use resources is ______.</a:t>
-            </a:r>
-            <a:endParaRPr lang="en-US" sz="4000" dirty="0"/>
-          </a:p>
-          <a:p>
-            <a:pPr algn="l" marL="342900" indent="-342900">
-              <a:spcAft>
-                <a:spcPts val="800"/>
-              </a:spcAft>
-              <a:buSzPct val="100000"/>
-              <a:buFont typeface="+mj-lt"/>
-              <a:buAutoNum type="arabicPeriod" startAt="1"/>
-            </a:pPr>
-            <a:r>
-              <a:rPr lang="en-US" sz="4000" dirty="0">
-                <a:solidFill>
-                  <a:srgbClr val="111111"/>
-                </a:solidFill>
-                <a:latin typeface="Times New Roman" pitchFamily="34" charset="0"/>
-                <a:ea typeface="Times New Roman" pitchFamily="34" charset="-122"/>
-                <a:cs typeface="Times New Roman" pitchFamily="34" charset="-120"/>
-              </a:rPr>
-              <a:t>The ideal number of people is the ______ population.</a:t>
-            </a:r>
-            <a:endParaRPr lang="en-US" sz="4000" dirty="0"/>
-          </a:p>
-          <a:p>
-            <a:pPr algn="l" marL="342900" indent="-342900">
-              <a:spcAft>
-                <a:spcPts val="800"/>
-              </a:spcAft>
-              <a:buSzPct val="100000"/>
-              <a:buFont typeface="+mj-lt"/>
-              <a:buAutoNum type="arabicPeriod" startAt="1"/>
-            </a:pPr>
-            <a:r>
-              <a:rPr lang="en-US" sz="4000" dirty="0">
-                <a:solidFill>
-                  <a:srgbClr val="111111"/>
-                </a:solidFill>
-                <a:latin typeface="Times New Roman" pitchFamily="34" charset="0"/>
-                <a:ea typeface="Times New Roman" pitchFamily="34" charset="-122"/>
-                <a:cs typeface="Times New Roman" pitchFamily="34" charset="-120"/>
-              </a:rPr>
-              <a:t>Irrigation ______ the carrying capacity.</a:t>
+              <a:t>It depends on the amount of land, water and minerals and on technology, since irrigation and tractors raise it compared with the hoe. It also depends on lifestyles, because high consumption per person, as in the USA, lowers it.</a:t>
             </a:r>
             <a:endParaRPr lang="en-US" sz="4000" dirty="0"/>
           </a:p>
@@ -20686,7 +21552,7 @@
                 <a:ea typeface="Calibri" pitchFamily="34" charset="-122"/>
                 <a:cs typeface="Calibri" pitchFamily="34" charset="-120"/>
               </a:rPr>
-              <a:t>HOMEWORK</a:t>
+              <a:t>BOARD SUMMARY</a:t>
             </a:r>
             <a:endParaRPr lang="en-US" sz="1400" dirty="0"/>
           </a:p>
@@ -20751,7 +21617,7 @@
                 <a:ea typeface="Times New Roman" pitchFamily="34" charset="-122"/>
                 <a:cs typeface="Times New Roman" pitchFamily="34" charset="-120"/>
               </a:rPr>
-              <a:t>Homework</a:t>
+              <a:t>4. Carrying Capacity of the Land</a:t>
             </a:r>
             <a:endParaRPr lang="en-US" sz="3600" dirty="0"/>
           </a:p>
@@ -20785,7 +21651,7 @@
               <a:buNone/>
             </a:pPr>
             <a:r>
-              <a:rPr lang="en-US" sz="4000" dirty="0">
+              <a:rPr lang="en-US" sz="4000" b="1" dirty="0">
                 <a:solidFill>
                   <a:srgbClr val="111111"/>
                 </a:solidFill>
@@ -20793,7 +21659,24 @@
                 <a:ea typeface="Times New Roman" pitchFamily="34" charset="-122"/>
                 <a:cs typeface="Times New Roman" pitchFamily="34" charset="-120"/>
               </a:rPr>
-              <a:t>Give the date of Malthus's essay on population.</a:t>
+              <a:t>Consequences if exceeded: </a:t>
+            </a:r>
+            <a:pPr algn="l" indent="0" marL="0">
+              <a:spcAft>
+                <a:spcPts val="800"/>
+              </a:spcAft>
+              <a:buNone/>
+            </a:pPr>
+            <a:r>
+              <a:rPr lang="en-US" sz="4000" dirty="0">
+                <a:solidFill>
+                  <a:srgbClr val="111111"/>
+                </a:solidFill>
+                <a:latin typeface="Times New Roman" pitchFamily="34" charset="0"/>
+                <a:ea typeface="Times New Roman" pitchFamily="34" charset="-122"/>
+                <a:cs typeface="Times New Roman" pitchFamily="34" charset="-120"/>
+              </a:rPr>
+              <a:t>Famine, disease and conflicts over land and water may follow. Desertification and forced migration are also consequences.</a:t>
             </a:r>
             <a:endParaRPr lang="en-US" sz="4000" dirty="0"/>
           </a:p>
@@ -20905,15 +21788,115 @@
                 <a:ea typeface="Calibri" pitchFamily="34" charset="-122"/>
                 <a:cs typeface="Calibri" pitchFamily="34" charset="-120"/>
               </a:rPr>
-              <a:t>NEXT LESSON</a:t>
+              <a:t>BOARD SUMMARY</a:t>
             </a:r>
             <a:endParaRPr lang="en-US" sz="1400" dirty="0"/>
+          </a:p>
+        </p:txBody>
+      </p:sp>
+      <p:sp>
+        <p:nvSpPr>
+          <p:cNvPr id="3" name="Text 1"/>
+          <p:cNvSpPr/>
+          <p:nvPr/>
+        </p:nvSpPr>
+        <p:spPr>
+          <a:xfrm>
+            <a:off x="365760" y="1005840"/>
+            <a:ext cx="11460175" cy="731520"/>
+          </a:xfrm>
+          <a:prstGeom prst="rect">
+            <a:avLst/>
+          </a:prstGeom>
+          <a:noFill/>
+          <a:ln/>
+        </p:spPr>
+        <p:txBody>
+          <a:bodyPr wrap="square" lIns="0" tIns="0" rIns="0" bIns="0" rtlCol="0" anchor="ctr">
+            <a:normAutofit/>
+          </a:bodyPr>
+          <a:lstStyle/>
+          <a:p>
+            <a:pPr algn="ctr" indent="0" marL="0">
+              <a:buNone/>
+            </a:pPr>
+            <a:r>
+              <a:rPr lang="en-US" sz="3600" b="1" dirty="0">
+                <a:solidFill>
+                  <a:srgbClr val="990011"/>
+                </a:solidFill>
+                <a:latin typeface="Times New Roman" pitchFamily="34" charset="0"/>
+                <a:ea typeface="Times New Roman" pitchFamily="34" charset="-122"/>
+                <a:cs typeface="Times New Roman" pitchFamily="34" charset="-120"/>
+              </a:rPr>
+              <a:t>4. Carrying Capacity of the Land</a:t>
+            </a:r>
+            <a:endParaRPr lang="en-US" sz="3600" dirty="0"/>
+          </a:p>
+        </p:txBody>
+      </p:sp>
+      <p:sp>
+        <p:nvSpPr>
+          <p:cNvPr id="4" name="Text 2"/>
+          <p:cNvSpPr/>
+          <p:nvPr/>
+        </p:nvSpPr>
+        <p:spPr>
+          <a:xfrm>
+            <a:off x="365760" y="1783080"/>
+            <a:ext cx="6035040" cy="4617720"/>
+          </a:xfrm>
+          <a:prstGeom prst="rect">
+            <a:avLst/>
+          </a:prstGeom>
+          <a:noFill/>
+          <a:ln/>
+        </p:spPr>
+        <p:txBody>
+          <a:bodyPr wrap="square" lIns="0" tIns="0" rIns="0" bIns="0" rtlCol="0" anchor="t"/>
+          <a:lstStyle/>
+          <a:p>
+            <a:pPr algn="l" indent="0" marL="0">
+              <a:spcAft>
+                <a:spcPts val="800"/>
+              </a:spcAft>
+              <a:buNone/>
+            </a:pPr>
+            <a:r>
+              <a:rPr lang="en-US" sz="3600" b="1" dirty="0">
+                <a:solidFill>
+                  <a:srgbClr val="111111"/>
+                </a:solidFill>
+                <a:latin typeface="Times New Roman" pitchFamily="34" charset="0"/>
+                <a:ea typeface="Times New Roman" pitchFamily="34" charset="-122"/>
+                <a:cs typeface="Times New Roman" pitchFamily="34" charset="-120"/>
+              </a:rPr>
+              <a:t>Solutions: </a:t>
+            </a:r>
+            <a:pPr algn="l" indent="0" marL="0">
+              <a:spcAft>
+                <a:spcPts val="800"/>
+              </a:spcAft>
+              <a:buNone/>
+            </a:pPr>
+            <a:r>
+              <a:rPr lang="en-US" sz="3600" dirty="0">
+                <a:solidFill>
+                  <a:srgbClr val="111111"/>
+                </a:solidFill>
+                <a:latin typeface="Times New Roman" pitchFamily="34" charset="0"/>
+                <a:ea typeface="Times New Roman" pitchFamily="34" charset="-122"/>
+                <a:cs typeface="Times New Roman" pitchFamily="34" charset="-120"/>
+              </a:rPr>
+              <a:t>Irrigation, sustainable farming, renewable energy and recycling raise the carrying capacity or reduce the pressure on it. Controlling population growth keeps the population below it.</a:t>
+            </a:r>
+            <a:endParaRPr lang="en-US" sz="3600" dirty="0"/>
           </a:p>
         </p:txBody>
       </p:sp>
       <p:pic>
         <p:nvPicPr>
-          <p:cNvPr id="3" name="Image 0" descr="/home/claude/f4/img/minesec_sheet.png">    </p:cNvPr>
+          <p:cNvPr id="5" name="Image 0" descr="/home/claude/f4/img/v2/f2t_pivot.jpg">    </p:cNvPr>
           <p:cNvPicPr>
             <a:picLocks noChangeAspect="1"/>
           </p:cNvPicPr>
@@ -20927,8 +21910,8 @@
         </p:blipFill>
         <p:spPr>
           <a:xfrm>
-            <a:off x="0" y="658368"/>
-            <a:ext cx="5120640" cy="5833872"/>
+            <a:off x="6537960" y="2400897"/>
+            <a:ext cx="5470855" cy="3034615"/>
           </a:xfrm>
           <a:prstGeom prst="rect">
             <a:avLst/>
@@ -20937,14 +21920,14 @@
       </p:pic>
       <p:sp>
         <p:nvSpPr>
-          <p:cNvPr id="4" name="Text 1"/>
+          <p:cNvPr id="6" name="Text 3"/>
           <p:cNvSpPr/>
           <p:nvPr/>
         </p:nvSpPr>
         <p:spPr>
           <a:xfrm>
-            <a:off x="5349240" y="1005840"/>
-            <a:ext cx="6522415" cy="731520"/>
+            <a:off x="6537960" y="6089904"/>
+            <a:ext cx="5470855" cy="347472"/>
           </a:xfrm>
           <a:prstGeom prst="rect">
             <a:avLst/>
@@ -20953,88 +21936,24 @@
           <a:ln/>
         </p:spPr>
         <p:txBody>
-          <a:bodyPr wrap="square" lIns="0" tIns="0" rIns="0" bIns="0" rtlCol="0" anchor="ctr">
-            <a:normAutofit/>
-          </a:bodyPr>
+          <a:bodyPr wrap="square" lIns="0" tIns="0" rIns="0" bIns="0" rtlCol="0" anchor="ctr"/>
           <a:lstStyle/>
           <a:p>
             <a:pPr algn="ctr" indent="0" marL="0">
               <a:buNone/>
             </a:pPr>
             <a:r>
-              <a:rPr lang="en-US" sz="3600" b="1" dirty="0">
-                <a:solidFill>
-                  <a:srgbClr val="990011"/>
+              <a:rPr lang="en-US" sz="1600" i="1" dirty="0">
+                <a:solidFill>
+                  <a:srgbClr val="555555"/>
                 </a:solidFill>
                 <a:latin typeface="Times New Roman" pitchFamily="34" charset="0"/>
                 <a:ea typeface="Times New Roman" pitchFamily="34" charset="-122"/>
                 <a:cs typeface="Times New Roman" pitchFamily="34" charset="-120"/>
               </a:rPr>
-              <a:t>Next Lesson</a:t>
-            </a:r>
-            <a:endParaRPr lang="en-US" sz="3600" dirty="0"/>
-          </a:p>
-        </p:txBody>
-      </p:sp>
-      <p:sp>
-        <p:nvSpPr>
-          <p:cNvPr id="5" name="Text 2"/>
-          <p:cNvSpPr/>
-          <p:nvPr/>
-        </p:nvSpPr>
-        <p:spPr>
-          <a:xfrm>
-            <a:off x="5349240" y="1783080"/>
-            <a:ext cx="6522415" cy="4663440"/>
-          </a:xfrm>
-          <a:prstGeom prst="rect">
-            <a:avLst/>
-          </a:prstGeom>
-          <a:noFill/>
-          <a:ln/>
-        </p:spPr>
-        <p:txBody>
-          <a:bodyPr wrap="square" lIns="0" tIns="0" rIns="0" bIns="0" rtlCol="0" anchor="ctr"/>
-          <a:lstStyle/>
-          <a:p>
-            <a:pPr algn="ctr" indent="0" marL="0">
-              <a:spcAft>
-                <a:spcPts val="800"/>
-              </a:spcAft>
-              <a:buNone/>
-            </a:pPr>
-            <a:r>
-              <a:rPr lang="en-US" sz="4000" b="1" dirty="0">
-                <a:solidFill>
-                  <a:srgbClr val="111111"/>
-                </a:solidFill>
-                <a:latin typeface="Times New Roman" pitchFamily="34" charset="0"/>
-                <a:ea typeface="Times New Roman" pitchFamily="34" charset="-122"/>
-                <a:cs typeface="Times New Roman" pitchFamily="34" charset="-120"/>
-              </a:rPr>
-              <a:t>Our next lesson will be on:</a:t>
-            </a:r>
-            <a:endParaRPr lang="en-US" sz="4000" dirty="0"/>
-          </a:p>
-          <a:p>
-            <a:pPr algn="ctr" indent="0" marL="0">
-              <a:spcAft>
-                <a:spcPts val="800"/>
-              </a:spcAft>
-              <a:buNone/>
-            </a:pPr>
-            <a:r>
-              <a:rPr lang="en-US" sz="4000" b="1" dirty="0">
-                <a:solidFill>
-                  <a:srgbClr val="990011"/>
-                </a:solidFill>
-                <a:latin typeface="Times New Roman" pitchFamily="34" charset="0"/>
-                <a:ea typeface="Times New Roman" pitchFamily="34" charset="-122"/>
-                <a:cs typeface="Times New Roman" pitchFamily="34" charset="-120"/>
-              </a:rPr>
-              <a:t>Lesson 18: Theories of Population and Resources: Malthus and Boserup</a:t>
-            </a:r>
-            <a:endParaRPr lang="en-US" sz="4000" dirty="0"/>
+              <a:t>Illustration: irrigation</a:t>
+            </a:r>
+            <a:endParaRPr lang="en-US" sz="1600" dirty="0"/>
           </a:p>
         </p:txBody>
       </p:sp>
@@ -21144,22 +22063,46 @@
                 <a:ea typeface="Calibri" pitchFamily="34" charset="-122"/>
                 <a:cs typeface="Calibri" pitchFamily="34" charset="-120"/>
               </a:rPr>
-              <a:t>BILINGUAL GAME</a:t>
+              <a:t>FORMATIVE EVALUATION</a:t>
             </a:r>
             <a:endParaRPr lang="en-US" sz="1400" dirty="0"/>
           </a:p>
         </p:txBody>
       </p:sp>
-      <p:sp>
-        <p:nvSpPr>
-          <p:cNvPr id="3" name="Text 1"/>
+      <p:pic>
+        <p:nvPicPr>
+          <p:cNvPr id="3" name="Image 0" descr="/home/claude/f4/img/minesec_sheet.png">    </p:cNvPr>
+          <p:cNvPicPr>
+            <a:picLocks noChangeAspect="1"/>
+          </p:cNvPicPr>
+          <p:nvPr/>
+        </p:nvPicPr>
+        <p:blipFill>
+          <a:blip r:embed="rId1"/>
+          <a:stretch>
+            <a:fillRect/>
+          </a:stretch>
+        </p:blipFill>
+        <p:spPr>
+          <a:xfrm>
+            <a:off x="0" y="658368"/>
+            <a:ext cx="5120640" cy="5833872"/>
+          </a:xfrm>
+          <a:prstGeom prst="rect">
+            <a:avLst/>
+          </a:prstGeom>
+        </p:spPr>
+      </p:pic>
+      <p:sp>
+        <p:nvSpPr>
+          <p:cNvPr id="4" name="Text 1"/>
           <p:cNvSpPr/>
           <p:nvPr/>
         </p:nvSpPr>
         <p:spPr>
           <a:xfrm>
-            <a:off x="457200" y="1005840"/>
-            <a:ext cx="11277295" cy="731520"/>
+            <a:off x="5349240" y="1005840"/>
+            <a:ext cx="6522415" cy="731520"/>
           </a:xfrm>
           <a:prstGeom prst="rect">
             <a:avLst/>
@@ -21168,7 +22111,9 @@
           <a:ln/>
         </p:spPr>
         <p:txBody>
-          <a:bodyPr wrap="square" lIns="0" tIns="0" rIns="0" bIns="0" rtlCol="0" anchor="ctr"/>
+          <a:bodyPr wrap="square" lIns="0" tIns="0" rIns="0" bIns="0" rtlCol="0" anchor="ctr">
+            <a:normAutofit/>
+          </a:bodyPr>
           <a:lstStyle/>
           <a:p>
             <a:pPr algn="ctr" indent="0" marL="0">
@@ -21183,6 +22128,1930 @@
                 <a:ea typeface="Times New Roman" pitchFamily="34" charset="-122"/>
                 <a:cs typeface="Times New Roman" pitchFamily="34" charset="-120"/>
               </a:rPr>
+              <a:t>Evaluation 1</a:t>
+            </a:r>
+            <a:endParaRPr lang="en-US" sz="3600" dirty="0"/>
+          </a:p>
+        </p:txBody>
+      </p:sp>
+      <p:sp>
+        <p:nvSpPr>
+          <p:cNvPr id="5" name="Text 2"/>
+          <p:cNvSpPr/>
+          <p:nvPr/>
+        </p:nvSpPr>
+        <p:spPr>
+          <a:xfrm>
+            <a:off x="5349240" y="1783080"/>
+            <a:ext cx="6522415" cy="4663440"/>
+          </a:xfrm>
+          <a:prstGeom prst="rect">
+            <a:avLst/>
+          </a:prstGeom>
+          <a:noFill/>
+          <a:ln/>
+        </p:spPr>
+        <p:txBody>
+          <a:bodyPr wrap="square" lIns="0" tIns="0" rIns="0" bIns="0" rtlCol="0" anchor="t"/>
+          <a:lstStyle/>
+          <a:p>
+            <a:pPr algn="l" indent="0" marL="0">
+              <a:spcAft>
+                <a:spcPts val="800"/>
+              </a:spcAft>
+              <a:buNone/>
+            </a:pPr>
+            <a:r>
+              <a:rPr lang="en-US" sz="4000" dirty="0">
+                <a:solidFill>
+                  <a:srgbClr val="111111"/>
+                </a:solidFill>
+                <a:latin typeface="Times New Roman" pitchFamily="34" charset="0"/>
+                <a:ea typeface="Times New Roman" pitchFamily="34" charset="-122"/>
+                <a:cs typeface="Times New Roman" pitchFamily="34" charset="-120"/>
+              </a:rPr>
+              <a:t>Give two causes and two solutions of overpopulation.</a:t>
+            </a:r>
+            <a:endParaRPr lang="en-US" sz="4000" dirty="0"/>
+          </a:p>
+        </p:txBody>
+      </p:sp>
+      <p:sp>
+        <p:nvSpPr>
+          <p:cNvPr id="25" name="Slide Number Placeholder 0"/>
+          <p:cNvSpPr>
+            <a:spLocks noGrp="1"/>
+          </p:cNvSpPr>
+          <p:nvPr>
+            <p:ph type="sldNum" sz="quarter" idx="4294967295"/>
+          </p:nvPr>
+        </p:nvSpPr>
+        <p:spPr>
+          <a:xfrm>
+            <a:off x="27432" y="91440"/>
+            <a:ext cx="585216" cy="475488"/>
+          </a:xfrm>
+          <a:prstGeom prst="rect">
+            <a:avLst/>
+          </a:prstGeom>
+          <a:extLst>
+            <a:ext uri="{C572A759-6A51-4108-AA02-DFA0A04FC94B}">
+              <ma14:wrappingTextBoxFlag xmlns:ma14="http://schemas.microsoft.com/office/mac/drawingml/2011/main" val="0"/>
+            </a:ext>
+          </a:extLst>
+        </p:spPr>
+        <p:txBody>
+          <a:bodyPr/>
+          <a:lstStyle>
+            <a:lvl1pPr>
+              <a:defRPr sz="2000">
+                <a:solidFill>
+                  <a:srgbClr val="FFFFFF"/>
+                </a:solidFill>
+                <a:latin typeface="Calibri"/>
+                <a:ea typeface="Calibri"/>
+                <a:cs typeface="Calibri"/>
+              </a:defRPr>
+            </a:lvl1pPr>
+          </a:lstStyle>
+          <a:p>
+            <a:pPr algn="ctr"/>
+            <a:fld id="{F7021451-1387-4CA6-816F-3879F97B5CBC}" type="slidenum">
+              <a:rPr b="1" lang="en-US"/>
+              <a:t>59</a:t>
+            </a:fld>
+            <a:endParaRPr lang="en-US"/>
+          </a:p>
+        </p:txBody>
+      </p:sp>
+    </p:spTree>
+  </p:cSld>
+  <p:clrMapOvr>
+    <a:masterClrMapping/>
+  </p:clrMapOvr>
+</p:sld>
+</file>
+
+<file path=ppt/slides/slide6.xml><?xml version="1.0" encoding="utf-8"?>
+<p:sld xmlns:a="http://schemas.openxmlformats.org/drawingml/2006/main" xmlns:r="http://schemas.openxmlformats.org/officeDocument/2006/relationships" xmlns:p="http://schemas.openxmlformats.org/presentationml/2006/main">
+  <p:cSld name="Slide 6">
+    <p:spTree>
+      <p:nvGrpSpPr>
+        <p:cNvPr id="1" name=""/>
+        <p:cNvGrpSpPr/>
+        <p:nvPr/>
+      </p:nvGrpSpPr>
+      <p:grpSpPr>
+        <a:xfrm>
+          <a:off x="0" y="0"/>
+          <a:ext cx="0" cy="0"/>
+          <a:chOff x="0" y="0"/>
+          <a:chExt cx="0" cy="0"/>
+        </a:xfrm>
+      </p:grpSpPr>
+      <p:sp>
+        <p:nvSpPr>
+          <p:cNvPr id="2" name="Text 0"/>
+          <p:cNvSpPr/>
+          <p:nvPr/>
+        </p:nvSpPr>
+        <p:spPr>
+          <a:xfrm>
+            <a:off x="457200" y="713232"/>
+            <a:ext cx="11368735" cy="274320"/>
+          </a:xfrm>
+          <a:prstGeom prst="rect">
+            <a:avLst/>
+          </a:prstGeom>
+          <a:noFill/>
+          <a:ln/>
+        </p:spPr>
+        <p:txBody>
+          <a:bodyPr wrap="square" lIns="0" tIns="0" rIns="0" bIns="0" rtlCol="0" anchor="ctr"/>
+          <a:lstStyle/>
+          <a:p>
+            <a:pPr algn="r" indent="0" marL="0">
+              <a:buNone/>
+            </a:pPr>
+            <a:r>
+              <a:rPr lang="en-US" sz="1400" b="1" dirty="0">
+                <a:solidFill>
+                  <a:srgbClr val="1C3F6E"/>
+                </a:solidFill>
+                <a:latin typeface="Calibri" pitchFamily="34" charset="0"/>
+                <a:ea typeface="Calibri" pitchFamily="34" charset="-122"/>
+                <a:cs typeface="Calibri" pitchFamily="34" charset="-120"/>
+              </a:rPr>
+              <a:t>LESSON PLAN</a:t>
+            </a:r>
+            <a:endParaRPr lang="en-US" sz="1400" dirty="0"/>
+          </a:p>
+        </p:txBody>
+      </p:sp>
+      <p:pic>
+        <p:nvPicPr>
+          <p:cNvPr id="3" name="Image 0" descr="/home/claude/f4/img/minesec_sheet.png">    </p:cNvPr>
+          <p:cNvPicPr>
+            <a:picLocks noChangeAspect="1"/>
+          </p:cNvPicPr>
+          <p:nvPr/>
+        </p:nvPicPr>
+        <p:blipFill>
+          <a:blip r:embed="rId1"/>
+          <a:stretch>
+            <a:fillRect/>
+          </a:stretch>
+        </p:blipFill>
+        <p:spPr>
+          <a:xfrm>
+            <a:off x="0" y="658368"/>
+            <a:ext cx="2468880" cy="5833872"/>
+          </a:xfrm>
+          <a:prstGeom prst="rect">
+            <a:avLst/>
+          </a:prstGeom>
+        </p:spPr>
+      </p:pic>
+      <p:sp>
+        <p:nvSpPr>
+          <p:cNvPr id="4" name="Text 1"/>
+          <p:cNvSpPr/>
+          <p:nvPr/>
+        </p:nvSpPr>
+        <p:spPr>
+          <a:xfrm>
+            <a:off x="2697480" y="1005840"/>
+            <a:ext cx="9174175" cy="731520"/>
+          </a:xfrm>
+          <a:prstGeom prst="rect">
+            <a:avLst/>
+          </a:prstGeom>
+          <a:noFill/>
+          <a:ln/>
+        </p:spPr>
+        <p:txBody>
+          <a:bodyPr wrap="square" lIns="0" tIns="0" rIns="0" bIns="0" rtlCol="0" anchor="ctr">
+            <a:normAutofit/>
+          </a:bodyPr>
+          <a:lstStyle/>
+          <a:p>
+            <a:pPr algn="ctr" indent="0" marL="0">
+              <a:buNone/>
+            </a:pPr>
+            <a:r>
+              <a:rPr lang="en-US" sz="3600" b="1" dirty="0">
+                <a:solidFill>
+                  <a:srgbClr val="990011"/>
+                </a:solidFill>
+                <a:latin typeface="Times New Roman" pitchFamily="34" charset="0"/>
+                <a:ea typeface="Times New Roman" pitchFamily="34" charset="-122"/>
+                <a:cs typeface="Times New Roman" pitchFamily="34" charset="-120"/>
+              </a:rPr>
+              <a:t>Lesson Plan</a:t>
+            </a:r>
+            <a:endParaRPr lang="en-US" sz="3600" dirty="0"/>
+          </a:p>
+        </p:txBody>
+      </p:sp>
+      <p:sp>
+        <p:nvSpPr>
+          <p:cNvPr id="5" name="Text 2"/>
+          <p:cNvSpPr/>
+          <p:nvPr/>
+        </p:nvSpPr>
+        <p:spPr>
+          <a:xfrm>
+            <a:off x="2697480" y="1783080"/>
+            <a:ext cx="9174175" cy="4663440"/>
+          </a:xfrm>
+          <a:prstGeom prst="rect">
+            <a:avLst/>
+          </a:prstGeom>
+          <a:noFill/>
+          <a:ln/>
+        </p:spPr>
+        <p:txBody>
+          <a:bodyPr wrap="square" lIns="0" tIns="0" rIns="0" bIns="0" rtlCol="0" anchor="t"/>
+          <a:lstStyle/>
+          <a:p>
+            <a:pPr algn="l" marL="342900" indent="-342900">
+              <a:spcAft>
+                <a:spcPts val="800"/>
+              </a:spcAft>
+              <a:buSzPct val="100000"/>
+              <a:buFont typeface="+mj-lt"/>
+              <a:buAutoNum type="arabicPeriod" startAt="1"/>
+            </a:pPr>
+            <a:r>
+              <a:rPr lang="en-US" sz="4000" dirty="0">
+                <a:solidFill>
+                  <a:srgbClr val="111111"/>
+                </a:solidFill>
+                <a:latin typeface="Times New Roman" pitchFamily="34" charset="0"/>
+                <a:ea typeface="Times New Roman" pitchFamily="34" charset="-122"/>
+                <a:cs typeface="Times New Roman" pitchFamily="34" charset="-120"/>
+              </a:rPr>
+              <a:t>Correction of the homework</a:t>
+            </a:r>
+            <a:endParaRPr lang="en-US" sz="4000" dirty="0"/>
+          </a:p>
+          <a:p>
+            <a:pPr algn="l" marL="342900" indent="-342900">
+              <a:spcAft>
+                <a:spcPts val="800"/>
+              </a:spcAft>
+              <a:buSzPct val="100000"/>
+              <a:buFont typeface="+mj-lt"/>
+              <a:buAutoNum type="arabicPeriod" startAt="1"/>
+            </a:pPr>
+            <a:r>
+              <a:rPr lang="en-US" sz="4000" dirty="0">
+                <a:solidFill>
+                  <a:srgbClr val="111111"/>
+                </a:solidFill>
+                <a:latin typeface="Times New Roman" pitchFamily="34" charset="0"/>
+                <a:ea typeface="Times New Roman" pitchFamily="34" charset="-122"/>
+                <a:cs typeface="Times New Roman" pitchFamily="34" charset="-120"/>
+              </a:rPr>
+              <a:t>Objectives and recall</a:t>
+            </a:r>
+            <a:endParaRPr lang="en-US" sz="4000" dirty="0"/>
+          </a:p>
+          <a:p>
+            <a:pPr algn="l" marL="342900" indent="-342900">
+              <a:spcAft>
+                <a:spcPts val="800"/>
+              </a:spcAft>
+              <a:buSzPct val="100000"/>
+              <a:buFont typeface="+mj-lt"/>
+              <a:buAutoNum type="arabicPeriod" startAt="1"/>
+            </a:pPr>
+            <a:r>
+              <a:rPr lang="en-US" sz="4000" dirty="0">
+                <a:solidFill>
+                  <a:srgbClr val="111111"/>
+                </a:solidFill>
+                <a:latin typeface="Times New Roman" pitchFamily="34" charset="0"/>
+                <a:ea typeface="Times New Roman" pitchFamily="34" charset="-122"/>
+                <a:cs typeface="Times New Roman" pitchFamily="34" charset="-120"/>
+              </a:rPr>
+              <a:t>Real-life situation and action to take</a:t>
+            </a:r>
+            <a:endParaRPr lang="en-US" sz="4000" dirty="0"/>
+          </a:p>
+          <a:p>
+            <a:pPr algn="l" marL="342900" indent="-342900">
+              <a:spcAft>
+                <a:spcPts val="800"/>
+              </a:spcAft>
+              <a:buSzPct val="100000"/>
+              <a:buFont typeface="+mj-lt"/>
+              <a:buAutoNum type="arabicPeriod" startAt="1"/>
+            </a:pPr>
+            <a:r>
+              <a:rPr lang="en-US" sz="4000" dirty="0">
+                <a:solidFill>
+                  <a:srgbClr val="111111"/>
+                </a:solidFill>
+                <a:latin typeface="Times New Roman" pitchFamily="34" charset="0"/>
+                <a:ea typeface="Times New Roman" pitchFamily="34" charset="-122"/>
+                <a:cs typeface="Times New Roman" pitchFamily="34" charset="-120"/>
+              </a:rPr>
+              <a:t>Learning activities</a:t>
+            </a:r>
+            <a:endParaRPr lang="en-US" sz="4000" dirty="0"/>
+          </a:p>
+          <a:p>
+            <a:pPr algn="l" marL="342900" indent="-342900">
+              <a:spcAft>
+                <a:spcPts val="800"/>
+              </a:spcAft>
+              <a:buSzPct val="100000"/>
+              <a:buFont typeface="+mj-lt"/>
+              <a:buAutoNum type="arabicPeriod" startAt="1"/>
+            </a:pPr>
+            <a:r>
+              <a:rPr lang="en-US" sz="4000" dirty="0">
+                <a:solidFill>
+                  <a:srgbClr val="111111"/>
+                </a:solidFill>
+                <a:latin typeface="Times New Roman" pitchFamily="34" charset="0"/>
+                <a:ea typeface="Times New Roman" pitchFamily="34" charset="-122"/>
+                <a:cs typeface="Times New Roman" pitchFamily="34" charset="-120"/>
+              </a:rPr>
+              <a:t>Board summary</a:t>
+            </a:r>
+            <a:endParaRPr lang="en-US" sz="4000" dirty="0"/>
+          </a:p>
+          <a:p>
+            <a:pPr algn="l" marL="342900" indent="-342900">
+              <a:spcAft>
+                <a:spcPts val="800"/>
+              </a:spcAft>
+              <a:buSzPct val="100000"/>
+              <a:buFont typeface="+mj-lt"/>
+              <a:buAutoNum type="arabicPeriod" startAt="1"/>
+            </a:pPr>
+            <a:r>
+              <a:rPr lang="en-US" sz="4000" dirty="0">
+                <a:solidFill>
+                  <a:srgbClr val="111111"/>
+                </a:solidFill>
+                <a:latin typeface="Times New Roman" pitchFamily="34" charset="0"/>
+                <a:ea typeface="Times New Roman" pitchFamily="34" charset="-122"/>
+                <a:cs typeface="Times New Roman" pitchFamily="34" charset="-120"/>
+              </a:rPr>
+              <a:t>Evaluation, remediation and homework</a:t>
+            </a:r>
+            <a:endParaRPr lang="en-US" sz="4000" dirty="0"/>
+          </a:p>
+        </p:txBody>
+      </p:sp>
+      <p:sp>
+        <p:nvSpPr>
+          <p:cNvPr id="25" name="Slide Number Placeholder 0"/>
+          <p:cNvSpPr>
+            <a:spLocks noGrp="1"/>
+          </p:cNvSpPr>
+          <p:nvPr>
+            <p:ph type="sldNum" sz="quarter" idx="4294967295"/>
+          </p:nvPr>
+        </p:nvSpPr>
+        <p:spPr>
+          <a:xfrm>
+            <a:off x="27432" y="91440"/>
+            <a:ext cx="585216" cy="475488"/>
+          </a:xfrm>
+          <a:prstGeom prst="rect">
+            <a:avLst/>
+          </a:prstGeom>
+          <a:extLst>
+            <a:ext uri="{C572A759-6A51-4108-AA02-DFA0A04FC94B}">
+              <ma14:wrappingTextBoxFlag xmlns:ma14="http://schemas.microsoft.com/office/mac/drawingml/2011/main" val="0"/>
+            </a:ext>
+          </a:extLst>
+        </p:spPr>
+        <p:txBody>
+          <a:bodyPr/>
+          <a:lstStyle>
+            <a:lvl1pPr>
+              <a:defRPr sz="2000">
+                <a:solidFill>
+                  <a:srgbClr val="FFFFFF"/>
+                </a:solidFill>
+                <a:latin typeface="Calibri"/>
+                <a:ea typeface="Calibri"/>
+                <a:cs typeface="Calibri"/>
+              </a:defRPr>
+            </a:lvl1pPr>
+          </a:lstStyle>
+          <a:p>
+            <a:pPr algn="ctr"/>
+            <a:fld id="{F7021451-1387-4CA6-816F-3879F97B5CBC}" type="slidenum">
+              <a:rPr b="1" lang="en-US"/>
+              <a:t>6</a:t>
+            </a:fld>
+            <a:endParaRPr lang="en-US"/>
+          </a:p>
+        </p:txBody>
+      </p:sp>
+    </p:spTree>
+  </p:cSld>
+  <p:clrMapOvr>
+    <a:masterClrMapping/>
+  </p:clrMapOvr>
+</p:sld>
+</file>
+
+<file path=ppt/slides/slide60.xml><?xml version="1.0" encoding="utf-8"?>
+<p:sld xmlns:a="http://schemas.openxmlformats.org/drawingml/2006/main" xmlns:r="http://schemas.openxmlformats.org/officeDocument/2006/relationships" xmlns:p="http://schemas.openxmlformats.org/presentationml/2006/main">
+  <p:cSld name="Slide 60">
+    <p:spTree>
+      <p:nvGrpSpPr>
+        <p:cNvPr id="1" name=""/>
+        <p:cNvGrpSpPr/>
+        <p:nvPr/>
+      </p:nvGrpSpPr>
+      <p:grpSpPr>
+        <a:xfrm>
+          <a:off x="0" y="0"/>
+          <a:ext cx="0" cy="0"/>
+          <a:chOff x="0" y="0"/>
+          <a:chExt cx="0" cy="0"/>
+        </a:xfrm>
+      </p:grpSpPr>
+      <p:sp>
+        <p:nvSpPr>
+          <p:cNvPr id="2" name="Text 0"/>
+          <p:cNvSpPr/>
+          <p:nvPr/>
+        </p:nvSpPr>
+        <p:spPr>
+          <a:xfrm>
+            <a:off x="457200" y="713232"/>
+            <a:ext cx="11368735" cy="274320"/>
+          </a:xfrm>
+          <a:prstGeom prst="rect">
+            <a:avLst/>
+          </a:prstGeom>
+          <a:noFill/>
+          <a:ln/>
+        </p:spPr>
+        <p:txBody>
+          <a:bodyPr wrap="square" lIns="0" tIns="0" rIns="0" bIns="0" rtlCol="0" anchor="ctr"/>
+          <a:lstStyle/>
+          <a:p>
+            <a:pPr algn="r" indent="0" marL="0">
+              <a:buNone/>
+            </a:pPr>
+            <a:r>
+              <a:rPr lang="en-US" sz="1400" b="1" dirty="0">
+                <a:solidFill>
+                  <a:srgbClr val="1C3F6E"/>
+                </a:solidFill>
+                <a:latin typeface="Calibri" pitchFamily="34" charset="0"/>
+                <a:ea typeface="Calibri" pitchFamily="34" charset="-122"/>
+                <a:cs typeface="Calibri" pitchFamily="34" charset="-120"/>
+              </a:rPr>
+              <a:t>FORMATIVE EVALUATION</a:t>
+            </a:r>
+            <a:endParaRPr lang="en-US" sz="1400" dirty="0"/>
+          </a:p>
+        </p:txBody>
+      </p:sp>
+      <p:pic>
+        <p:nvPicPr>
+          <p:cNvPr id="3" name="Image 0" descr="/home/claude/f4/img/minesec_sheet.png">    </p:cNvPr>
+          <p:cNvPicPr>
+            <a:picLocks noChangeAspect="1"/>
+          </p:cNvPicPr>
+          <p:nvPr/>
+        </p:nvPicPr>
+        <p:blipFill>
+          <a:blip r:embed="rId1"/>
+          <a:stretch>
+            <a:fillRect/>
+          </a:stretch>
+        </p:blipFill>
+        <p:spPr>
+          <a:xfrm>
+            <a:off x="0" y="658368"/>
+            <a:ext cx="5120640" cy="5833872"/>
+          </a:xfrm>
+          <a:prstGeom prst="rect">
+            <a:avLst/>
+          </a:prstGeom>
+        </p:spPr>
+      </p:pic>
+      <p:sp>
+        <p:nvSpPr>
+          <p:cNvPr id="4" name="Text 1"/>
+          <p:cNvSpPr/>
+          <p:nvPr/>
+        </p:nvSpPr>
+        <p:spPr>
+          <a:xfrm>
+            <a:off x="5349240" y="1005840"/>
+            <a:ext cx="6522415" cy="731520"/>
+          </a:xfrm>
+          <a:prstGeom prst="rect">
+            <a:avLst/>
+          </a:prstGeom>
+          <a:noFill/>
+          <a:ln/>
+        </p:spPr>
+        <p:txBody>
+          <a:bodyPr wrap="square" lIns="0" tIns="0" rIns="0" bIns="0" rtlCol="0" anchor="ctr">
+            <a:normAutofit/>
+          </a:bodyPr>
+          <a:lstStyle/>
+          <a:p>
+            <a:pPr algn="ctr" indent="0" marL="0">
+              <a:buNone/>
+            </a:pPr>
+            <a:r>
+              <a:rPr lang="en-US" sz="3600" b="1" dirty="0">
+                <a:solidFill>
+                  <a:srgbClr val="990011"/>
+                </a:solidFill>
+                <a:latin typeface="Times New Roman" pitchFamily="34" charset="0"/>
+                <a:ea typeface="Times New Roman" pitchFamily="34" charset="-122"/>
+                <a:cs typeface="Times New Roman" pitchFamily="34" charset="-120"/>
+              </a:rPr>
+              <a:t>Expected Answer</a:t>
+            </a:r>
+            <a:endParaRPr lang="en-US" sz="3600" dirty="0"/>
+          </a:p>
+        </p:txBody>
+      </p:sp>
+      <p:sp>
+        <p:nvSpPr>
+          <p:cNvPr id="5" name="Text 2"/>
+          <p:cNvSpPr/>
+          <p:nvPr/>
+        </p:nvSpPr>
+        <p:spPr>
+          <a:xfrm>
+            <a:off x="5349240" y="1783080"/>
+            <a:ext cx="6522415" cy="4663440"/>
+          </a:xfrm>
+          <a:prstGeom prst="rect">
+            <a:avLst/>
+          </a:prstGeom>
+          <a:noFill/>
+          <a:ln/>
+        </p:spPr>
+        <p:txBody>
+          <a:bodyPr wrap="square" lIns="0" tIns="0" rIns="0" bIns="0" rtlCol="0" anchor="t"/>
+          <a:lstStyle/>
+          <a:p>
+            <a:pPr algn="l" indent="0" marL="0">
+              <a:spcAft>
+                <a:spcPts val="800"/>
+              </a:spcAft>
+              <a:buNone/>
+            </a:pPr>
+            <a:r>
+              <a:rPr lang="en-US" sz="4000" dirty="0">
+                <a:solidFill>
+                  <a:srgbClr val="111111"/>
+                </a:solidFill>
+                <a:latin typeface="Times New Roman" pitchFamily="34" charset="0"/>
+                <a:ea typeface="Times New Roman" pitchFamily="34" charset="-122"/>
+                <a:cs typeface="Times New Roman" pitchFamily="34" charset="-120"/>
+              </a:rPr>
+              <a:t>Causes: high births, falling deaths, immigration; solutions: family planning, education of girls, technology, industrial jobs.</a:t>
+            </a:r>
+            <a:endParaRPr lang="en-US" sz="4000" dirty="0"/>
+          </a:p>
+        </p:txBody>
+      </p:sp>
+      <p:sp>
+        <p:nvSpPr>
+          <p:cNvPr id="25" name="Slide Number Placeholder 0"/>
+          <p:cNvSpPr>
+            <a:spLocks noGrp="1"/>
+          </p:cNvSpPr>
+          <p:nvPr>
+            <p:ph type="sldNum" sz="quarter" idx="4294967295"/>
+          </p:nvPr>
+        </p:nvSpPr>
+        <p:spPr>
+          <a:xfrm>
+            <a:off x="27432" y="91440"/>
+            <a:ext cx="585216" cy="475488"/>
+          </a:xfrm>
+          <a:prstGeom prst="rect">
+            <a:avLst/>
+          </a:prstGeom>
+          <a:extLst>
+            <a:ext uri="{C572A759-6A51-4108-AA02-DFA0A04FC94B}">
+              <ma14:wrappingTextBoxFlag xmlns:ma14="http://schemas.microsoft.com/office/mac/drawingml/2011/main" val="0"/>
+            </a:ext>
+          </a:extLst>
+        </p:spPr>
+        <p:txBody>
+          <a:bodyPr/>
+          <a:lstStyle>
+            <a:lvl1pPr>
+              <a:defRPr sz="2000">
+                <a:solidFill>
+                  <a:srgbClr val="FFFFFF"/>
+                </a:solidFill>
+                <a:latin typeface="Calibri"/>
+                <a:ea typeface="Calibri"/>
+                <a:cs typeface="Calibri"/>
+              </a:defRPr>
+            </a:lvl1pPr>
+          </a:lstStyle>
+          <a:p>
+            <a:pPr algn="ctr"/>
+            <a:fld id="{F7021451-1387-4CA6-816F-3879F97B5CBC}" type="slidenum">
+              <a:rPr b="1" lang="en-US"/>
+              <a:t>60</a:t>
+            </a:fld>
+            <a:endParaRPr lang="en-US"/>
+          </a:p>
+        </p:txBody>
+      </p:sp>
+    </p:spTree>
+  </p:cSld>
+  <p:clrMapOvr>
+    <a:masterClrMapping/>
+  </p:clrMapOvr>
+</p:sld>
+</file>
+
+<file path=ppt/slides/slide61.xml><?xml version="1.0" encoding="utf-8"?>
+<p:sld xmlns:a="http://schemas.openxmlformats.org/drawingml/2006/main" xmlns:r="http://schemas.openxmlformats.org/officeDocument/2006/relationships" xmlns:p="http://schemas.openxmlformats.org/presentationml/2006/main">
+  <p:cSld name="Slide 61">
+    <p:spTree>
+      <p:nvGrpSpPr>
+        <p:cNvPr id="1" name=""/>
+        <p:cNvGrpSpPr/>
+        <p:nvPr/>
+      </p:nvGrpSpPr>
+      <p:grpSpPr>
+        <a:xfrm>
+          <a:off x="0" y="0"/>
+          <a:ext cx="0" cy="0"/>
+          <a:chOff x="0" y="0"/>
+          <a:chExt cx="0" cy="0"/>
+        </a:xfrm>
+      </p:grpSpPr>
+      <p:sp>
+        <p:nvSpPr>
+          <p:cNvPr id="2" name="Text 0"/>
+          <p:cNvSpPr/>
+          <p:nvPr/>
+        </p:nvSpPr>
+        <p:spPr>
+          <a:xfrm>
+            <a:off x="457200" y="713232"/>
+            <a:ext cx="11368735" cy="274320"/>
+          </a:xfrm>
+          <a:prstGeom prst="rect">
+            <a:avLst/>
+          </a:prstGeom>
+          <a:noFill/>
+          <a:ln/>
+        </p:spPr>
+        <p:txBody>
+          <a:bodyPr wrap="square" lIns="0" tIns="0" rIns="0" bIns="0" rtlCol="0" anchor="ctr"/>
+          <a:lstStyle/>
+          <a:p>
+            <a:pPr algn="r" indent="0" marL="0">
+              <a:buNone/>
+            </a:pPr>
+            <a:r>
+              <a:rPr lang="en-US" sz="1400" b="1" dirty="0">
+                <a:solidFill>
+                  <a:srgbClr val="1C3F6E"/>
+                </a:solidFill>
+                <a:latin typeface="Calibri" pitchFamily="34" charset="0"/>
+                <a:ea typeface="Calibri" pitchFamily="34" charset="-122"/>
+                <a:cs typeface="Calibri" pitchFamily="34" charset="-120"/>
+              </a:rPr>
+              <a:t>FORMATIVE EVALUATION</a:t>
+            </a:r>
+            <a:endParaRPr lang="en-US" sz="1400" dirty="0"/>
+          </a:p>
+        </p:txBody>
+      </p:sp>
+      <p:pic>
+        <p:nvPicPr>
+          <p:cNvPr id="3" name="Image 0" descr="/home/claude/f4/img/minesec_sheet.png">    </p:cNvPr>
+          <p:cNvPicPr>
+            <a:picLocks noChangeAspect="1"/>
+          </p:cNvPicPr>
+          <p:nvPr/>
+        </p:nvPicPr>
+        <p:blipFill>
+          <a:blip r:embed="rId1"/>
+          <a:stretch>
+            <a:fillRect/>
+          </a:stretch>
+        </p:blipFill>
+        <p:spPr>
+          <a:xfrm>
+            <a:off x="0" y="658368"/>
+            <a:ext cx="5120640" cy="5833872"/>
+          </a:xfrm>
+          <a:prstGeom prst="rect">
+            <a:avLst/>
+          </a:prstGeom>
+        </p:spPr>
+      </p:pic>
+      <p:sp>
+        <p:nvSpPr>
+          <p:cNvPr id="4" name="Text 1"/>
+          <p:cNvSpPr/>
+          <p:nvPr/>
+        </p:nvSpPr>
+        <p:spPr>
+          <a:xfrm>
+            <a:off x="5349240" y="1005840"/>
+            <a:ext cx="6522415" cy="731520"/>
+          </a:xfrm>
+          <a:prstGeom prst="rect">
+            <a:avLst/>
+          </a:prstGeom>
+          <a:noFill/>
+          <a:ln/>
+        </p:spPr>
+        <p:txBody>
+          <a:bodyPr wrap="square" lIns="0" tIns="0" rIns="0" bIns="0" rtlCol="0" anchor="ctr">
+            <a:normAutofit/>
+          </a:bodyPr>
+          <a:lstStyle/>
+          <a:p>
+            <a:pPr algn="ctr" indent="0" marL="0">
+              <a:buNone/>
+            </a:pPr>
+            <a:r>
+              <a:rPr lang="en-US" sz="3600" b="1" dirty="0">
+                <a:solidFill>
+                  <a:srgbClr val="990011"/>
+                </a:solidFill>
+                <a:latin typeface="Times New Roman" pitchFamily="34" charset="0"/>
+                <a:ea typeface="Times New Roman" pitchFamily="34" charset="-122"/>
+                <a:cs typeface="Times New Roman" pitchFamily="34" charset="-120"/>
+              </a:rPr>
+              <a:t>Evaluation 2</a:t>
+            </a:r>
+            <a:endParaRPr lang="en-US" sz="3600" dirty="0"/>
+          </a:p>
+        </p:txBody>
+      </p:sp>
+      <p:sp>
+        <p:nvSpPr>
+          <p:cNvPr id="5" name="Text 2"/>
+          <p:cNvSpPr/>
+          <p:nvPr/>
+        </p:nvSpPr>
+        <p:spPr>
+          <a:xfrm>
+            <a:off x="5349240" y="1783080"/>
+            <a:ext cx="6522415" cy="4663440"/>
+          </a:xfrm>
+          <a:prstGeom prst="rect">
+            <a:avLst/>
+          </a:prstGeom>
+          <a:noFill/>
+          <a:ln/>
+        </p:spPr>
+        <p:txBody>
+          <a:bodyPr wrap="square" lIns="0" tIns="0" rIns="0" bIns="0" rtlCol="0" anchor="t"/>
+          <a:lstStyle/>
+          <a:p>
+            <a:pPr algn="l" indent="0" marL="0">
+              <a:spcAft>
+                <a:spcPts val="800"/>
+              </a:spcAft>
+              <a:buNone/>
+            </a:pPr>
+            <a:r>
+              <a:rPr lang="en-US" sz="4000" dirty="0">
+                <a:solidFill>
+                  <a:srgbClr val="111111"/>
+                </a:solidFill>
+                <a:latin typeface="Times New Roman" pitchFamily="34" charset="0"/>
+                <a:ea typeface="Times New Roman" pitchFamily="34" charset="-122"/>
+                <a:cs typeface="Times New Roman" pitchFamily="34" charset="-120"/>
+              </a:rPr>
+              <a:t>How can a new irrigation system change the carrying capacity and the optimum population?</a:t>
+            </a:r>
+            <a:endParaRPr lang="en-US" sz="4000" dirty="0"/>
+          </a:p>
+        </p:txBody>
+      </p:sp>
+      <p:sp>
+        <p:nvSpPr>
+          <p:cNvPr id="25" name="Slide Number Placeholder 0"/>
+          <p:cNvSpPr>
+            <a:spLocks noGrp="1"/>
+          </p:cNvSpPr>
+          <p:nvPr>
+            <p:ph type="sldNum" sz="quarter" idx="4294967295"/>
+          </p:nvPr>
+        </p:nvSpPr>
+        <p:spPr>
+          <a:xfrm>
+            <a:off x="27432" y="91440"/>
+            <a:ext cx="585216" cy="475488"/>
+          </a:xfrm>
+          <a:prstGeom prst="rect">
+            <a:avLst/>
+          </a:prstGeom>
+          <a:extLst>
+            <a:ext uri="{C572A759-6A51-4108-AA02-DFA0A04FC94B}">
+              <ma14:wrappingTextBoxFlag xmlns:ma14="http://schemas.microsoft.com/office/mac/drawingml/2011/main" val="0"/>
+            </a:ext>
+          </a:extLst>
+        </p:spPr>
+        <p:txBody>
+          <a:bodyPr/>
+          <a:lstStyle>
+            <a:lvl1pPr>
+              <a:defRPr sz="2000">
+                <a:solidFill>
+                  <a:srgbClr val="FFFFFF"/>
+                </a:solidFill>
+                <a:latin typeface="Calibri"/>
+                <a:ea typeface="Calibri"/>
+                <a:cs typeface="Calibri"/>
+              </a:defRPr>
+            </a:lvl1pPr>
+          </a:lstStyle>
+          <a:p>
+            <a:pPr algn="ctr"/>
+            <a:fld id="{F7021451-1387-4CA6-816F-3879F97B5CBC}" type="slidenum">
+              <a:rPr b="1" lang="en-US"/>
+              <a:t>61</a:t>
+            </a:fld>
+            <a:endParaRPr lang="en-US"/>
+          </a:p>
+        </p:txBody>
+      </p:sp>
+    </p:spTree>
+  </p:cSld>
+  <p:clrMapOvr>
+    <a:masterClrMapping/>
+  </p:clrMapOvr>
+</p:sld>
+</file>
+
+<file path=ppt/slides/slide62.xml><?xml version="1.0" encoding="utf-8"?>
+<p:sld xmlns:a="http://schemas.openxmlformats.org/drawingml/2006/main" xmlns:r="http://schemas.openxmlformats.org/officeDocument/2006/relationships" xmlns:p="http://schemas.openxmlformats.org/presentationml/2006/main">
+  <p:cSld name="Slide 62">
+    <p:spTree>
+      <p:nvGrpSpPr>
+        <p:cNvPr id="1" name=""/>
+        <p:cNvGrpSpPr/>
+        <p:nvPr/>
+      </p:nvGrpSpPr>
+      <p:grpSpPr>
+        <a:xfrm>
+          <a:off x="0" y="0"/>
+          <a:ext cx="0" cy="0"/>
+          <a:chOff x="0" y="0"/>
+          <a:chExt cx="0" cy="0"/>
+        </a:xfrm>
+      </p:grpSpPr>
+      <p:sp>
+        <p:nvSpPr>
+          <p:cNvPr id="2" name="Text 0"/>
+          <p:cNvSpPr/>
+          <p:nvPr/>
+        </p:nvSpPr>
+        <p:spPr>
+          <a:xfrm>
+            <a:off x="457200" y="713232"/>
+            <a:ext cx="11368735" cy="274320"/>
+          </a:xfrm>
+          <a:prstGeom prst="rect">
+            <a:avLst/>
+          </a:prstGeom>
+          <a:noFill/>
+          <a:ln/>
+        </p:spPr>
+        <p:txBody>
+          <a:bodyPr wrap="square" lIns="0" tIns="0" rIns="0" bIns="0" rtlCol="0" anchor="ctr"/>
+          <a:lstStyle/>
+          <a:p>
+            <a:pPr algn="r" indent="0" marL="0">
+              <a:buNone/>
+            </a:pPr>
+            <a:r>
+              <a:rPr lang="en-US" sz="1400" b="1" dirty="0">
+                <a:solidFill>
+                  <a:srgbClr val="1C3F6E"/>
+                </a:solidFill>
+                <a:latin typeface="Calibri" pitchFamily="34" charset="0"/>
+                <a:ea typeface="Calibri" pitchFamily="34" charset="-122"/>
+                <a:cs typeface="Calibri" pitchFamily="34" charset="-120"/>
+              </a:rPr>
+              <a:t>FORMATIVE EVALUATION</a:t>
+            </a:r>
+            <a:endParaRPr lang="en-US" sz="1400" dirty="0"/>
+          </a:p>
+        </p:txBody>
+      </p:sp>
+      <p:pic>
+        <p:nvPicPr>
+          <p:cNvPr id="3" name="Image 0" descr="/home/claude/f4/img/minesec_sheet.png">    </p:cNvPr>
+          <p:cNvPicPr>
+            <a:picLocks noChangeAspect="1"/>
+          </p:cNvPicPr>
+          <p:nvPr/>
+        </p:nvPicPr>
+        <p:blipFill>
+          <a:blip r:embed="rId1"/>
+          <a:stretch>
+            <a:fillRect/>
+          </a:stretch>
+        </p:blipFill>
+        <p:spPr>
+          <a:xfrm>
+            <a:off x="0" y="658368"/>
+            <a:ext cx="5120640" cy="5833872"/>
+          </a:xfrm>
+          <a:prstGeom prst="rect">
+            <a:avLst/>
+          </a:prstGeom>
+        </p:spPr>
+      </p:pic>
+      <p:sp>
+        <p:nvSpPr>
+          <p:cNvPr id="4" name="Text 1"/>
+          <p:cNvSpPr/>
+          <p:nvPr/>
+        </p:nvSpPr>
+        <p:spPr>
+          <a:xfrm>
+            <a:off x="5349240" y="1005840"/>
+            <a:ext cx="6522415" cy="731520"/>
+          </a:xfrm>
+          <a:prstGeom prst="rect">
+            <a:avLst/>
+          </a:prstGeom>
+          <a:noFill/>
+          <a:ln/>
+        </p:spPr>
+        <p:txBody>
+          <a:bodyPr wrap="square" lIns="0" tIns="0" rIns="0" bIns="0" rtlCol="0" anchor="ctr">
+            <a:normAutofit/>
+          </a:bodyPr>
+          <a:lstStyle/>
+          <a:p>
+            <a:pPr algn="ctr" indent="0" marL="0">
+              <a:buNone/>
+            </a:pPr>
+            <a:r>
+              <a:rPr lang="en-US" sz="3600" b="1" dirty="0">
+                <a:solidFill>
+                  <a:srgbClr val="990011"/>
+                </a:solidFill>
+                <a:latin typeface="Times New Roman" pitchFamily="34" charset="0"/>
+                <a:ea typeface="Times New Roman" pitchFamily="34" charset="-122"/>
+                <a:cs typeface="Times New Roman" pitchFamily="34" charset="-120"/>
+              </a:rPr>
+              <a:t>Expected Answer</a:t>
+            </a:r>
+            <a:endParaRPr lang="en-US" sz="3600" dirty="0"/>
+          </a:p>
+        </p:txBody>
+      </p:sp>
+      <p:sp>
+        <p:nvSpPr>
+          <p:cNvPr id="5" name="Text 2"/>
+          <p:cNvSpPr/>
+          <p:nvPr/>
+        </p:nvSpPr>
+        <p:spPr>
+          <a:xfrm>
+            <a:off x="5349240" y="1783080"/>
+            <a:ext cx="6522415" cy="4663440"/>
+          </a:xfrm>
+          <a:prstGeom prst="rect">
+            <a:avLst/>
+          </a:prstGeom>
+          <a:noFill/>
+          <a:ln/>
+        </p:spPr>
+        <p:txBody>
+          <a:bodyPr wrap="square" lIns="0" tIns="0" rIns="0" bIns="0" rtlCol="0" anchor="t"/>
+          <a:lstStyle/>
+          <a:p>
+            <a:pPr algn="l" indent="0" marL="0">
+              <a:spcAft>
+                <a:spcPts val="800"/>
+              </a:spcAft>
+              <a:buNone/>
+            </a:pPr>
+            <a:r>
+              <a:rPr lang="en-US" sz="4000" dirty="0">
+                <a:solidFill>
+                  <a:srgbClr val="111111"/>
+                </a:solidFill>
+                <a:latin typeface="Times New Roman" pitchFamily="34" charset="0"/>
+                <a:ea typeface="Times New Roman" pitchFamily="34" charset="-122"/>
+                <a:cs typeface="Times New Roman" pitchFamily="34" charset="-120"/>
+              </a:rPr>
+              <a:t>It raises both, because the same land can feed more people at a higher standard of living.</a:t>
+            </a:r>
+            <a:endParaRPr lang="en-US" sz="4000" dirty="0"/>
+          </a:p>
+        </p:txBody>
+      </p:sp>
+      <p:sp>
+        <p:nvSpPr>
+          <p:cNvPr id="25" name="Slide Number Placeholder 0"/>
+          <p:cNvSpPr>
+            <a:spLocks noGrp="1"/>
+          </p:cNvSpPr>
+          <p:nvPr>
+            <p:ph type="sldNum" sz="quarter" idx="4294967295"/>
+          </p:nvPr>
+        </p:nvSpPr>
+        <p:spPr>
+          <a:xfrm>
+            <a:off x="27432" y="91440"/>
+            <a:ext cx="585216" cy="475488"/>
+          </a:xfrm>
+          <a:prstGeom prst="rect">
+            <a:avLst/>
+          </a:prstGeom>
+          <a:extLst>
+            <a:ext uri="{C572A759-6A51-4108-AA02-DFA0A04FC94B}">
+              <ma14:wrappingTextBoxFlag xmlns:ma14="http://schemas.microsoft.com/office/mac/drawingml/2011/main" val="0"/>
+            </a:ext>
+          </a:extLst>
+        </p:spPr>
+        <p:txBody>
+          <a:bodyPr/>
+          <a:lstStyle>
+            <a:lvl1pPr>
+              <a:defRPr sz="2000">
+                <a:solidFill>
+                  <a:srgbClr val="FFFFFF"/>
+                </a:solidFill>
+                <a:latin typeface="Calibri"/>
+                <a:ea typeface="Calibri"/>
+                <a:cs typeface="Calibri"/>
+              </a:defRPr>
+            </a:lvl1pPr>
+          </a:lstStyle>
+          <a:p>
+            <a:pPr algn="ctr"/>
+            <a:fld id="{F7021451-1387-4CA6-816F-3879F97B5CBC}" type="slidenum">
+              <a:rPr b="1" lang="en-US"/>
+              <a:t>62</a:t>
+            </a:fld>
+            <a:endParaRPr lang="en-US"/>
+          </a:p>
+        </p:txBody>
+      </p:sp>
+    </p:spTree>
+  </p:cSld>
+  <p:clrMapOvr>
+    <a:masterClrMapping/>
+  </p:clrMapOvr>
+</p:sld>
+</file>
+
+<file path=ppt/slides/slide63.xml><?xml version="1.0" encoding="utf-8"?>
+<p:sld xmlns:a="http://schemas.openxmlformats.org/drawingml/2006/main" xmlns:r="http://schemas.openxmlformats.org/officeDocument/2006/relationships" xmlns:p="http://schemas.openxmlformats.org/presentationml/2006/main">
+  <p:cSld name="Slide 63">
+    <p:spTree>
+      <p:nvGrpSpPr>
+        <p:cNvPr id="1" name=""/>
+        <p:cNvGrpSpPr/>
+        <p:nvPr/>
+      </p:nvGrpSpPr>
+      <p:grpSpPr>
+        <a:xfrm>
+          <a:off x="0" y="0"/>
+          <a:ext cx="0" cy="0"/>
+          <a:chOff x="0" y="0"/>
+          <a:chExt cx="0" cy="0"/>
+        </a:xfrm>
+      </p:grpSpPr>
+      <p:sp>
+        <p:nvSpPr>
+          <p:cNvPr id="2" name="Text 0"/>
+          <p:cNvSpPr/>
+          <p:nvPr/>
+        </p:nvSpPr>
+        <p:spPr>
+          <a:xfrm>
+            <a:off x="457200" y="713232"/>
+            <a:ext cx="11368735" cy="274320"/>
+          </a:xfrm>
+          <a:prstGeom prst="rect">
+            <a:avLst/>
+          </a:prstGeom>
+          <a:noFill/>
+          <a:ln/>
+        </p:spPr>
+        <p:txBody>
+          <a:bodyPr wrap="square" lIns="0" tIns="0" rIns="0" bIns="0" rtlCol="0" anchor="ctr"/>
+          <a:lstStyle/>
+          <a:p>
+            <a:pPr algn="r" indent="0" marL="0">
+              <a:buNone/>
+            </a:pPr>
+            <a:r>
+              <a:rPr lang="en-US" sz="1400" b="1" dirty="0">
+                <a:solidFill>
+                  <a:srgbClr val="1C3F6E"/>
+                </a:solidFill>
+                <a:latin typeface="Calibri" pitchFamily="34" charset="0"/>
+                <a:ea typeface="Calibri" pitchFamily="34" charset="-122"/>
+                <a:cs typeface="Calibri" pitchFamily="34" charset="-120"/>
+              </a:rPr>
+              <a:t>REMEDIATION</a:t>
+            </a:r>
+            <a:endParaRPr lang="en-US" sz="1400" dirty="0"/>
+          </a:p>
+        </p:txBody>
+      </p:sp>
+      <p:pic>
+        <p:nvPicPr>
+          <p:cNvPr id="3" name="Image 0" descr="/home/claude/f4/img/minesec_sheet.png">    </p:cNvPr>
+          <p:cNvPicPr>
+            <a:picLocks noChangeAspect="1"/>
+          </p:cNvPicPr>
+          <p:nvPr/>
+        </p:nvPicPr>
+        <p:blipFill>
+          <a:blip r:embed="rId1"/>
+          <a:stretch>
+            <a:fillRect/>
+          </a:stretch>
+        </p:blipFill>
+        <p:spPr>
+          <a:xfrm>
+            <a:off x="0" y="658368"/>
+            <a:ext cx="1463040" cy="5833872"/>
+          </a:xfrm>
+          <a:prstGeom prst="rect">
+            <a:avLst/>
+          </a:prstGeom>
+        </p:spPr>
+      </p:pic>
+      <p:sp>
+        <p:nvSpPr>
+          <p:cNvPr id="4" name="Text 1"/>
+          <p:cNvSpPr/>
+          <p:nvPr/>
+        </p:nvSpPr>
+        <p:spPr>
+          <a:xfrm>
+            <a:off x="1691640" y="1005840"/>
+            <a:ext cx="10180015" cy="731520"/>
+          </a:xfrm>
+          <a:prstGeom prst="rect">
+            <a:avLst/>
+          </a:prstGeom>
+          <a:noFill/>
+          <a:ln/>
+        </p:spPr>
+        <p:txBody>
+          <a:bodyPr wrap="square" lIns="0" tIns="0" rIns="0" bIns="0" rtlCol="0" anchor="ctr">
+            <a:normAutofit/>
+          </a:bodyPr>
+          <a:lstStyle/>
+          <a:p>
+            <a:pPr algn="ctr" indent="0" marL="0">
+              <a:buNone/>
+            </a:pPr>
+            <a:r>
+              <a:rPr lang="en-US" sz="3600" b="1" dirty="0">
+                <a:solidFill>
+                  <a:srgbClr val="990011"/>
+                </a:solidFill>
+                <a:latin typeface="Times New Roman" pitchFamily="34" charset="0"/>
+                <a:ea typeface="Times New Roman" pitchFamily="34" charset="-122"/>
+                <a:cs typeface="Times New Roman" pitchFamily="34" charset="-120"/>
+              </a:rPr>
+              <a:t>Remediation</a:t>
+            </a:r>
+            <a:endParaRPr lang="en-US" sz="3600" dirty="0"/>
+          </a:p>
+        </p:txBody>
+      </p:sp>
+      <p:sp>
+        <p:nvSpPr>
+          <p:cNvPr id="5" name="Text 2"/>
+          <p:cNvSpPr/>
+          <p:nvPr/>
+        </p:nvSpPr>
+        <p:spPr>
+          <a:xfrm>
+            <a:off x="1691640" y="1783080"/>
+            <a:ext cx="10180015" cy="4663440"/>
+          </a:xfrm>
+          <a:prstGeom prst="rect">
+            <a:avLst/>
+          </a:prstGeom>
+          <a:noFill/>
+          <a:ln/>
+        </p:spPr>
+        <p:txBody>
+          <a:bodyPr wrap="square" lIns="0" tIns="0" rIns="0" bIns="0" rtlCol="0" anchor="t"/>
+          <a:lstStyle/>
+          <a:p>
+            <a:pPr algn="l" indent="0" marL="0">
+              <a:spcAft>
+                <a:spcPts val="800"/>
+              </a:spcAft>
+              <a:buNone/>
+            </a:pPr>
+            <a:r>
+              <a:rPr lang="en-US" sz="4000" b="1" dirty="0">
+                <a:solidFill>
+                  <a:srgbClr val="111111"/>
+                </a:solidFill>
+                <a:latin typeface="Times New Roman" pitchFamily="34" charset="0"/>
+                <a:ea typeface="Times New Roman" pitchFamily="34" charset="-122"/>
+                <a:cs typeface="Times New Roman" pitchFamily="34" charset="-120"/>
+              </a:rPr>
+              <a:t>Fill in the blanks:</a:t>
+            </a:r>
+            <a:endParaRPr lang="en-US" sz="4000" dirty="0"/>
+          </a:p>
+          <a:p>
+            <a:pPr algn="l" marL="342900" indent="-342900">
+              <a:spcAft>
+                <a:spcPts val="800"/>
+              </a:spcAft>
+              <a:buSzPct val="100000"/>
+              <a:buFont typeface="+mj-lt"/>
+              <a:buAutoNum type="arabicPeriod" startAt="1"/>
+            </a:pPr>
+            <a:r>
+              <a:rPr lang="en-US" sz="4000" dirty="0">
+                <a:solidFill>
+                  <a:srgbClr val="111111"/>
+                </a:solidFill>
+                <a:latin typeface="Times New Roman" pitchFamily="34" charset="0"/>
+                <a:ea typeface="Times New Roman" pitchFamily="34" charset="-122"/>
+                <a:cs typeface="Times New Roman" pitchFamily="34" charset="-120"/>
+              </a:rPr>
+              <a:t>Too few people to use resources is ______.</a:t>
+            </a:r>
+            <a:endParaRPr lang="en-US" sz="4000" dirty="0"/>
+          </a:p>
+          <a:p>
+            <a:pPr algn="l" marL="342900" indent="-342900">
+              <a:spcAft>
+                <a:spcPts val="800"/>
+              </a:spcAft>
+              <a:buSzPct val="100000"/>
+              <a:buFont typeface="+mj-lt"/>
+              <a:buAutoNum type="arabicPeriod" startAt="1"/>
+            </a:pPr>
+            <a:r>
+              <a:rPr lang="en-US" sz="4000" dirty="0">
+                <a:solidFill>
+                  <a:srgbClr val="111111"/>
+                </a:solidFill>
+                <a:latin typeface="Times New Roman" pitchFamily="34" charset="0"/>
+                <a:ea typeface="Times New Roman" pitchFamily="34" charset="-122"/>
+                <a:cs typeface="Times New Roman" pitchFamily="34" charset="-120"/>
+              </a:rPr>
+              <a:t>The ideal number of people is the ______ population.</a:t>
+            </a:r>
+            <a:endParaRPr lang="en-US" sz="4000" dirty="0"/>
+          </a:p>
+          <a:p>
+            <a:pPr algn="l" marL="342900" indent="-342900">
+              <a:spcAft>
+                <a:spcPts val="800"/>
+              </a:spcAft>
+              <a:buSzPct val="100000"/>
+              <a:buFont typeface="+mj-lt"/>
+              <a:buAutoNum type="arabicPeriod" startAt="1"/>
+            </a:pPr>
+            <a:r>
+              <a:rPr lang="en-US" sz="4000" dirty="0">
+                <a:solidFill>
+                  <a:srgbClr val="111111"/>
+                </a:solidFill>
+                <a:latin typeface="Times New Roman" pitchFamily="34" charset="0"/>
+                <a:ea typeface="Times New Roman" pitchFamily="34" charset="-122"/>
+                <a:cs typeface="Times New Roman" pitchFamily="34" charset="-120"/>
+              </a:rPr>
+              <a:t>Irrigation ______ the carrying capacity.</a:t>
+            </a:r>
+            <a:endParaRPr lang="en-US" sz="4000" dirty="0"/>
+          </a:p>
+        </p:txBody>
+      </p:sp>
+      <p:sp>
+        <p:nvSpPr>
+          <p:cNvPr id="25" name="Slide Number Placeholder 0"/>
+          <p:cNvSpPr>
+            <a:spLocks noGrp="1"/>
+          </p:cNvSpPr>
+          <p:nvPr>
+            <p:ph type="sldNum" sz="quarter" idx="4294967295"/>
+          </p:nvPr>
+        </p:nvSpPr>
+        <p:spPr>
+          <a:xfrm>
+            <a:off x="27432" y="91440"/>
+            <a:ext cx="585216" cy="475488"/>
+          </a:xfrm>
+          <a:prstGeom prst="rect">
+            <a:avLst/>
+          </a:prstGeom>
+          <a:extLst>
+            <a:ext uri="{C572A759-6A51-4108-AA02-DFA0A04FC94B}">
+              <ma14:wrappingTextBoxFlag xmlns:ma14="http://schemas.microsoft.com/office/mac/drawingml/2011/main" val="0"/>
+            </a:ext>
+          </a:extLst>
+        </p:spPr>
+        <p:txBody>
+          <a:bodyPr/>
+          <a:lstStyle>
+            <a:lvl1pPr>
+              <a:defRPr sz="2000">
+                <a:solidFill>
+                  <a:srgbClr val="FFFFFF"/>
+                </a:solidFill>
+                <a:latin typeface="Calibri"/>
+                <a:ea typeface="Calibri"/>
+                <a:cs typeface="Calibri"/>
+              </a:defRPr>
+            </a:lvl1pPr>
+          </a:lstStyle>
+          <a:p>
+            <a:pPr algn="ctr"/>
+            <a:fld id="{F7021451-1387-4CA6-816F-3879F97B5CBC}" type="slidenum">
+              <a:rPr b="1" lang="en-US"/>
+              <a:t>63</a:t>
+            </a:fld>
+            <a:endParaRPr lang="en-US"/>
+          </a:p>
+        </p:txBody>
+      </p:sp>
+    </p:spTree>
+  </p:cSld>
+  <p:clrMapOvr>
+    <a:masterClrMapping/>
+  </p:clrMapOvr>
+</p:sld>
+</file>
+
+<file path=ppt/slides/slide64.xml><?xml version="1.0" encoding="utf-8"?>
+<p:sld xmlns:a="http://schemas.openxmlformats.org/drawingml/2006/main" xmlns:r="http://schemas.openxmlformats.org/officeDocument/2006/relationships" xmlns:p="http://schemas.openxmlformats.org/presentationml/2006/main">
+  <p:cSld name="Slide 64">
+    <p:spTree>
+      <p:nvGrpSpPr>
+        <p:cNvPr id="1" name=""/>
+        <p:cNvGrpSpPr/>
+        <p:nvPr/>
+      </p:nvGrpSpPr>
+      <p:grpSpPr>
+        <a:xfrm>
+          <a:off x="0" y="0"/>
+          <a:ext cx="0" cy="0"/>
+          <a:chOff x="0" y="0"/>
+          <a:chExt cx="0" cy="0"/>
+        </a:xfrm>
+      </p:grpSpPr>
+      <p:sp>
+        <p:nvSpPr>
+          <p:cNvPr id="2" name="Text 0"/>
+          <p:cNvSpPr/>
+          <p:nvPr/>
+        </p:nvSpPr>
+        <p:spPr>
+          <a:xfrm>
+            <a:off x="457200" y="713232"/>
+            <a:ext cx="11368735" cy="274320"/>
+          </a:xfrm>
+          <a:prstGeom prst="rect">
+            <a:avLst/>
+          </a:prstGeom>
+          <a:noFill/>
+          <a:ln/>
+        </p:spPr>
+        <p:txBody>
+          <a:bodyPr wrap="square" lIns="0" tIns="0" rIns="0" bIns="0" rtlCol="0" anchor="ctr"/>
+          <a:lstStyle/>
+          <a:p>
+            <a:pPr algn="r" indent="0" marL="0">
+              <a:buNone/>
+            </a:pPr>
+            <a:r>
+              <a:rPr lang="en-US" sz="1400" b="1" dirty="0">
+                <a:solidFill>
+                  <a:srgbClr val="1C3F6E"/>
+                </a:solidFill>
+                <a:latin typeface="Calibri" pitchFamily="34" charset="0"/>
+                <a:ea typeface="Calibri" pitchFamily="34" charset="-122"/>
+                <a:cs typeface="Calibri" pitchFamily="34" charset="-120"/>
+              </a:rPr>
+              <a:t>HOMEWORK</a:t>
+            </a:r>
+            <a:endParaRPr lang="en-US" sz="1400" dirty="0"/>
+          </a:p>
+        </p:txBody>
+      </p:sp>
+      <p:pic>
+        <p:nvPicPr>
+          <p:cNvPr id="3" name="Image 0" descr="/home/claude/f4/img/minesec_sheet.png">    </p:cNvPr>
+          <p:cNvPicPr>
+            <a:picLocks noChangeAspect="1"/>
+          </p:cNvPicPr>
+          <p:nvPr/>
+        </p:nvPicPr>
+        <p:blipFill>
+          <a:blip r:embed="rId1"/>
+          <a:stretch>
+            <a:fillRect/>
+          </a:stretch>
+        </p:blipFill>
+        <p:spPr>
+          <a:xfrm>
+            <a:off x="0" y="658368"/>
+            <a:ext cx="5120640" cy="5833872"/>
+          </a:xfrm>
+          <a:prstGeom prst="rect">
+            <a:avLst/>
+          </a:prstGeom>
+        </p:spPr>
+      </p:pic>
+      <p:sp>
+        <p:nvSpPr>
+          <p:cNvPr id="4" name="Text 1"/>
+          <p:cNvSpPr/>
+          <p:nvPr/>
+        </p:nvSpPr>
+        <p:spPr>
+          <a:xfrm>
+            <a:off x="5349240" y="1005840"/>
+            <a:ext cx="6522415" cy="731520"/>
+          </a:xfrm>
+          <a:prstGeom prst="rect">
+            <a:avLst/>
+          </a:prstGeom>
+          <a:noFill/>
+          <a:ln/>
+        </p:spPr>
+        <p:txBody>
+          <a:bodyPr wrap="square" lIns="0" tIns="0" rIns="0" bIns="0" rtlCol="0" anchor="ctr">
+            <a:normAutofit/>
+          </a:bodyPr>
+          <a:lstStyle/>
+          <a:p>
+            <a:pPr algn="ctr" indent="0" marL="0">
+              <a:buNone/>
+            </a:pPr>
+            <a:r>
+              <a:rPr lang="en-US" sz="3600" b="1" dirty="0">
+                <a:solidFill>
+                  <a:srgbClr val="990011"/>
+                </a:solidFill>
+                <a:latin typeface="Times New Roman" pitchFamily="34" charset="0"/>
+                <a:ea typeface="Times New Roman" pitchFamily="34" charset="-122"/>
+                <a:cs typeface="Times New Roman" pitchFamily="34" charset="-120"/>
+              </a:rPr>
+              <a:t>Homework</a:t>
+            </a:r>
+            <a:endParaRPr lang="en-US" sz="3600" dirty="0"/>
+          </a:p>
+        </p:txBody>
+      </p:sp>
+      <p:sp>
+        <p:nvSpPr>
+          <p:cNvPr id="5" name="Text 2"/>
+          <p:cNvSpPr/>
+          <p:nvPr/>
+        </p:nvSpPr>
+        <p:spPr>
+          <a:xfrm>
+            <a:off x="5349240" y="1783080"/>
+            <a:ext cx="6522415" cy="4663440"/>
+          </a:xfrm>
+          <a:prstGeom prst="rect">
+            <a:avLst/>
+          </a:prstGeom>
+          <a:noFill/>
+          <a:ln/>
+        </p:spPr>
+        <p:txBody>
+          <a:bodyPr wrap="square" lIns="0" tIns="0" rIns="0" bIns="0" rtlCol="0" anchor="t"/>
+          <a:lstStyle/>
+          <a:p>
+            <a:pPr algn="l" indent="0" marL="0">
+              <a:spcAft>
+                <a:spcPts val="800"/>
+              </a:spcAft>
+              <a:buNone/>
+            </a:pPr>
+            <a:r>
+              <a:rPr lang="en-US" sz="4000" dirty="0">
+                <a:solidFill>
+                  <a:srgbClr val="111111"/>
+                </a:solidFill>
+                <a:latin typeface="Times New Roman" pitchFamily="34" charset="0"/>
+                <a:ea typeface="Times New Roman" pitchFamily="34" charset="-122"/>
+                <a:cs typeface="Times New Roman" pitchFamily="34" charset="-120"/>
+              </a:rPr>
+              <a:t>Give the date of Malthus's essay on population.</a:t>
+            </a:r>
+            <a:endParaRPr lang="en-US" sz="4000" dirty="0"/>
+          </a:p>
+        </p:txBody>
+      </p:sp>
+      <p:sp>
+        <p:nvSpPr>
+          <p:cNvPr id="25" name="Slide Number Placeholder 0"/>
+          <p:cNvSpPr>
+            <a:spLocks noGrp="1"/>
+          </p:cNvSpPr>
+          <p:nvPr>
+            <p:ph type="sldNum" sz="quarter" idx="4294967295"/>
+          </p:nvPr>
+        </p:nvSpPr>
+        <p:spPr>
+          <a:xfrm>
+            <a:off x="27432" y="91440"/>
+            <a:ext cx="585216" cy="475488"/>
+          </a:xfrm>
+          <a:prstGeom prst="rect">
+            <a:avLst/>
+          </a:prstGeom>
+          <a:extLst>
+            <a:ext uri="{C572A759-6A51-4108-AA02-DFA0A04FC94B}">
+              <ma14:wrappingTextBoxFlag xmlns:ma14="http://schemas.microsoft.com/office/mac/drawingml/2011/main" val="0"/>
+            </a:ext>
+          </a:extLst>
+        </p:spPr>
+        <p:txBody>
+          <a:bodyPr/>
+          <a:lstStyle>
+            <a:lvl1pPr>
+              <a:defRPr sz="2000">
+                <a:solidFill>
+                  <a:srgbClr val="FFFFFF"/>
+                </a:solidFill>
+                <a:latin typeface="Calibri"/>
+                <a:ea typeface="Calibri"/>
+                <a:cs typeface="Calibri"/>
+              </a:defRPr>
+            </a:lvl1pPr>
+          </a:lstStyle>
+          <a:p>
+            <a:pPr algn="ctr"/>
+            <a:fld id="{F7021451-1387-4CA6-816F-3879F97B5CBC}" type="slidenum">
+              <a:rPr b="1" lang="en-US"/>
+              <a:t>64</a:t>
+            </a:fld>
+            <a:endParaRPr lang="en-US"/>
+          </a:p>
+        </p:txBody>
+      </p:sp>
+    </p:spTree>
+  </p:cSld>
+  <p:clrMapOvr>
+    <a:masterClrMapping/>
+  </p:clrMapOvr>
+</p:sld>
+</file>
+
+<file path=ppt/slides/slide65.xml><?xml version="1.0" encoding="utf-8"?>
+<p:sld xmlns:a="http://schemas.openxmlformats.org/drawingml/2006/main" xmlns:r="http://schemas.openxmlformats.org/officeDocument/2006/relationships" xmlns:p="http://schemas.openxmlformats.org/presentationml/2006/main">
+  <p:cSld name="Slide 65">
+    <p:spTree>
+      <p:nvGrpSpPr>
+        <p:cNvPr id="1" name=""/>
+        <p:cNvGrpSpPr/>
+        <p:nvPr/>
+      </p:nvGrpSpPr>
+      <p:grpSpPr>
+        <a:xfrm>
+          <a:off x="0" y="0"/>
+          <a:ext cx="0" cy="0"/>
+          <a:chOff x="0" y="0"/>
+          <a:chExt cx="0" cy="0"/>
+        </a:xfrm>
+      </p:grpSpPr>
+      <p:sp>
+        <p:nvSpPr>
+          <p:cNvPr id="2" name="Text 0"/>
+          <p:cNvSpPr/>
+          <p:nvPr/>
+        </p:nvSpPr>
+        <p:spPr>
+          <a:xfrm>
+            <a:off x="457200" y="713232"/>
+            <a:ext cx="11368735" cy="274320"/>
+          </a:xfrm>
+          <a:prstGeom prst="rect">
+            <a:avLst/>
+          </a:prstGeom>
+          <a:noFill/>
+          <a:ln/>
+        </p:spPr>
+        <p:txBody>
+          <a:bodyPr wrap="square" lIns="0" tIns="0" rIns="0" bIns="0" rtlCol="0" anchor="ctr"/>
+          <a:lstStyle/>
+          <a:p>
+            <a:pPr algn="r" indent="0" marL="0">
+              <a:buNone/>
+            </a:pPr>
+            <a:r>
+              <a:rPr lang="en-US" sz="1400" b="1" dirty="0">
+                <a:solidFill>
+                  <a:srgbClr val="1C3F6E"/>
+                </a:solidFill>
+                <a:latin typeface="Calibri" pitchFamily="34" charset="0"/>
+                <a:ea typeface="Calibri" pitchFamily="34" charset="-122"/>
+                <a:cs typeface="Calibri" pitchFamily="34" charset="-120"/>
+              </a:rPr>
+              <a:t>NEXT LESSON</a:t>
+            </a:r>
+            <a:endParaRPr lang="en-US" sz="1400" dirty="0"/>
+          </a:p>
+        </p:txBody>
+      </p:sp>
+      <p:pic>
+        <p:nvPicPr>
+          <p:cNvPr id="3" name="Image 0" descr="/home/claude/f4/img/minesec_sheet.png">    </p:cNvPr>
+          <p:cNvPicPr>
+            <a:picLocks noChangeAspect="1"/>
+          </p:cNvPicPr>
+          <p:nvPr/>
+        </p:nvPicPr>
+        <p:blipFill>
+          <a:blip r:embed="rId1"/>
+          <a:stretch>
+            <a:fillRect/>
+          </a:stretch>
+        </p:blipFill>
+        <p:spPr>
+          <a:xfrm>
+            <a:off x="0" y="658368"/>
+            <a:ext cx="5120640" cy="5833872"/>
+          </a:xfrm>
+          <a:prstGeom prst="rect">
+            <a:avLst/>
+          </a:prstGeom>
+        </p:spPr>
+      </p:pic>
+      <p:sp>
+        <p:nvSpPr>
+          <p:cNvPr id="4" name="Text 1"/>
+          <p:cNvSpPr/>
+          <p:nvPr/>
+        </p:nvSpPr>
+        <p:spPr>
+          <a:xfrm>
+            <a:off x="5349240" y="1005840"/>
+            <a:ext cx="6522415" cy="731520"/>
+          </a:xfrm>
+          <a:prstGeom prst="rect">
+            <a:avLst/>
+          </a:prstGeom>
+          <a:noFill/>
+          <a:ln/>
+        </p:spPr>
+        <p:txBody>
+          <a:bodyPr wrap="square" lIns="0" tIns="0" rIns="0" bIns="0" rtlCol="0" anchor="ctr">
+            <a:normAutofit/>
+          </a:bodyPr>
+          <a:lstStyle/>
+          <a:p>
+            <a:pPr algn="ctr" indent="0" marL="0">
+              <a:buNone/>
+            </a:pPr>
+            <a:r>
+              <a:rPr lang="en-US" sz="3600" b="1" dirty="0">
+                <a:solidFill>
+                  <a:srgbClr val="990011"/>
+                </a:solidFill>
+                <a:latin typeface="Times New Roman" pitchFamily="34" charset="0"/>
+                <a:ea typeface="Times New Roman" pitchFamily="34" charset="-122"/>
+                <a:cs typeface="Times New Roman" pitchFamily="34" charset="-120"/>
+              </a:rPr>
+              <a:t>Next Lesson</a:t>
+            </a:r>
+            <a:endParaRPr lang="en-US" sz="3600" dirty="0"/>
+          </a:p>
+        </p:txBody>
+      </p:sp>
+      <p:sp>
+        <p:nvSpPr>
+          <p:cNvPr id="5" name="Text 2"/>
+          <p:cNvSpPr/>
+          <p:nvPr/>
+        </p:nvSpPr>
+        <p:spPr>
+          <a:xfrm>
+            <a:off x="5349240" y="1783080"/>
+            <a:ext cx="6522415" cy="4663440"/>
+          </a:xfrm>
+          <a:prstGeom prst="rect">
+            <a:avLst/>
+          </a:prstGeom>
+          <a:noFill/>
+          <a:ln/>
+        </p:spPr>
+        <p:txBody>
+          <a:bodyPr wrap="square" lIns="0" tIns="0" rIns="0" bIns="0" rtlCol="0" anchor="ctr"/>
+          <a:lstStyle/>
+          <a:p>
+            <a:pPr algn="ctr" indent="0" marL="0">
+              <a:spcAft>
+                <a:spcPts val="800"/>
+              </a:spcAft>
+              <a:buNone/>
+            </a:pPr>
+            <a:r>
+              <a:rPr lang="en-US" sz="4000" b="1" dirty="0">
+                <a:solidFill>
+                  <a:srgbClr val="111111"/>
+                </a:solidFill>
+                <a:latin typeface="Times New Roman" pitchFamily="34" charset="0"/>
+                <a:ea typeface="Times New Roman" pitchFamily="34" charset="-122"/>
+                <a:cs typeface="Times New Roman" pitchFamily="34" charset="-120"/>
+              </a:rPr>
+              <a:t>Our next lesson will be on:</a:t>
+            </a:r>
+            <a:endParaRPr lang="en-US" sz="4000" dirty="0"/>
+          </a:p>
+          <a:p>
+            <a:pPr algn="ctr" indent="0" marL="0">
+              <a:spcAft>
+                <a:spcPts val="800"/>
+              </a:spcAft>
+              <a:buNone/>
+            </a:pPr>
+            <a:r>
+              <a:rPr lang="en-US" sz="4000" b="1" dirty="0">
+                <a:solidFill>
+                  <a:srgbClr val="990011"/>
+                </a:solidFill>
+                <a:latin typeface="Times New Roman" pitchFamily="34" charset="0"/>
+                <a:ea typeface="Times New Roman" pitchFamily="34" charset="-122"/>
+                <a:cs typeface="Times New Roman" pitchFamily="34" charset="-120"/>
+              </a:rPr>
+              <a:t>Lesson 18: Theories of Population and Resources: Malthus and Boserup</a:t>
+            </a:r>
+            <a:endParaRPr lang="en-US" sz="4000" dirty="0"/>
+          </a:p>
+        </p:txBody>
+      </p:sp>
+      <p:sp>
+        <p:nvSpPr>
+          <p:cNvPr id="25" name="Slide Number Placeholder 0"/>
+          <p:cNvSpPr>
+            <a:spLocks noGrp="1"/>
+          </p:cNvSpPr>
+          <p:nvPr>
+            <p:ph type="sldNum" sz="quarter" idx="4294967295"/>
+          </p:nvPr>
+        </p:nvSpPr>
+        <p:spPr>
+          <a:xfrm>
+            <a:off x="27432" y="91440"/>
+            <a:ext cx="585216" cy="475488"/>
+          </a:xfrm>
+          <a:prstGeom prst="rect">
+            <a:avLst/>
+          </a:prstGeom>
+          <a:extLst>
+            <a:ext uri="{C572A759-6A51-4108-AA02-DFA0A04FC94B}">
+              <ma14:wrappingTextBoxFlag xmlns:ma14="http://schemas.microsoft.com/office/mac/drawingml/2011/main" val="0"/>
+            </a:ext>
+          </a:extLst>
+        </p:spPr>
+        <p:txBody>
+          <a:bodyPr/>
+          <a:lstStyle>
+            <a:lvl1pPr>
+              <a:defRPr sz="2000">
+                <a:solidFill>
+                  <a:srgbClr val="FFFFFF"/>
+                </a:solidFill>
+                <a:latin typeface="Calibri"/>
+                <a:ea typeface="Calibri"/>
+                <a:cs typeface="Calibri"/>
+              </a:defRPr>
+            </a:lvl1pPr>
+          </a:lstStyle>
+          <a:p>
+            <a:pPr algn="ctr"/>
+            <a:fld id="{F7021451-1387-4CA6-816F-3879F97B5CBC}" type="slidenum">
+              <a:rPr b="1" lang="en-US"/>
+              <a:t>65</a:t>
+            </a:fld>
+            <a:endParaRPr lang="en-US"/>
+          </a:p>
+        </p:txBody>
+      </p:sp>
+    </p:spTree>
+  </p:cSld>
+  <p:clrMapOvr>
+    <a:masterClrMapping/>
+  </p:clrMapOvr>
+</p:sld>
+</file>
+
+<file path=ppt/slides/slide66.xml><?xml version="1.0" encoding="utf-8"?>
+<p:sld xmlns:a="http://schemas.openxmlformats.org/drawingml/2006/main" xmlns:r="http://schemas.openxmlformats.org/officeDocument/2006/relationships" xmlns:p="http://schemas.openxmlformats.org/presentationml/2006/main">
+  <p:cSld name="Slide 66">
+    <p:spTree>
+      <p:nvGrpSpPr>
+        <p:cNvPr id="1" name=""/>
+        <p:cNvGrpSpPr/>
+        <p:nvPr/>
+      </p:nvGrpSpPr>
+      <p:grpSpPr>
+        <a:xfrm>
+          <a:off x="0" y="0"/>
+          <a:ext cx="0" cy="0"/>
+          <a:chOff x="0" y="0"/>
+          <a:chExt cx="0" cy="0"/>
+        </a:xfrm>
+      </p:grpSpPr>
+      <p:sp>
+        <p:nvSpPr>
+          <p:cNvPr id="2" name="Text 0"/>
+          <p:cNvSpPr/>
+          <p:nvPr/>
+        </p:nvSpPr>
+        <p:spPr>
+          <a:xfrm>
+            <a:off x="457200" y="713232"/>
+            <a:ext cx="11368735" cy="274320"/>
+          </a:xfrm>
+          <a:prstGeom prst="rect">
+            <a:avLst/>
+          </a:prstGeom>
+          <a:noFill/>
+          <a:ln/>
+        </p:spPr>
+        <p:txBody>
+          <a:bodyPr wrap="square" lIns="0" tIns="0" rIns="0" bIns="0" rtlCol="0" anchor="ctr"/>
+          <a:lstStyle/>
+          <a:p>
+            <a:pPr algn="r" indent="0" marL="0">
+              <a:buNone/>
+            </a:pPr>
+            <a:r>
+              <a:rPr lang="en-US" sz="1400" b="1" dirty="0">
+                <a:solidFill>
+                  <a:srgbClr val="1C3F6E"/>
+                </a:solidFill>
+                <a:latin typeface="Calibri" pitchFamily="34" charset="0"/>
+                <a:ea typeface="Calibri" pitchFamily="34" charset="-122"/>
+                <a:cs typeface="Calibri" pitchFamily="34" charset="-120"/>
+              </a:rPr>
+              <a:t>BILINGUAL GAME</a:t>
+            </a:r>
+            <a:endParaRPr lang="en-US" sz="1400" dirty="0"/>
+          </a:p>
+        </p:txBody>
+      </p:sp>
+      <p:sp>
+        <p:nvSpPr>
+          <p:cNvPr id="3" name="Text 1"/>
+          <p:cNvSpPr/>
+          <p:nvPr/>
+        </p:nvSpPr>
+        <p:spPr>
+          <a:xfrm>
+            <a:off x="457200" y="1005840"/>
+            <a:ext cx="11277295" cy="731520"/>
+          </a:xfrm>
+          <a:prstGeom prst="rect">
+            <a:avLst/>
+          </a:prstGeom>
+          <a:noFill/>
+          <a:ln/>
+        </p:spPr>
+        <p:txBody>
+          <a:bodyPr wrap="square" lIns="0" tIns="0" rIns="0" bIns="0" rtlCol="0" anchor="ctr"/>
+          <a:lstStyle/>
+          <a:p>
+            <a:pPr algn="ctr" indent="0" marL="0">
+              <a:buNone/>
+            </a:pPr>
+            <a:r>
+              <a:rPr lang="en-US" sz="3600" b="1" dirty="0">
+                <a:solidFill>
+                  <a:srgbClr val="990011"/>
+                </a:solidFill>
+                <a:latin typeface="Times New Roman" pitchFamily="34" charset="0"/>
+                <a:ea typeface="Times New Roman" pitchFamily="34" charset="-122"/>
+                <a:cs typeface="Times New Roman" pitchFamily="34" charset="-120"/>
+              </a:rPr>
               <a:t>Bilingual Game (Jeu Bilingue)</a:t>
             </a:r>
             <a:endParaRPr lang="en-US" sz="3600" dirty="0"/>
@@ -21191,7 +24060,7 @@
       </p:sp>
       <p:graphicFrame>
         <p:nvGraphicFramePr>
-          <p:cNvPr id="60" name="Table 0"/>
+          <p:cNvPr id="67" name="Table 0"/>
           <p:cNvGraphicFramePr>
             <a:graphicFrameLocks noGrp="1"/>
           </p:cNvGraphicFramePr>
@@ -22227,7 +25096,7 @@
             <a:pPr algn="ctr"/>
             <a:fld id="{F7021451-1387-4CA6-816F-3879F97B5CBC}" type="slidenum">
               <a:rPr b="1" lang="en-US"/>
-              <a:t>59</a:t>
+              <a:t>66</a:t>
             </a:fld>
             <a:endParaRPr lang="en-US"/>
           </a:p>
@@ -22241,9 +25110,9 @@
 </p:sld>
 </file>
 
-<file path=ppt/slides/slide6.xml><?xml version="1.0" encoding="utf-8"?>
+<file path=ppt/slides/slide67.xml><?xml version="1.0" encoding="utf-8"?>
 <p:sld xmlns:a="http://schemas.openxmlformats.org/drawingml/2006/main" xmlns:r="http://schemas.openxmlformats.org/officeDocument/2006/relationships" xmlns:p="http://schemas.openxmlformats.org/presentationml/2006/main">
-  <p:cSld name="Slide 6">
+  <p:cSld name="Slide 67">
     <p:spTree>
       <p:nvGrpSpPr>
         <p:cNvPr id="1" name=""/>
@@ -22291,46 +25160,22 @@
                 <a:ea typeface="Calibri" pitchFamily="34" charset="-122"/>
                 <a:cs typeface="Calibri" pitchFamily="34" charset="-120"/>
               </a:rPr>
-              <a:t>LESSON PLAN</a:t>
+              <a:t>LOGBOOK</a:t>
             </a:r>
             <a:endParaRPr lang="en-US" sz="1400" dirty="0"/>
           </a:p>
         </p:txBody>
       </p:sp>
-      <p:pic>
-        <p:nvPicPr>
-          <p:cNvPr id="3" name="Image 0" descr="/home/claude/f4/img/minesec_sheet.png">    </p:cNvPr>
-          <p:cNvPicPr>
-            <a:picLocks noChangeAspect="1"/>
-          </p:cNvPicPr>
-          <p:nvPr/>
-        </p:nvPicPr>
-        <p:blipFill>
-          <a:blip r:embed="rId1"/>
-          <a:stretch>
-            <a:fillRect/>
-          </a:stretch>
-        </p:blipFill>
-        <p:spPr>
-          <a:xfrm>
-            <a:off x="0" y="658368"/>
-            <a:ext cx="2468880" cy="5833872"/>
-          </a:xfrm>
-          <a:prstGeom prst="rect">
-            <a:avLst/>
-          </a:prstGeom>
-        </p:spPr>
-      </p:pic>
-      <p:sp>
-        <p:nvSpPr>
-          <p:cNvPr id="4" name="Text 1"/>
+      <p:sp>
+        <p:nvSpPr>
+          <p:cNvPr id="3" name="Text 1"/>
           <p:cNvSpPr/>
           <p:nvPr/>
         </p:nvSpPr>
         <p:spPr>
           <a:xfrm>
-            <a:off x="2697480" y="1005840"/>
-            <a:ext cx="9174175" cy="731520"/>
+            <a:off x="457200" y="1005840"/>
+            <a:ext cx="11277295" cy="731520"/>
           </a:xfrm>
           <a:prstGeom prst="rect">
             <a:avLst/>
@@ -22339,9 +25184,7 @@
           <a:ln/>
         </p:spPr>
         <p:txBody>
-          <a:bodyPr wrap="square" lIns="0" tIns="0" rIns="0" bIns="0" rtlCol="0" anchor="ctr">
-            <a:normAutofit/>
-          </a:bodyPr>
+          <a:bodyPr wrap="square" lIns="0" tIns="0" rIns="0" bIns="0" rtlCol="0" anchor="ctr"/>
           <a:lstStyle/>
           <a:p>
             <a:pPr algn="ctr" indent="0" marL="0">
@@ -22356,311 +25199,6 @@
                 <a:ea typeface="Times New Roman" pitchFamily="34" charset="-122"/>
                 <a:cs typeface="Times New Roman" pitchFamily="34" charset="-120"/>
               </a:rPr>
-              <a:t>Lesson Plan</a:t>
-            </a:r>
-            <a:endParaRPr lang="en-US" sz="3600" dirty="0"/>
-          </a:p>
-        </p:txBody>
-      </p:sp>
-      <p:sp>
-        <p:nvSpPr>
-          <p:cNvPr id="5" name="Text 2"/>
-          <p:cNvSpPr/>
-          <p:nvPr/>
-        </p:nvSpPr>
-        <p:spPr>
-          <a:xfrm>
-            <a:off x="2697480" y="1783080"/>
-            <a:ext cx="9174175" cy="4663440"/>
-          </a:xfrm>
-          <a:prstGeom prst="rect">
-            <a:avLst/>
-          </a:prstGeom>
-          <a:noFill/>
-          <a:ln/>
-        </p:spPr>
-        <p:txBody>
-          <a:bodyPr wrap="square" lIns="0" tIns="0" rIns="0" bIns="0" rtlCol="0" anchor="t"/>
-          <a:lstStyle/>
-          <a:p>
-            <a:pPr algn="l" marL="342900" indent="-342900">
-              <a:spcAft>
-                <a:spcPts val="800"/>
-              </a:spcAft>
-              <a:buSzPct val="100000"/>
-              <a:buFont typeface="+mj-lt"/>
-              <a:buAutoNum type="arabicPeriod" startAt="1"/>
-            </a:pPr>
-            <a:r>
-              <a:rPr lang="en-US" sz="4000" dirty="0">
-                <a:solidFill>
-                  <a:srgbClr val="111111"/>
-                </a:solidFill>
-                <a:latin typeface="Times New Roman" pitchFamily="34" charset="0"/>
-                <a:ea typeface="Times New Roman" pitchFamily="34" charset="-122"/>
-                <a:cs typeface="Times New Roman" pitchFamily="34" charset="-120"/>
-              </a:rPr>
-              <a:t>Correction of the homework</a:t>
-            </a:r>
-            <a:endParaRPr lang="en-US" sz="4000" dirty="0"/>
-          </a:p>
-          <a:p>
-            <a:pPr algn="l" marL="342900" indent="-342900">
-              <a:spcAft>
-                <a:spcPts val="800"/>
-              </a:spcAft>
-              <a:buSzPct val="100000"/>
-              <a:buFont typeface="+mj-lt"/>
-              <a:buAutoNum type="arabicPeriod" startAt="1"/>
-            </a:pPr>
-            <a:r>
-              <a:rPr lang="en-US" sz="4000" dirty="0">
-                <a:solidFill>
-                  <a:srgbClr val="111111"/>
-                </a:solidFill>
-                <a:latin typeface="Times New Roman" pitchFamily="34" charset="0"/>
-                <a:ea typeface="Times New Roman" pitchFamily="34" charset="-122"/>
-                <a:cs typeface="Times New Roman" pitchFamily="34" charset="-120"/>
-              </a:rPr>
-              <a:t>Objectives and recall</a:t>
-            </a:r>
-            <a:endParaRPr lang="en-US" sz="4000" dirty="0"/>
-          </a:p>
-          <a:p>
-            <a:pPr algn="l" marL="342900" indent="-342900">
-              <a:spcAft>
-                <a:spcPts val="800"/>
-              </a:spcAft>
-              <a:buSzPct val="100000"/>
-              <a:buFont typeface="+mj-lt"/>
-              <a:buAutoNum type="arabicPeriod" startAt="1"/>
-            </a:pPr>
-            <a:r>
-              <a:rPr lang="en-US" sz="4000" dirty="0">
-                <a:solidFill>
-                  <a:srgbClr val="111111"/>
-                </a:solidFill>
-                <a:latin typeface="Times New Roman" pitchFamily="34" charset="0"/>
-                <a:ea typeface="Times New Roman" pitchFamily="34" charset="-122"/>
-                <a:cs typeface="Times New Roman" pitchFamily="34" charset="-120"/>
-              </a:rPr>
-              <a:t>Real-life situation and action to take</a:t>
-            </a:r>
-            <a:endParaRPr lang="en-US" sz="4000" dirty="0"/>
-          </a:p>
-          <a:p>
-            <a:pPr algn="l" marL="342900" indent="-342900">
-              <a:spcAft>
-                <a:spcPts val="800"/>
-              </a:spcAft>
-              <a:buSzPct val="100000"/>
-              <a:buFont typeface="+mj-lt"/>
-              <a:buAutoNum type="arabicPeriod" startAt="1"/>
-            </a:pPr>
-            <a:r>
-              <a:rPr lang="en-US" sz="4000" dirty="0">
-                <a:solidFill>
-                  <a:srgbClr val="111111"/>
-                </a:solidFill>
-                <a:latin typeface="Times New Roman" pitchFamily="34" charset="0"/>
-                <a:ea typeface="Times New Roman" pitchFamily="34" charset="-122"/>
-                <a:cs typeface="Times New Roman" pitchFamily="34" charset="-120"/>
-              </a:rPr>
-              <a:t>Learning activities</a:t>
-            </a:r>
-            <a:endParaRPr lang="en-US" sz="4000" dirty="0"/>
-          </a:p>
-          <a:p>
-            <a:pPr algn="l" marL="342900" indent="-342900">
-              <a:spcAft>
-                <a:spcPts val="800"/>
-              </a:spcAft>
-              <a:buSzPct val="100000"/>
-              <a:buFont typeface="+mj-lt"/>
-              <a:buAutoNum type="arabicPeriod" startAt="1"/>
-            </a:pPr>
-            <a:r>
-              <a:rPr lang="en-US" sz="4000" dirty="0">
-                <a:solidFill>
-                  <a:srgbClr val="111111"/>
-                </a:solidFill>
-                <a:latin typeface="Times New Roman" pitchFamily="34" charset="0"/>
-                <a:ea typeface="Times New Roman" pitchFamily="34" charset="-122"/>
-                <a:cs typeface="Times New Roman" pitchFamily="34" charset="-120"/>
-              </a:rPr>
-              <a:t>Board summary</a:t>
-            </a:r>
-            <a:endParaRPr lang="en-US" sz="4000" dirty="0"/>
-          </a:p>
-          <a:p>
-            <a:pPr algn="l" marL="342900" indent="-342900">
-              <a:spcAft>
-                <a:spcPts val="800"/>
-              </a:spcAft>
-              <a:buSzPct val="100000"/>
-              <a:buFont typeface="+mj-lt"/>
-              <a:buAutoNum type="arabicPeriod" startAt="1"/>
-            </a:pPr>
-            <a:r>
-              <a:rPr lang="en-US" sz="4000" dirty="0">
-                <a:solidFill>
-                  <a:srgbClr val="111111"/>
-                </a:solidFill>
-                <a:latin typeface="Times New Roman" pitchFamily="34" charset="0"/>
-                <a:ea typeface="Times New Roman" pitchFamily="34" charset="-122"/>
-                <a:cs typeface="Times New Roman" pitchFamily="34" charset="-120"/>
-              </a:rPr>
-              <a:t>Evaluation, remediation and homework</a:t>
-            </a:r>
-            <a:endParaRPr lang="en-US" sz="4000" dirty="0"/>
-          </a:p>
-        </p:txBody>
-      </p:sp>
-      <p:sp>
-        <p:nvSpPr>
-          <p:cNvPr id="25" name="Slide Number Placeholder 0"/>
-          <p:cNvSpPr>
-            <a:spLocks noGrp="1"/>
-          </p:cNvSpPr>
-          <p:nvPr>
-            <p:ph type="sldNum" sz="quarter" idx="4294967295"/>
-          </p:nvPr>
-        </p:nvSpPr>
-        <p:spPr>
-          <a:xfrm>
-            <a:off x="27432" y="91440"/>
-            <a:ext cx="585216" cy="475488"/>
-          </a:xfrm>
-          <a:prstGeom prst="rect">
-            <a:avLst/>
-          </a:prstGeom>
-          <a:extLst>
-            <a:ext uri="{C572A759-6A51-4108-AA02-DFA0A04FC94B}">
-              <ma14:wrappingTextBoxFlag xmlns:ma14="http://schemas.microsoft.com/office/mac/drawingml/2011/main" val="0"/>
-            </a:ext>
-          </a:extLst>
-        </p:spPr>
-        <p:txBody>
-          <a:bodyPr/>
-          <a:lstStyle>
-            <a:lvl1pPr>
-              <a:defRPr sz="2000">
-                <a:solidFill>
-                  <a:srgbClr val="FFFFFF"/>
-                </a:solidFill>
-                <a:latin typeface="Calibri"/>
-                <a:ea typeface="Calibri"/>
-                <a:cs typeface="Calibri"/>
-              </a:defRPr>
-            </a:lvl1pPr>
-          </a:lstStyle>
-          <a:p>
-            <a:pPr algn="ctr"/>
-            <a:fld id="{F7021451-1387-4CA6-816F-3879F97B5CBC}" type="slidenum">
-              <a:rPr b="1" lang="en-US"/>
-              <a:t>6</a:t>
-            </a:fld>
-            <a:endParaRPr lang="en-US"/>
-          </a:p>
-        </p:txBody>
-      </p:sp>
-    </p:spTree>
-  </p:cSld>
-  <p:clrMapOvr>
-    <a:masterClrMapping/>
-  </p:clrMapOvr>
-</p:sld>
-</file>
-
-<file path=ppt/slides/slide60.xml><?xml version="1.0" encoding="utf-8"?>
-<p:sld xmlns:a="http://schemas.openxmlformats.org/drawingml/2006/main" xmlns:r="http://schemas.openxmlformats.org/officeDocument/2006/relationships" xmlns:p="http://schemas.openxmlformats.org/presentationml/2006/main">
-  <p:cSld name="Slide 60">
-    <p:spTree>
-      <p:nvGrpSpPr>
-        <p:cNvPr id="1" name=""/>
-        <p:cNvGrpSpPr/>
-        <p:nvPr/>
-      </p:nvGrpSpPr>
-      <p:grpSpPr>
-        <a:xfrm>
-          <a:off x="0" y="0"/>
-          <a:ext cx="0" cy="0"/>
-          <a:chOff x="0" y="0"/>
-          <a:chExt cx="0" cy="0"/>
-        </a:xfrm>
-      </p:grpSpPr>
-      <p:sp>
-        <p:nvSpPr>
-          <p:cNvPr id="2" name="Text 0"/>
-          <p:cNvSpPr/>
-          <p:nvPr/>
-        </p:nvSpPr>
-        <p:spPr>
-          <a:xfrm>
-            <a:off x="457200" y="713232"/>
-            <a:ext cx="11368735" cy="274320"/>
-          </a:xfrm>
-          <a:prstGeom prst="rect">
-            <a:avLst/>
-          </a:prstGeom>
-          <a:noFill/>
-          <a:ln/>
-        </p:spPr>
-        <p:txBody>
-          <a:bodyPr wrap="square" lIns="0" tIns="0" rIns="0" bIns="0" rtlCol="0" anchor="ctr"/>
-          <a:lstStyle/>
-          <a:p>
-            <a:pPr algn="r" indent="0" marL="0">
-              <a:buNone/>
-            </a:pPr>
-            <a:r>
-              <a:rPr lang="en-US" sz="1400" b="1" dirty="0">
-                <a:solidFill>
-                  <a:srgbClr val="1C3F6E"/>
-                </a:solidFill>
-                <a:latin typeface="Calibri" pitchFamily="34" charset="0"/>
-                <a:ea typeface="Calibri" pitchFamily="34" charset="-122"/>
-                <a:cs typeface="Calibri" pitchFamily="34" charset="-120"/>
-              </a:rPr>
-              <a:t>LOGBOOK</a:t>
-            </a:r>
-            <a:endParaRPr lang="en-US" sz="1400" dirty="0"/>
-          </a:p>
-        </p:txBody>
-      </p:sp>
-      <p:sp>
-        <p:nvSpPr>
-          <p:cNvPr id="3" name="Text 1"/>
-          <p:cNvSpPr/>
-          <p:nvPr/>
-        </p:nvSpPr>
-        <p:spPr>
-          <a:xfrm>
-            <a:off x="457200" y="1005840"/>
-            <a:ext cx="11277295" cy="731520"/>
-          </a:xfrm>
-          <a:prstGeom prst="rect">
-            <a:avLst/>
-          </a:prstGeom>
-          <a:noFill/>
-          <a:ln/>
-        </p:spPr>
-        <p:txBody>
-          <a:bodyPr wrap="square" lIns="0" tIns="0" rIns="0" bIns="0" rtlCol="0" anchor="ctr"/>
-          <a:lstStyle/>
-          <a:p>
-            <a:pPr algn="ctr" indent="0" marL="0">
-              <a:buNone/>
-            </a:pPr>
-            <a:r>
-              <a:rPr lang="en-US" sz="3600" b="1" dirty="0">
-                <a:solidFill>
-                  <a:srgbClr val="990011"/>
-                </a:solidFill>
-                <a:latin typeface="Times New Roman" pitchFamily="34" charset="0"/>
-                <a:ea typeface="Times New Roman" pitchFamily="34" charset="-122"/>
-                <a:cs typeface="Times New Roman" pitchFamily="34" charset="-120"/>
-              </a:rPr>
               <a:t>Official Logbook (1/2)</a:t>
             </a:r>
             <a:endParaRPr lang="en-US" sz="3600" dirty="0"/>
@@ -22669,7 +25207,7 @@
       </p:sp>
       <p:graphicFrame>
         <p:nvGraphicFramePr>
-          <p:cNvPr id="61" name="Table 0"/>
+          <p:cNvPr id="68" name="Table 0"/>
           <p:cNvGraphicFramePr>
             <a:graphicFrameLocks noGrp="1"/>
           </p:cNvGraphicFramePr>
@@ -23291,7 +25829,7 @@
             <a:pPr algn="ctr"/>
             <a:fld id="{F7021451-1387-4CA6-816F-3879F97B5CBC}" type="slidenum">
               <a:rPr b="1" lang="en-US"/>
-              <a:t>60</a:t>
+              <a:t>67</a:t>
             </a:fld>
             <a:endParaRPr lang="en-US"/>
           </a:p>
@@ -23305,9 +25843,9 @@
 </p:sld>
 </file>
 
-<file path=ppt/slides/slide61.xml><?xml version="1.0" encoding="utf-8"?>
+<file path=ppt/slides/slide68.xml><?xml version="1.0" encoding="utf-8"?>
 <p:sld xmlns:a="http://schemas.openxmlformats.org/drawingml/2006/main" xmlns:r="http://schemas.openxmlformats.org/officeDocument/2006/relationships" xmlns:p="http://schemas.openxmlformats.org/presentationml/2006/main">
-  <p:cSld name="Slide 61">
+  <p:cSld name="Slide 68">
     <p:spTree>
       <p:nvGrpSpPr>
         <p:cNvPr id="1" name=""/>
@@ -23402,7 +25940,7 @@
       </p:sp>
       <p:graphicFrame>
         <p:nvGraphicFramePr>
-          <p:cNvPr id="62" name="Table 0"/>
+          <p:cNvPr id="69" name="Table 0"/>
           <p:cNvGraphicFramePr>
             <a:graphicFrameLocks noGrp="1"/>
           </p:cNvGraphicFramePr>
@@ -23512,7 +26050,7 @@
                           <a:ea typeface="Calibri" pitchFamily="34" charset="-122"/>
                           <a:cs typeface="Calibri" pitchFamily="34" charset="-120"/>
                         </a:rPr>
-                        <a:t>DEFINITIONS; Overpopulation; Underpopulation; Optimum Population; Carrying Capacity of the Land.</a:t>
+                        <a:t>DEFINITIONS; Meaning, Indicators and Causes; Consequences and Solutions; Optimum Population; Carrying Capacity of the Land.</a:t>
                       </a:r>
                       <a:endParaRPr lang="en-US" sz="1600" dirty="0">
                         <a:latin typeface="Calibri" charset="0"/>
@@ -24162,7 +26700,7 @@
             <a:pPr algn="ctr"/>
             <a:fld id="{F7021451-1387-4CA6-816F-3879F97B5CBC}" type="slidenum">
               <a:rPr b="1" lang="en-US"/>
-              <a:t>61</a:t>
+              <a:t>68</a:t>
             </a:fld>
             <a:endParaRPr lang="en-US"/>
           </a:p>
@@ -24176,9 +26714,9 @@
 </p:sld>
 </file>
 
-<file path=ppt/slides/slide62.xml><?xml version="1.0" encoding="utf-8"?>
+<file path=ppt/slides/slide69.xml><?xml version="1.0" encoding="utf-8"?>
 <p:sld xmlns:a="http://schemas.openxmlformats.org/drawingml/2006/main" xmlns:r="http://schemas.openxmlformats.org/officeDocument/2006/relationships" xmlns:p="http://schemas.openxmlformats.org/presentationml/2006/main">
-  <p:cSld name="Slide 62">
+  <p:cSld name="Slide 69">
     <p:spTree>
       <p:nvGrpSpPr>
         <p:cNvPr id="1" name=""/>
@@ -24487,353 +27025,7 @@
             <a:pPr algn="ctr"/>
             <a:fld id="{F7021451-1387-4CA6-816F-3879F97B5CBC}" type="slidenum">
               <a:rPr b="1" lang="en-US"/>
-              <a:t>62</a:t>
-            </a:fld>
-            <a:endParaRPr lang="en-US"/>
-          </a:p>
-        </p:txBody>
-      </p:sp>
-    </p:spTree>
-  </p:cSld>
-  <p:clrMapOvr>
-    <a:masterClrMapping/>
-  </p:clrMapOvr>
-</p:sld>
-</file>
-
-<file path=ppt/slides/slide63.xml><?xml version="1.0" encoding="utf-8"?>
-<p:sld xmlns:a="http://schemas.openxmlformats.org/drawingml/2006/main" xmlns:r="http://schemas.openxmlformats.org/officeDocument/2006/relationships" xmlns:p="http://schemas.openxmlformats.org/presentationml/2006/main">
-  <p:cSld name="Slide 63">
-    <p:spTree>
-      <p:nvGrpSpPr>
-        <p:cNvPr id="1" name=""/>
-        <p:cNvGrpSpPr/>
-        <p:nvPr/>
-      </p:nvGrpSpPr>
-      <p:grpSpPr>
-        <a:xfrm>
-          <a:off x="0" y="0"/>
-          <a:ext cx="0" cy="0"/>
-          <a:chOff x="0" y="0"/>
-          <a:chExt cx="0" cy="0"/>
-        </a:xfrm>
-      </p:grpSpPr>
-      <p:sp>
-        <p:nvSpPr>
-          <p:cNvPr id="2" name="Text 0"/>
-          <p:cNvSpPr/>
-          <p:nvPr/>
-        </p:nvSpPr>
-        <p:spPr>
-          <a:xfrm>
-            <a:off x="457200" y="713232"/>
-            <a:ext cx="11368735" cy="274320"/>
-          </a:xfrm>
-          <a:prstGeom prst="rect">
-            <a:avLst/>
-          </a:prstGeom>
-          <a:noFill/>
-          <a:ln/>
-        </p:spPr>
-        <p:txBody>
-          <a:bodyPr wrap="square" lIns="0" tIns="0" rIns="0" bIns="0" rtlCol="0" anchor="ctr"/>
-          <a:lstStyle/>
-          <a:p>
-            <a:pPr algn="r" indent="0" marL="0">
-              <a:buNone/>
-            </a:pPr>
-            <a:r>
-              <a:rPr lang="en-US" sz="1400" b="1" dirty="0">
-                <a:solidFill>
-                  <a:srgbClr val="1C3F6E"/>
-                </a:solidFill>
-                <a:latin typeface="Calibri" pitchFamily="34" charset="0"/>
-                <a:ea typeface="Calibri" pitchFamily="34" charset="-122"/>
-                <a:cs typeface="Calibri" pitchFamily="34" charset="-120"/>
-              </a:rPr>
-              <a:t>REFERENCES</a:t>
-            </a:r>
-            <a:endParaRPr lang="en-US" sz="1400" dirty="0"/>
-          </a:p>
-        </p:txBody>
-      </p:sp>
-      <p:pic>
-        <p:nvPicPr>
-          <p:cNvPr id="3" name="Image 0" descr="/home/claude/f4/img/minesec_sheet.png">    </p:cNvPr>
-          <p:cNvPicPr>
-            <a:picLocks noChangeAspect="1"/>
-          </p:cNvPicPr>
-          <p:nvPr/>
-        </p:nvPicPr>
-        <p:blipFill>
-          <a:blip r:embed="rId1"/>
-          <a:stretch>
-            <a:fillRect/>
-          </a:stretch>
-        </p:blipFill>
-        <p:spPr>
-          <a:xfrm>
-            <a:off x="0" y="658368"/>
-            <a:ext cx="3840480" cy="5833872"/>
-          </a:xfrm>
-          <a:prstGeom prst="rect">
-            <a:avLst/>
-          </a:prstGeom>
-        </p:spPr>
-      </p:pic>
-      <p:sp>
-        <p:nvSpPr>
-          <p:cNvPr id="4" name="Text 1"/>
-          <p:cNvSpPr/>
-          <p:nvPr/>
-        </p:nvSpPr>
-        <p:spPr>
-          <a:xfrm>
-            <a:off x="4069080" y="1005840"/>
-            <a:ext cx="7802575" cy="731520"/>
-          </a:xfrm>
-          <a:prstGeom prst="rect">
-            <a:avLst/>
-          </a:prstGeom>
-          <a:noFill/>
-          <a:ln/>
-        </p:spPr>
-        <p:txBody>
-          <a:bodyPr wrap="square" lIns="0" tIns="0" rIns="0" bIns="0" rtlCol="0" anchor="ctr">
-            <a:normAutofit/>
-          </a:bodyPr>
-          <a:lstStyle/>
-          <a:p>
-            <a:pPr algn="ctr" indent="0" marL="0">
-              <a:buNone/>
-            </a:pPr>
-            <a:r>
-              <a:rPr lang="en-US" sz="3600" b="1" dirty="0">
-                <a:solidFill>
-                  <a:srgbClr val="990011"/>
-                </a:solidFill>
-                <a:latin typeface="Times New Roman" pitchFamily="34" charset="0"/>
-                <a:ea typeface="Times New Roman" pitchFamily="34" charset="-122"/>
-                <a:cs typeface="Times New Roman" pitchFamily="34" charset="-120"/>
-              </a:rPr>
-              <a:t>References</a:t>
-            </a:r>
-            <a:endParaRPr lang="en-US" sz="3600" dirty="0"/>
-          </a:p>
-        </p:txBody>
-      </p:sp>
-      <p:sp>
-        <p:nvSpPr>
-          <p:cNvPr id="5" name="Text 2"/>
-          <p:cNvSpPr/>
-          <p:nvPr/>
-        </p:nvSpPr>
-        <p:spPr>
-          <a:xfrm>
-            <a:off x="4069080" y="1783080"/>
-            <a:ext cx="7802575" cy="4663440"/>
-          </a:xfrm>
-          <a:prstGeom prst="rect">
-            <a:avLst/>
-          </a:prstGeom>
-          <a:noFill/>
-          <a:ln/>
-        </p:spPr>
-        <p:txBody>
-          <a:bodyPr wrap="square" lIns="0" tIns="0" rIns="0" bIns="0" rtlCol="0" anchor="t"/>
-          <a:lstStyle/>
-          <a:p>
-            <a:pPr algn="l" marL="342900" indent="-342900">
-              <a:spcAft>
-                <a:spcPts val="800"/>
-              </a:spcAft>
-              <a:buSzPct val="100000"/>
-              <a:buChar char="•"/>
-            </a:pPr>
-            <a:r>
-              <a:rPr lang="en-US" sz="1800" dirty="0">
-                <a:solidFill>
-                  <a:srgbClr val="111111"/>
-                </a:solidFill>
-                <a:latin typeface="Calibri" pitchFamily="34" charset="0"/>
-                <a:ea typeface="Calibri" pitchFamily="34" charset="-122"/>
-                <a:cs typeface="Calibri" pitchFamily="34" charset="-120"/>
-              </a:rPr>
-              <a:t>Geography Syllabus for Sixth Forms (Lower and Upper Sixth), MINESEC, 2019 — Module 4 (Population Geography).</a:t>
-            </a:r>
-            <a:endParaRPr lang="en-US" sz="1800" dirty="0"/>
-          </a:p>
-          <a:p>
-            <a:pPr algn="l" marL="342900" indent="-342900">
-              <a:spcAft>
-                <a:spcPts val="800"/>
-              </a:spcAft>
-              <a:buSzPct val="100000"/>
-              <a:buChar char="•"/>
-            </a:pPr>
-            <a:r>
-              <a:rPr lang="en-US" sz="1800" dirty="0">
-                <a:solidFill>
-                  <a:srgbClr val="111111"/>
-                </a:solidFill>
-                <a:latin typeface="Calibri" pitchFamily="34" charset="0"/>
-                <a:ea typeface="Calibri" pitchFamily="34" charset="-122"/>
-                <a:cs typeface="Calibri" pitchFamily="34" charset="-120"/>
-              </a:rPr>
-              <a:t>Teacher's course notes: Mr KAMDEM E., Population Geography (USA), GBHS Garoua, 2026.</a:t>
-            </a:r>
-            <a:endParaRPr lang="en-US" sz="1800" dirty="0"/>
-          </a:p>
-          <a:p>
-            <a:pPr algn="l" marL="342900" indent="-342900">
-              <a:spcAft>
-                <a:spcPts val="800"/>
-              </a:spcAft>
-              <a:buSzPct val="100000"/>
-              <a:buChar char="•"/>
-            </a:pPr>
-            <a:r>
-              <a:rPr lang="en-US" sz="1800" dirty="0">
-                <a:solidFill>
-                  <a:srgbClr val="111111"/>
-                </a:solidFill>
-                <a:latin typeface="Calibri" pitchFamily="34" charset="0"/>
-                <a:ea typeface="Calibri" pitchFamily="34" charset="-122"/>
-                <a:cs typeface="Calibri" pitchFamily="34" charset="-120"/>
-              </a:rPr>
-              <a:t>United Nations, World Population Prospects 2024.</a:t>
-            </a:r>
-            <a:endParaRPr lang="en-US" sz="1800" dirty="0"/>
-          </a:p>
-          <a:p>
-            <a:pPr algn="l" marL="342900" indent="-342900">
-              <a:spcAft>
-                <a:spcPts val="800"/>
-              </a:spcAft>
-              <a:buSzPct val="100000"/>
-              <a:buChar char="•"/>
-            </a:pPr>
-            <a:r>
-              <a:rPr lang="en-US" sz="1800" dirty="0">
-                <a:solidFill>
-                  <a:srgbClr val="111111"/>
-                </a:solidFill>
-                <a:latin typeface="Calibri" pitchFamily="34" charset="0"/>
-                <a:ea typeface="Calibri" pitchFamily="34" charset="-122"/>
-                <a:cs typeface="Calibri" pitchFamily="34" charset="-120"/>
-              </a:rPr>
-              <a:t>Photo, Activity 1: “Mathare” by Book Aid International, CC BY-NC-ND 2.0, via Flickr (https://www.flickr.com/photos/45024905@N07/4135561707)</a:t>
-            </a:r>
-            <a:endParaRPr lang="en-US" sz="1800" dirty="0"/>
-          </a:p>
-          <a:p>
-            <a:pPr algn="l" marL="342900" indent="-342900">
-              <a:spcAft>
-                <a:spcPts val="800"/>
-              </a:spcAft>
-              <a:buSzPct val="100000"/>
-              <a:buChar char="•"/>
-            </a:pPr>
-            <a:r>
-              <a:rPr lang="en-US" sz="1800" dirty="0">
-                <a:solidFill>
-                  <a:srgbClr val="111111"/>
-                </a:solidFill>
-                <a:latin typeface="Calibri" pitchFamily="34" charset="0"/>
-                <a:ea typeface="Calibri" pitchFamily="34" charset="-122"/>
-                <a:cs typeface="Calibri" pitchFamily="34" charset="-120"/>
-              </a:rPr>
-              <a:t>Photo, Activity 4: “Mid-West Agriculture” by Djof, CC BY-NC-SA 2.0, via Flickr (https://www.flickr.com/photos/10787942@N00/147222315)</a:t>
-            </a:r>
-            <a:endParaRPr lang="en-US" sz="1800" dirty="0"/>
-          </a:p>
-          <a:p>
-            <a:pPr algn="l" marL="342900" indent="-342900">
-              <a:spcAft>
-                <a:spcPts val="800"/>
-              </a:spcAft>
-              <a:buSzPct val="100000"/>
-              <a:buChar char="•"/>
-            </a:pPr>
-            <a:r>
-              <a:rPr lang="en-US" sz="1800" dirty="0">
-                <a:solidFill>
-                  <a:srgbClr val="111111"/>
-                </a:solidFill>
-                <a:latin typeface="Calibri" pitchFamily="34" charset="0"/>
-                <a:ea typeface="Calibri" pitchFamily="34" charset="-122"/>
-                <a:cs typeface="Calibri" pitchFamily="34" charset="-120"/>
-              </a:rPr>
-              <a:t>Photo, Activity 5: “Cracked Earth” by Aleatoric Consonance, CC BY 2.0, via Flickr (https://www.flickr.com/photos/93921318@N00/3772011444)</a:t>
-            </a:r>
-            <a:endParaRPr lang="en-US" sz="1800" dirty="0"/>
-          </a:p>
-          <a:p>
-            <a:pPr algn="l" marL="342900" indent="-342900">
-              <a:spcAft>
-                <a:spcPts val="800"/>
-              </a:spcAft>
-              <a:buSzPct val="100000"/>
-              <a:buChar char="•"/>
-            </a:pPr>
-            <a:r>
-              <a:rPr lang="en-US" sz="1800" dirty="0">
-                <a:solidFill>
-                  <a:srgbClr val="111111"/>
-                </a:solidFill>
-                <a:latin typeface="Calibri" pitchFamily="34" charset="0"/>
-                <a:ea typeface="Calibri" pitchFamily="34" charset="-122"/>
-                <a:cs typeface="Calibri" pitchFamily="34" charset="-120"/>
-              </a:rPr>
-              <a:t>Diagrams and animations: drawn for this lesson (Geography Department).</a:t>
-            </a:r>
-            <a:endParaRPr lang="en-US" sz="1800" dirty="0"/>
-          </a:p>
-        </p:txBody>
-      </p:sp>
-      <p:sp>
-        <p:nvSpPr>
-          <p:cNvPr id="25" name="Slide Number Placeholder 0"/>
-          <p:cNvSpPr>
-            <a:spLocks noGrp="1"/>
-          </p:cNvSpPr>
-          <p:nvPr>
-            <p:ph type="sldNum" sz="quarter" idx="4294967295"/>
-          </p:nvPr>
-        </p:nvSpPr>
-        <p:spPr>
-          <a:xfrm>
-            <a:off x="27432" y="91440"/>
-            <a:ext cx="585216" cy="475488"/>
-          </a:xfrm>
-          <a:prstGeom prst="rect">
-            <a:avLst/>
-          </a:prstGeom>
-          <a:extLst>
-            <a:ext uri="{C572A759-6A51-4108-AA02-DFA0A04FC94B}">
-              <ma14:wrappingTextBoxFlag xmlns:ma14="http://schemas.microsoft.com/office/mac/drawingml/2011/main" val="0"/>
-            </a:ext>
-          </a:extLst>
-        </p:spPr>
-        <p:txBody>
-          <a:bodyPr/>
-          <a:lstStyle>
-            <a:lvl1pPr>
-              <a:defRPr sz="2000">
-                <a:solidFill>
-                  <a:srgbClr val="FFFFFF"/>
-                </a:solidFill>
-                <a:latin typeface="Calibri"/>
-                <a:ea typeface="Calibri"/>
-                <a:cs typeface="Calibri"/>
-              </a:defRPr>
-            </a:lvl1pPr>
-          </a:lstStyle>
-          <a:p>
-            <a:pPr algn="ctr"/>
-            <a:fld id="{F7021451-1387-4CA6-816F-3879F97B5CBC}" type="slidenum">
-              <a:rPr b="1" lang="en-US"/>
-              <a:t>63</a:t>
+              <a:t>69</a:t>
             </a:fld>
             <a:endParaRPr lang="en-US"/>
           </a:p>
@@ -25119,6 +27311,352 @@
             <a:fld id="{F7021451-1387-4CA6-816F-3879F97B5CBC}" type="slidenum">
               <a:rPr b="1" lang="en-US"/>
               <a:t>7</a:t>
+            </a:fld>
+            <a:endParaRPr lang="en-US"/>
+          </a:p>
+        </p:txBody>
+      </p:sp>
+    </p:spTree>
+  </p:cSld>
+  <p:clrMapOvr>
+    <a:masterClrMapping/>
+  </p:clrMapOvr>
+</p:sld>
+</file>
+
+<file path=ppt/slides/slide70.xml><?xml version="1.0" encoding="utf-8"?>
+<p:sld xmlns:a="http://schemas.openxmlformats.org/drawingml/2006/main" xmlns:r="http://schemas.openxmlformats.org/officeDocument/2006/relationships" xmlns:p="http://schemas.openxmlformats.org/presentationml/2006/main">
+  <p:cSld name="Slide 70">
+    <p:spTree>
+      <p:nvGrpSpPr>
+        <p:cNvPr id="1" name=""/>
+        <p:cNvGrpSpPr/>
+        <p:nvPr/>
+      </p:nvGrpSpPr>
+      <p:grpSpPr>
+        <a:xfrm>
+          <a:off x="0" y="0"/>
+          <a:ext cx="0" cy="0"/>
+          <a:chOff x="0" y="0"/>
+          <a:chExt cx="0" cy="0"/>
+        </a:xfrm>
+      </p:grpSpPr>
+      <p:sp>
+        <p:nvSpPr>
+          <p:cNvPr id="2" name="Text 0"/>
+          <p:cNvSpPr/>
+          <p:nvPr/>
+        </p:nvSpPr>
+        <p:spPr>
+          <a:xfrm>
+            <a:off x="457200" y="713232"/>
+            <a:ext cx="11368735" cy="274320"/>
+          </a:xfrm>
+          <a:prstGeom prst="rect">
+            <a:avLst/>
+          </a:prstGeom>
+          <a:noFill/>
+          <a:ln/>
+        </p:spPr>
+        <p:txBody>
+          <a:bodyPr wrap="square" lIns="0" tIns="0" rIns="0" bIns="0" rtlCol="0" anchor="ctr"/>
+          <a:lstStyle/>
+          <a:p>
+            <a:pPr algn="r" indent="0" marL="0">
+              <a:buNone/>
+            </a:pPr>
+            <a:r>
+              <a:rPr lang="en-US" sz="1400" b="1" dirty="0">
+                <a:solidFill>
+                  <a:srgbClr val="1C3F6E"/>
+                </a:solidFill>
+                <a:latin typeface="Calibri" pitchFamily="34" charset="0"/>
+                <a:ea typeface="Calibri" pitchFamily="34" charset="-122"/>
+                <a:cs typeface="Calibri" pitchFamily="34" charset="-120"/>
+              </a:rPr>
+              <a:t>REFERENCES</a:t>
+            </a:r>
+            <a:endParaRPr lang="en-US" sz="1400" dirty="0"/>
+          </a:p>
+        </p:txBody>
+      </p:sp>
+      <p:pic>
+        <p:nvPicPr>
+          <p:cNvPr id="3" name="Image 0" descr="/home/claude/f4/img/minesec_sheet.png">    </p:cNvPr>
+          <p:cNvPicPr>
+            <a:picLocks noChangeAspect="1"/>
+          </p:cNvPicPr>
+          <p:nvPr/>
+        </p:nvPicPr>
+        <p:blipFill>
+          <a:blip r:embed="rId1"/>
+          <a:stretch>
+            <a:fillRect/>
+          </a:stretch>
+        </p:blipFill>
+        <p:spPr>
+          <a:xfrm>
+            <a:off x="0" y="658368"/>
+            <a:ext cx="3840480" cy="5833872"/>
+          </a:xfrm>
+          <a:prstGeom prst="rect">
+            <a:avLst/>
+          </a:prstGeom>
+        </p:spPr>
+      </p:pic>
+      <p:sp>
+        <p:nvSpPr>
+          <p:cNvPr id="4" name="Text 1"/>
+          <p:cNvSpPr/>
+          <p:nvPr/>
+        </p:nvSpPr>
+        <p:spPr>
+          <a:xfrm>
+            <a:off x="4069080" y="1005840"/>
+            <a:ext cx="7802575" cy="731520"/>
+          </a:xfrm>
+          <a:prstGeom prst="rect">
+            <a:avLst/>
+          </a:prstGeom>
+          <a:noFill/>
+          <a:ln/>
+        </p:spPr>
+        <p:txBody>
+          <a:bodyPr wrap="square" lIns="0" tIns="0" rIns="0" bIns="0" rtlCol="0" anchor="ctr">
+            <a:normAutofit/>
+          </a:bodyPr>
+          <a:lstStyle/>
+          <a:p>
+            <a:pPr algn="ctr" indent="0" marL="0">
+              <a:buNone/>
+            </a:pPr>
+            <a:r>
+              <a:rPr lang="en-US" sz="3600" b="1" dirty="0">
+                <a:solidFill>
+                  <a:srgbClr val="990011"/>
+                </a:solidFill>
+                <a:latin typeface="Times New Roman" pitchFamily="34" charset="0"/>
+                <a:ea typeface="Times New Roman" pitchFamily="34" charset="-122"/>
+                <a:cs typeface="Times New Roman" pitchFamily="34" charset="-120"/>
+              </a:rPr>
+              <a:t>References</a:t>
+            </a:r>
+            <a:endParaRPr lang="en-US" sz="3600" dirty="0"/>
+          </a:p>
+        </p:txBody>
+      </p:sp>
+      <p:sp>
+        <p:nvSpPr>
+          <p:cNvPr id="5" name="Text 2"/>
+          <p:cNvSpPr/>
+          <p:nvPr/>
+        </p:nvSpPr>
+        <p:spPr>
+          <a:xfrm>
+            <a:off x="4069080" y="1783080"/>
+            <a:ext cx="7802575" cy="4663440"/>
+          </a:xfrm>
+          <a:prstGeom prst="rect">
+            <a:avLst/>
+          </a:prstGeom>
+          <a:noFill/>
+          <a:ln/>
+        </p:spPr>
+        <p:txBody>
+          <a:bodyPr wrap="square" lIns="0" tIns="0" rIns="0" bIns="0" rtlCol="0" anchor="t"/>
+          <a:lstStyle/>
+          <a:p>
+            <a:pPr algn="l" marL="342900" indent="-342900">
+              <a:spcAft>
+                <a:spcPts val="800"/>
+              </a:spcAft>
+              <a:buSzPct val="100000"/>
+              <a:buChar char="•"/>
+            </a:pPr>
+            <a:r>
+              <a:rPr lang="en-US" sz="1800" dirty="0">
+                <a:solidFill>
+                  <a:srgbClr val="111111"/>
+                </a:solidFill>
+                <a:latin typeface="Calibri" pitchFamily="34" charset="0"/>
+                <a:ea typeface="Calibri" pitchFamily="34" charset="-122"/>
+                <a:cs typeface="Calibri" pitchFamily="34" charset="-120"/>
+              </a:rPr>
+              <a:t>Geography Syllabus for Sixth Forms (Lower and Upper Sixth), MINESEC, 2019 — Module 4 (Population Geography).</a:t>
+            </a:r>
+            <a:endParaRPr lang="en-US" sz="1800" dirty="0"/>
+          </a:p>
+          <a:p>
+            <a:pPr algn="l" marL="342900" indent="-342900">
+              <a:spcAft>
+                <a:spcPts val="800"/>
+              </a:spcAft>
+              <a:buSzPct val="100000"/>
+              <a:buChar char="•"/>
+            </a:pPr>
+            <a:r>
+              <a:rPr lang="en-US" sz="1800" dirty="0">
+                <a:solidFill>
+                  <a:srgbClr val="111111"/>
+                </a:solidFill>
+                <a:latin typeface="Calibri" pitchFamily="34" charset="0"/>
+                <a:ea typeface="Calibri" pitchFamily="34" charset="-122"/>
+                <a:cs typeface="Calibri" pitchFamily="34" charset="-120"/>
+              </a:rPr>
+              <a:t>Teacher's course notes: Mr KAMDEM E., Population Geography (USA), GBHS Garoua, 2026.</a:t>
+            </a:r>
+            <a:endParaRPr lang="en-US" sz="1800" dirty="0"/>
+          </a:p>
+          <a:p>
+            <a:pPr algn="l" marL="342900" indent="-342900">
+              <a:spcAft>
+                <a:spcPts val="800"/>
+              </a:spcAft>
+              <a:buSzPct val="100000"/>
+              <a:buChar char="•"/>
+            </a:pPr>
+            <a:r>
+              <a:rPr lang="en-US" sz="1800" dirty="0">
+                <a:solidFill>
+                  <a:srgbClr val="111111"/>
+                </a:solidFill>
+                <a:latin typeface="Calibri" pitchFamily="34" charset="0"/>
+                <a:ea typeface="Calibri" pitchFamily="34" charset="-122"/>
+                <a:cs typeface="Calibri" pitchFamily="34" charset="-120"/>
+              </a:rPr>
+              <a:t>United Nations, World Population Prospects 2024.</a:t>
+            </a:r>
+            <a:endParaRPr lang="en-US" sz="1800" dirty="0"/>
+          </a:p>
+          <a:p>
+            <a:pPr algn="l" marL="342900" indent="-342900">
+              <a:spcAft>
+                <a:spcPts val="800"/>
+              </a:spcAft>
+              <a:buSzPct val="100000"/>
+              <a:buChar char="•"/>
+            </a:pPr>
+            <a:r>
+              <a:rPr lang="en-US" sz="1800" dirty="0">
+                <a:solidFill>
+                  <a:srgbClr val="111111"/>
+                </a:solidFill>
+                <a:latin typeface="Calibri" pitchFamily="34" charset="0"/>
+                <a:ea typeface="Calibri" pitchFamily="34" charset="-122"/>
+                <a:cs typeface="Calibri" pitchFamily="34" charset="-120"/>
+              </a:rPr>
+              <a:t>Photo, Activity 1: “Mathare” by Book Aid International, CC BY-NC-ND 2.0, via Flickr (https://www.flickr.com/photos/45024905@N07/4135561707)</a:t>
+            </a:r>
+            <a:endParaRPr lang="en-US" sz="1800" dirty="0"/>
+          </a:p>
+          <a:p>
+            <a:pPr algn="l" marL="342900" indent="-342900">
+              <a:spcAft>
+                <a:spcPts val="800"/>
+              </a:spcAft>
+              <a:buSzPct val="100000"/>
+              <a:buChar char="•"/>
+            </a:pPr>
+            <a:r>
+              <a:rPr lang="en-US" sz="1800" dirty="0">
+                <a:solidFill>
+                  <a:srgbClr val="111111"/>
+                </a:solidFill>
+                <a:latin typeface="Calibri" pitchFamily="34" charset="0"/>
+                <a:ea typeface="Calibri" pitchFamily="34" charset="-122"/>
+                <a:cs typeface="Calibri" pitchFamily="34" charset="-120"/>
+              </a:rPr>
+              <a:t>Photo, Activity 4: “Mid-West Agriculture” by Djof, CC BY-NC-SA 2.0, via Flickr (https://www.flickr.com/photos/10787942@N00/147222315)</a:t>
+            </a:r>
+            <a:endParaRPr lang="en-US" sz="1800" dirty="0"/>
+          </a:p>
+          <a:p>
+            <a:pPr algn="l" marL="342900" indent="-342900">
+              <a:spcAft>
+                <a:spcPts val="800"/>
+              </a:spcAft>
+              <a:buSzPct val="100000"/>
+              <a:buChar char="•"/>
+            </a:pPr>
+            <a:r>
+              <a:rPr lang="en-US" sz="1800" dirty="0">
+                <a:solidFill>
+                  <a:srgbClr val="111111"/>
+                </a:solidFill>
+                <a:latin typeface="Calibri" pitchFamily="34" charset="0"/>
+                <a:ea typeface="Calibri" pitchFamily="34" charset="-122"/>
+                <a:cs typeface="Calibri" pitchFamily="34" charset="-120"/>
+              </a:rPr>
+              <a:t>Photo, Activity 5: “Cracked Earth” by Aleatoric Consonance, CC BY 2.0, via Flickr (https://www.flickr.com/photos/93921318@N00/3772011444)</a:t>
+            </a:r>
+            <a:endParaRPr lang="en-US" sz="1800" dirty="0"/>
+          </a:p>
+          <a:p>
+            <a:pPr algn="l" marL="342900" indent="-342900">
+              <a:spcAft>
+                <a:spcPts val="800"/>
+              </a:spcAft>
+              <a:buSzPct val="100000"/>
+              <a:buChar char="•"/>
+            </a:pPr>
+            <a:r>
+              <a:rPr lang="en-US" sz="1800" dirty="0">
+                <a:solidFill>
+                  <a:srgbClr val="111111"/>
+                </a:solidFill>
+                <a:latin typeface="Calibri" pitchFamily="34" charset="0"/>
+                <a:ea typeface="Calibri" pitchFamily="34" charset="-122"/>
+                <a:cs typeface="Calibri" pitchFamily="34" charset="-120"/>
+              </a:rPr>
+              <a:t>Diagrams and animations: drawn for this lesson (Geography Department).</a:t>
+            </a:r>
+            <a:endParaRPr lang="en-US" sz="1800" dirty="0"/>
+          </a:p>
+        </p:txBody>
+      </p:sp>
+      <p:sp>
+        <p:nvSpPr>
+          <p:cNvPr id="25" name="Slide Number Placeholder 0"/>
+          <p:cNvSpPr>
+            <a:spLocks noGrp="1"/>
+          </p:cNvSpPr>
+          <p:nvPr>
+            <p:ph type="sldNum" sz="quarter" idx="4294967295"/>
+          </p:nvPr>
+        </p:nvSpPr>
+        <p:spPr>
+          <a:xfrm>
+            <a:off x="27432" y="91440"/>
+            <a:ext cx="585216" cy="475488"/>
+          </a:xfrm>
+          <a:prstGeom prst="rect">
+            <a:avLst/>
+          </a:prstGeom>
+          <a:extLst>
+            <a:ext uri="{C572A759-6A51-4108-AA02-DFA0A04FC94B}">
+              <ma14:wrappingTextBoxFlag xmlns:ma14="http://schemas.microsoft.com/office/mac/drawingml/2011/main" val="0"/>
+            </a:ext>
+          </a:extLst>
+        </p:spPr>
+        <p:txBody>
+          <a:bodyPr/>
+          <a:lstStyle>
+            <a:lvl1pPr>
+              <a:defRPr sz="2000">
+                <a:solidFill>
+                  <a:srgbClr val="FFFFFF"/>
+                </a:solidFill>
+                <a:latin typeface="Calibri"/>
+                <a:ea typeface="Calibri"/>
+                <a:cs typeface="Calibri"/>
+              </a:defRPr>
+            </a:lvl1pPr>
+          </a:lstStyle>
+          <a:p>
+            <a:pPr algn="ctr"/>
+            <a:fld id="{F7021451-1387-4CA6-816F-3879F97B5CBC}" type="slidenum">
+              <a:rPr b="1" lang="en-US"/>
+              <a:t>70</a:t>
             </a:fld>
             <a:endParaRPr lang="en-US"/>
           </a:p>
